--- a/docs/Pellet_Burner_Components.pptx
+++ b/docs/Pellet_Burner_Components.pptx
@@ -14,6 +14,7 @@
     <p:sldId id="262" r:id="rId13"/>
     <p:sldId id="263" r:id="rId14"/>
     <p:sldId id="264" r:id="rId15"/>
+    <p:sldId id="265" r:id="rId16"/>
   </p:sldIdLst>
   <p:sldSz cx="12188952" cy="6858000" type="screen4x3"/>
   <p:notesSz cx="6858000" cy="9144000"/>
@@ -3335,6 +3336,2581 @@
 </p:sld>
 </file>
 
+<file path=ppt/slides/slide10.xml><?xml version="1.0" encoding="utf-8"?>
+<p:sld xmlns:a="http://schemas.openxmlformats.org/drawingml/2006/main" xmlns:p="http://schemas.openxmlformats.org/presentationml/2006/main" xmlns:r="http://schemas.openxmlformats.org/officeDocument/2006/relationships">
+  <p:cSld>
+    <p:spTree>
+      <p:nvGrpSpPr>
+        <p:cNvPr id="1" name=""/>
+        <p:cNvGrpSpPr/>
+        <p:nvPr/>
+      </p:nvGrpSpPr>
+      <p:grpSpPr/>
+      <p:sp>
+        <p:nvSpPr>
+          <p:cNvPr id="2" name="Rectangle 1"/>
+          <p:cNvSpPr/>
+          <p:nvPr/>
+        </p:nvSpPr>
+        <p:spPr>
+          <a:xfrm>
+            <a:off x="0" y="0"/>
+            <a:ext cx="12188952" cy="6858000"/>
+          </a:xfrm>
+          <a:prstGeom prst="rect">
+            <a:avLst/>
+          </a:prstGeom>
+          <a:solidFill>
+            <a:srgbClr val="1A1A2E"/>
+          </a:solidFill>
+          <a:ln>
+            <a:noFill/>
+          </a:ln>
+        </p:spPr>
+        <p:style>
+          <a:lnRef idx="1">
+            <a:schemeClr val="accent1"/>
+          </a:lnRef>
+          <a:fillRef idx="3">
+            <a:schemeClr val="accent1"/>
+          </a:fillRef>
+          <a:effectRef idx="2">
+            <a:schemeClr val="accent1"/>
+          </a:effectRef>
+          <a:fontRef idx="minor">
+            <a:schemeClr val="lt1"/>
+          </a:fontRef>
+        </p:style>
+        <p:txBody>
+          <a:bodyPr rtlCol="0" anchor="ctr"/>
+          <a:lstStyle/>
+          <a:p>
+            <a:pPr algn="ctr"/>
+          </a:p>
+        </p:txBody>
+      </p:sp>
+      <p:sp>
+        <p:nvSpPr>
+          <p:cNvPr id="3" name="TextBox 2"/>
+          <p:cNvSpPr txBox="1"/>
+          <p:nvPr/>
+        </p:nvSpPr>
+        <p:spPr>
+          <a:xfrm>
+            <a:off x="365760" y="137160"/>
+            <a:ext cx="8229600" cy="502920"/>
+          </a:xfrm>
+          <a:prstGeom prst="rect">
+            <a:avLst/>
+          </a:prstGeom>
+          <a:noFill/>
+        </p:spPr>
+        <p:txBody>
+          <a:bodyPr wrap="square">
+            <a:spAutoFit/>
+          </a:bodyPr>
+          <a:lstStyle/>
+          <a:p>
+            <a:pPr algn="l"/>
+            <a:r>
+              <a:rPr sz="2800" b="1">
+                <a:solidFill>
+                  <a:srgbClr val="E94560"/>
+                </a:solidFill>
+              </a:rPr>
+              <a:t>Pin Reference Table</a:t>
+            </a:r>
+          </a:p>
+        </p:txBody>
+      </p:sp>
+      <p:sp>
+        <p:nvSpPr>
+          <p:cNvPr id="4" name="Rectangle 3"/>
+          <p:cNvSpPr/>
+          <p:nvPr/>
+        </p:nvSpPr>
+        <p:spPr>
+          <a:xfrm>
+            <a:off x="365760" y="658368"/>
+            <a:ext cx="11457432" cy="19050"/>
+          </a:xfrm>
+          <a:prstGeom prst="rect">
+            <a:avLst/>
+          </a:prstGeom>
+          <a:solidFill>
+            <a:srgbClr val="E94560"/>
+          </a:solidFill>
+          <a:ln>
+            <a:noFill/>
+          </a:ln>
+        </p:spPr>
+        <p:style>
+          <a:lnRef idx="1">
+            <a:schemeClr val="accent1"/>
+          </a:lnRef>
+          <a:fillRef idx="3">
+            <a:schemeClr val="accent1"/>
+          </a:fillRef>
+          <a:effectRef idx="2">
+            <a:schemeClr val="accent1"/>
+          </a:effectRef>
+          <a:fontRef idx="minor">
+            <a:schemeClr val="lt1"/>
+          </a:fontRef>
+        </p:style>
+        <p:txBody>
+          <a:bodyPr rtlCol="0" anchor="ctr"/>
+          <a:lstStyle/>
+          <a:p>
+            <a:pPr algn="ctr"/>
+          </a:p>
+        </p:txBody>
+      </p:sp>
+      <p:graphicFrame>
+        <p:nvGraphicFramePr>
+          <p:cNvPr id="5" name="Table 4"/>
+          <p:cNvGraphicFramePr>
+            <a:graphicFrameLocks noGrp="1"/>
+          </p:cNvGraphicFramePr>
+          <p:nvPr/>
+        </p:nvGraphicFramePr>
+        <p:xfrm>
+          <a:off x="274320" y="822960"/>
+          <a:ext cx="11640311" cy="5852154"/>
+        </p:xfrm>
+        <a:graphic>
+          <a:graphicData uri="http://schemas.openxmlformats.org/drawingml/2006/table">
+            <a:tbl>
+              <a:tblPr firstRow="1" bandRow="1">
+                <a:tableStyleId>{5C22544A-7EE6-4342-B048-85BDC9FD1C3A}</a:tableStyleId>
+              </a:tblPr>
+              <a:tblGrid>
+                <a:gridCol w="3026481"/>
+                <a:gridCol w="1164031"/>
+                <a:gridCol w="1164031"/>
+                <a:gridCol w="1047628"/>
+                <a:gridCol w="5238140"/>
+              </a:tblGrid>
+              <a:tr h="420624">
+                <a:tc>
+                  <a:txBody>
+                    <a:bodyPr wrap="square"/>
+                    <a:lstStyle/>
+                    <a:p>
+                      <a:pPr algn="ctr"/>
+                      <a:r>
+                        <a:rPr sz="1400" b="1">
+                          <a:solidFill>
+                            <a:srgbClr val="FFFFFF"/>
+                          </a:solidFill>
+                        </a:rPr>
+                        <a:t>Component</a:t>
+                      </a:r>
+                    </a:p>
+                  </a:txBody>
+                  <a:tcPr>
+                    <a:solidFill>
+                      <a:srgbClr val="E94560"/>
+                    </a:solidFill>
+                    <a:lnL>
+                      <a:noFill/>
+                    </a:lnL>
+                    <a:lnR>
+                      <a:noFill/>
+                    </a:lnR>
+                    <a:lnT>
+                      <a:noFill/>
+                    </a:lnT>
+                    <a:lnB>
+                      <a:noFill/>
+                    </a:lnB>
+                  </a:tcPr>
+                </a:tc>
+                <a:tc>
+                  <a:txBody>
+                    <a:bodyPr wrap="square"/>
+                    <a:lstStyle/>
+                    <a:p>
+                      <a:pPr algn="ctr"/>
+                      <a:r>
+                        <a:rPr sz="1400" b="1">
+                          <a:solidFill>
+                            <a:srgbClr val="FFFFFF"/>
+                          </a:solidFill>
+                        </a:rPr>
+                        <a:t>GPIO</a:t>
+                      </a:r>
+                    </a:p>
+                  </a:txBody>
+                  <a:tcPr>
+                    <a:solidFill>
+                      <a:srgbClr val="E94560"/>
+                    </a:solidFill>
+                    <a:lnL>
+                      <a:noFill/>
+                    </a:lnL>
+                    <a:lnR>
+                      <a:noFill/>
+                    </a:lnR>
+                    <a:lnT>
+                      <a:noFill/>
+                    </a:lnT>
+                    <a:lnB>
+                      <a:noFill/>
+                    </a:lnB>
+                  </a:tcPr>
+                </a:tc>
+                <a:tc>
+                  <a:txBody>
+                    <a:bodyPr wrap="square"/>
+                    <a:lstStyle/>
+                    <a:p>
+                      <a:pPr algn="ctr"/>
+                      <a:r>
+                        <a:rPr sz="1400" b="1">
+                          <a:solidFill>
+                            <a:srgbClr val="FFFFFF"/>
+                          </a:solidFill>
+                        </a:rPr>
+                        <a:t>Protocol</a:t>
+                      </a:r>
+                    </a:p>
+                  </a:txBody>
+                  <a:tcPr>
+                    <a:solidFill>
+                      <a:srgbClr val="E94560"/>
+                    </a:solidFill>
+                    <a:lnL>
+                      <a:noFill/>
+                    </a:lnL>
+                    <a:lnR>
+                      <a:noFill/>
+                    </a:lnR>
+                    <a:lnT>
+                      <a:noFill/>
+                    </a:lnT>
+                    <a:lnB>
+                      <a:noFill/>
+                    </a:lnB>
+                  </a:tcPr>
+                </a:tc>
+                <a:tc>
+                  <a:txBody>
+                    <a:bodyPr wrap="square"/>
+                    <a:lstStyle/>
+                    <a:p>
+                      <a:pPr algn="ctr"/>
+                      <a:r>
+                        <a:rPr sz="1400" b="1">
+                          <a:solidFill>
+                            <a:srgbClr val="FFFFFF"/>
+                          </a:solidFill>
+                        </a:rPr>
+                        <a:t>Voltage</a:t>
+                      </a:r>
+                    </a:p>
+                  </a:txBody>
+                  <a:tcPr>
+                    <a:solidFill>
+                      <a:srgbClr val="E94560"/>
+                    </a:solidFill>
+                    <a:lnL>
+                      <a:noFill/>
+                    </a:lnL>
+                    <a:lnR>
+                      <a:noFill/>
+                    </a:lnR>
+                    <a:lnT>
+                      <a:noFill/>
+                    </a:lnT>
+                    <a:lnB>
+                      <a:noFill/>
+                    </a:lnB>
+                  </a:tcPr>
+                </a:tc>
+                <a:tc>
+                  <a:txBody>
+                    <a:bodyPr wrap="square"/>
+                    <a:lstStyle/>
+                    <a:p>
+                      <a:pPr algn="ctr"/>
+                      <a:r>
+                        <a:rPr sz="1400" b="1">
+                          <a:solidFill>
+                            <a:srgbClr val="FFFFFF"/>
+                          </a:solidFill>
+                        </a:rPr>
+                        <a:t>Notes</a:t>
+                      </a:r>
+                    </a:p>
+                  </a:txBody>
+                  <a:tcPr>
+                    <a:solidFill>
+                      <a:srgbClr val="E94560"/>
+                    </a:solidFill>
+                    <a:lnL>
+                      <a:noFill/>
+                    </a:lnL>
+                    <a:lnR>
+                      <a:noFill/>
+                    </a:lnR>
+                    <a:lnT>
+                      <a:noFill/>
+                    </a:lnT>
+                    <a:lnB>
+                      <a:noFill/>
+                    </a:lnB>
+                  </a:tcPr>
+                </a:tc>
+              </a:tr>
+              <a:tr h="417810">
+                <a:tc>
+                  <a:txBody>
+                    <a:bodyPr wrap="square"/>
+                    <a:lstStyle/>
+                    <a:p>
+                      <a:pPr algn="l"/>
+                      <a:r>
+                        <a:rPr sz="1300" b="0">
+                          <a:solidFill>
+                            <a:srgbClr val="FFFFFF"/>
+                          </a:solidFill>
+                        </a:rPr>
+                        <a:t>SH1106 OLED — SDA</a:t>
+                      </a:r>
+                    </a:p>
+                  </a:txBody>
+                  <a:tcPr>
+                    <a:solidFill>
+                      <a:srgbClr val="0F3460"/>
+                    </a:solidFill>
+                    <a:lnL>
+                      <a:noFill/>
+                    </a:lnL>
+                    <a:lnR>
+                      <a:noFill/>
+                    </a:lnR>
+                    <a:lnT>
+                      <a:noFill/>
+                    </a:lnT>
+                    <a:lnB>
+                      <a:noFill/>
+                    </a:lnB>
+                  </a:tcPr>
+                </a:tc>
+                <a:tc>
+                  <a:txBody>
+                    <a:bodyPr wrap="square"/>
+                    <a:lstStyle/>
+                    <a:p>
+                      <a:pPr algn="l"/>
+                      <a:r>
+                        <a:rPr sz="1300" b="0">
+                          <a:solidFill>
+                            <a:srgbClr val="A8DADC"/>
+                          </a:solidFill>
+                        </a:rPr>
+                        <a:t>GPIO21</a:t>
+                      </a:r>
+                    </a:p>
+                  </a:txBody>
+                  <a:tcPr>
+                    <a:solidFill>
+                      <a:srgbClr val="0F3460"/>
+                    </a:solidFill>
+                    <a:lnL>
+                      <a:noFill/>
+                    </a:lnL>
+                    <a:lnR>
+                      <a:noFill/>
+                    </a:lnR>
+                    <a:lnT>
+                      <a:noFill/>
+                    </a:lnT>
+                    <a:lnB>
+                      <a:noFill/>
+                    </a:lnB>
+                  </a:tcPr>
+                </a:tc>
+                <a:tc>
+                  <a:txBody>
+                    <a:bodyPr wrap="square"/>
+                    <a:lstStyle/>
+                    <a:p>
+                      <a:pPr algn="l"/>
+                      <a:r>
+                        <a:rPr sz="1300" b="0">
+                          <a:solidFill>
+                            <a:srgbClr val="FFFFFF"/>
+                          </a:solidFill>
+                        </a:rPr>
+                        <a:t>I2C</a:t>
+                      </a:r>
+                    </a:p>
+                  </a:txBody>
+                  <a:tcPr>
+                    <a:solidFill>
+                      <a:srgbClr val="0F3460"/>
+                    </a:solidFill>
+                    <a:lnL>
+                      <a:noFill/>
+                    </a:lnL>
+                    <a:lnR>
+                      <a:noFill/>
+                    </a:lnR>
+                    <a:lnT>
+                      <a:noFill/>
+                    </a:lnT>
+                    <a:lnB>
+                      <a:noFill/>
+                    </a:lnB>
+                  </a:tcPr>
+                </a:tc>
+                <a:tc>
+                  <a:txBody>
+                    <a:bodyPr wrap="square"/>
+                    <a:lstStyle/>
+                    <a:p>
+                      <a:pPr algn="l"/>
+                      <a:r>
+                        <a:rPr sz="1300" b="0">
+                          <a:solidFill>
+                            <a:srgbClr val="FFFFFF"/>
+                          </a:solidFill>
+                        </a:rPr>
+                        <a:t>3.3 V</a:t>
+                      </a:r>
+                    </a:p>
+                  </a:txBody>
+                  <a:tcPr>
+                    <a:solidFill>
+                      <a:srgbClr val="0F3460"/>
+                    </a:solidFill>
+                    <a:lnL>
+                      <a:noFill/>
+                    </a:lnL>
+                    <a:lnR>
+                      <a:noFill/>
+                    </a:lnR>
+                    <a:lnT>
+                      <a:noFill/>
+                    </a:lnT>
+                    <a:lnB>
+                      <a:noFill/>
+                    </a:lnB>
+                  </a:tcPr>
+                </a:tc>
+                <a:tc>
+                  <a:txBody>
+                    <a:bodyPr wrap="square"/>
+                    <a:lstStyle/>
+                    <a:p>
+                      <a:pPr algn="l"/>
+                      <a:r>
+                        <a:rPr sz="1300" b="0">
+                          <a:solidFill>
+                            <a:srgbClr val="AAAAAA"/>
+                          </a:solidFill>
+                        </a:rPr>
+                        <a:t>I2C address 0x3C</a:t>
+                      </a:r>
+                    </a:p>
+                  </a:txBody>
+                  <a:tcPr>
+                    <a:solidFill>
+                      <a:srgbClr val="0F3460"/>
+                    </a:solidFill>
+                    <a:lnL>
+                      <a:noFill/>
+                    </a:lnL>
+                    <a:lnR>
+                      <a:noFill/>
+                    </a:lnR>
+                    <a:lnT>
+                      <a:noFill/>
+                    </a:lnT>
+                    <a:lnB>
+                      <a:noFill/>
+                    </a:lnB>
+                  </a:tcPr>
+                </a:tc>
+              </a:tr>
+              <a:tr h="417810">
+                <a:tc>
+                  <a:txBody>
+                    <a:bodyPr wrap="square"/>
+                    <a:lstStyle/>
+                    <a:p>
+                      <a:pPr algn="l"/>
+                      <a:r>
+                        <a:rPr sz="1300" b="0">
+                          <a:solidFill>
+                            <a:srgbClr val="FFFFFF"/>
+                          </a:solidFill>
+                        </a:rPr>
+                        <a:t>SH1106 OLED — SCL</a:t>
+                      </a:r>
+                    </a:p>
+                  </a:txBody>
+                  <a:tcPr>
+                    <a:solidFill>
+                      <a:srgbClr val="16213E"/>
+                    </a:solidFill>
+                    <a:lnL>
+                      <a:noFill/>
+                    </a:lnL>
+                    <a:lnR>
+                      <a:noFill/>
+                    </a:lnR>
+                    <a:lnT>
+                      <a:noFill/>
+                    </a:lnT>
+                    <a:lnB>
+                      <a:noFill/>
+                    </a:lnB>
+                  </a:tcPr>
+                </a:tc>
+                <a:tc>
+                  <a:txBody>
+                    <a:bodyPr wrap="square"/>
+                    <a:lstStyle/>
+                    <a:p>
+                      <a:pPr algn="l"/>
+                      <a:r>
+                        <a:rPr sz="1300" b="0">
+                          <a:solidFill>
+                            <a:srgbClr val="A8DADC"/>
+                          </a:solidFill>
+                        </a:rPr>
+                        <a:t>GPIO22</a:t>
+                      </a:r>
+                    </a:p>
+                  </a:txBody>
+                  <a:tcPr>
+                    <a:solidFill>
+                      <a:srgbClr val="16213E"/>
+                    </a:solidFill>
+                    <a:lnL>
+                      <a:noFill/>
+                    </a:lnL>
+                    <a:lnR>
+                      <a:noFill/>
+                    </a:lnR>
+                    <a:lnT>
+                      <a:noFill/>
+                    </a:lnT>
+                    <a:lnB>
+                      <a:noFill/>
+                    </a:lnB>
+                  </a:tcPr>
+                </a:tc>
+                <a:tc>
+                  <a:txBody>
+                    <a:bodyPr wrap="square"/>
+                    <a:lstStyle/>
+                    <a:p>
+                      <a:pPr algn="l"/>
+                      <a:r>
+                        <a:rPr sz="1300" b="0">
+                          <a:solidFill>
+                            <a:srgbClr val="FFFFFF"/>
+                          </a:solidFill>
+                        </a:rPr>
+                        <a:t>I2C</a:t>
+                      </a:r>
+                    </a:p>
+                  </a:txBody>
+                  <a:tcPr>
+                    <a:solidFill>
+                      <a:srgbClr val="16213E"/>
+                    </a:solidFill>
+                    <a:lnL>
+                      <a:noFill/>
+                    </a:lnL>
+                    <a:lnR>
+                      <a:noFill/>
+                    </a:lnR>
+                    <a:lnT>
+                      <a:noFill/>
+                    </a:lnT>
+                    <a:lnB>
+                      <a:noFill/>
+                    </a:lnB>
+                  </a:tcPr>
+                </a:tc>
+                <a:tc>
+                  <a:txBody>
+                    <a:bodyPr wrap="square"/>
+                    <a:lstStyle/>
+                    <a:p>
+                      <a:pPr algn="l"/>
+                      <a:r>
+                        <a:rPr sz="1300" b="0">
+                          <a:solidFill>
+                            <a:srgbClr val="FFFFFF"/>
+                          </a:solidFill>
+                        </a:rPr>
+                        <a:t>3.3 V</a:t>
+                      </a:r>
+                    </a:p>
+                  </a:txBody>
+                  <a:tcPr>
+                    <a:solidFill>
+                      <a:srgbClr val="16213E"/>
+                    </a:solidFill>
+                    <a:lnL>
+                      <a:noFill/>
+                    </a:lnL>
+                    <a:lnR>
+                      <a:noFill/>
+                    </a:lnR>
+                    <a:lnT>
+                      <a:noFill/>
+                    </a:lnT>
+                    <a:lnB>
+                      <a:noFill/>
+                    </a:lnB>
+                  </a:tcPr>
+                </a:tc>
+                <a:tc>
+                  <a:txBody>
+                    <a:bodyPr wrap="square"/>
+                    <a:lstStyle/>
+                    <a:p>
+                      <a:pPr algn="l"/>
+                      <a:r>
+                        <a:rPr sz="1300" b="0">
+                          <a:solidFill>
+                            <a:srgbClr val="AAAAAA"/>
+                          </a:solidFill>
+                        </a:rPr>
+                        <a:t>400 kHz fast-mode</a:t>
+                      </a:r>
+                    </a:p>
+                  </a:txBody>
+                  <a:tcPr>
+                    <a:solidFill>
+                      <a:srgbClr val="16213E"/>
+                    </a:solidFill>
+                    <a:lnL>
+                      <a:noFill/>
+                    </a:lnL>
+                    <a:lnR>
+                      <a:noFill/>
+                    </a:lnR>
+                    <a:lnT>
+                      <a:noFill/>
+                    </a:lnT>
+                    <a:lnB>
+                      <a:noFill/>
+                    </a:lnB>
+                  </a:tcPr>
+                </a:tc>
+              </a:tr>
+              <a:tr h="417810">
+                <a:tc>
+                  <a:txBody>
+                    <a:bodyPr wrap="square"/>
+                    <a:lstStyle/>
+                    <a:p>
+                      <a:pPr algn="l"/>
+                      <a:r>
+                        <a:rPr sz="1300" b="0">
+                          <a:solidFill>
+                            <a:srgbClr val="FFFFFF"/>
+                          </a:solidFill>
+                        </a:rPr>
+                        <a:t>DS18B20 DATA</a:t>
+                      </a:r>
+                    </a:p>
+                  </a:txBody>
+                  <a:tcPr>
+                    <a:solidFill>
+                      <a:srgbClr val="0F3460"/>
+                    </a:solidFill>
+                    <a:lnL>
+                      <a:noFill/>
+                    </a:lnL>
+                    <a:lnR>
+                      <a:noFill/>
+                    </a:lnR>
+                    <a:lnT>
+                      <a:noFill/>
+                    </a:lnT>
+                    <a:lnB>
+                      <a:noFill/>
+                    </a:lnB>
+                  </a:tcPr>
+                </a:tc>
+                <a:tc>
+                  <a:txBody>
+                    <a:bodyPr wrap="square"/>
+                    <a:lstStyle/>
+                    <a:p>
+                      <a:pPr algn="l"/>
+                      <a:r>
+                        <a:rPr sz="1300" b="0">
+                          <a:solidFill>
+                            <a:srgbClr val="A8DADC"/>
+                          </a:solidFill>
+                        </a:rPr>
+                        <a:t>GPIO4</a:t>
+                      </a:r>
+                    </a:p>
+                  </a:txBody>
+                  <a:tcPr>
+                    <a:solidFill>
+                      <a:srgbClr val="0F3460"/>
+                    </a:solidFill>
+                    <a:lnL>
+                      <a:noFill/>
+                    </a:lnL>
+                    <a:lnR>
+                      <a:noFill/>
+                    </a:lnR>
+                    <a:lnT>
+                      <a:noFill/>
+                    </a:lnT>
+                    <a:lnB>
+                      <a:noFill/>
+                    </a:lnB>
+                  </a:tcPr>
+                </a:tc>
+                <a:tc>
+                  <a:txBody>
+                    <a:bodyPr wrap="square"/>
+                    <a:lstStyle/>
+                    <a:p>
+                      <a:pPr algn="l"/>
+                      <a:r>
+                        <a:rPr sz="1300" b="0">
+                          <a:solidFill>
+                            <a:srgbClr val="FFFFFF"/>
+                          </a:solidFill>
+                        </a:rPr>
+                        <a:t>1-Wire</a:t>
+                      </a:r>
+                    </a:p>
+                  </a:txBody>
+                  <a:tcPr>
+                    <a:solidFill>
+                      <a:srgbClr val="0F3460"/>
+                    </a:solidFill>
+                    <a:lnL>
+                      <a:noFill/>
+                    </a:lnL>
+                    <a:lnR>
+                      <a:noFill/>
+                    </a:lnR>
+                    <a:lnT>
+                      <a:noFill/>
+                    </a:lnT>
+                    <a:lnB>
+                      <a:noFill/>
+                    </a:lnB>
+                  </a:tcPr>
+                </a:tc>
+                <a:tc>
+                  <a:txBody>
+                    <a:bodyPr wrap="square"/>
+                    <a:lstStyle/>
+                    <a:p>
+                      <a:pPr algn="l"/>
+                      <a:r>
+                        <a:rPr sz="1300" b="0">
+                          <a:solidFill>
+                            <a:srgbClr val="FFFFFF"/>
+                          </a:solidFill>
+                        </a:rPr>
+                        <a:t>3.3 V</a:t>
+                      </a:r>
+                    </a:p>
+                  </a:txBody>
+                  <a:tcPr>
+                    <a:solidFill>
+                      <a:srgbClr val="0F3460"/>
+                    </a:solidFill>
+                    <a:lnL>
+                      <a:noFill/>
+                    </a:lnL>
+                    <a:lnR>
+                      <a:noFill/>
+                    </a:lnR>
+                    <a:lnT>
+                      <a:noFill/>
+                    </a:lnT>
+                    <a:lnB>
+                      <a:noFill/>
+                    </a:lnB>
+                  </a:tcPr>
+                </a:tc>
+                <a:tc>
+                  <a:txBody>
+                    <a:bodyPr wrap="square"/>
+                    <a:lstStyle/>
+                    <a:p>
+                      <a:pPr algn="l"/>
+                      <a:r>
+                        <a:rPr sz="1300" b="0">
+                          <a:solidFill>
+                            <a:srgbClr val="AAAAAA"/>
+                          </a:solidFill>
+                        </a:rPr>
+                        <a:t>4.7 kΩ pull-up to 3.3 V</a:t>
+                      </a:r>
+                    </a:p>
+                  </a:txBody>
+                  <a:tcPr>
+                    <a:solidFill>
+                      <a:srgbClr val="0F3460"/>
+                    </a:solidFill>
+                    <a:lnL>
+                      <a:noFill/>
+                    </a:lnL>
+                    <a:lnR>
+                      <a:noFill/>
+                    </a:lnR>
+                    <a:lnT>
+                      <a:noFill/>
+                    </a:lnT>
+                    <a:lnB>
+                      <a:noFill/>
+                    </a:lnB>
+                  </a:tcPr>
+                </a:tc>
+              </a:tr>
+              <a:tr h="417810">
+                <a:tc>
+                  <a:txBody>
+                    <a:bodyPr wrap="square"/>
+                    <a:lstStyle/>
+                    <a:p>
+                      <a:pPr algn="l"/>
+                      <a:r>
+                        <a:rPr sz="1300" b="0">
+                          <a:solidFill>
+                            <a:srgbClr val="FFFFFF"/>
+                          </a:solidFill>
+                        </a:rPr>
+                        <a:t>MAX6675 CS</a:t>
+                      </a:r>
+                    </a:p>
+                  </a:txBody>
+                  <a:tcPr>
+                    <a:solidFill>
+                      <a:srgbClr val="16213E"/>
+                    </a:solidFill>
+                    <a:lnL>
+                      <a:noFill/>
+                    </a:lnL>
+                    <a:lnR>
+                      <a:noFill/>
+                    </a:lnR>
+                    <a:lnT>
+                      <a:noFill/>
+                    </a:lnT>
+                    <a:lnB>
+                      <a:noFill/>
+                    </a:lnB>
+                  </a:tcPr>
+                </a:tc>
+                <a:tc>
+                  <a:txBody>
+                    <a:bodyPr wrap="square"/>
+                    <a:lstStyle/>
+                    <a:p>
+                      <a:pPr algn="l"/>
+                      <a:r>
+                        <a:rPr sz="1300" b="0">
+                          <a:solidFill>
+                            <a:srgbClr val="A8DADC"/>
+                          </a:solidFill>
+                        </a:rPr>
+                        <a:t>GPIO5</a:t>
+                      </a:r>
+                    </a:p>
+                  </a:txBody>
+                  <a:tcPr>
+                    <a:solidFill>
+                      <a:srgbClr val="16213E"/>
+                    </a:solidFill>
+                    <a:lnL>
+                      <a:noFill/>
+                    </a:lnL>
+                    <a:lnR>
+                      <a:noFill/>
+                    </a:lnR>
+                    <a:lnT>
+                      <a:noFill/>
+                    </a:lnT>
+                    <a:lnB>
+                      <a:noFill/>
+                    </a:lnB>
+                  </a:tcPr>
+                </a:tc>
+                <a:tc>
+                  <a:txBody>
+                    <a:bodyPr wrap="square"/>
+                    <a:lstStyle/>
+                    <a:p>
+                      <a:pPr algn="l"/>
+                      <a:r>
+                        <a:rPr sz="1300" b="0">
+                          <a:solidFill>
+                            <a:srgbClr val="FFFFFF"/>
+                          </a:solidFill>
+                        </a:rPr>
+                        <a:t>SPI</a:t>
+                      </a:r>
+                    </a:p>
+                  </a:txBody>
+                  <a:tcPr>
+                    <a:solidFill>
+                      <a:srgbClr val="16213E"/>
+                    </a:solidFill>
+                    <a:lnL>
+                      <a:noFill/>
+                    </a:lnL>
+                    <a:lnR>
+                      <a:noFill/>
+                    </a:lnR>
+                    <a:lnT>
+                      <a:noFill/>
+                    </a:lnT>
+                    <a:lnB>
+                      <a:noFill/>
+                    </a:lnB>
+                  </a:tcPr>
+                </a:tc>
+                <a:tc>
+                  <a:txBody>
+                    <a:bodyPr wrap="square"/>
+                    <a:lstStyle/>
+                    <a:p>
+                      <a:pPr algn="l"/>
+                      <a:r>
+                        <a:rPr sz="1300" b="0">
+                          <a:solidFill>
+                            <a:srgbClr val="FFFFFF"/>
+                          </a:solidFill>
+                        </a:rPr>
+                        <a:t>3.3 V</a:t>
+                      </a:r>
+                    </a:p>
+                  </a:txBody>
+                  <a:tcPr>
+                    <a:solidFill>
+                      <a:srgbClr val="16213E"/>
+                    </a:solidFill>
+                    <a:lnL>
+                      <a:noFill/>
+                    </a:lnL>
+                    <a:lnR>
+                      <a:noFill/>
+                    </a:lnR>
+                    <a:lnT>
+                      <a:noFill/>
+                    </a:lnT>
+                    <a:lnB>
+                      <a:noFill/>
+                    </a:lnB>
+                  </a:tcPr>
+                </a:tc>
+                <a:tc>
+                  <a:txBody>
+                    <a:bodyPr wrap="square"/>
+                    <a:lstStyle/>
+                    <a:p>
+                      <a:pPr algn="l"/>
+                      <a:r>
+                        <a:rPr sz="1300" b="0">
+                          <a:solidFill>
+                            <a:srgbClr val="AAAAAA"/>
+                          </a:solidFill>
+                        </a:rPr>
+                        <a:t>dedicated SPI bus</a:t>
+                      </a:r>
+                    </a:p>
+                  </a:txBody>
+                  <a:tcPr>
+                    <a:solidFill>
+                      <a:srgbClr val="16213E"/>
+                    </a:solidFill>
+                    <a:lnL>
+                      <a:noFill/>
+                    </a:lnL>
+                    <a:lnR>
+                      <a:noFill/>
+                    </a:lnR>
+                    <a:lnT>
+                      <a:noFill/>
+                    </a:lnT>
+                    <a:lnB>
+                      <a:noFill/>
+                    </a:lnB>
+                  </a:tcPr>
+                </a:tc>
+              </a:tr>
+              <a:tr h="417810">
+                <a:tc>
+                  <a:txBody>
+                    <a:bodyPr wrap="square"/>
+                    <a:lstStyle/>
+                    <a:p>
+                      <a:pPr algn="l"/>
+                      <a:r>
+                        <a:rPr sz="1300" b="0">
+                          <a:solidFill>
+                            <a:srgbClr val="FFFFFF"/>
+                          </a:solidFill>
+                        </a:rPr>
+                        <a:t>MAX6675 SCK</a:t>
+                      </a:r>
+                    </a:p>
+                  </a:txBody>
+                  <a:tcPr>
+                    <a:solidFill>
+                      <a:srgbClr val="0F3460"/>
+                    </a:solidFill>
+                    <a:lnL>
+                      <a:noFill/>
+                    </a:lnL>
+                    <a:lnR>
+                      <a:noFill/>
+                    </a:lnR>
+                    <a:lnT>
+                      <a:noFill/>
+                    </a:lnT>
+                    <a:lnB>
+                      <a:noFill/>
+                    </a:lnB>
+                  </a:tcPr>
+                </a:tc>
+                <a:tc>
+                  <a:txBody>
+                    <a:bodyPr wrap="square"/>
+                    <a:lstStyle/>
+                    <a:p>
+                      <a:pPr algn="l"/>
+                      <a:r>
+                        <a:rPr sz="1300" b="0">
+                          <a:solidFill>
+                            <a:srgbClr val="A8DADC"/>
+                          </a:solidFill>
+                        </a:rPr>
+                        <a:t>GPIO18</a:t>
+                      </a:r>
+                    </a:p>
+                  </a:txBody>
+                  <a:tcPr>
+                    <a:solidFill>
+                      <a:srgbClr val="0F3460"/>
+                    </a:solidFill>
+                    <a:lnL>
+                      <a:noFill/>
+                    </a:lnL>
+                    <a:lnR>
+                      <a:noFill/>
+                    </a:lnR>
+                    <a:lnT>
+                      <a:noFill/>
+                    </a:lnT>
+                    <a:lnB>
+                      <a:noFill/>
+                    </a:lnB>
+                  </a:tcPr>
+                </a:tc>
+                <a:tc>
+                  <a:txBody>
+                    <a:bodyPr wrap="square"/>
+                    <a:lstStyle/>
+                    <a:p>
+                      <a:pPr algn="l"/>
+                      <a:r>
+                        <a:rPr sz="1300" b="0">
+                          <a:solidFill>
+                            <a:srgbClr val="FFFFFF"/>
+                          </a:solidFill>
+                        </a:rPr>
+                        <a:t>SPI</a:t>
+                      </a:r>
+                    </a:p>
+                  </a:txBody>
+                  <a:tcPr>
+                    <a:solidFill>
+                      <a:srgbClr val="0F3460"/>
+                    </a:solidFill>
+                    <a:lnL>
+                      <a:noFill/>
+                    </a:lnL>
+                    <a:lnR>
+                      <a:noFill/>
+                    </a:lnR>
+                    <a:lnT>
+                      <a:noFill/>
+                    </a:lnT>
+                    <a:lnB>
+                      <a:noFill/>
+                    </a:lnB>
+                  </a:tcPr>
+                </a:tc>
+                <a:tc>
+                  <a:txBody>
+                    <a:bodyPr wrap="square"/>
+                    <a:lstStyle/>
+                    <a:p>
+                      <a:pPr algn="l"/>
+                      <a:r>
+                        <a:rPr sz="1300" b="0">
+                          <a:solidFill>
+                            <a:srgbClr val="FFFFFF"/>
+                          </a:solidFill>
+                        </a:rPr>
+                        <a:t>3.3 V</a:t>
+                      </a:r>
+                    </a:p>
+                  </a:txBody>
+                  <a:tcPr>
+                    <a:solidFill>
+                      <a:srgbClr val="0F3460"/>
+                    </a:solidFill>
+                    <a:lnL>
+                      <a:noFill/>
+                    </a:lnL>
+                    <a:lnR>
+                      <a:noFill/>
+                    </a:lnR>
+                    <a:lnT>
+                      <a:noFill/>
+                    </a:lnT>
+                    <a:lnB>
+                      <a:noFill/>
+                    </a:lnB>
+                  </a:tcPr>
+                </a:tc>
+                <a:tc>
+                  <a:txBody>
+                    <a:bodyPr wrap="square"/>
+                    <a:lstStyle/>
+                    <a:p>
+                      <a:pPr algn="l"/>
+                      <a:r>
+                        <a:rPr sz="1300" b="0">
+                          <a:solidFill>
+                            <a:srgbClr val="AAAAAA"/>
+                          </a:solidFill>
+                        </a:rPr>
+                        <a:t>max 4.3 MHz</a:t>
+                      </a:r>
+                    </a:p>
+                  </a:txBody>
+                  <a:tcPr>
+                    <a:solidFill>
+                      <a:srgbClr val="0F3460"/>
+                    </a:solidFill>
+                    <a:lnL>
+                      <a:noFill/>
+                    </a:lnL>
+                    <a:lnR>
+                      <a:noFill/>
+                    </a:lnR>
+                    <a:lnT>
+                      <a:noFill/>
+                    </a:lnT>
+                    <a:lnB>
+                      <a:noFill/>
+                    </a:lnB>
+                  </a:tcPr>
+                </a:tc>
+              </a:tr>
+              <a:tr h="417810">
+                <a:tc>
+                  <a:txBody>
+                    <a:bodyPr wrap="square"/>
+                    <a:lstStyle/>
+                    <a:p>
+                      <a:pPr algn="l"/>
+                      <a:r>
+                        <a:rPr sz="1300" b="0">
+                          <a:solidFill>
+                            <a:srgbClr val="FFFFFF"/>
+                          </a:solidFill>
+                        </a:rPr>
+                        <a:t>MAX6675 MISO (SO)</a:t>
+                      </a:r>
+                    </a:p>
+                  </a:txBody>
+                  <a:tcPr>
+                    <a:solidFill>
+                      <a:srgbClr val="16213E"/>
+                    </a:solidFill>
+                    <a:lnL>
+                      <a:noFill/>
+                    </a:lnL>
+                    <a:lnR>
+                      <a:noFill/>
+                    </a:lnR>
+                    <a:lnT>
+                      <a:noFill/>
+                    </a:lnT>
+                    <a:lnB>
+                      <a:noFill/>
+                    </a:lnB>
+                  </a:tcPr>
+                </a:tc>
+                <a:tc>
+                  <a:txBody>
+                    <a:bodyPr wrap="square"/>
+                    <a:lstStyle/>
+                    <a:p>
+                      <a:pPr algn="l"/>
+                      <a:r>
+                        <a:rPr sz="1300" b="0">
+                          <a:solidFill>
+                            <a:srgbClr val="A8DADC"/>
+                          </a:solidFill>
+                        </a:rPr>
+                        <a:t>GPIO19</a:t>
+                      </a:r>
+                    </a:p>
+                  </a:txBody>
+                  <a:tcPr>
+                    <a:solidFill>
+                      <a:srgbClr val="16213E"/>
+                    </a:solidFill>
+                    <a:lnL>
+                      <a:noFill/>
+                    </a:lnL>
+                    <a:lnR>
+                      <a:noFill/>
+                    </a:lnR>
+                    <a:lnT>
+                      <a:noFill/>
+                    </a:lnT>
+                    <a:lnB>
+                      <a:noFill/>
+                    </a:lnB>
+                  </a:tcPr>
+                </a:tc>
+                <a:tc>
+                  <a:txBody>
+                    <a:bodyPr wrap="square"/>
+                    <a:lstStyle/>
+                    <a:p>
+                      <a:pPr algn="l"/>
+                      <a:r>
+                        <a:rPr sz="1300" b="0">
+                          <a:solidFill>
+                            <a:srgbClr val="FFFFFF"/>
+                          </a:solidFill>
+                        </a:rPr>
+                        <a:t>SPI</a:t>
+                      </a:r>
+                    </a:p>
+                  </a:txBody>
+                  <a:tcPr>
+                    <a:solidFill>
+                      <a:srgbClr val="16213E"/>
+                    </a:solidFill>
+                    <a:lnL>
+                      <a:noFill/>
+                    </a:lnL>
+                    <a:lnR>
+                      <a:noFill/>
+                    </a:lnR>
+                    <a:lnT>
+                      <a:noFill/>
+                    </a:lnT>
+                    <a:lnB>
+                      <a:noFill/>
+                    </a:lnB>
+                  </a:tcPr>
+                </a:tc>
+                <a:tc>
+                  <a:txBody>
+                    <a:bodyPr wrap="square"/>
+                    <a:lstStyle/>
+                    <a:p>
+                      <a:pPr algn="l"/>
+                      <a:r>
+                        <a:rPr sz="1300" b="0">
+                          <a:solidFill>
+                            <a:srgbClr val="FFFFFF"/>
+                          </a:solidFill>
+                        </a:rPr>
+                        <a:t>3.3 V</a:t>
+                      </a:r>
+                    </a:p>
+                  </a:txBody>
+                  <a:tcPr>
+                    <a:solidFill>
+                      <a:srgbClr val="16213E"/>
+                    </a:solidFill>
+                    <a:lnL>
+                      <a:noFill/>
+                    </a:lnL>
+                    <a:lnR>
+                      <a:noFill/>
+                    </a:lnR>
+                    <a:lnT>
+                      <a:noFill/>
+                    </a:lnT>
+                    <a:lnB>
+                      <a:noFill/>
+                    </a:lnB>
+                  </a:tcPr>
+                </a:tc>
+                <a:tc>
+                  <a:txBody>
+                    <a:bodyPr wrap="square"/>
+                    <a:lstStyle/>
+                    <a:p>
+                      <a:pPr algn="l"/>
+                      <a:r>
+                        <a:rPr sz="1300" b="0">
+                          <a:solidFill>
+                            <a:srgbClr val="AAAAAA"/>
+                          </a:solidFill>
+                        </a:rPr>
+                        <a:t>read-only from module</a:t>
+                      </a:r>
+                    </a:p>
+                  </a:txBody>
+                  <a:tcPr>
+                    <a:solidFill>
+                      <a:srgbClr val="16213E"/>
+                    </a:solidFill>
+                    <a:lnL>
+                      <a:noFill/>
+                    </a:lnL>
+                    <a:lnR>
+                      <a:noFill/>
+                    </a:lnR>
+                    <a:lnT>
+                      <a:noFill/>
+                    </a:lnT>
+                    <a:lnB>
+                      <a:noFill/>
+                    </a:lnB>
+                  </a:tcPr>
+                </a:tc>
+              </a:tr>
+              <a:tr h="417810">
+                <a:tc>
+                  <a:txBody>
+                    <a:bodyPr wrap="square"/>
+                    <a:lstStyle/>
+                    <a:p>
+                      <a:pPr algn="l"/>
+                      <a:r>
+                        <a:rPr sz="1300" b="0">
+                          <a:solidFill>
+                            <a:srgbClr val="FFFFFF"/>
+                          </a:solidFill>
+                        </a:rPr>
+                        <a:t>Relay — Feeder IN</a:t>
+                      </a:r>
+                    </a:p>
+                  </a:txBody>
+                  <a:tcPr>
+                    <a:solidFill>
+                      <a:srgbClr val="0F3460"/>
+                    </a:solidFill>
+                    <a:lnL>
+                      <a:noFill/>
+                    </a:lnL>
+                    <a:lnR>
+                      <a:noFill/>
+                    </a:lnR>
+                    <a:lnT>
+                      <a:noFill/>
+                    </a:lnT>
+                    <a:lnB>
+                      <a:noFill/>
+                    </a:lnB>
+                  </a:tcPr>
+                </a:tc>
+                <a:tc>
+                  <a:txBody>
+                    <a:bodyPr wrap="square"/>
+                    <a:lstStyle/>
+                    <a:p>
+                      <a:pPr algn="l"/>
+                      <a:r>
+                        <a:rPr sz="1300" b="0">
+                          <a:solidFill>
+                            <a:srgbClr val="A8DADC"/>
+                          </a:solidFill>
+                        </a:rPr>
+                        <a:t>GPIO25</a:t>
+                      </a:r>
+                    </a:p>
+                  </a:txBody>
+                  <a:tcPr>
+                    <a:solidFill>
+                      <a:srgbClr val="0F3460"/>
+                    </a:solidFill>
+                    <a:lnL>
+                      <a:noFill/>
+                    </a:lnL>
+                    <a:lnR>
+                      <a:noFill/>
+                    </a:lnR>
+                    <a:lnT>
+                      <a:noFill/>
+                    </a:lnT>
+                    <a:lnB>
+                      <a:noFill/>
+                    </a:lnB>
+                  </a:tcPr>
+                </a:tc>
+                <a:tc>
+                  <a:txBody>
+                    <a:bodyPr wrap="square"/>
+                    <a:lstStyle/>
+                    <a:p>
+                      <a:pPr algn="l"/>
+                      <a:r>
+                        <a:rPr sz="1300" b="0">
+                          <a:solidFill>
+                            <a:srgbClr val="FFFFFF"/>
+                          </a:solidFill>
+                        </a:rPr>
+                        <a:t>GPIO</a:t>
+                      </a:r>
+                    </a:p>
+                  </a:txBody>
+                  <a:tcPr>
+                    <a:solidFill>
+                      <a:srgbClr val="0F3460"/>
+                    </a:solidFill>
+                    <a:lnL>
+                      <a:noFill/>
+                    </a:lnL>
+                    <a:lnR>
+                      <a:noFill/>
+                    </a:lnR>
+                    <a:lnT>
+                      <a:noFill/>
+                    </a:lnT>
+                    <a:lnB>
+                      <a:noFill/>
+                    </a:lnB>
+                  </a:tcPr>
+                </a:tc>
+                <a:tc>
+                  <a:txBody>
+                    <a:bodyPr wrap="square"/>
+                    <a:lstStyle/>
+                    <a:p>
+                      <a:pPr algn="l"/>
+                      <a:r>
+                        <a:rPr sz="1300" b="0">
+                          <a:solidFill>
+                            <a:srgbClr val="FFFFFF"/>
+                          </a:solidFill>
+                        </a:rPr>
+                        <a:t>3.3 V</a:t>
+                      </a:r>
+                    </a:p>
+                  </a:txBody>
+                  <a:tcPr>
+                    <a:solidFill>
+                      <a:srgbClr val="0F3460"/>
+                    </a:solidFill>
+                    <a:lnL>
+                      <a:noFill/>
+                    </a:lnL>
+                    <a:lnR>
+                      <a:noFill/>
+                    </a:lnR>
+                    <a:lnT>
+                      <a:noFill/>
+                    </a:lnT>
+                    <a:lnB>
+                      <a:noFill/>
+                    </a:lnB>
+                  </a:tcPr>
+                </a:tc>
+                <a:tc>
+                  <a:txBody>
+                    <a:bodyPr wrap="square"/>
+                    <a:lstStyle/>
+                    <a:p>
+                      <a:pPr algn="l"/>
+                      <a:r>
+                        <a:rPr sz="1300" b="0">
+                          <a:solidFill>
+                            <a:srgbClr val="AAAAAA"/>
+                          </a:solidFill>
+                        </a:rPr>
+                        <a:t>active LOW, relay VCC = 5 V</a:t>
+                      </a:r>
+                    </a:p>
+                  </a:txBody>
+                  <a:tcPr>
+                    <a:solidFill>
+                      <a:srgbClr val="0F3460"/>
+                    </a:solidFill>
+                    <a:lnL>
+                      <a:noFill/>
+                    </a:lnL>
+                    <a:lnR>
+                      <a:noFill/>
+                    </a:lnR>
+                    <a:lnT>
+                      <a:noFill/>
+                    </a:lnT>
+                    <a:lnB>
+                      <a:noFill/>
+                    </a:lnB>
+                  </a:tcPr>
+                </a:tc>
+              </a:tr>
+              <a:tr h="417810">
+                <a:tc>
+                  <a:txBody>
+                    <a:bodyPr wrap="square"/>
+                    <a:lstStyle/>
+                    <a:p>
+                      <a:pPr algn="l"/>
+                      <a:r>
+                        <a:rPr sz="1300" b="0">
+                          <a:solidFill>
+                            <a:srgbClr val="FFFFFF"/>
+                          </a:solidFill>
+                        </a:rPr>
+                        <a:t>Relay — Igniter IN</a:t>
+                      </a:r>
+                    </a:p>
+                  </a:txBody>
+                  <a:tcPr>
+                    <a:solidFill>
+                      <a:srgbClr val="16213E"/>
+                    </a:solidFill>
+                    <a:lnL>
+                      <a:noFill/>
+                    </a:lnL>
+                    <a:lnR>
+                      <a:noFill/>
+                    </a:lnR>
+                    <a:lnT>
+                      <a:noFill/>
+                    </a:lnT>
+                    <a:lnB>
+                      <a:noFill/>
+                    </a:lnB>
+                  </a:tcPr>
+                </a:tc>
+                <a:tc>
+                  <a:txBody>
+                    <a:bodyPr wrap="square"/>
+                    <a:lstStyle/>
+                    <a:p>
+                      <a:pPr algn="l"/>
+                      <a:r>
+                        <a:rPr sz="1300" b="0">
+                          <a:solidFill>
+                            <a:srgbClr val="A8DADC"/>
+                          </a:solidFill>
+                        </a:rPr>
+                        <a:t>GPIO26</a:t>
+                      </a:r>
+                    </a:p>
+                  </a:txBody>
+                  <a:tcPr>
+                    <a:solidFill>
+                      <a:srgbClr val="16213E"/>
+                    </a:solidFill>
+                    <a:lnL>
+                      <a:noFill/>
+                    </a:lnL>
+                    <a:lnR>
+                      <a:noFill/>
+                    </a:lnR>
+                    <a:lnT>
+                      <a:noFill/>
+                    </a:lnT>
+                    <a:lnB>
+                      <a:noFill/>
+                    </a:lnB>
+                  </a:tcPr>
+                </a:tc>
+                <a:tc>
+                  <a:txBody>
+                    <a:bodyPr wrap="square"/>
+                    <a:lstStyle/>
+                    <a:p>
+                      <a:pPr algn="l"/>
+                      <a:r>
+                        <a:rPr sz="1300" b="0">
+                          <a:solidFill>
+                            <a:srgbClr val="FFFFFF"/>
+                          </a:solidFill>
+                        </a:rPr>
+                        <a:t>GPIO</a:t>
+                      </a:r>
+                    </a:p>
+                  </a:txBody>
+                  <a:tcPr>
+                    <a:solidFill>
+                      <a:srgbClr val="16213E"/>
+                    </a:solidFill>
+                    <a:lnL>
+                      <a:noFill/>
+                    </a:lnL>
+                    <a:lnR>
+                      <a:noFill/>
+                    </a:lnR>
+                    <a:lnT>
+                      <a:noFill/>
+                    </a:lnT>
+                    <a:lnB>
+                      <a:noFill/>
+                    </a:lnB>
+                  </a:tcPr>
+                </a:tc>
+                <a:tc>
+                  <a:txBody>
+                    <a:bodyPr wrap="square"/>
+                    <a:lstStyle/>
+                    <a:p>
+                      <a:pPr algn="l"/>
+                      <a:r>
+                        <a:rPr sz="1300" b="0">
+                          <a:solidFill>
+                            <a:srgbClr val="FFFFFF"/>
+                          </a:solidFill>
+                        </a:rPr>
+                        <a:t>3.3 V</a:t>
+                      </a:r>
+                    </a:p>
+                  </a:txBody>
+                  <a:tcPr>
+                    <a:solidFill>
+                      <a:srgbClr val="16213E"/>
+                    </a:solidFill>
+                    <a:lnL>
+                      <a:noFill/>
+                    </a:lnL>
+                    <a:lnR>
+                      <a:noFill/>
+                    </a:lnR>
+                    <a:lnT>
+                      <a:noFill/>
+                    </a:lnT>
+                    <a:lnB>
+                      <a:noFill/>
+                    </a:lnB>
+                  </a:tcPr>
+                </a:tc>
+                <a:tc>
+                  <a:txBody>
+                    <a:bodyPr wrap="square"/>
+                    <a:lstStyle/>
+                    <a:p>
+                      <a:pPr algn="l"/>
+                      <a:r>
+                        <a:rPr sz="1300" b="0">
+                          <a:solidFill>
+                            <a:srgbClr val="AAAAAA"/>
+                          </a:solidFill>
+                        </a:rPr>
+                        <a:t>active LOW, relay VCC = 5 V</a:t>
+                      </a:r>
+                    </a:p>
+                  </a:txBody>
+                  <a:tcPr>
+                    <a:solidFill>
+                      <a:srgbClr val="16213E"/>
+                    </a:solidFill>
+                    <a:lnL>
+                      <a:noFill/>
+                    </a:lnL>
+                    <a:lnR>
+                      <a:noFill/>
+                    </a:lnR>
+                    <a:lnT>
+                      <a:noFill/>
+                    </a:lnT>
+                    <a:lnB>
+                      <a:noFill/>
+                    </a:lnB>
+                  </a:tcPr>
+                </a:tc>
+              </a:tr>
+              <a:tr h="417810">
+                <a:tc>
+                  <a:txBody>
+                    <a:bodyPr wrap="square"/>
+                    <a:lstStyle/>
+                    <a:p>
+                      <a:pPr algn="l"/>
+                      <a:r>
+                        <a:rPr sz="1300" b="0">
+                          <a:solidFill>
+                            <a:srgbClr val="FFFFFF"/>
+                          </a:solidFill>
+                        </a:rPr>
+                        <a:t>Relay — Pump IN</a:t>
+                      </a:r>
+                    </a:p>
+                  </a:txBody>
+                  <a:tcPr>
+                    <a:solidFill>
+                      <a:srgbClr val="0F3460"/>
+                    </a:solidFill>
+                    <a:lnL>
+                      <a:noFill/>
+                    </a:lnL>
+                    <a:lnR>
+                      <a:noFill/>
+                    </a:lnR>
+                    <a:lnT>
+                      <a:noFill/>
+                    </a:lnT>
+                    <a:lnB>
+                      <a:noFill/>
+                    </a:lnB>
+                  </a:tcPr>
+                </a:tc>
+                <a:tc>
+                  <a:txBody>
+                    <a:bodyPr wrap="square"/>
+                    <a:lstStyle/>
+                    <a:p>
+                      <a:pPr algn="l"/>
+                      <a:r>
+                        <a:rPr sz="1300" b="0">
+                          <a:solidFill>
+                            <a:srgbClr val="A8DADC"/>
+                          </a:solidFill>
+                        </a:rPr>
+                        <a:t>GPIO27</a:t>
+                      </a:r>
+                    </a:p>
+                  </a:txBody>
+                  <a:tcPr>
+                    <a:solidFill>
+                      <a:srgbClr val="0F3460"/>
+                    </a:solidFill>
+                    <a:lnL>
+                      <a:noFill/>
+                    </a:lnL>
+                    <a:lnR>
+                      <a:noFill/>
+                    </a:lnR>
+                    <a:lnT>
+                      <a:noFill/>
+                    </a:lnT>
+                    <a:lnB>
+                      <a:noFill/>
+                    </a:lnB>
+                  </a:tcPr>
+                </a:tc>
+                <a:tc>
+                  <a:txBody>
+                    <a:bodyPr wrap="square"/>
+                    <a:lstStyle/>
+                    <a:p>
+                      <a:pPr algn="l"/>
+                      <a:r>
+                        <a:rPr sz="1300" b="0">
+                          <a:solidFill>
+                            <a:srgbClr val="FFFFFF"/>
+                          </a:solidFill>
+                        </a:rPr>
+                        <a:t>GPIO</a:t>
+                      </a:r>
+                    </a:p>
+                  </a:txBody>
+                  <a:tcPr>
+                    <a:solidFill>
+                      <a:srgbClr val="0F3460"/>
+                    </a:solidFill>
+                    <a:lnL>
+                      <a:noFill/>
+                    </a:lnL>
+                    <a:lnR>
+                      <a:noFill/>
+                    </a:lnR>
+                    <a:lnT>
+                      <a:noFill/>
+                    </a:lnT>
+                    <a:lnB>
+                      <a:noFill/>
+                    </a:lnB>
+                  </a:tcPr>
+                </a:tc>
+                <a:tc>
+                  <a:txBody>
+                    <a:bodyPr wrap="square"/>
+                    <a:lstStyle/>
+                    <a:p>
+                      <a:pPr algn="l"/>
+                      <a:r>
+                        <a:rPr sz="1300" b="0">
+                          <a:solidFill>
+                            <a:srgbClr val="FFFFFF"/>
+                          </a:solidFill>
+                        </a:rPr>
+                        <a:t>3.3 V</a:t>
+                      </a:r>
+                    </a:p>
+                  </a:txBody>
+                  <a:tcPr>
+                    <a:solidFill>
+                      <a:srgbClr val="0F3460"/>
+                    </a:solidFill>
+                    <a:lnL>
+                      <a:noFill/>
+                    </a:lnL>
+                    <a:lnR>
+                      <a:noFill/>
+                    </a:lnR>
+                    <a:lnT>
+                      <a:noFill/>
+                    </a:lnT>
+                    <a:lnB>
+                      <a:noFill/>
+                    </a:lnB>
+                  </a:tcPr>
+                </a:tc>
+                <a:tc>
+                  <a:txBody>
+                    <a:bodyPr wrap="square"/>
+                    <a:lstStyle/>
+                    <a:p>
+                      <a:pPr algn="l"/>
+                      <a:r>
+                        <a:rPr sz="1300" b="0">
+                          <a:solidFill>
+                            <a:srgbClr val="AAAAAA"/>
+                          </a:solidFill>
+                        </a:rPr>
+                        <a:t>active LOW, relay VCC = 5 V</a:t>
+                      </a:r>
+                    </a:p>
+                  </a:txBody>
+                  <a:tcPr>
+                    <a:solidFill>
+                      <a:srgbClr val="0F3460"/>
+                    </a:solidFill>
+                    <a:lnL>
+                      <a:noFill/>
+                    </a:lnL>
+                    <a:lnR>
+                      <a:noFill/>
+                    </a:lnR>
+                    <a:lnT>
+                      <a:noFill/>
+                    </a:lnT>
+                    <a:lnB>
+                      <a:noFill/>
+                    </a:lnB>
+                  </a:tcPr>
+                </a:tc>
+              </a:tr>
+              <a:tr h="417810">
+                <a:tc>
+                  <a:txBody>
+                    <a:bodyPr wrap="square"/>
+                    <a:lstStyle/>
+                    <a:p>
+                      <a:pPr algn="l"/>
+                      <a:r>
+                        <a:rPr sz="1300" b="0">
+                          <a:solidFill>
+                            <a:srgbClr val="FFFFFF"/>
+                          </a:solidFill>
+                        </a:rPr>
+                        <a:t>TRIAC gate</a:t>
+                      </a:r>
+                    </a:p>
+                  </a:txBody>
+                  <a:tcPr>
+                    <a:solidFill>
+                      <a:srgbClr val="16213E"/>
+                    </a:solidFill>
+                    <a:lnL>
+                      <a:noFill/>
+                    </a:lnL>
+                    <a:lnR>
+                      <a:noFill/>
+                    </a:lnR>
+                    <a:lnT>
+                      <a:noFill/>
+                    </a:lnT>
+                    <a:lnB>
+                      <a:noFill/>
+                    </a:lnB>
+                  </a:tcPr>
+                </a:tc>
+                <a:tc>
+                  <a:txBody>
+                    <a:bodyPr wrap="square"/>
+                    <a:lstStyle/>
+                    <a:p>
+                      <a:pPr algn="l"/>
+                      <a:r>
+                        <a:rPr sz="1300" b="0">
+                          <a:solidFill>
+                            <a:srgbClr val="A8DADC"/>
+                          </a:solidFill>
+                        </a:rPr>
+                        <a:t>GPIO33</a:t>
+                      </a:r>
+                    </a:p>
+                  </a:txBody>
+                  <a:tcPr>
+                    <a:solidFill>
+                      <a:srgbClr val="16213E"/>
+                    </a:solidFill>
+                    <a:lnL>
+                      <a:noFill/>
+                    </a:lnL>
+                    <a:lnR>
+                      <a:noFill/>
+                    </a:lnR>
+                    <a:lnT>
+                      <a:noFill/>
+                    </a:lnT>
+                    <a:lnB>
+                      <a:noFill/>
+                    </a:lnB>
+                  </a:tcPr>
+                </a:tc>
+                <a:tc>
+                  <a:txBody>
+                    <a:bodyPr wrap="square"/>
+                    <a:lstStyle/>
+                    <a:p>
+                      <a:pPr algn="l"/>
+                      <a:r>
+                        <a:rPr sz="1300" b="0">
+                          <a:solidFill>
+                            <a:srgbClr val="FFFFFF"/>
+                          </a:solidFill>
+                        </a:rPr>
+                        <a:t>GPIO</a:t>
+                      </a:r>
+                    </a:p>
+                  </a:txBody>
+                  <a:tcPr>
+                    <a:solidFill>
+                      <a:srgbClr val="16213E"/>
+                    </a:solidFill>
+                    <a:lnL>
+                      <a:noFill/>
+                    </a:lnL>
+                    <a:lnR>
+                      <a:noFill/>
+                    </a:lnR>
+                    <a:lnT>
+                      <a:noFill/>
+                    </a:lnT>
+                    <a:lnB>
+                      <a:noFill/>
+                    </a:lnB>
+                  </a:tcPr>
+                </a:tc>
+                <a:tc>
+                  <a:txBody>
+                    <a:bodyPr wrap="square"/>
+                    <a:lstStyle/>
+                    <a:p>
+                      <a:pPr algn="l"/>
+                      <a:r>
+                        <a:rPr sz="1300" b="0">
+                          <a:solidFill>
+                            <a:srgbClr val="FFFFFF"/>
+                          </a:solidFill>
+                        </a:rPr>
+                        <a:t>3.3 V</a:t>
+                      </a:r>
+                    </a:p>
+                  </a:txBody>
+                  <a:tcPr>
+                    <a:solidFill>
+                      <a:srgbClr val="16213E"/>
+                    </a:solidFill>
+                    <a:lnL>
+                      <a:noFill/>
+                    </a:lnL>
+                    <a:lnR>
+                      <a:noFill/>
+                    </a:lnR>
+                    <a:lnT>
+                      <a:noFill/>
+                    </a:lnT>
+                    <a:lnB>
+                      <a:noFill/>
+                    </a:lnB>
+                  </a:tcPr>
+                </a:tc>
+                <a:tc>
+                  <a:txBody>
+                    <a:bodyPr wrap="square"/>
+                    <a:lstStyle/>
+                    <a:p>
+                      <a:pPr algn="l"/>
+                      <a:r>
+                        <a:rPr sz="1300" b="0">
+                          <a:solidFill>
+                            <a:srgbClr val="AAAAAA"/>
+                          </a:solidFill>
+                        </a:rPr>
+                        <a:t>330 Ω → MOC3021 → TRIAC gate</a:t>
+                      </a:r>
+                    </a:p>
+                  </a:txBody>
+                  <a:tcPr>
+                    <a:solidFill>
+                      <a:srgbClr val="16213E"/>
+                    </a:solidFill>
+                    <a:lnL>
+                      <a:noFill/>
+                    </a:lnL>
+                    <a:lnR>
+                      <a:noFill/>
+                    </a:lnR>
+                    <a:lnT>
+                      <a:noFill/>
+                    </a:lnT>
+                    <a:lnB>
+                      <a:noFill/>
+                    </a:lnB>
+                  </a:tcPr>
+                </a:tc>
+              </a:tr>
+              <a:tr h="417810">
+                <a:tc>
+                  <a:txBody>
+                    <a:bodyPr wrap="square"/>
+                    <a:lstStyle/>
+                    <a:p>
+                      <a:pPr algn="l"/>
+                      <a:r>
+                        <a:rPr sz="1300" b="0">
+                          <a:solidFill>
+                            <a:srgbClr val="FFFFFF"/>
+                          </a:solidFill>
+                        </a:rPr>
+                        <a:t>Zero-cross detect</a:t>
+                      </a:r>
+                    </a:p>
+                  </a:txBody>
+                  <a:tcPr>
+                    <a:solidFill>
+                      <a:srgbClr val="0F3460"/>
+                    </a:solidFill>
+                    <a:lnL>
+                      <a:noFill/>
+                    </a:lnL>
+                    <a:lnR>
+                      <a:noFill/>
+                    </a:lnR>
+                    <a:lnT>
+                      <a:noFill/>
+                    </a:lnT>
+                    <a:lnB>
+                      <a:noFill/>
+                    </a:lnB>
+                  </a:tcPr>
+                </a:tc>
+                <a:tc>
+                  <a:txBody>
+                    <a:bodyPr wrap="square"/>
+                    <a:lstStyle/>
+                    <a:p>
+                      <a:pPr algn="l"/>
+                      <a:r>
+                        <a:rPr sz="1300" b="0">
+                          <a:solidFill>
+                            <a:srgbClr val="A8DADC"/>
+                          </a:solidFill>
+                        </a:rPr>
+                        <a:t>GPIO35</a:t>
+                      </a:r>
+                    </a:p>
+                  </a:txBody>
+                  <a:tcPr>
+                    <a:solidFill>
+                      <a:srgbClr val="0F3460"/>
+                    </a:solidFill>
+                    <a:lnL>
+                      <a:noFill/>
+                    </a:lnL>
+                    <a:lnR>
+                      <a:noFill/>
+                    </a:lnR>
+                    <a:lnT>
+                      <a:noFill/>
+                    </a:lnT>
+                    <a:lnB>
+                      <a:noFill/>
+                    </a:lnB>
+                  </a:tcPr>
+                </a:tc>
+                <a:tc>
+                  <a:txBody>
+                    <a:bodyPr wrap="square"/>
+                    <a:lstStyle/>
+                    <a:p>
+                      <a:pPr algn="l"/>
+                      <a:r>
+                        <a:rPr sz="1300" b="0">
+                          <a:solidFill>
+                            <a:srgbClr val="FFFFFF"/>
+                          </a:solidFill>
+                        </a:rPr>
+                        <a:t>GPIO</a:t>
+                      </a:r>
+                    </a:p>
+                  </a:txBody>
+                  <a:tcPr>
+                    <a:solidFill>
+                      <a:srgbClr val="0F3460"/>
+                    </a:solidFill>
+                    <a:lnL>
+                      <a:noFill/>
+                    </a:lnL>
+                    <a:lnR>
+                      <a:noFill/>
+                    </a:lnR>
+                    <a:lnT>
+                      <a:noFill/>
+                    </a:lnT>
+                    <a:lnB>
+                      <a:noFill/>
+                    </a:lnB>
+                  </a:tcPr>
+                </a:tc>
+                <a:tc>
+                  <a:txBody>
+                    <a:bodyPr wrap="square"/>
+                    <a:lstStyle/>
+                    <a:p>
+                      <a:pPr algn="l"/>
+                      <a:r>
+                        <a:rPr sz="1300" b="0">
+                          <a:solidFill>
+                            <a:srgbClr val="FFFFFF"/>
+                          </a:solidFill>
+                        </a:rPr>
+                        <a:t>3.3 V</a:t>
+                      </a:r>
+                    </a:p>
+                  </a:txBody>
+                  <a:tcPr>
+                    <a:solidFill>
+                      <a:srgbClr val="0F3460"/>
+                    </a:solidFill>
+                    <a:lnL>
+                      <a:noFill/>
+                    </a:lnL>
+                    <a:lnR>
+                      <a:noFill/>
+                    </a:lnR>
+                    <a:lnT>
+                      <a:noFill/>
+                    </a:lnT>
+                    <a:lnB>
+                      <a:noFill/>
+                    </a:lnB>
+                  </a:tcPr>
+                </a:tc>
+                <a:tc>
+                  <a:txBody>
+                    <a:bodyPr wrap="square"/>
+                    <a:lstStyle/>
+                    <a:p>
+                      <a:pPr algn="l"/>
+                      <a:r>
+                        <a:rPr sz="1300" b="0">
+                          <a:solidFill>
+                            <a:srgbClr val="AAAAAA"/>
+                          </a:solidFill>
+                        </a:rPr>
+                        <a:t>input-only pin, falling edge ISR</a:t>
+                      </a:r>
+                    </a:p>
+                  </a:txBody>
+                  <a:tcPr>
+                    <a:solidFill>
+                      <a:srgbClr val="0F3460"/>
+                    </a:solidFill>
+                    <a:lnL>
+                      <a:noFill/>
+                    </a:lnL>
+                    <a:lnR>
+                      <a:noFill/>
+                    </a:lnR>
+                    <a:lnT>
+                      <a:noFill/>
+                    </a:lnT>
+                    <a:lnB>
+                      <a:noFill/>
+                    </a:lnB>
+                  </a:tcPr>
+                </a:tc>
+              </a:tr>
+              <a:tr h="417810">
+                <a:tc>
+                  <a:txBody>
+                    <a:bodyPr wrap="square"/>
+                    <a:lstStyle/>
+                    <a:p>
+                      <a:pPr algn="l"/>
+                      <a:r>
+                        <a:rPr sz="1300" b="0">
+                          <a:solidFill>
+                            <a:srgbClr val="FFFFFF"/>
+                          </a:solidFill>
+                        </a:rPr>
+                        <a:t>Button — On/Off</a:t>
+                      </a:r>
+                    </a:p>
+                  </a:txBody>
+                  <a:tcPr>
+                    <a:solidFill>
+                      <a:srgbClr val="16213E"/>
+                    </a:solidFill>
+                    <a:lnL>
+                      <a:noFill/>
+                    </a:lnL>
+                    <a:lnR>
+                      <a:noFill/>
+                    </a:lnR>
+                    <a:lnT>
+                      <a:noFill/>
+                    </a:lnT>
+                    <a:lnB>
+                      <a:noFill/>
+                    </a:lnB>
+                  </a:tcPr>
+                </a:tc>
+                <a:tc>
+                  <a:txBody>
+                    <a:bodyPr wrap="square"/>
+                    <a:lstStyle/>
+                    <a:p>
+                      <a:pPr algn="l"/>
+                      <a:r>
+                        <a:rPr sz="1300" b="0">
+                          <a:solidFill>
+                            <a:srgbClr val="A8DADC"/>
+                          </a:solidFill>
+                        </a:rPr>
+                        <a:t>GPIO13</a:t>
+                      </a:r>
+                    </a:p>
+                  </a:txBody>
+                  <a:tcPr>
+                    <a:solidFill>
+                      <a:srgbClr val="16213E"/>
+                    </a:solidFill>
+                    <a:lnL>
+                      <a:noFill/>
+                    </a:lnL>
+                    <a:lnR>
+                      <a:noFill/>
+                    </a:lnR>
+                    <a:lnT>
+                      <a:noFill/>
+                    </a:lnT>
+                    <a:lnB>
+                      <a:noFill/>
+                    </a:lnB>
+                  </a:tcPr>
+                </a:tc>
+                <a:tc>
+                  <a:txBody>
+                    <a:bodyPr wrap="square"/>
+                    <a:lstStyle/>
+                    <a:p>
+                      <a:pPr algn="l"/>
+                      <a:r>
+                        <a:rPr sz="1300" b="0">
+                          <a:solidFill>
+                            <a:srgbClr val="FFFFFF"/>
+                          </a:solidFill>
+                        </a:rPr>
+                        <a:t>GPIO</a:t>
+                      </a:r>
+                    </a:p>
+                  </a:txBody>
+                  <a:tcPr>
+                    <a:solidFill>
+                      <a:srgbClr val="16213E"/>
+                    </a:solidFill>
+                    <a:lnL>
+                      <a:noFill/>
+                    </a:lnL>
+                    <a:lnR>
+                      <a:noFill/>
+                    </a:lnR>
+                    <a:lnT>
+                      <a:noFill/>
+                    </a:lnT>
+                    <a:lnB>
+                      <a:noFill/>
+                    </a:lnB>
+                  </a:tcPr>
+                </a:tc>
+                <a:tc>
+                  <a:txBody>
+                    <a:bodyPr wrap="square"/>
+                    <a:lstStyle/>
+                    <a:p>
+                      <a:pPr algn="l"/>
+                      <a:r>
+                        <a:rPr sz="1300" b="0">
+                          <a:solidFill>
+                            <a:srgbClr val="FFFFFF"/>
+                          </a:solidFill>
+                        </a:rPr>
+                        <a:t>3.3 V</a:t>
+                      </a:r>
+                    </a:p>
+                  </a:txBody>
+                  <a:tcPr>
+                    <a:solidFill>
+                      <a:srgbClr val="16213E"/>
+                    </a:solidFill>
+                    <a:lnL>
+                      <a:noFill/>
+                    </a:lnL>
+                    <a:lnR>
+                      <a:noFill/>
+                    </a:lnR>
+                    <a:lnT>
+                      <a:noFill/>
+                    </a:lnT>
+                    <a:lnB>
+                      <a:noFill/>
+                    </a:lnB>
+                  </a:tcPr>
+                </a:tc>
+                <a:tc>
+                  <a:txBody>
+                    <a:bodyPr wrap="square"/>
+                    <a:lstStyle/>
+                    <a:p>
+                      <a:pPr algn="l"/>
+                      <a:r>
+                        <a:rPr sz="1300" b="0">
+                          <a:solidFill>
+                            <a:srgbClr val="AAAAAA"/>
+                          </a:solidFill>
+                        </a:rPr>
+                        <a:t>internal pull-up, active LOW</a:t>
+                      </a:r>
+                    </a:p>
+                  </a:txBody>
+                  <a:tcPr>
+                    <a:solidFill>
+                      <a:srgbClr val="16213E"/>
+                    </a:solidFill>
+                    <a:lnL>
+                      <a:noFill/>
+                    </a:lnL>
+                    <a:lnR>
+                      <a:noFill/>
+                    </a:lnR>
+                    <a:lnT>
+                      <a:noFill/>
+                    </a:lnT>
+                    <a:lnB>
+                      <a:noFill/>
+                    </a:lnB>
+                  </a:tcPr>
+                </a:tc>
+              </a:tr>
+              <a:tr h="417810">
+                <a:tc>
+                  <a:txBody>
+                    <a:bodyPr wrap="square"/>
+                    <a:lstStyle/>
+                    <a:p>
+                      <a:pPr algn="l"/>
+                      <a:r>
+                        <a:rPr sz="1300" b="0">
+                          <a:solidFill>
+                            <a:srgbClr val="FFFFFF"/>
+                          </a:solidFill>
+                        </a:rPr>
+                        <a:t>Button — E-Stop</a:t>
+                      </a:r>
+                    </a:p>
+                  </a:txBody>
+                  <a:tcPr>
+                    <a:solidFill>
+                      <a:srgbClr val="0F3460"/>
+                    </a:solidFill>
+                    <a:lnL>
+                      <a:noFill/>
+                    </a:lnL>
+                    <a:lnR>
+                      <a:noFill/>
+                    </a:lnR>
+                    <a:lnT>
+                      <a:noFill/>
+                    </a:lnT>
+                    <a:lnB>
+                      <a:noFill/>
+                    </a:lnB>
+                  </a:tcPr>
+                </a:tc>
+                <a:tc>
+                  <a:txBody>
+                    <a:bodyPr wrap="square"/>
+                    <a:lstStyle/>
+                    <a:p>
+                      <a:pPr algn="l"/>
+                      <a:r>
+                        <a:rPr sz="1300" b="0">
+                          <a:solidFill>
+                            <a:srgbClr val="A8DADC"/>
+                          </a:solidFill>
+                        </a:rPr>
+                        <a:t>GPIO14</a:t>
+                      </a:r>
+                    </a:p>
+                  </a:txBody>
+                  <a:tcPr>
+                    <a:solidFill>
+                      <a:srgbClr val="0F3460"/>
+                    </a:solidFill>
+                    <a:lnL>
+                      <a:noFill/>
+                    </a:lnL>
+                    <a:lnR>
+                      <a:noFill/>
+                    </a:lnR>
+                    <a:lnT>
+                      <a:noFill/>
+                    </a:lnT>
+                    <a:lnB>
+                      <a:noFill/>
+                    </a:lnB>
+                  </a:tcPr>
+                </a:tc>
+                <a:tc>
+                  <a:txBody>
+                    <a:bodyPr wrap="square"/>
+                    <a:lstStyle/>
+                    <a:p>
+                      <a:pPr algn="l"/>
+                      <a:r>
+                        <a:rPr sz="1300" b="0">
+                          <a:solidFill>
+                            <a:srgbClr val="FFFFFF"/>
+                          </a:solidFill>
+                        </a:rPr>
+                        <a:t>GPIO</a:t>
+                      </a:r>
+                    </a:p>
+                  </a:txBody>
+                  <a:tcPr>
+                    <a:solidFill>
+                      <a:srgbClr val="0F3460"/>
+                    </a:solidFill>
+                    <a:lnL>
+                      <a:noFill/>
+                    </a:lnL>
+                    <a:lnR>
+                      <a:noFill/>
+                    </a:lnR>
+                    <a:lnT>
+                      <a:noFill/>
+                    </a:lnT>
+                    <a:lnB>
+                      <a:noFill/>
+                    </a:lnB>
+                  </a:tcPr>
+                </a:tc>
+                <a:tc>
+                  <a:txBody>
+                    <a:bodyPr wrap="square"/>
+                    <a:lstStyle/>
+                    <a:p>
+                      <a:pPr algn="l"/>
+                      <a:r>
+                        <a:rPr sz="1300" b="0">
+                          <a:solidFill>
+                            <a:srgbClr val="FFFFFF"/>
+                          </a:solidFill>
+                        </a:rPr>
+                        <a:t>3.3 V</a:t>
+                      </a:r>
+                    </a:p>
+                  </a:txBody>
+                  <a:tcPr>
+                    <a:solidFill>
+                      <a:srgbClr val="0F3460"/>
+                    </a:solidFill>
+                    <a:lnL>
+                      <a:noFill/>
+                    </a:lnL>
+                    <a:lnR>
+                      <a:noFill/>
+                    </a:lnR>
+                    <a:lnT>
+                      <a:noFill/>
+                    </a:lnT>
+                    <a:lnB>
+                      <a:noFill/>
+                    </a:lnB>
+                  </a:tcPr>
+                </a:tc>
+                <a:tc>
+                  <a:txBody>
+                    <a:bodyPr wrap="square"/>
+                    <a:lstStyle/>
+                    <a:p>
+                      <a:pPr algn="l"/>
+                      <a:r>
+                        <a:rPr sz="1300" b="0">
+                          <a:solidFill>
+                            <a:srgbClr val="AAAAAA"/>
+                          </a:solidFill>
+                        </a:rPr>
+                        <a:t>internal pull-up, active LOW</a:t>
+                      </a:r>
+                    </a:p>
+                  </a:txBody>
+                  <a:tcPr>
+                    <a:solidFill>
+                      <a:srgbClr val="0F3460"/>
+                    </a:solidFill>
+                    <a:lnL>
+                      <a:noFill/>
+                    </a:lnL>
+                    <a:lnR>
+                      <a:noFill/>
+                    </a:lnR>
+                    <a:lnT>
+                      <a:noFill/>
+                    </a:lnT>
+                    <a:lnB>
+                      <a:noFill/>
+                    </a:lnB>
+                  </a:tcPr>
+                </a:tc>
+              </a:tr>
+            </a:tbl>
+          </a:graphicData>
+        </a:graphic>
+      </p:graphicFrame>
+    </p:spTree>
+  </p:cSld>
+  <p:clrMapOvr>
+    <a:masterClrMapping/>
+  </p:clrMapOvr>
+</p:sld>
+</file>
+
 <file path=ppt/slides/slide2.xml><?xml version="1.0" encoding="utf-8"?>
 <p:sld xmlns:a="http://schemas.openxmlformats.org/drawingml/2006/main" xmlns:p="http://schemas.openxmlformats.org/presentationml/2006/main" xmlns:r="http://schemas.openxmlformats.org/officeDocument/2006/relationships">
   <p:cSld>
@@ -14409,5396 +16985,6 @@
                 </a:solidFill>
               </a:rPr>
               <a:t>• Fuse the AC circuit (5–10A slow blow)</a:t>
-            </a:r>
-          </a:p>
-        </p:txBody>
-      </p:sp>
-      <p:sp>
-        <p:nvSpPr>
-          <p:cNvPr id="48" name="Rectangle 47"/>
-          <p:cNvSpPr/>
-          <p:nvPr/>
-        </p:nvSpPr>
-        <p:spPr>
-          <a:xfrm>
-            <a:off x="274320" y="4892040"/>
-            <a:ext cx="2560868" cy="256032"/>
-          </a:xfrm>
-          <a:prstGeom prst="rect">
-            <a:avLst/>
-          </a:prstGeom>
-          <a:solidFill>
-            <a:srgbClr val="E94560"/>
-          </a:solidFill>
-          <a:ln>
-            <a:noFill/>
-          </a:ln>
-        </p:spPr>
-        <p:style>
-          <a:lnRef idx="1">
-            <a:schemeClr val="accent1"/>
-          </a:lnRef>
-          <a:fillRef idx="3">
-            <a:schemeClr val="accent1"/>
-          </a:fillRef>
-          <a:effectRef idx="2">
-            <a:schemeClr val="accent1"/>
-          </a:effectRef>
-          <a:fontRef idx="minor">
-            <a:schemeClr val="lt1"/>
-          </a:fontRef>
-        </p:style>
-        <p:txBody>
-          <a:bodyPr rtlCol="0" anchor="ctr"/>
-          <a:lstStyle/>
-          <a:p>
-            <a:pPr algn="ctr"/>
-          </a:p>
-        </p:txBody>
-      </p:sp>
-      <p:sp>
-        <p:nvSpPr>
-          <p:cNvPr id="49" name="TextBox 48"/>
-          <p:cNvSpPr txBox="1"/>
-          <p:nvPr/>
-        </p:nvSpPr>
-        <p:spPr>
-          <a:xfrm>
-            <a:off x="310896" y="4910328"/>
-            <a:ext cx="2560868" cy="219456"/>
-          </a:xfrm>
-          <a:prstGeom prst="rect">
-            <a:avLst/>
-          </a:prstGeom>
-          <a:noFill/>
-        </p:spPr>
-        <p:txBody>
-          <a:bodyPr wrap="square">
-            <a:spAutoFit/>
-          </a:bodyPr>
-          <a:lstStyle/>
-          <a:p>
-            <a:pPr algn="l"/>
-            <a:r>
-              <a:rPr sz="1100" b="1">
-                <a:solidFill>
-                  <a:srgbClr val="FFFFFF"/>
-                </a:solidFill>
-              </a:rPr>
-              <a:t>Component</a:t>
-            </a:r>
-          </a:p>
-        </p:txBody>
-      </p:sp>
-      <p:sp>
-        <p:nvSpPr>
-          <p:cNvPr id="50" name="Rectangle 49"/>
-          <p:cNvSpPr/>
-          <p:nvPr/>
-        </p:nvSpPr>
-        <p:spPr>
-          <a:xfrm>
-            <a:off x="2835188" y="4892040"/>
-            <a:ext cx="1164031" cy="256032"/>
-          </a:xfrm>
-          <a:prstGeom prst="rect">
-            <a:avLst/>
-          </a:prstGeom>
-          <a:solidFill>
-            <a:srgbClr val="E94560"/>
-          </a:solidFill>
-          <a:ln>
-            <a:noFill/>
-          </a:ln>
-        </p:spPr>
-        <p:style>
-          <a:lnRef idx="1">
-            <a:schemeClr val="accent1"/>
-          </a:lnRef>
-          <a:fillRef idx="3">
-            <a:schemeClr val="accent1"/>
-          </a:fillRef>
-          <a:effectRef idx="2">
-            <a:schemeClr val="accent1"/>
-          </a:effectRef>
-          <a:fontRef idx="minor">
-            <a:schemeClr val="lt1"/>
-          </a:fontRef>
-        </p:style>
-        <p:txBody>
-          <a:bodyPr rtlCol="0" anchor="ctr"/>
-          <a:lstStyle/>
-          <a:p>
-            <a:pPr algn="ctr"/>
-          </a:p>
-        </p:txBody>
-      </p:sp>
-      <p:sp>
-        <p:nvSpPr>
-          <p:cNvPr id="51" name="TextBox 50"/>
-          <p:cNvSpPr txBox="1"/>
-          <p:nvPr/>
-        </p:nvSpPr>
-        <p:spPr>
-          <a:xfrm>
-            <a:off x="2871764" y="4910328"/>
-            <a:ext cx="1164031" cy="219456"/>
-          </a:xfrm>
-          <a:prstGeom prst="rect">
-            <a:avLst/>
-          </a:prstGeom>
-          <a:noFill/>
-        </p:spPr>
-        <p:txBody>
-          <a:bodyPr wrap="square">
-            <a:spAutoFit/>
-          </a:bodyPr>
-          <a:lstStyle/>
-          <a:p>
-            <a:pPr algn="l"/>
-            <a:r>
-              <a:rPr sz="1100" b="1">
-                <a:solidFill>
-                  <a:srgbClr val="FFFFFF"/>
-                </a:solidFill>
-              </a:rPr>
-              <a:t>GPIO</a:t>
-            </a:r>
-          </a:p>
-        </p:txBody>
-      </p:sp>
-      <p:sp>
-        <p:nvSpPr>
-          <p:cNvPr id="52" name="Rectangle 51"/>
-          <p:cNvSpPr/>
-          <p:nvPr/>
-        </p:nvSpPr>
-        <p:spPr>
-          <a:xfrm>
-            <a:off x="3999219" y="4892040"/>
-            <a:ext cx="1164031" cy="256032"/>
-          </a:xfrm>
-          <a:prstGeom prst="rect">
-            <a:avLst/>
-          </a:prstGeom>
-          <a:solidFill>
-            <a:srgbClr val="E94560"/>
-          </a:solidFill>
-          <a:ln>
-            <a:noFill/>
-          </a:ln>
-        </p:spPr>
-        <p:style>
-          <a:lnRef idx="1">
-            <a:schemeClr val="accent1"/>
-          </a:lnRef>
-          <a:fillRef idx="3">
-            <a:schemeClr val="accent1"/>
-          </a:fillRef>
-          <a:effectRef idx="2">
-            <a:schemeClr val="accent1"/>
-          </a:effectRef>
-          <a:fontRef idx="minor">
-            <a:schemeClr val="lt1"/>
-          </a:fontRef>
-        </p:style>
-        <p:txBody>
-          <a:bodyPr rtlCol="0" anchor="ctr"/>
-          <a:lstStyle/>
-          <a:p>
-            <a:pPr algn="ctr"/>
-          </a:p>
-        </p:txBody>
-      </p:sp>
-      <p:sp>
-        <p:nvSpPr>
-          <p:cNvPr id="53" name="TextBox 52"/>
-          <p:cNvSpPr txBox="1"/>
-          <p:nvPr/>
-        </p:nvSpPr>
-        <p:spPr>
-          <a:xfrm>
-            <a:off x="4035795" y="4910328"/>
-            <a:ext cx="1164031" cy="219456"/>
-          </a:xfrm>
-          <a:prstGeom prst="rect">
-            <a:avLst/>
-          </a:prstGeom>
-          <a:noFill/>
-        </p:spPr>
-        <p:txBody>
-          <a:bodyPr wrap="square">
-            <a:spAutoFit/>
-          </a:bodyPr>
-          <a:lstStyle/>
-          <a:p>
-            <a:pPr algn="l"/>
-            <a:r>
-              <a:rPr sz="1100" b="1">
-                <a:solidFill>
-                  <a:srgbClr val="FFFFFF"/>
-                </a:solidFill>
-              </a:rPr>
-              <a:t>Protocol</a:t>
-            </a:r>
-          </a:p>
-        </p:txBody>
-      </p:sp>
-      <p:sp>
-        <p:nvSpPr>
-          <p:cNvPr id="54" name="Rectangle 53"/>
-          <p:cNvSpPr/>
-          <p:nvPr/>
-        </p:nvSpPr>
-        <p:spPr>
-          <a:xfrm>
-            <a:off x="5163250" y="4892040"/>
-            <a:ext cx="1164031" cy="256032"/>
-          </a:xfrm>
-          <a:prstGeom prst="rect">
-            <a:avLst/>
-          </a:prstGeom>
-          <a:solidFill>
-            <a:srgbClr val="E94560"/>
-          </a:solidFill>
-          <a:ln>
-            <a:noFill/>
-          </a:ln>
-        </p:spPr>
-        <p:style>
-          <a:lnRef idx="1">
-            <a:schemeClr val="accent1"/>
-          </a:lnRef>
-          <a:fillRef idx="3">
-            <a:schemeClr val="accent1"/>
-          </a:fillRef>
-          <a:effectRef idx="2">
-            <a:schemeClr val="accent1"/>
-          </a:effectRef>
-          <a:fontRef idx="minor">
-            <a:schemeClr val="lt1"/>
-          </a:fontRef>
-        </p:style>
-        <p:txBody>
-          <a:bodyPr rtlCol="0" anchor="ctr"/>
-          <a:lstStyle/>
-          <a:p>
-            <a:pPr algn="ctr"/>
-          </a:p>
-        </p:txBody>
-      </p:sp>
-      <p:sp>
-        <p:nvSpPr>
-          <p:cNvPr id="55" name="TextBox 54"/>
-          <p:cNvSpPr txBox="1"/>
-          <p:nvPr/>
-        </p:nvSpPr>
-        <p:spPr>
-          <a:xfrm>
-            <a:off x="5199826" y="4910328"/>
-            <a:ext cx="1164031" cy="219456"/>
-          </a:xfrm>
-          <a:prstGeom prst="rect">
-            <a:avLst/>
-          </a:prstGeom>
-          <a:noFill/>
-        </p:spPr>
-        <p:txBody>
-          <a:bodyPr wrap="square">
-            <a:spAutoFit/>
-          </a:bodyPr>
-          <a:lstStyle/>
-          <a:p>
-            <a:pPr algn="l"/>
-            <a:r>
-              <a:rPr sz="1100" b="1">
-                <a:solidFill>
-                  <a:srgbClr val="FFFFFF"/>
-                </a:solidFill>
-              </a:rPr>
-              <a:t>Voltage</a:t>
-            </a:r>
-          </a:p>
-        </p:txBody>
-      </p:sp>
-      <p:sp>
-        <p:nvSpPr>
-          <p:cNvPr id="56" name="Rectangle 55"/>
-          <p:cNvSpPr/>
-          <p:nvPr/>
-        </p:nvSpPr>
-        <p:spPr>
-          <a:xfrm>
-            <a:off x="6327281" y="4892040"/>
-            <a:ext cx="5587349" cy="256032"/>
-          </a:xfrm>
-          <a:prstGeom prst="rect">
-            <a:avLst/>
-          </a:prstGeom>
-          <a:solidFill>
-            <a:srgbClr val="E94560"/>
-          </a:solidFill>
-          <a:ln>
-            <a:noFill/>
-          </a:ln>
-        </p:spPr>
-        <p:style>
-          <a:lnRef idx="1">
-            <a:schemeClr val="accent1"/>
-          </a:lnRef>
-          <a:fillRef idx="3">
-            <a:schemeClr val="accent1"/>
-          </a:fillRef>
-          <a:effectRef idx="2">
-            <a:schemeClr val="accent1"/>
-          </a:effectRef>
-          <a:fontRef idx="minor">
-            <a:schemeClr val="lt1"/>
-          </a:fontRef>
-        </p:style>
-        <p:txBody>
-          <a:bodyPr rtlCol="0" anchor="ctr"/>
-          <a:lstStyle/>
-          <a:p>
-            <a:pPr algn="ctr"/>
-          </a:p>
-        </p:txBody>
-      </p:sp>
-      <p:sp>
-        <p:nvSpPr>
-          <p:cNvPr id="57" name="TextBox 56"/>
-          <p:cNvSpPr txBox="1"/>
-          <p:nvPr/>
-        </p:nvSpPr>
-        <p:spPr>
-          <a:xfrm>
-            <a:off x="6363857" y="4910328"/>
-            <a:ext cx="5587349" cy="219456"/>
-          </a:xfrm>
-          <a:prstGeom prst="rect">
-            <a:avLst/>
-          </a:prstGeom>
-          <a:noFill/>
-        </p:spPr>
-        <p:txBody>
-          <a:bodyPr wrap="square">
-            <a:spAutoFit/>
-          </a:bodyPr>
-          <a:lstStyle/>
-          <a:p>
-            <a:pPr algn="l"/>
-            <a:r>
-              <a:rPr sz="1100" b="1">
-                <a:solidFill>
-                  <a:srgbClr val="FFFFFF"/>
-                </a:solidFill>
-              </a:rPr>
-              <a:t>Notes</a:t>
-            </a:r>
-          </a:p>
-        </p:txBody>
-      </p:sp>
-      <p:sp>
-        <p:nvSpPr>
-          <p:cNvPr id="58" name="Rectangle 57"/>
-          <p:cNvSpPr/>
-          <p:nvPr/>
-        </p:nvSpPr>
-        <p:spPr>
-          <a:xfrm>
-            <a:off x="274320" y="5148072"/>
-            <a:ext cx="2560868" cy="121615"/>
-          </a:xfrm>
-          <a:prstGeom prst="rect">
-            <a:avLst/>
-          </a:prstGeom>
-          <a:solidFill>
-            <a:srgbClr val="0F3460"/>
-          </a:solidFill>
-          <a:ln>
-            <a:noFill/>
-          </a:ln>
-        </p:spPr>
-        <p:style>
-          <a:lnRef idx="1">
-            <a:schemeClr val="accent1"/>
-          </a:lnRef>
-          <a:fillRef idx="3">
-            <a:schemeClr val="accent1"/>
-          </a:fillRef>
-          <a:effectRef idx="2">
-            <a:schemeClr val="accent1"/>
-          </a:effectRef>
-          <a:fontRef idx="minor">
-            <a:schemeClr val="lt1"/>
-          </a:fontRef>
-        </p:style>
-        <p:txBody>
-          <a:bodyPr rtlCol="0" anchor="ctr"/>
-          <a:lstStyle/>
-          <a:p>
-            <a:pPr algn="ctr"/>
-          </a:p>
-        </p:txBody>
-      </p:sp>
-      <p:sp>
-        <p:nvSpPr>
-          <p:cNvPr id="59" name="TextBox 58"/>
-          <p:cNvSpPr txBox="1"/>
-          <p:nvPr/>
-        </p:nvSpPr>
-        <p:spPr>
-          <a:xfrm>
-            <a:off x="310896" y="5148072"/>
-            <a:ext cx="2560868" cy="121615"/>
-          </a:xfrm>
-          <a:prstGeom prst="rect">
-            <a:avLst/>
-          </a:prstGeom>
-          <a:noFill/>
-        </p:spPr>
-        <p:txBody>
-          <a:bodyPr wrap="square">
-            <a:spAutoFit/>
-          </a:bodyPr>
-          <a:lstStyle/>
-          <a:p>
-            <a:pPr algn="l"/>
-            <a:r>
-              <a:rPr sz="1000" b="0">
-                <a:solidFill>
-                  <a:srgbClr val="FFFFFF"/>
-                </a:solidFill>
-              </a:rPr>
-              <a:t>SH1106 OLED SDA</a:t>
-            </a:r>
-          </a:p>
-        </p:txBody>
-      </p:sp>
-      <p:sp>
-        <p:nvSpPr>
-          <p:cNvPr id="60" name="Rectangle 59"/>
-          <p:cNvSpPr/>
-          <p:nvPr/>
-        </p:nvSpPr>
-        <p:spPr>
-          <a:xfrm>
-            <a:off x="2835188" y="5148072"/>
-            <a:ext cx="1164031" cy="121615"/>
-          </a:xfrm>
-          <a:prstGeom prst="rect">
-            <a:avLst/>
-          </a:prstGeom>
-          <a:solidFill>
-            <a:srgbClr val="0F3460"/>
-          </a:solidFill>
-          <a:ln>
-            <a:noFill/>
-          </a:ln>
-        </p:spPr>
-        <p:style>
-          <a:lnRef idx="1">
-            <a:schemeClr val="accent1"/>
-          </a:lnRef>
-          <a:fillRef idx="3">
-            <a:schemeClr val="accent1"/>
-          </a:fillRef>
-          <a:effectRef idx="2">
-            <a:schemeClr val="accent1"/>
-          </a:effectRef>
-          <a:fontRef idx="minor">
-            <a:schemeClr val="lt1"/>
-          </a:fontRef>
-        </p:style>
-        <p:txBody>
-          <a:bodyPr rtlCol="0" anchor="ctr"/>
-          <a:lstStyle/>
-          <a:p>
-            <a:pPr algn="ctr"/>
-          </a:p>
-        </p:txBody>
-      </p:sp>
-      <p:sp>
-        <p:nvSpPr>
-          <p:cNvPr id="61" name="TextBox 60"/>
-          <p:cNvSpPr txBox="1"/>
-          <p:nvPr/>
-        </p:nvSpPr>
-        <p:spPr>
-          <a:xfrm>
-            <a:off x="2871764" y="5148072"/>
-            <a:ext cx="1164031" cy="121615"/>
-          </a:xfrm>
-          <a:prstGeom prst="rect">
-            <a:avLst/>
-          </a:prstGeom>
-          <a:noFill/>
-        </p:spPr>
-        <p:txBody>
-          <a:bodyPr wrap="square">
-            <a:spAutoFit/>
-          </a:bodyPr>
-          <a:lstStyle/>
-          <a:p>
-            <a:pPr algn="l"/>
-            <a:r>
-              <a:rPr sz="1000" b="0">
-                <a:solidFill>
-                  <a:srgbClr val="A8DADC"/>
-                </a:solidFill>
-              </a:rPr>
-              <a:t>GPIO21</a:t>
-            </a:r>
-          </a:p>
-        </p:txBody>
-      </p:sp>
-      <p:sp>
-        <p:nvSpPr>
-          <p:cNvPr id="62" name="Rectangle 61"/>
-          <p:cNvSpPr/>
-          <p:nvPr/>
-        </p:nvSpPr>
-        <p:spPr>
-          <a:xfrm>
-            <a:off x="3999219" y="5148072"/>
-            <a:ext cx="1164031" cy="121615"/>
-          </a:xfrm>
-          <a:prstGeom prst="rect">
-            <a:avLst/>
-          </a:prstGeom>
-          <a:solidFill>
-            <a:srgbClr val="0F3460"/>
-          </a:solidFill>
-          <a:ln>
-            <a:noFill/>
-          </a:ln>
-        </p:spPr>
-        <p:style>
-          <a:lnRef idx="1">
-            <a:schemeClr val="accent1"/>
-          </a:lnRef>
-          <a:fillRef idx="3">
-            <a:schemeClr val="accent1"/>
-          </a:fillRef>
-          <a:effectRef idx="2">
-            <a:schemeClr val="accent1"/>
-          </a:effectRef>
-          <a:fontRef idx="minor">
-            <a:schemeClr val="lt1"/>
-          </a:fontRef>
-        </p:style>
-        <p:txBody>
-          <a:bodyPr rtlCol="0" anchor="ctr"/>
-          <a:lstStyle/>
-          <a:p>
-            <a:pPr algn="ctr"/>
-          </a:p>
-        </p:txBody>
-      </p:sp>
-      <p:sp>
-        <p:nvSpPr>
-          <p:cNvPr id="63" name="TextBox 62"/>
-          <p:cNvSpPr txBox="1"/>
-          <p:nvPr/>
-        </p:nvSpPr>
-        <p:spPr>
-          <a:xfrm>
-            <a:off x="4035795" y="5148072"/>
-            <a:ext cx="1164031" cy="121615"/>
-          </a:xfrm>
-          <a:prstGeom prst="rect">
-            <a:avLst/>
-          </a:prstGeom>
-          <a:noFill/>
-        </p:spPr>
-        <p:txBody>
-          <a:bodyPr wrap="square">
-            <a:spAutoFit/>
-          </a:bodyPr>
-          <a:lstStyle/>
-          <a:p>
-            <a:pPr algn="l"/>
-            <a:r>
-              <a:rPr sz="1000" b="0">
-                <a:solidFill>
-                  <a:srgbClr val="FFFFFF"/>
-                </a:solidFill>
-              </a:rPr>
-              <a:t>I2C</a:t>
-            </a:r>
-          </a:p>
-        </p:txBody>
-      </p:sp>
-      <p:sp>
-        <p:nvSpPr>
-          <p:cNvPr id="64" name="Rectangle 63"/>
-          <p:cNvSpPr/>
-          <p:nvPr/>
-        </p:nvSpPr>
-        <p:spPr>
-          <a:xfrm>
-            <a:off x="5163250" y="5148072"/>
-            <a:ext cx="1164031" cy="121615"/>
-          </a:xfrm>
-          <a:prstGeom prst="rect">
-            <a:avLst/>
-          </a:prstGeom>
-          <a:solidFill>
-            <a:srgbClr val="0F3460"/>
-          </a:solidFill>
-          <a:ln>
-            <a:noFill/>
-          </a:ln>
-        </p:spPr>
-        <p:style>
-          <a:lnRef idx="1">
-            <a:schemeClr val="accent1"/>
-          </a:lnRef>
-          <a:fillRef idx="3">
-            <a:schemeClr val="accent1"/>
-          </a:fillRef>
-          <a:effectRef idx="2">
-            <a:schemeClr val="accent1"/>
-          </a:effectRef>
-          <a:fontRef idx="minor">
-            <a:schemeClr val="lt1"/>
-          </a:fontRef>
-        </p:style>
-        <p:txBody>
-          <a:bodyPr rtlCol="0" anchor="ctr"/>
-          <a:lstStyle/>
-          <a:p>
-            <a:pPr algn="ctr"/>
-          </a:p>
-        </p:txBody>
-      </p:sp>
-      <p:sp>
-        <p:nvSpPr>
-          <p:cNvPr id="65" name="TextBox 64"/>
-          <p:cNvSpPr txBox="1"/>
-          <p:nvPr/>
-        </p:nvSpPr>
-        <p:spPr>
-          <a:xfrm>
-            <a:off x="5199826" y="5148072"/>
-            <a:ext cx="1164031" cy="121615"/>
-          </a:xfrm>
-          <a:prstGeom prst="rect">
-            <a:avLst/>
-          </a:prstGeom>
-          <a:noFill/>
-        </p:spPr>
-        <p:txBody>
-          <a:bodyPr wrap="square">
-            <a:spAutoFit/>
-          </a:bodyPr>
-          <a:lstStyle/>
-          <a:p>
-            <a:pPr algn="l"/>
-            <a:r>
-              <a:rPr sz="1000" b="0">
-                <a:solidFill>
-                  <a:srgbClr val="FFFFFF"/>
-                </a:solidFill>
-              </a:rPr>
-              <a:t>3.3V</a:t>
-            </a:r>
-          </a:p>
-        </p:txBody>
-      </p:sp>
-      <p:sp>
-        <p:nvSpPr>
-          <p:cNvPr id="66" name="Rectangle 65"/>
-          <p:cNvSpPr/>
-          <p:nvPr/>
-        </p:nvSpPr>
-        <p:spPr>
-          <a:xfrm>
-            <a:off x="6327281" y="5148072"/>
-            <a:ext cx="5587349" cy="121615"/>
-          </a:xfrm>
-          <a:prstGeom prst="rect">
-            <a:avLst/>
-          </a:prstGeom>
-          <a:solidFill>
-            <a:srgbClr val="0F3460"/>
-          </a:solidFill>
-          <a:ln>
-            <a:noFill/>
-          </a:ln>
-        </p:spPr>
-        <p:style>
-          <a:lnRef idx="1">
-            <a:schemeClr val="accent1"/>
-          </a:lnRef>
-          <a:fillRef idx="3">
-            <a:schemeClr val="accent1"/>
-          </a:fillRef>
-          <a:effectRef idx="2">
-            <a:schemeClr val="accent1"/>
-          </a:effectRef>
-          <a:fontRef idx="minor">
-            <a:schemeClr val="lt1"/>
-          </a:fontRef>
-        </p:style>
-        <p:txBody>
-          <a:bodyPr rtlCol="0" anchor="ctr"/>
-          <a:lstStyle/>
-          <a:p>
-            <a:pPr algn="ctr"/>
-          </a:p>
-        </p:txBody>
-      </p:sp>
-      <p:sp>
-        <p:nvSpPr>
-          <p:cNvPr id="67" name="TextBox 66"/>
-          <p:cNvSpPr txBox="1"/>
-          <p:nvPr/>
-        </p:nvSpPr>
-        <p:spPr>
-          <a:xfrm>
-            <a:off x="6363857" y="5148072"/>
-            <a:ext cx="5587349" cy="121615"/>
-          </a:xfrm>
-          <a:prstGeom prst="rect">
-            <a:avLst/>
-          </a:prstGeom>
-          <a:noFill/>
-        </p:spPr>
-        <p:txBody>
-          <a:bodyPr wrap="square">
-            <a:spAutoFit/>
-          </a:bodyPr>
-          <a:lstStyle/>
-          <a:p>
-            <a:pPr algn="l"/>
-            <a:r>
-              <a:rPr sz="1000" b="0">
-                <a:solidFill>
-                  <a:srgbClr val="AAAAAA"/>
-                </a:solidFill>
-              </a:rPr>
-              <a:t>addr 0x3C</a:t>
-            </a:r>
-          </a:p>
-        </p:txBody>
-      </p:sp>
-      <p:sp>
-        <p:nvSpPr>
-          <p:cNvPr id="68" name="Rectangle 67"/>
-          <p:cNvSpPr/>
-          <p:nvPr/>
-        </p:nvSpPr>
-        <p:spPr>
-          <a:xfrm>
-            <a:off x="274320" y="5269687"/>
-            <a:ext cx="2560868" cy="121615"/>
-          </a:xfrm>
-          <a:prstGeom prst="rect">
-            <a:avLst/>
-          </a:prstGeom>
-          <a:solidFill>
-            <a:srgbClr val="16213E"/>
-          </a:solidFill>
-          <a:ln>
-            <a:noFill/>
-          </a:ln>
-        </p:spPr>
-        <p:style>
-          <a:lnRef idx="1">
-            <a:schemeClr val="accent1"/>
-          </a:lnRef>
-          <a:fillRef idx="3">
-            <a:schemeClr val="accent1"/>
-          </a:fillRef>
-          <a:effectRef idx="2">
-            <a:schemeClr val="accent1"/>
-          </a:effectRef>
-          <a:fontRef idx="minor">
-            <a:schemeClr val="lt1"/>
-          </a:fontRef>
-        </p:style>
-        <p:txBody>
-          <a:bodyPr rtlCol="0" anchor="ctr"/>
-          <a:lstStyle/>
-          <a:p>
-            <a:pPr algn="ctr"/>
-          </a:p>
-        </p:txBody>
-      </p:sp>
-      <p:sp>
-        <p:nvSpPr>
-          <p:cNvPr id="69" name="TextBox 68"/>
-          <p:cNvSpPr txBox="1"/>
-          <p:nvPr/>
-        </p:nvSpPr>
-        <p:spPr>
-          <a:xfrm>
-            <a:off x="310896" y="5269687"/>
-            <a:ext cx="2560868" cy="121615"/>
-          </a:xfrm>
-          <a:prstGeom prst="rect">
-            <a:avLst/>
-          </a:prstGeom>
-          <a:noFill/>
-        </p:spPr>
-        <p:txBody>
-          <a:bodyPr wrap="square">
-            <a:spAutoFit/>
-          </a:bodyPr>
-          <a:lstStyle/>
-          <a:p>
-            <a:pPr algn="l"/>
-            <a:r>
-              <a:rPr sz="1000" b="0">
-                <a:solidFill>
-                  <a:srgbClr val="FFFFFF"/>
-                </a:solidFill>
-              </a:rPr>
-              <a:t>SH1106 OLED SCL</a:t>
-            </a:r>
-          </a:p>
-        </p:txBody>
-      </p:sp>
-      <p:sp>
-        <p:nvSpPr>
-          <p:cNvPr id="70" name="Rectangle 69"/>
-          <p:cNvSpPr/>
-          <p:nvPr/>
-        </p:nvSpPr>
-        <p:spPr>
-          <a:xfrm>
-            <a:off x="2835188" y="5269687"/>
-            <a:ext cx="1164031" cy="121615"/>
-          </a:xfrm>
-          <a:prstGeom prst="rect">
-            <a:avLst/>
-          </a:prstGeom>
-          <a:solidFill>
-            <a:srgbClr val="16213E"/>
-          </a:solidFill>
-          <a:ln>
-            <a:noFill/>
-          </a:ln>
-        </p:spPr>
-        <p:style>
-          <a:lnRef idx="1">
-            <a:schemeClr val="accent1"/>
-          </a:lnRef>
-          <a:fillRef idx="3">
-            <a:schemeClr val="accent1"/>
-          </a:fillRef>
-          <a:effectRef idx="2">
-            <a:schemeClr val="accent1"/>
-          </a:effectRef>
-          <a:fontRef idx="minor">
-            <a:schemeClr val="lt1"/>
-          </a:fontRef>
-        </p:style>
-        <p:txBody>
-          <a:bodyPr rtlCol="0" anchor="ctr"/>
-          <a:lstStyle/>
-          <a:p>
-            <a:pPr algn="ctr"/>
-          </a:p>
-        </p:txBody>
-      </p:sp>
-      <p:sp>
-        <p:nvSpPr>
-          <p:cNvPr id="71" name="TextBox 70"/>
-          <p:cNvSpPr txBox="1"/>
-          <p:nvPr/>
-        </p:nvSpPr>
-        <p:spPr>
-          <a:xfrm>
-            <a:off x="2871764" y="5269687"/>
-            <a:ext cx="1164031" cy="121615"/>
-          </a:xfrm>
-          <a:prstGeom prst="rect">
-            <a:avLst/>
-          </a:prstGeom>
-          <a:noFill/>
-        </p:spPr>
-        <p:txBody>
-          <a:bodyPr wrap="square">
-            <a:spAutoFit/>
-          </a:bodyPr>
-          <a:lstStyle/>
-          <a:p>
-            <a:pPr algn="l"/>
-            <a:r>
-              <a:rPr sz="1000" b="0">
-                <a:solidFill>
-                  <a:srgbClr val="A8DADC"/>
-                </a:solidFill>
-              </a:rPr>
-              <a:t>GPIO22</a:t>
-            </a:r>
-          </a:p>
-        </p:txBody>
-      </p:sp>
-      <p:sp>
-        <p:nvSpPr>
-          <p:cNvPr id="72" name="Rectangle 71"/>
-          <p:cNvSpPr/>
-          <p:nvPr/>
-        </p:nvSpPr>
-        <p:spPr>
-          <a:xfrm>
-            <a:off x="3999219" y="5269687"/>
-            <a:ext cx="1164031" cy="121615"/>
-          </a:xfrm>
-          <a:prstGeom prst="rect">
-            <a:avLst/>
-          </a:prstGeom>
-          <a:solidFill>
-            <a:srgbClr val="16213E"/>
-          </a:solidFill>
-          <a:ln>
-            <a:noFill/>
-          </a:ln>
-        </p:spPr>
-        <p:style>
-          <a:lnRef idx="1">
-            <a:schemeClr val="accent1"/>
-          </a:lnRef>
-          <a:fillRef idx="3">
-            <a:schemeClr val="accent1"/>
-          </a:fillRef>
-          <a:effectRef idx="2">
-            <a:schemeClr val="accent1"/>
-          </a:effectRef>
-          <a:fontRef idx="minor">
-            <a:schemeClr val="lt1"/>
-          </a:fontRef>
-        </p:style>
-        <p:txBody>
-          <a:bodyPr rtlCol="0" anchor="ctr"/>
-          <a:lstStyle/>
-          <a:p>
-            <a:pPr algn="ctr"/>
-          </a:p>
-        </p:txBody>
-      </p:sp>
-      <p:sp>
-        <p:nvSpPr>
-          <p:cNvPr id="73" name="TextBox 72"/>
-          <p:cNvSpPr txBox="1"/>
-          <p:nvPr/>
-        </p:nvSpPr>
-        <p:spPr>
-          <a:xfrm>
-            <a:off x="4035795" y="5269687"/>
-            <a:ext cx="1164031" cy="121615"/>
-          </a:xfrm>
-          <a:prstGeom prst="rect">
-            <a:avLst/>
-          </a:prstGeom>
-          <a:noFill/>
-        </p:spPr>
-        <p:txBody>
-          <a:bodyPr wrap="square">
-            <a:spAutoFit/>
-          </a:bodyPr>
-          <a:lstStyle/>
-          <a:p>
-            <a:pPr algn="l"/>
-            <a:r>
-              <a:rPr sz="1000" b="0">
-                <a:solidFill>
-                  <a:srgbClr val="FFFFFF"/>
-                </a:solidFill>
-              </a:rPr>
-              <a:t>I2C</a:t>
-            </a:r>
-          </a:p>
-        </p:txBody>
-      </p:sp>
-      <p:sp>
-        <p:nvSpPr>
-          <p:cNvPr id="74" name="Rectangle 73"/>
-          <p:cNvSpPr/>
-          <p:nvPr/>
-        </p:nvSpPr>
-        <p:spPr>
-          <a:xfrm>
-            <a:off x="5163250" y="5269687"/>
-            <a:ext cx="1164031" cy="121615"/>
-          </a:xfrm>
-          <a:prstGeom prst="rect">
-            <a:avLst/>
-          </a:prstGeom>
-          <a:solidFill>
-            <a:srgbClr val="16213E"/>
-          </a:solidFill>
-          <a:ln>
-            <a:noFill/>
-          </a:ln>
-        </p:spPr>
-        <p:style>
-          <a:lnRef idx="1">
-            <a:schemeClr val="accent1"/>
-          </a:lnRef>
-          <a:fillRef idx="3">
-            <a:schemeClr val="accent1"/>
-          </a:fillRef>
-          <a:effectRef idx="2">
-            <a:schemeClr val="accent1"/>
-          </a:effectRef>
-          <a:fontRef idx="minor">
-            <a:schemeClr val="lt1"/>
-          </a:fontRef>
-        </p:style>
-        <p:txBody>
-          <a:bodyPr rtlCol="0" anchor="ctr"/>
-          <a:lstStyle/>
-          <a:p>
-            <a:pPr algn="ctr"/>
-          </a:p>
-        </p:txBody>
-      </p:sp>
-      <p:sp>
-        <p:nvSpPr>
-          <p:cNvPr id="75" name="TextBox 74"/>
-          <p:cNvSpPr txBox="1"/>
-          <p:nvPr/>
-        </p:nvSpPr>
-        <p:spPr>
-          <a:xfrm>
-            <a:off x="5199826" y="5269687"/>
-            <a:ext cx="1164031" cy="121615"/>
-          </a:xfrm>
-          <a:prstGeom prst="rect">
-            <a:avLst/>
-          </a:prstGeom>
-          <a:noFill/>
-        </p:spPr>
-        <p:txBody>
-          <a:bodyPr wrap="square">
-            <a:spAutoFit/>
-          </a:bodyPr>
-          <a:lstStyle/>
-          <a:p>
-            <a:pPr algn="l"/>
-            <a:r>
-              <a:rPr sz="1000" b="0">
-                <a:solidFill>
-                  <a:srgbClr val="FFFFFF"/>
-                </a:solidFill>
-              </a:rPr>
-              <a:t>3.3V</a:t>
-            </a:r>
-          </a:p>
-        </p:txBody>
-      </p:sp>
-      <p:sp>
-        <p:nvSpPr>
-          <p:cNvPr id="76" name="Rectangle 75"/>
-          <p:cNvSpPr/>
-          <p:nvPr/>
-        </p:nvSpPr>
-        <p:spPr>
-          <a:xfrm>
-            <a:off x="6327281" y="5269687"/>
-            <a:ext cx="5587349" cy="121615"/>
-          </a:xfrm>
-          <a:prstGeom prst="rect">
-            <a:avLst/>
-          </a:prstGeom>
-          <a:solidFill>
-            <a:srgbClr val="16213E"/>
-          </a:solidFill>
-          <a:ln>
-            <a:noFill/>
-          </a:ln>
-        </p:spPr>
-        <p:style>
-          <a:lnRef idx="1">
-            <a:schemeClr val="accent1"/>
-          </a:lnRef>
-          <a:fillRef idx="3">
-            <a:schemeClr val="accent1"/>
-          </a:fillRef>
-          <a:effectRef idx="2">
-            <a:schemeClr val="accent1"/>
-          </a:effectRef>
-          <a:fontRef idx="minor">
-            <a:schemeClr val="lt1"/>
-          </a:fontRef>
-        </p:style>
-        <p:txBody>
-          <a:bodyPr rtlCol="0" anchor="ctr"/>
-          <a:lstStyle/>
-          <a:p>
-            <a:pPr algn="ctr"/>
-          </a:p>
-        </p:txBody>
-      </p:sp>
-      <p:sp>
-        <p:nvSpPr>
-          <p:cNvPr id="77" name="TextBox 76"/>
-          <p:cNvSpPr txBox="1"/>
-          <p:nvPr/>
-        </p:nvSpPr>
-        <p:spPr>
-          <a:xfrm>
-            <a:off x="6363857" y="5269687"/>
-            <a:ext cx="5587349" cy="121615"/>
-          </a:xfrm>
-          <a:prstGeom prst="rect">
-            <a:avLst/>
-          </a:prstGeom>
-          <a:noFill/>
-        </p:spPr>
-        <p:txBody>
-          <a:bodyPr wrap="square">
-            <a:spAutoFit/>
-          </a:bodyPr>
-          <a:lstStyle/>
-          <a:p>
-            <a:pPr algn="l"/>
-            <a:r>
-              <a:rPr sz="1000" b="0">
-                <a:solidFill>
-                  <a:srgbClr val="AAAAAA"/>
-                </a:solidFill>
-              </a:rPr>
-              <a:t>400 kHz</a:t>
-            </a:r>
-          </a:p>
-        </p:txBody>
-      </p:sp>
-      <p:sp>
-        <p:nvSpPr>
-          <p:cNvPr id="78" name="Rectangle 77"/>
-          <p:cNvSpPr/>
-          <p:nvPr/>
-        </p:nvSpPr>
-        <p:spPr>
-          <a:xfrm>
-            <a:off x="274320" y="5391302"/>
-            <a:ext cx="2560868" cy="121615"/>
-          </a:xfrm>
-          <a:prstGeom prst="rect">
-            <a:avLst/>
-          </a:prstGeom>
-          <a:solidFill>
-            <a:srgbClr val="0F3460"/>
-          </a:solidFill>
-          <a:ln>
-            <a:noFill/>
-          </a:ln>
-        </p:spPr>
-        <p:style>
-          <a:lnRef idx="1">
-            <a:schemeClr val="accent1"/>
-          </a:lnRef>
-          <a:fillRef idx="3">
-            <a:schemeClr val="accent1"/>
-          </a:fillRef>
-          <a:effectRef idx="2">
-            <a:schemeClr val="accent1"/>
-          </a:effectRef>
-          <a:fontRef idx="minor">
-            <a:schemeClr val="lt1"/>
-          </a:fontRef>
-        </p:style>
-        <p:txBody>
-          <a:bodyPr rtlCol="0" anchor="ctr"/>
-          <a:lstStyle/>
-          <a:p>
-            <a:pPr algn="ctr"/>
-          </a:p>
-        </p:txBody>
-      </p:sp>
-      <p:sp>
-        <p:nvSpPr>
-          <p:cNvPr id="79" name="TextBox 78"/>
-          <p:cNvSpPr txBox="1"/>
-          <p:nvPr/>
-        </p:nvSpPr>
-        <p:spPr>
-          <a:xfrm>
-            <a:off x="310896" y="5391302"/>
-            <a:ext cx="2560868" cy="121615"/>
-          </a:xfrm>
-          <a:prstGeom prst="rect">
-            <a:avLst/>
-          </a:prstGeom>
-          <a:noFill/>
-        </p:spPr>
-        <p:txBody>
-          <a:bodyPr wrap="square">
-            <a:spAutoFit/>
-          </a:bodyPr>
-          <a:lstStyle/>
-          <a:p>
-            <a:pPr algn="l"/>
-            <a:r>
-              <a:rPr sz="1000" b="0">
-                <a:solidFill>
-                  <a:srgbClr val="FFFFFF"/>
-                </a:solidFill>
-              </a:rPr>
-              <a:t>DS18B20 DATA</a:t>
-            </a:r>
-          </a:p>
-        </p:txBody>
-      </p:sp>
-      <p:sp>
-        <p:nvSpPr>
-          <p:cNvPr id="80" name="Rectangle 79"/>
-          <p:cNvSpPr/>
-          <p:nvPr/>
-        </p:nvSpPr>
-        <p:spPr>
-          <a:xfrm>
-            <a:off x="2835188" y="5391302"/>
-            <a:ext cx="1164031" cy="121615"/>
-          </a:xfrm>
-          <a:prstGeom prst="rect">
-            <a:avLst/>
-          </a:prstGeom>
-          <a:solidFill>
-            <a:srgbClr val="0F3460"/>
-          </a:solidFill>
-          <a:ln>
-            <a:noFill/>
-          </a:ln>
-        </p:spPr>
-        <p:style>
-          <a:lnRef idx="1">
-            <a:schemeClr val="accent1"/>
-          </a:lnRef>
-          <a:fillRef idx="3">
-            <a:schemeClr val="accent1"/>
-          </a:fillRef>
-          <a:effectRef idx="2">
-            <a:schemeClr val="accent1"/>
-          </a:effectRef>
-          <a:fontRef idx="minor">
-            <a:schemeClr val="lt1"/>
-          </a:fontRef>
-        </p:style>
-        <p:txBody>
-          <a:bodyPr rtlCol="0" anchor="ctr"/>
-          <a:lstStyle/>
-          <a:p>
-            <a:pPr algn="ctr"/>
-          </a:p>
-        </p:txBody>
-      </p:sp>
-      <p:sp>
-        <p:nvSpPr>
-          <p:cNvPr id="81" name="TextBox 80"/>
-          <p:cNvSpPr txBox="1"/>
-          <p:nvPr/>
-        </p:nvSpPr>
-        <p:spPr>
-          <a:xfrm>
-            <a:off x="2871764" y="5391302"/>
-            <a:ext cx="1164031" cy="121615"/>
-          </a:xfrm>
-          <a:prstGeom prst="rect">
-            <a:avLst/>
-          </a:prstGeom>
-          <a:noFill/>
-        </p:spPr>
-        <p:txBody>
-          <a:bodyPr wrap="square">
-            <a:spAutoFit/>
-          </a:bodyPr>
-          <a:lstStyle/>
-          <a:p>
-            <a:pPr algn="l"/>
-            <a:r>
-              <a:rPr sz="1000" b="0">
-                <a:solidFill>
-                  <a:srgbClr val="A8DADC"/>
-                </a:solidFill>
-              </a:rPr>
-              <a:t>GPIO4</a:t>
-            </a:r>
-          </a:p>
-        </p:txBody>
-      </p:sp>
-      <p:sp>
-        <p:nvSpPr>
-          <p:cNvPr id="82" name="Rectangle 81"/>
-          <p:cNvSpPr/>
-          <p:nvPr/>
-        </p:nvSpPr>
-        <p:spPr>
-          <a:xfrm>
-            <a:off x="3999219" y="5391302"/>
-            <a:ext cx="1164031" cy="121615"/>
-          </a:xfrm>
-          <a:prstGeom prst="rect">
-            <a:avLst/>
-          </a:prstGeom>
-          <a:solidFill>
-            <a:srgbClr val="0F3460"/>
-          </a:solidFill>
-          <a:ln>
-            <a:noFill/>
-          </a:ln>
-        </p:spPr>
-        <p:style>
-          <a:lnRef idx="1">
-            <a:schemeClr val="accent1"/>
-          </a:lnRef>
-          <a:fillRef idx="3">
-            <a:schemeClr val="accent1"/>
-          </a:fillRef>
-          <a:effectRef idx="2">
-            <a:schemeClr val="accent1"/>
-          </a:effectRef>
-          <a:fontRef idx="minor">
-            <a:schemeClr val="lt1"/>
-          </a:fontRef>
-        </p:style>
-        <p:txBody>
-          <a:bodyPr rtlCol="0" anchor="ctr"/>
-          <a:lstStyle/>
-          <a:p>
-            <a:pPr algn="ctr"/>
-          </a:p>
-        </p:txBody>
-      </p:sp>
-      <p:sp>
-        <p:nvSpPr>
-          <p:cNvPr id="83" name="TextBox 82"/>
-          <p:cNvSpPr txBox="1"/>
-          <p:nvPr/>
-        </p:nvSpPr>
-        <p:spPr>
-          <a:xfrm>
-            <a:off x="4035795" y="5391302"/>
-            <a:ext cx="1164031" cy="121615"/>
-          </a:xfrm>
-          <a:prstGeom prst="rect">
-            <a:avLst/>
-          </a:prstGeom>
-          <a:noFill/>
-        </p:spPr>
-        <p:txBody>
-          <a:bodyPr wrap="square">
-            <a:spAutoFit/>
-          </a:bodyPr>
-          <a:lstStyle/>
-          <a:p>
-            <a:pPr algn="l"/>
-            <a:r>
-              <a:rPr sz="1000" b="0">
-                <a:solidFill>
-                  <a:srgbClr val="FFFFFF"/>
-                </a:solidFill>
-              </a:rPr>
-              <a:t>1-Wire</a:t>
-            </a:r>
-          </a:p>
-        </p:txBody>
-      </p:sp>
-      <p:sp>
-        <p:nvSpPr>
-          <p:cNvPr id="84" name="Rectangle 83"/>
-          <p:cNvSpPr/>
-          <p:nvPr/>
-        </p:nvSpPr>
-        <p:spPr>
-          <a:xfrm>
-            <a:off x="5163250" y="5391302"/>
-            <a:ext cx="1164031" cy="121615"/>
-          </a:xfrm>
-          <a:prstGeom prst="rect">
-            <a:avLst/>
-          </a:prstGeom>
-          <a:solidFill>
-            <a:srgbClr val="0F3460"/>
-          </a:solidFill>
-          <a:ln>
-            <a:noFill/>
-          </a:ln>
-        </p:spPr>
-        <p:style>
-          <a:lnRef idx="1">
-            <a:schemeClr val="accent1"/>
-          </a:lnRef>
-          <a:fillRef idx="3">
-            <a:schemeClr val="accent1"/>
-          </a:fillRef>
-          <a:effectRef idx="2">
-            <a:schemeClr val="accent1"/>
-          </a:effectRef>
-          <a:fontRef idx="minor">
-            <a:schemeClr val="lt1"/>
-          </a:fontRef>
-        </p:style>
-        <p:txBody>
-          <a:bodyPr rtlCol="0" anchor="ctr"/>
-          <a:lstStyle/>
-          <a:p>
-            <a:pPr algn="ctr"/>
-          </a:p>
-        </p:txBody>
-      </p:sp>
-      <p:sp>
-        <p:nvSpPr>
-          <p:cNvPr id="85" name="TextBox 84"/>
-          <p:cNvSpPr txBox="1"/>
-          <p:nvPr/>
-        </p:nvSpPr>
-        <p:spPr>
-          <a:xfrm>
-            <a:off x="5199826" y="5391302"/>
-            <a:ext cx="1164031" cy="121615"/>
-          </a:xfrm>
-          <a:prstGeom prst="rect">
-            <a:avLst/>
-          </a:prstGeom>
-          <a:noFill/>
-        </p:spPr>
-        <p:txBody>
-          <a:bodyPr wrap="square">
-            <a:spAutoFit/>
-          </a:bodyPr>
-          <a:lstStyle/>
-          <a:p>
-            <a:pPr algn="l"/>
-            <a:r>
-              <a:rPr sz="1000" b="0">
-                <a:solidFill>
-                  <a:srgbClr val="FFFFFF"/>
-                </a:solidFill>
-              </a:rPr>
-              <a:t>3.3V</a:t>
-            </a:r>
-          </a:p>
-        </p:txBody>
-      </p:sp>
-      <p:sp>
-        <p:nvSpPr>
-          <p:cNvPr id="86" name="Rectangle 85"/>
-          <p:cNvSpPr/>
-          <p:nvPr/>
-        </p:nvSpPr>
-        <p:spPr>
-          <a:xfrm>
-            <a:off x="6327281" y="5391302"/>
-            <a:ext cx="5587349" cy="121615"/>
-          </a:xfrm>
-          <a:prstGeom prst="rect">
-            <a:avLst/>
-          </a:prstGeom>
-          <a:solidFill>
-            <a:srgbClr val="0F3460"/>
-          </a:solidFill>
-          <a:ln>
-            <a:noFill/>
-          </a:ln>
-        </p:spPr>
-        <p:style>
-          <a:lnRef idx="1">
-            <a:schemeClr val="accent1"/>
-          </a:lnRef>
-          <a:fillRef idx="3">
-            <a:schemeClr val="accent1"/>
-          </a:fillRef>
-          <a:effectRef idx="2">
-            <a:schemeClr val="accent1"/>
-          </a:effectRef>
-          <a:fontRef idx="minor">
-            <a:schemeClr val="lt1"/>
-          </a:fontRef>
-        </p:style>
-        <p:txBody>
-          <a:bodyPr rtlCol="0" anchor="ctr"/>
-          <a:lstStyle/>
-          <a:p>
-            <a:pPr algn="ctr"/>
-          </a:p>
-        </p:txBody>
-      </p:sp>
-      <p:sp>
-        <p:nvSpPr>
-          <p:cNvPr id="87" name="TextBox 86"/>
-          <p:cNvSpPr txBox="1"/>
-          <p:nvPr/>
-        </p:nvSpPr>
-        <p:spPr>
-          <a:xfrm>
-            <a:off x="6363857" y="5391302"/>
-            <a:ext cx="5587349" cy="121615"/>
-          </a:xfrm>
-          <a:prstGeom prst="rect">
-            <a:avLst/>
-          </a:prstGeom>
-          <a:noFill/>
-        </p:spPr>
-        <p:txBody>
-          <a:bodyPr wrap="square">
-            <a:spAutoFit/>
-          </a:bodyPr>
-          <a:lstStyle/>
-          <a:p>
-            <a:pPr algn="l"/>
-            <a:r>
-              <a:rPr sz="1000" b="0">
-                <a:solidFill>
-                  <a:srgbClr val="AAAAAA"/>
-                </a:solidFill>
-              </a:rPr>
-              <a:t>4.7kΩ pull-up</a:t>
-            </a:r>
-          </a:p>
-        </p:txBody>
-      </p:sp>
-      <p:sp>
-        <p:nvSpPr>
-          <p:cNvPr id="88" name="Rectangle 87"/>
-          <p:cNvSpPr/>
-          <p:nvPr/>
-        </p:nvSpPr>
-        <p:spPr>
-          <a:xfrm>
-            <a:off x="274320" y="5512917"/>
-            <a:ext cx="2560868" cy="121615"/>
-          </a:xfrm>
-          <a:prstGeom prst="rect">
-            <a:avLst/>
-          </a:prstGeom>
-          <a:solidFill>
-            <a:srgbClr val="16213E"/>
-          </a:solidFill>
-          <a:ln>
-            <a:noFill/>
-          </a:ln>
-        </p:spPr>
-        <p:style>
-          <a:lnRef idx="1">
-            <a:schemeClr val="accent1"/>
-          </a:lnRef>
-          <a:fillRef idx="3">
-            <a:schemeClr val="accent1"/>
-          </a:fillRef>
-          <a:effectRef idx="2">
-            <a:schemeClr val="accent1"/>
-          </a:effectRef>
-          <a:fontRef idx="minor">
-            <a:schemeClr val="lt1"/>
-          </a:fontRef>
-        </p:style>
-        <p:txBody>
-          <a:bodyPr rtlCol="0" anchor="ctr"/>
-          <a:lstStyle/>
-          <a:p>
-            <a:pPr algn="ctr"/>
-          </a:p>
-        </p:txBody>
-      </p:sp>
-      <p:sp>
-        <p:nvSpPr>
-          <p:cNvPr id="89" name="TextBox 88"/>
-          <p:cNvSpPr txBox="1"/>
-          <p:nvPr/>
-        </p:nvSpPr>
-        <p:spPr>
-          <a:xfrm>
-            <a:off x="310896" y="5512917"/>
-            <a:ext cx="2560868" cy="121615"/>
-          </a:xfrm>
-          <a:prstGeom prst="rect">
-            <a:avLst/>
-          </a:prstGeom>
-          <a:noFill/>
-        </p:spPr>
-        <p:txBody>
-          <a:bodyPr wrap="square">
-            <a:spAutoFit/>
-          </a:bodyPr>
-          <a:lstStyle/>
-          <a:p>
-            <a:pPr algn="l"/>
-            <a:r>
-              <a:rPr sz="1000" b="0">
-                <a:solidFill>
-                  <a:srgbClr val="FFFFFF"/>
-                </a:solidFill>
-              </a:rPr>
-              <a:t>MAX6675 CS</a:t>
-            </a:r>
-          </a:p>
-        </p:txBody>
-      </p:sp>
-      <p:sp>
-        <p:nvSpPr>
-          <p:cNvPr id="90" name="Rectangle 89"/>
-          <p:cNvSpPr/>
-          <p:nvPr/>
-        </p:nvSpPr>
-        <p:spPr>
-          <a:xfrm>
-            <a:off x="2835188" y="5512917"/>
-            <a:ext cx="1164031" cy="121615"/>
-          </a:xfrm>
-          <a:prstGeom prst="rect">
-            <a:avLst/>
-          </a:prstGeom>
-          <a:solidFill>
-            <a:srgbClr val="16213E"/>
-          </a:solidFill>
-          <a:ln>
-            <a:noFill/>
-          </a:ln>
-        </p:spPr>
-        <p:style>
-          <a:lnRef idx="1">
-            <a:schemeClr val="accent1"/>
-          </a:lnRef>
-          <a:fillRef idx="3">
-            <a:schemeClr val="accent1"/>
-          </a:fillRef>
-          <a:effectRef idx="2">
-            <a:schemeClr val="accent1"/>
-          </a:effectRef>
-          <a:fontRef idx="minor">
-            <a:schemeClr val="lt1"/>
-          </a:fontRef>
-        </p:style>
-        <p:txBody>
-          <a:bodyPr rtlCol="0" anchor="ctr"/>
-          <a:lstStyle/>
-          <a:p>
-            <a:pPr algn="ctr"/>
-          </a:p>
-        </p:txBody>
-      </p:sp>
-      <p:sp>
-        <p:nvSpPr>
-          <p:cNvPr id="91" name="TextBox 90"/>
-          <p:cNvSpPr txBox="1"/>
-          <p:nvPr/>
-        </p:nvSpPr>
-        <p:spPr>
-          <a:xfrm>
-            <a:off x="2871764" y="5512917"/>
-            <a:ext cx="1164031" cy="121615"/>
-          </a:xfrm>
-          <a:prstGeom prst="rect">
-            <a:avLst/>
-          </a:prstGeom>
-          <a:noFill/>
-        </p:spPr>
-        <p:txBody>
-          <a:bodyPr wrap="square">
-            <a:spAutoFit/>
-          </a:bodyPr>
-          <a:lstStyle/>
-          <a:p>
-            <a:pPr algn="l"/>
-            <a:r>
-              <a:rPr sz="1000" b="0">
-                <a:solidFill>
-                  <a:srgbClr val="A8DADC"/>
-                </a:solidFill>
-              </a:rPr>
-              <a:t>GPIO5</a:t>
-            </a:r>
-          </a:p>
-        </p:txBody>
-      </p:sp>
-      <p:sp>
-        <p:nvSpPr>
-          <p:cNvPr id="92" name="Rectangle 91"/>
-          <p:cNvSpPr/>
-          <p:nvPr/>
-        </p:nvSpPr>
-        <p:spPr>
-          <a:xfrm>
-            <a:off x="3999219" y="5512917"/>
-            <a:ext cx="1164031" cy="121615"/>
-          </a:xfrm>
-          <a:prstGeom prst="rect">
-            <a:avLst/>
-          </a:prstGeom>
-          <a:solidFill>
-            <a:srgbClr val="16213E"/>
-          </a:solidFill>
-          <a:ln>
-            <a:noFill/>
-          </a:ln>
-        </p:spPr>
-        <p:style>
-          <a:lnRef idx="1">
-            <a:schemeClr val="accent1"/>
-          </a:lnRef>
-          <a:fillRef idx="3">
-            <a:schemeClr val="accent1"/>
-          </a:fillRef>
-          <a:effectRef idx="2">
-            <a:schemeClr val="accent1"/>
-          </a:effectRef>
-          <a:fontRef idx="minor">
-            <a:schemeClr val="lt1"/>
-          </a:fontRef>
-        </p:style>
-        <p:txBody>
-          <a:bodyPr rtlCol="0" anchor="ctr"/>
-          <a:lstStyle/>
-          <a:p>
-            <a:pPr algn="ctr"/>
-          </a:p>
-        </p:txBody>
-      </p:sp>
-      <p:sp>
-        <p:nvSpPr>
-          <p:cNvPr id="93" name="TextBox 92"/>
-          <p:cNvSpPr txBox="1"/>
-          <p:nvPr/>
-        </p:nvSpPr>
-        <p:spPr>
-          <a:xfrm>
-            <a:off x="4035795" y="5512917"/>
-            <a:ext cx="1164031" cy="121615"/>
-          </a:xfrm>
-          <a:prstGeom prst="rect">
-            <a:avLst/>
-          </a:prstGeom>
-          <a:noFill/>
-        </p:spPr>
-        <p:txBody>
-          <a:bodyPr wrap="square">
-            <a:spAutoFit/>
-          </a:bodyPr>
-          <a:lstStyle/>
-          <a:p>
-            <a:pPr algn="l"/>
-            <a:r>
-              <a:rPr sz="1000" b="0">
-                <a:solidFill>
-                  <a:srgbClr val="FFFFFF"/>
-                </a:solidFill>
-              </a:rPr>
-              <a:t>SPI</a:t>
-            </a:r>
-          </a:p>
-        </p:txBody>
-      </p:sp>
-      <p:sp>
-        <p:nvSpPr>
-          <p:cNvPr id="94" name="Rectangle 93"/>
-          <p:cNvSpPr/>
-          <p:nvPr/>
-        </p:nvSpPr>
-        <p:spPr>
-          <a:xfrm>
-            <a:off x="5163250" y="5512917"/>
-            <a:ext cx="1164031" cy="121615"/>
-          </a:xfrm>
-          <a:prstGeom prst="rect">
-            <a:avLst/>
-          </a:prstGeom>
-          <a:solidFill>
-            <a:srgbClr val="16213E"/>
-          </a:solidFill>
-          <a:ln>
-            <a:noFill/>
-          </a:ln>
-        </p:spPr>
-        <p:style>
-          <a:lnRef idx="1">
-            <a:schemeClr val="accent1"/>
-          </a:lnRef>
-          <a:fillRef idx="3">
-            <a:schemeClr val="accent1"/>
-          </a:fillRef>
-          <a:effectRef idx="2">
-            <a:schemeClr val="accent1"/>
-          </a:effectRef>
-          <a:fontRef idx="minor">
-            <a:schemeClr val="lt1"/>
-          </a:fontRef>
-        </p:style>
-        <p:txBody>
-          <a:bodyPr rtlCol="0" anchor="ctr"/>
-          <a:lstStyle/>
-          <a:p>
-            <a:pPr algn="ctr"/>
-          </a:p>
-        </p:txBody>
-      </p:sp>
-      <p:sp>
-        <p:nvSpPr>
-          <p:cNvPr id="95" name="TextBox 94"/>
-          <p:cNvSpPr txBox="1"/>
-          <p:nvPr/>
-        </p:nvSpPr>
-        <p:spPr>
-          <a:xfrm>
-            <a:off x="5199826" y="5512917"/>
-            <a:ext cx="1164031" cy="121615"/>
-          </a:xfrm>
-          <a:prstGeom prst="rect">
-            <a:avLst/>
-          </a:prstGeom>
-          <a:noFill/>
-        </p:spPr>
-        <p:txBody>
-          <a:bodyPr wrap="square">
-            <a:spAutoFit/>
-          </a:bodyPr>
-          <a:lstStyle/>
-          <a:p>
-            <a:pPr algn="l"/>
-            <a:r>
-              <a:rPr sz="1000" b="0">
-                <a:solidFill>
-                  <a:srgbClr val="FFFFFF"/>
-                </a:solidFill>
-              </a:rPr>
-              <a:t>3.3V</a:t>
-            </a:r>
-          </a:p>
-        </p:txBody>
-      </p:sp>
-      <p:sp>
-        <p:nvSpPr>
-          <p:cNvPr id="96" name="Rectangle 95"/>
-          <p:cNvSpPr/>
-          <p:nvPr/>
-        </p:nvSpPr>
-        <p:spPr>
-          <a:xfrm>
-            <a:off x="6327281" y="5512917"/>
-            <a:ext cx="5587349" cy="121615"/>
-          </a:xfrm>
-          <a:prstGeom prst="rect">
-            <a:avLst/>
-          </a:prstGeom>
-          <a:solidFill>
-            <a:srgbClr val="16213E"/>
-          </a:solidFill>
-          <a:ln>
-            <a:noFill/>
-          </a:ln>
-        </p:spPr>
-        <p:style>
-          <a:lnRef idx="1">
-            <a:schemeClr val="accent1"/>
-          </a:lnRef>
-          <a:fillRef idx="3">
-            <a:schemeClr val="accent1"/>
-          </a:fillRef>
-          <a:effectRef idx="2">
-            <a:schemeClr val="accent1"/>
-          </a:effectRef>
-          <a:fontRef idx="minor">
-            <a:schemeClr val="lt1"/>
-          </a:fontRef>
-        </p:style>
-        <p:txBody>
-          <a:bodyPr rtlCol="0" anchor="ctr"/>
-          <a:lstStyle/>
-          <a:p>
-            <a:pPr algn="ctr"/>
-          </a:p>
-        </p:txBody>
-      </p:sp>
-      <p:sp>
-        <p:nvSpPr>
-          <p:cNvPr id="97" name="TextBox 96"/>
-          <p:cNvSpPr txBox="1"/>
-          <p:nvPr/>
-        </p:nvSpPr>
-        <p:spPr>
-          <a:xfrm>
-            <a:off x="6363857" y="5512917"/>
-            <a:ext cx="5587349" cy="121615"/>
-          </a:xfrm>
-          <a:prstGeom prst="rect">
-            <a:avLst/>
-          </a:prstGeom>
-          <a:noFill/>
-        </p:spPr>
-        <p:txBody>
-          <a:bodyPr wrap="square">
-            <a:spAutoFit/>
-          </a:bodyPr>
-          <a:lstStyle/>
-          <a:p>
-            <a:pPr algn="l"/>
-            <a:r>
-              <a:rPr sz="1000" b="0">
-                <a:solidFill>
-                  <a:srgbClr val="AAAAAA"/>
-                </a:solidFill>
-              </a:rPr>
-              <a:t>dedicated SPI</a:t>
-            </a:r>
-          </a:p>
-        </p:txBody>
-      </p:sp>
-      <p:sp>
-        <p:nvSpPr>
-          <p:cNvPr id="98" name="Rectangle 97"/>
-          <p:cNvSpPr/>
-          <p:nvPr/>
-        </p:nvSpPr>
-        <p:spPr>
-          <a:xfrm>
-            <a:off x="274320" y="5634532"/>
-            <a:ext cx="2560868" cy="121615"/>
-          </a:xfrm>
-          <a:prstGeom prst="rect">
-            <a:avLst/>
-          </a:prstGeom>
-          <a:solidFill>
-            <a:srgbClr val="0F3460"/>
-          </a:solidFill>
-          <a:ln>
-            <a:noFill/>
-          </a:ln>
-        </p:spPr>
-        <p:style>
-          <a:lnRef idx="1">
-            <a:schemeClr val="accent1"/>
-          </a:lnRef>
-          <a:fillRef idx="3">
-            <a:schemeClr val="accent1"/>
-          </a:fillRef>
-          <a:effectRef idx="2">
-            <a:schemeClr val="accent1"/>
-          </a:effectRef>
-          <a:fontRef idx="minor">
-            <a:schemeClr val="lt1"/>
-          </a:fontRef>
-        </p:style>
-        <p:txBody>
-          <a:bodyPr rtlCol="0" anchor="ctr"/>
-          <a:lstStyle/>
-          <a:p>
-            <a:pPr algn="ctr"/>
-          </a:p>
-        </p:txBody>
-      </p:sp>
-      <p:sp>
-        <p:nvSpPr>
-          <p:cNvPr id="99" name="TextBox 98"/>
-          <p:cNvSpPr txBox="1"/>
-          <p:nvPr/>
-        </p:nvSpPr>
-        <p:spPr>
-          <a:xfrm>
-            <a:off x="310896" y="5634532"/>
-            <a:ext cx="2560868" cy="121615"/>
-          </a:xfrm>
-          <a:prstGeom prst="rect">
-            <a:avLst/>
-          </a:prstGeom>
-          <a:noFill/>
-        </p:spPr>
-        <p:txBody>
-          <a:bodyPr wrap="square">
-            <a:spAutoFit/>
-          </a:bodyPr>
-          <a:lstStyle/>
-          <a:p>
-            <a:pPr algn="l"/>
-            <a:r>
-              <a:rPr sz="1000" b="0">
-                <a:solidFill>
-                  <a:srgbClr val="FFFFFF"/>
-                </a:solidFill>
-              </a:rPr>
-              <a:t>MAX6675 SCK</a:t>
-            </a:r>
-          </a:p>
-        </p:txBody>
-      </p:sp>
-      <p:sp>
-        <p:nvSpPr>
-          <p:cNvPr id="100" name="Rectangle 99"/>
-          <p:cNvSpPr/>
-          <p:nvPr/>
-        </p:nvSpPr>
-        <p:spPr>
-          <a:xfrm>
-            <a:off x="2835188" y="5634532"/>
-            <a:ext cx="1164031" cy="121615"/>
-          </a:xfrm>
-          <a:prstGeom prst="rect">
-            <a:avLst/>
-          </a:prstGeom>
-          <a:solidFill>
-            <a:srgbClr val="0F3460"/>
-          </a:solidFill>
-          <a:ln>
-            <a:noFill/>
-          </a:ln>
-        </p:spPr>
-        <p:style>
-          <a:lnRef idx="1">
-            <a:schemeClr val="accent1"/>
-          </a:lnRef>
-          <a:fillRef idx="3">
-            <a:schemeClr val="accent1"/>
-          </a:fillRef>
-          <a:effectRef idx="2">
-            <a:schemeClr val="accent1"/>
-          </a:effectRef>
-          <a:fontRef idx="minor">
-            <a:schemeClr val="lt1"/>
-          </a:fontRef>
-        </p:style>
-        <p:txBody>
-          <a:bodyPr rtlCol="0" anchor="ctr"/>
-          <a:lstStyle/>
-          <a:p>
-            <a:pPr algn="ctr"/>
-          </a:p>
-        </p:txBody>
-      </p:sp>
-      <p:sp>
-        <p:nvSpPr>
-          <p:cNvPr id="101" name="TextBox 100"/>
-          <p:cNvSpPr txBox="1"/>
-          <p:nvPr/>
-        </p:nvSpPr>
-        <p:spPr>
-          <a:xfrm>
-            <a:off x="2871764" y="5634532"/>
-            <a:ext cx="1164031" cy="121615"/>
-          </a:xfrm>
-          <a:prstGeom prst="rect">
-            <a:avLst/>
-          </a:prstGeom>
-          <a:noFill/>
-        </p:spPr>
-        <p:txBody>
-          <a:bodyPr wrap="square">
-            <a:spAutoFit/>
-          </a:bodyPr>
-          <a:lstStyle/>
-          <a:p>
-            <a:pPr algn="l"/>
-            <a:r>
-              <a:rPr sz="1000" b="0">
-                <a:solidFill>
-                  <a:srgbClr val="A8DADC"/>
-                </a:solidFill>
-              </a:rPr>
-              <a:t>GPIO18</a:t>
-            </a:r>
-          </a:p>
-        </p:txBody>
-      </p:sp>
-      <p:sp>
-        <p:nvSpPr>
-          <p:cNvPr id="102" name="Rectangle 101"/>
-          <p:cNvSpPr/>
-          <p:nvPr/>
-        </p:nvSpPr>
-        <p:spPr>
-          <a:xfrm>
-            <a:off x="3999219" y="5634532"/>
-            <a:ext cx="1164031" cy="121615"/>
-          </a:xfrm>
-          <a:prstGeom prst="rect">
-            <a:avLst/>
-          </a:prstGeom>
-          <a:solidFill>
-            <a:srgbClr val="0F3460"/>
-          </a:solidFill>
-          <a:ln>
-            <a:noFill/>
-          </a:ln>
-        </p:spPr>
-        <p:style>
-          <a:lnRef idx="1">
-            <a:schemeClr val="accent1"/>
-          </a:lnRef>
-          <a:fillRef idx="3">
-            <a:schemeClr val="accent1"/>
-          </a:fillRef>
-          <a:effectRef idx="2">
-            <a:schemeClr val="accent1"/>
-          </a:effectRef>
-          <a:fontRef idx="minor">
-            <a:schemeClr val="lt1"/>
-          </a:fontRef>
-        </p:style>
-        <p:txBody>
-          <a:bodyPr rtlCol="0" anchor="ctr"/>
-          <a:lstStyle/>
-          <a:p>
-            <a:pPr algn="ctr"/>
-          </a:p>
-        </p:txBody>
-      </p:sp>
-      <p:sp>
-        <p:nvSpPr>
-          <p:cNvPr id="103" name="TextBox 102"/>
-          <p:cNvSpPr txBox="1"/>
-          <p:nvPr/>
-        </p:nvSpPr>
-        <p:spPr>
-          <a:xfrm>
-            <a:off x="4035795" y="5634532"/>
-            <a:ext cx="1164031" cy="121615"/>
-          </a:xfrm>
-          <a:prstGeom prst="rect">
-            <a:avLst/>
-          </a:prstGeom>
-          <a:noFill/>
-        </p:spPr>
-        <p:txBody>
-          <a:bodyPr wrap="square">
-            <a:spAutoFit/>
-          </a:bodyPr>
-          <a:lstStyle/>
-          <a:p>
-            <a:pPr algn="l"/>
-            <a:r>
-              <a:rPr sz="1000" b="0">
-                <a:solidFill>
-                  <a:srgbClr val="FFFFFF"/>
-                </a:solidFill>
-              </a:rPr>
-              <a:t>SPI</a:t>
-            </a:r>
-          </a:p>
-        </p:txBody>
-      </p:sp>
-      <p:sp>
-        <p:nvSpPr>
-          <p:cNvPr id="104" name="Rectangle 103"/>
-          <p:cNvSpPr/>
-          <p:nvPr/>
-        </p:nvSpPr>
-        <p:spPr>
-          <a:xfrm>
-            <a:off x="5163250" y="5634532"/>
-            <a:ext cx="1164031" cy="121615"/>
-          </a:xfrm>
-          <a:prstGeom prst="rect">
-            <a:avLst/>
-          </a:prstGeom>
-          <a:solidFill>
-            <a:srgbClr val="0F3460"/>
-          </a:solidFill>
-          <a:ln>
-            <a:noFill/>
-          </a:ln>
-        </p:spPr>
-        <p:style>
-          <a:lnRef idx="1">
-            <a:schemeClr val="accent1"/>
-          </a:lnRef>
-          <a:fillRef idx="3">
-            <a:schemeClr val="accent1"/>
-          </a:fillRef>
-          <a:effectRef idx="2">
-            <a:schemeClr val="accent1"/>
-          </a:effectRef>
-          <a:fontRef idx="minor">
-            <a:schemeClr val="lt1"/>
-          </a:fontRef>
-        </p:style>
-        <p:txBody>
-          <a:bodyPr rtlCol="0" anchor="ctr"/>
-          <a:lstStyle/>
-          <a:p>
-            <a:pPr algn="ctr"/>
-          </a:p>
-        </p:txBody>
-      </p:sp>
-      <p:sp>
-        <p:nvSpPr>
-          <p:cNvPr id="105" name="TextBox 104"/>
-          <p:cNvSpPr txBox="1"/>
-          <p:nvPr/>
-        </p:nvSpPr>
-        <p:spPr>
-          <a:xfrm>
-            <a:off x="5199826" y="5634532"/>
-            <a:ext cx="1164031" cy="121615"/>
-          </a:xfrm>
-          <a:prstGeom prst="rect">
-            <a:avLst/>
-          </a:prstGeom>
-          <a:noFill/>
-        </p:spPr>
-        <p:txBody>
-          <a:bodyPr wrap="square">
-            <a:spAutoFit/>
-          </a:bodyPr>
-          <a:lstStyle/>
-          <a:p>
-            <a:pPr algn="l"/>
-            <a:r>
-              <a:rPr sz="1000" b="0">
-                <a:solidFill>
-                  <a:srgbClr val="FFFFFF"/>
-                </a:solidFill>
-              </a:rPr>
-              <a:t>3.3V</a:t>
-            </a:r>
-          </a:p>
-        </p:txBody>
-      </p:sp>
-      <p:sp>
-        <p:nvSpPr>
-          <p:cNvPr id="106" name="Rectangle 105"/>
-          <p:cNvSpPr/>
-          <p:nvPr/>
-        </p:nvSpPr>
-        <p:spPr>
-          <a:xfrm>
-            <a:off x="6327281" y="5634532"/>
-            <a:ext cx="5587349" cy="121615"/>
-          </a:xfrm>
-          <a:prstGeom prst="rect">
-            <a:avLst/>
-          </a:prstGeom>
-          <a:solidFill>
-            <a:srgbClr val="0F3460"/>
-          </a:solidFill>
-          <a:ln>
-            <a:noFill/>
-          </a:ln>
-        </p:spPr>
-        <p:style>
-          <a:lnRef idx="1">
-            <a:schemeClr val="accent1"/>
-          </a:lnRef>
-          <a:fillRef idx="3">
-            <a:schemeClr val="accent1"/>
-          </a:fillRef>
-          <a:effectRef idx="2">
-            <a:schemeClr val="accent1"/>
-          </a:effectRef>
-          <a:fontRef idx="minor">
-            <a:schemeClr val="lt1"/>
-          </a:fontRef>
-        </p:style>
-        <p:txBody>
-          <a:bodyPr rtlCol="0" anchor="ctr"/>
-          <a:lstStyle/>
-          <a:p>
-            <a:pPr algn="ctr"/>
-          </a:p>
-        </p:txBody>
-      </p:sp>
-      <p:sp>
-        <p:nvSpPr>
-          <p:cNvPr id="107" name="TextBox 106"/>
-          <p:cNvSpPr txBox="1"/>
-          <p:nvPr/>
-        </p:nvSpPr>
-        <p:spPr>
-          <a:xfrm>
-            <a:off x="6363857" y="5634532"/>
-            <a:ext cx="5587349" cy="121615"/>
-          </a:xfrm>
-          <a:prstGeom prst="rect">
-            <a:avLst/>
-          </a:prstGeom>
-          <a:noFill/>
-        </p:spPr>
-        <p:txBody>
-          <a:bodyPr wrap="square">
-            <a:spAutoFit/>
-          </a:bodyPr>
-          <a:lstStyle/>
-          <a:p>
-            <a:pPr algn="l"/>
-            <a:r>
-              <a:rPr sz="1000" b="0">
-                <a:solidFill>
-                  <a:srgbClr val="AAAAAA"/>
-                </a:solidFill>
-              </a:rPr>
-              <a:t/>
-            </a:r>
-          </a:p>
-        </p:txBody>
-      </p:sp>
-      <p:sp>
-        <p:nvSpPr>
-          <p:cNvPr id="108" name="Rectangle 107"/>
-          <p:cNvSpPr/>
-          <p:nvPr/>
-        </p:nvSpPr>
-        <p:spPr>
-          <a:xfrm>
-            <a:off x="274320" y="5756147"/>
-            <a:ext cx="2560868" cy="121615"/>
-          </a:xfrm>
-          <a:prstGeom prst="rect">
-            <a:avLst/>
-          </a:prstGeom>
-          <a:solidFill>
-            <a:srgbClr val="16213E"/>
-          </a:solidFill>
-          <a:ln>
-            <a:noFill/>
-          </a:ln>
-        </p:spPr>
-        <p:style>
-          <a:lnRef idx="1">
-            <a:schemeClr val="accent1"/>
-          </a:lnRef>
-          <a:fillRef idx="3">
-            <a:schemeClr val="accent1"/>
-          </a:fillRef>
-          <a:effectRef idx="2">
-            <a:schemeClr val="accent1"/>
-          </a:effectRef>
-          <a:fontRef idx="minor">
-            <a:schemeClr val="lt1"/>
-          </a:fontRef>
-        </p:style>
-        <p:txBody>
-          <a:bodyPr rtlCol="0" anchor="ctr"/>
-          <a:lstStyle/>
-          <a:p>
-            <a:pPr algn="ctr"/>
-          </a:p>
-        </p:txBody>
-      </p:sp>
-      <p:sp>
-        <p:nvSpPr>
-          <p:cNvPr id="109" name="TextBox 108"/>
-          <p:cNvSpPr txBox="1"/>
-          <p:nvPr/>
-        </p:nvSpPr>
-        <p:spPr>
-          <a:xfrm>
-            <a:off x="310896" y="5756147"/>
-            <a:ext cx="2560868" cy="121615"/>
-          </a:xfrm>
-          <a:prstGeom prst="rect">
-            <a:avLst/>
-          </a:prstGeom>
-          <a:noFill/>
-        </p:spPr>
-        <p:txBody>
-          <a:bodyPr wrap="square">
-            <a:spAutoFit/>
-          </a:bodyPr>
-          <a:lstStyle/>
-          <a:p>
-            <a:pPr algn="l"/>
-            <a:r>
-              <a:rPr sz="1000" b="0">
-                <a:solidFill>
-                  <a:srgbClr val="FFFFFF"/>
-                </a:solidFill>
-              </a:rPr>
-              <a:t>MAX6675 MISO</a:t>
-            </a:r>
-          </a:p>
-        </p:txBody>
-      </p:sp>
-      <p:sp>
-        <p:nvSpPr>
-          <p:cNvPr id="110" name="Rectangle 109"/>
-          <p:cNvSpPr/>
-          <p:nvPr/>
-        </p:nvSpPr>
-        <p:spPr>
-          <a:xfrm>
-            <a:off x="2835188" y="5756147"/>
-            <a:ext cx="1164031" cy="121615"/>
-          </a:xfrm>
-          <a:prstGeom prst="rect">
-            <a:avLst/>
-          </a:prstGeom>
-          <a:solidFill>
-            <a:srgbClr val="16213E"/>
-          </a:solidFill>
-          <a:ln>
-            <a:noFill/>
-          </a:ln>
-        </p:spPr>
-        <p:style>
-          <a:lnRef idx="1">
-            <a:schemeClr val="accent1"/>
-          </a:lnRef>
-          <a:fillRef idx="3">
-            <a:schemeClr val="accent1"/>
-          </a:fillRef>
-          <a:effectRef idx="2">
-            <a:schemeClr val="accent1"/>
-          </a:effectRef>
-          <a:fontRef idx="minor">
-            <a:schemeClr val="lt1"/>
-          </a:fontRef>
-        </p:style>
-        <p:txBody>
-          <a:bodyPr rtlCol="0" anchor="ctr"/>
-          <a:lstStyle/>
-          <a:p>
-            <a:pPr algn="ctr"/>
-          </a:p>
-        </p:txBody>
-      </p:sp>
-      <p:sp>
-        <p:nvSpPr>
-          <p:cNvPr id="111" name="TextBox 110"/>
-          <p:cNvSpPr txBox="1"/>
-          <p:nvPr/>
-        </p:nvSpPr>
-        <p:spPr>
-          <a:xfrm>
-            <a:off x="2871764" y="5756147"/>
-            <a:ext cx="1164031" cy="121615"/>
-          </a:xfrm>
-          <a:prstGeom prst="rect">
-            <a:avLst/>
-          </a:prstGeom>
-          <a:noFill/>
-        </p:spPr>
-        <p:txBody>
-          <a:bodyPr wrap="square">
-            <a:spAutoFit/>
-          </a:bodyPr>
-          <a:lstStyle/>
-          <a:p>
-            <a:pPr algn="l"/>
-            <a:r>
-              <a:rPr sz="1000" b="0">
-                <a:solidFill>
-                  <a:srgbClr val="A8DADC"/>
-                </a:solidFill>
-              </a:rPr>
-              <a:t>GPIO19</a:t>
-            </a:r>
-          </a:p>
-        </p:txBody>
-      </p:sp>
-      <p:sp>
-        <p:nvSpPr>
-          <p:cNvPr id="112" name="Rectangle 111"/>
-          <p:cNvSpPr/>
-          <p:nvPr/>
-        </p:nvSpPr>
-        <p:spPr>
-          <a:xfrm>
-            <a:off x="3999219" y="5756147"/>
-            <a:ext cx="1164031" cy="121615"/>
-          </a:xfrm>
-          <a:prstGeom prst="rect">
-            <a:avLst/>
-          </a:prstGeom>
-          <a:solidFill>
-            <a:srgbClr val="16213E"/>
-          </a:solidFill>
-          <a:ln>
-            <a:noFill/>
-          </a:ln>
-        </p:spPr>
-        <p:style>
-          <a:lnRef idx="1">
-            <a:schemeClr val="accent1"/>
-          </a:lnRef>
-          <a:fillRef idx="3">
-            <a:schemeClr val="accent1"/>
-          </a:fillRef>
-          <a:effectRef idx="2">
-            <a:schemeClr val="accent1"/>
-          </a:effectRef>
-          <a:fontRef idx="minor">
-            <a:schemeClr val="lt1"/>
-          </a:fontRef>
-        </p:style>
-        <p:txBody>
-          <a:bodyPr rtlCol="0" anchor="ctr"/>
-          <a:lstStyle/>
-          <a:p>
-            <a:pPr algn="ctr"/>
-          </a:p>
-        </p:txBody>
-      </p:sp>
-      <p:sp>
-        <p:nvSpPr>
-          <p:cNvPr id="113" name="TextBox 112"/>
-          <p:cNvSpPr txBox="1"/>
-          <p:nvPr/>
-        </p:nvSpPr>
-        <p:spPr>
-          <a:xfrm>
-            <a:off x="4035795" y="5756147"/>
-            <a:ext cx="1164031" cy="121615"/>
-          </a:xfrm>
-          <a:prstGeom prst="rect">
-            <a:avLst/>
-          </a:prstGeom>
-          <a:noFill/>
-        </p:spPr>
-        <p:txBody>
-          <a:bodyPr wrap="square">
-            <a:spAutoFit/>
-          </a:bodyPr>
-          <a:lstStyle/>
-          <a:p>
-            <a:pPr algn="l"/>
-            <a:r>
-              <a:rPr sz="1000" b="0">
-                <a:solidFill>
-                  <a:srgbClr val="FFFFFF"/>
-                </a:solidFill>
-              </a:rPr>
-              <a:t>SPI</a:t>
-            </a:r>
-          </a:p>
-        </p:txBody>
-      </p:sp>
-      <p:sp>
-        <p:nvSpPr>
-          <p:cNvPr id="114" name="Rectangle 113"/>
-          <p:cNvSpPr/>
-          <p:nvPr/>
-        </p:nvSpPr>
-        <p:spPr>
-          <a:xfrm>
-            <a:off x="5163250" y="5756147"/>
-            <a:ext cx="1164031" cy="121615"/>
-          </a:xfrm>
-          <a:prstGeom prst="rect">
-            <a:avLst/>
-          </a:prstGeom>
-          <a:solidFill>
-            <a:srgbClr val="16213E"/>
-          </a:solidFill>
-          <a:ln>
-            <a:noFill/>
-          </a:ln>
-        </p:spPr>
-        <p:style>
-          <a:lnRef idx="1">
-            <a:schemeClr val="accent1"/>
-          </a:lnRef>
-          <a:fillRef idx="3">
-            <a:schemeClr val="accent1"/>
-          </a:fillRef>
-          <a:effectRef idx="2">
-            <a:schemeClr val="accent1"/>
-          </a:effectRef>
-          <a:fontRef idx="minor">
-            <a:schemeClr val="lt1"/>
-          </a:fontRef>
-        </p:style>
-        <p:txBody>
-          <a:bodyPr rtlCol="0" anchor="ctr"/>
-          <a:lstStyle/>
-          <a:p>
-            <a:pPr algn="ctr"/>
-          </a:p>
-        </p:txBody>
-      </p:sp>
-      <p:sp>
-        <p:nvSpPr>
-          <p:cNvPr id="115" name="TextBox 114"/>
-          <p:cNvSpPr txBox="1"/>
-          <p:nvPr/>
-        </p:nvSpPr>
-        <p:spPr>
-          <a:xfrm>
-            <a:off x="5199826" y="5756147"/>
-            <a:ext cx="1164031" cy="121615"/>
-          </a:xfrm>
-          <a:prstGeom prst="rect">
-            <a:avLst/>
-          </a:prstGeom>
-          <a:noFill/>
-        </p:spPr>
-        <p:txBody>
-          <a:bodyPr wrap="square">
-            <a:spAutoFit/>
-          </a:bodyPr>
-          <a:lstStyle/>
-          <a:p>
-            <a:pPr algn="l"/>
-            <a:r>
-              <a:rPr sz="1000" b="0">
-                <a:solidFill>
-                  <a:srgbClr val="FFFFFF"/>
-                </a:solidFill>
-              </a:rPr>
-              <a:t>3.3V</a:t>
-            </a:r>
-          </a:p>
-        </p:txBody>
-      </p:sp>
-      <p:sp>
-        <p:nvSpPr>
-          <p:cNvPr id="116" name="Rectangle 115"/>
-          <p:cNvSpPr/>
-          <p:nvPr/>
-        </p:nvSpPr>
-        <p:spPr>
-          <a:xfrm>
-            <a:off x="6327281" y="5756147"/>
-            <a:ext cx="5587349" cy="121615"/>
-          </a:xfrm>
-          <a:prstGeom prst="rect">
-            <a:avLst/>
-          </a:prstGeom>
-          <a:solidFill>
-            <a:srgbClr val="16213E"/>
-          </a:solidFill>
-          <a:ln>
-            <a:noFill/>
-          </a:ln>
-        </p:spPr>
-        <p:style>
-          <a:lnRef idx="1">
-            <a:schemeClr val="accent1"/>
-          </a:lnRef>
-          <a:fillRef idx="3">
-            <a:schemeClr val="accent1"/>
-          </a:fillRef>
-          <a:effectRef idx="2">
-            <a:schemeClr val="accent1"/>
-          </a:effectRef>
-          <a:fontRef idx="minor">
-            <a:schemeClr val="lt1"/>
-          </a:fontRef>
-        </p:style>
-        <p:txBody>
-          <a:bodyPr rtlCol="0" anchor="ctr"/>
-          <a:lstStyle/>
-          <a:p>
-            <a:pPr algn="ctr"/>
-          </a:p>
-        </p:txBody>
-      </p:sp>
-      <p:sp>
-        <p:nvSpPr>
-          <p:cNvPr id="117" name="TextBox 116"/>
-          <p:cNvSpPr txBox="1"/>
-          <p:nvPr/>
-        </p:nvSpPr>
-        <p:spPr>
-          <a:xfrm>
-            <a:off x="6363857" y="5756147"/>
-            <a:ext cx="5587349" cy="121615"/>
-          </a:xfrm>
-          <a:prstGeom prst="rect">
-            <a:avLst/>
-          </a:prstGeom>
-          <a:noFill/>
-        </p:spPr>
-        <p:txBody>
-          <a:bodyPr wrap="square">
-            <a:spAutoFit/>
-          </a:bodyPr>
-          <a:lstStyle/>
-          <a:p>
-            <a:pPr algn="l"/>
-            <a:r>
-              <a:rPr sz="1000" b="0">
-                <a:solidFill>
-                  <a:srgbClr val="AAAAAA"/>
-                </a:solidFill>
-              </a:rPr>
-              <a:t/>
-            </a:r>
-          </a:p>
-        </p:txBody>
-      </p:sp>
-      <p:sp>
-        <p:nvSpPr>
-          <p:cNvPr id="118" name="Rectangle 117"/>
-          <p:cNvSpPr/>
-          <p:nvPr/>
-        </p:nvSpPr>
-        <p:spPr>
-          <a:xfrm>
-            <a:off x="274320" y="5877762"/>
-            <a:ext cx="2560868" cy="121615"/>
-          </a:xfrm>
-          <a:prstGeom prst="rect">
-            <a:avLst/>
-          </a:prstGeom>
-          <a:solidFill>
-            <a:srgbClr val="0F3460"/>
-          </a:solidFill>
-          <a:ln>
-            <a:noFill/>
-          </a:ln>
-        </p:spPr>
-        <p:style>
-          <a:lnRef idx="1">
-            <a:schemeClr val="accent1"/>
-          </a:lnRef>
-          <a:fillRef idx="3">
-            <a:schemeClr val="accent1"/>
-          </a:fillRef>
-          <a:effectRef idx="2">
-            <a:schemeClr val="accent1"/>
-          </a:effectRef>
-          <a:fontRef idx="minor">
-            <a:schemeClr val="lt1"/>
-          </a:fontRef>
-        </p:style>
-        <p:txBody>
-          <a:bodyPr rtlCol="0" anchor="ctr"/>
-          <a:lstStyle/>
-          <a:p>
-            <a:pPr algn="ctr"/>
-          </a:p>
-        </p:txBody>
-      </p:sp>
-      <p:sp>
-        <p:nvSpPr>
-          <p:cNvPr id="119" name="TextBox 118"/>
-          <p:cNvSpPr txBox="1"/>
-          <p:nvPr/>
-        </p:nvSpPr>
-        <p:spPr>
-          <a:xfrm>
-            <a:off x="310896" y="5877762"/>
-            <a:ext cx="2560868" cy="121615"/>
-          </a:xfrm>
-          <a:prstGeom prst="rect">
-            <a:avLst/>
-          </a:prstGeom>
-          <a:noFill/>
-        </p:spPr>
-        <p:txBody>
-          <a:bodyPr wrap="square">
-            <a:spAutoFit/>
-          </a:bodyPr>
-          <a:lstStyle/>
-          <a:p>
-            <a:pPr algn="l"/>
-            <a:r>
-              <a:rPr sz="1000" b="0">
-                <a:solidFill>
-                  <a:srgbClr val="FFFFFF"/>
-                </a:solidFill>
-              </a:rPr>
-              <a:t>Relay Feeder IN</a:t>
-            </a:r>
-          </a:p>
-        </p:txBody>
-      </p:sp>
-      <p:sp>
-        <p:nvSpPr>
-          <p:cNvPr id="120" name="Rectangle 119"/>
-          <p:cNvSpPr/>
-          <p:nvPr/>
-        </p:nvSpPr>
-        <p:spPr>
-          <a:xfrm>
-            <a:off x="2835188" y="5877762"/>
-            <a:ext cx="1164031" cy="121615"/>
-          </a:xfrm>
-          <a:prstGeom prst="rect">
-            <a:avLst/>
-          </a:prstGeom>
-          <a:solidFill>
-            <a:srgbClr val="0F3460"/>
-          </a:solidFill>
-          <a:ln>
-            <a:noFill/>
-          </a:ln>
-        </p:spPr>
-        <p:style>
-          <a:lnRef idx="1">
-            <a:schemeClr val="accent1"/>
-          </a:lnRef>
-          <a:fillRef idx="3">
-            <a:schemeClr val="accent1"/>
-          </a:fillRef>
-          <a:effectRef idx="2">
-            <a:schemeClr val="accent1"/>
-          </a:effectRef>
-          <a:fontRef idx="minor">
-            <a:schemeClr val="lt1"/>
-          </a:fontRef>
-        </p:style>
-        <p:txBody>
-          <a:bodyPr rtlCol="0" anchor="ctr"/>
-          <a:lstStyle/>
-          <a:p>
-            <a:pPr algn="ctr"/>
-          </a:p>
-        </p:txBody>
-      </p:sp>
-      <p:sp>
-        <p:nvSpPr>
-          <p:cNvPr id="121" name="TextBox 120"/>
-          <p:cNvSpPr txBox="1"/>
-          <p:nvPr/>
-        </p:nvSpPr>
-        <p:spPr>
-          <a:xfrm>
-            <a:off x="2871764" y="5877762"/>
-            <a:ext cx="1164031" cy="121615"/>
-          </a:xfrm>
-          <a:prstGeom prst="rect">
-            <a:avLst/>
-          </a:prstGeom>
-          <a:noFill/>
-        </p:spPr>
-        <p:txBody>
-          <a:bodyPr wrap="square">
-            <a:spAutoFit/>
-          </a:bodyPr>
-          <a:lstStyle/>
-          <a:p>
-            <a:pPr algn="l"/>
-            <a:r>
-              <a:rPr sz="1000" b="0">
-                <a:solidFill>
-                  <a:srgbClr val="A8DADC"/>
-                </a:solidFill>
-              </a:rPr>
-              <a:t>GPIO25</a:t>
-            </a:r>
-          </a:p>
-        </p:txBody>
-      </p:sp>
-      <p:sp>
-        <p:nvSpPr>
-          <p:cNvPr id="122" name="Rectangle 121"/>
-          <p:cNvSpPr/>
-          <p:nvPr/>
-        </p:nvSpPr>
-        <p:spPr>
-          <a:xfrm>
-            <a:off x="3999219" y="5877762"/>
-            <a:ext cx="1164031" cy="121615"/>
-          </a:xfrm>
-          <a:prstGeom prst="rect">
-            <a:avLst/>
-          </a:prstGeom>
-          <a:solidFill>
-            <a:srgbClr val="0F3460"/>
-          </a:solidFill>
-          <a:ln>
-            <a:noFill/>
-          </a:ln>
-        </p:spPr>
-        <p:style>
-          <a:lnRef idx="1">
-            <a:schemeClr val="accent1"/>
-          </a:lnRef>
-          <a:fillRef idx="3">
-            <a:schemeClr val="accent1"/>
-          </a:fillRef>
-          <a:effectRef idx="2">
-            <a:schemeClr val="accent1"/>
-          </a:effectRef>
-          <a:fontRef idx="minor">
-            <a:schemeClr val="lt1"/>
-          </a:fontRef>
-        </p:style>
-        <p:txBody>
-          <a:bodyPr rtlCol="0" anchor="ctr"/>
-          <a:lstStyle/>
-          <a:p>
-            <a:pPr algn="ctr"/>
-          </a:p>
-        </p:txBody>
-      </p:sp>
-      <p:sp>
-        <p:nvSpPr>
-          <p:cNvPr id="123" name="TextBox 122"/>
-          <p:cNvSpPr txBox="1"/>
-          <p:nvPr/>
-        </p:nvSpPr>
-        <p:spPr>
-          <a:xfrm>
-            <a:off x="4035795" y="5877762"/>
-            <a:ext cx="1164031" cy="121615"/>
-          </a:xfrm>
-          <a:prstGeom prst="rect">
-            <a:avLst/>
-          </a:prstGeom>
-          <a:noFill/>
-        </p:spPr>
-        <p:txBody>
-          <a:bodyPr wrap="square">
-            <a:spAutoFit/>
-          </a:bodyPr>
-          <a:lstStyle/>
-          <a:p>
-            <a:pPr algn="l"/>
-            <a:r>
-              <a:rPr sz="1000" b="0">
-                <a:solidFill>
-                  <a:srgbClr val="FFFFFF"/>
-                </a:solidFill>
-              </a:rPr>
-              <a:t>GPIO</a:t>
-            </a:r>
-          </a:p>
-        </p:txBody>
-      </p:sp>
-      <p:sp>
-        <p:nvSpPr>
-          <p:cNvPr id="124" name="Rectangle 123"/>
-          <p:cNvSpPr/>
-          <p:nvPr/>
-        </p:nvSpPr>
-        <p:spPr>
-          <a:xfrm>
-            <a:off x="5163250" y="5877762"/>
-            <a:ext cx="1164031" cy="121615"/>
-          </a:xfrm>
-          <a:prstGeom prst="rect">
-            <a:avLst/>
-          </a:prstGeom>
-          <a:solidFill>
-            <a:srgbClr val="0F3460"/>
-          </a:solidFill>
-          <a:ln>
-            <a:noFill/>
-          </a:ln>
-        </p:spPr>
-        <p:style>
-          <a:lnRef idx="1">
-            <a:schemeClr val="accent1"/>
-          </a:lnRef>
-          <a:fillRef idx="3">
-            <a:schemeClr val="accent1"/>
-          </a:fillRef>
-          <a:effectRef idx="2">
-            <a:schemeClr val="accent1"/>
-          </a:effectRef>
-          <a:fontRef idx="minor">
-            <a:schemeClr val="lt1"/>
-          </a:fontRef>
-        </p:style>
-        <p:txBody>
-          <a:bodyPr rtlCol="0" anchor="ctr"/>
-          <a:lstStyle/>
-          <a:p>
-            <a:pPr algn="ctr"/>
-          </a:p>
-        </p:txBody>
-      </p:sp>
-      <p:sp>
-        <p:nvSpPr>
-          <p:cNvPr id="125" name="TextBox 124"/>
-          <p:cNvSpPr txBox="1"/>
-          <p:nvPr/>
-        </p:nvSpPr>
-        <p:spPr>
-          <a:xfrm>
-            <a:off x="5199826" y="5877762"/>
-            <a:ext cx="1164031" cy="121615"/>
-          </a:xfrm>
-          <a:prstGeom prst="rect">
-            <a:avLst/>
-          </a:prstGeom>
-          <a:noFill/>
-        </p:spPr>
-        <p:txBody>
-          <a:bodyPr wrap="square">
-            <a:spAutoFit/>
-          </a:bodyPr>
-          <a:lstStyle/>
-          <a:p>
-            <a:pPr algn="l"/>
-            <a:r>
-              <a:rPr sz="1000" b="0">
-                <a:solidFill>
-                  <a:srgbClr val="FFFFFF"/>
-                </a:solidFill>
-              </a:rPr>
-              <a:t>3.3V</a:t>
-            </a:r>
-          </a:p>
-        </p:txBody>
-      </p:sp>
-      <p:sp>
-        <p:nvSpPr>
-          <p:cNvPr id="126" name="Rectangle 125"/>
-          <p:cNvSpPr/>
-          <p:nvPr/>
-        </p:nvSpPr>
-        <p:spPr>
-          <a:xfrm>
-            <a:off x="6327281" y="5877762"/>
-            <a:ext cx="5587349" cy="121615"/>
-          </a:xfrm>
-          <a:prstGeom prst="rect">
-            <a:avLst/>
-          </a:prstGeom>
-          <a:solidFill>
-            <a:srgbClr val="0F3460"/>
-          </a:solidFill>
-          <a:ln>
-            <a:noFill/>
-          </a:ln>
-        </p:spPr>
-        <p:style>
-          <a:lnRef idx="1">
-            <a:schemeClr val="accent1"/>
-          </a:lnRef>
-          <a:fillRef idx="3">
-            <a:schemeClr val="accent1"/>
-          </a:fillRef>
-          <a:effectRef idx="2">
-            <a:schemeClr val="accent1"/>
-          </a:effectRef>
-          <a:fontRef idx="minor">
-            <a:schemeClr val="lt1"/>
-          </a:fontRef>
-        </p:style>
-        <p:txBody>
-          <a:bodyPr rtlCol="0" anchor="ctr"/>
-          <a:lstStyle/>
-          <a:p>
-            <a:pPr algn="ctr"/>
-          </a:p>
-        </p:txBody>
-      </p:sp>
-      <p:sp>
-        <p:nvSpPr>
-          <p:cNvPr id="127" name="TextBox 126"/>
-          <p:cNvSpPr txBox="1"/>
-          <p:nvPr/>
-        </p:nvSpPr>
-        <p:spPr>
-          <a:xfrm>
-            <a:off x="6363857" y="5877762"/>
-            <a:ext cx="5587349" cy="121615"/>
-          </a:xfrm>
-          <a:prstGeom prst="rect">
-            <a:avLst/>
-          </a:prstGeom>
-          <a:noFill/>
-        </p:spPr>
-        <p:txBody>
-          <a:bodyPr wrap="square">
-            <a:spAutoFit/>
-          </a:bodyPr>
-          <a:lstStyle/>
-          <a:p>
-            <a:pPr algn="l"/>
-            <a:r>
-              <a:rPr sz="1000" b="0">
-                <a:solidFill>
-                  <a:srgbClr val="AAAAAA"/>
-                </a:solidFill>
-              </a:rPr>
-              <a:t>active LOW</a:t>
-            </a:r>
-          </a:p>
-        </p:txBody>
-      </p:sp>
-      <p:sp>
-        <p:nvSpPr>
-          <p:cNvPr id="128" name="Rectangle 127"/>
-          <p:cNvSpPr/>
-          <p:nvPr/>
-        </p:nvSpPr>
-        <p:spPr>
-          <a:xfrm>
-            <a:off x="274320" y="5999377"/>
-            <a:ext cx="2560868" cy="121615"/>
-          </a:xfrm>
-          <a:prstGeom prst="rect">
-            <a:avLst/>
-          </a:prstGeom>
-          <a:solidFill>
-            <a:srgbClr val="16213E"/>
-          </a:solidFill>
-          <a:ln>
-            <a:noFill/>
-          </a:ln>
-        </p:spPr>
-        <p:style>
-          <a:lnRef idx="1">
-            <a:schemeClr val="accent1"/>
-          </a:lnRef>
-          <a:fillRef idx="3">
-            <a:schemeClr val="accent1"/>
-          </a:fillRef>
-          <a:effectRef idx="2">
-            <a:schemeClr val="accent1"/>
-          </a:effectRef>
-          <a:fontRef idx="minor">
-            <a:schemeClr val="lt1"/>
-          </a:fontRef>
-        </p:style>
-        <p:txBody>
-          <a:bodyPr rtlCol="0" anchor="ctr"/>
-          <a:lstStyle/>
-          <a:p>
-            <a:pPr algn="ctr"/>
-          </a:p>
-        </p:txBody>
-      </p:sp>
-      <p:sp>
-        <p:nvSpPr>
-          <p:cNvPr id="129" name="TextBox 128"/>
-          <p:cNvSpPr txBox="1"/>
-          <p:nvPr/>
-        </p:nvSpPr>
-        <p:spPr>
-          <a:xfrm>
-            <a:off x="310896" y="5999377"/>
-            <a:ext cx="2560868" cy="121615"/>
-          </a:xfrm>
-          <a:prstGeom prst="rect">
-            <a:avLst/>
-          </a:prstGeom>
-          <a:noFill/>
-        </p:spPr>
-        <p:txBody>
-          <a:bodyPr wrap="square">
-            <a:spAutoFit/>
-          </a:bodyPr>
-          <a:lstStyle/>
-          <a:p>
-            <a:pPr algn="l"/>
-            <a:r>
-              <a:rPr sz="1000" b="0">
-                <a:solidFill>
-                  <a:srgbClr val="FFFFFF"/>
-                </a:solidFill>
-              </a:rPr>
-              <a:t>Relay Igniter IN</a:t>
-            </a:r>
-          </a:p>
-        </p:txBody>
-      </p:sp>
-      <p:sp>
-        <p:nvSpPr>
-          <p:cNvPr id="130" name="Rectangle 129"/>
-          <p:cNvSpPr/>
-          <p:nvPr/>
-        </p:nvSpPr>
-        <p:spPr>
-          <a:xfrm>
-            <a:off x="2835188" y="5999377"/>
-            <a:ext cx="1164031" cy="121615"/>
-          </a:xfrm>
-          <a:prstGeom prst="rect">
-            <a:avLst/>
-          </a:prstGeom>
-          <a:solidFill>
-            <a:srgbClr val="16213E"/>
-          </a:solidFill>
-          <a:ln>
-            <a:noFill/>
-          </a:ln>
-        </p:spPr>
-        <p:style>
-          <a:lnRef idx="1">
-            <a:schemeClr val="accent1"/>
-          </a:lnRef>
-          <a:fillRef idx="3">
-            <a:schemeClr val="accent1"/>
-          </a:fillRef>
-          <a:effectRef idx="2">
-            <a:schemeClr val="accent1"/>
-          </a:effectRef>
-          <a:fontRef idx="minor">
-            <a:schemeClr val="lt1"/>
-          </a:fontRef>
-        </p:style>
-        <p:txBody>
-          <a:bodyPr rtlCol="0" anchor="ctr"/>
-          <a:lstStyle/>
-          <a:p>
-            <a:pPr algn="ctr"/>
-          </a:p>
-        </p:txBody>
-      </p:sp>
-      <p:sp>
-        <p:nvSpPr>
-          <p:cNvPr id="131" name="TextBox 130"/>
-          <p:cNvSpPr txBox="1"/>
-          <p:nvPr/>
-        </p:nvSpPr>
-        <p:spPr>
-          <a:xfrm>
-            <a:off x="2871764" y="5999377"/>
-            <a:ext cx="1164031" cy="121615"/>
-          </a:xfrm>
-          <a:prstGeom prst="rect">
-            <a:avLst/>
-          </a:prstGeom>
-          <a:noFill/>
-        </p:spPr>
-        <p:txBody>
-          <a:bodyPr wrap="square">
-            <a:spAutoFit/>
-          </a:bodyPr>
-          <a:lstStyle/>
-          <a:p>
-            <a:pPr algn="l"/>
-            <a:r>
-              <a:rPr sz="1000" b="0">
-                <a:solidFill>
-                  <a:srgbClr val="A8DADC"/>
-                </a:solidFill>
-              </a:rPr>
-              <a:t>GPIO26</a:t>
-            </a:r>
-          </a:p>
-        </p:txBody>
-      </p:sp>
-      <p:sp>
-        <p:nvSpPr>
-          <p:cNvPr id="132" name="Rectangle 131"/>
-          <p:cNvSpPr/>
-          <p:nvPr/>
-        </p:nvSpPr>
-        <p:spPr>
-          <a:xfrm>
-            <a:off x="3999219" y="5999377"/>
-            <a:ext cx="1164031" cy="121615"/>
-          </a:xfrm>
-          <a:prstGeom prst="rect">
-            <a:avLst/>
-          </a:prstGeom>
-          <a:solidFill>
-            <a:srgbClr val="16213E"/>
-          </a:solidFill>
-          <a:ln>
-            <a:noFill/>
-          </a:ln>
-        </p:spPr>
-        <p:style>
-          <a:lnRef idx="1">
-            <a:schemeClr val="accent1"/>
-          </a:lnRef>
-          <a:fillRef idx="3">
-            <a:schemeClr val="accent1"/>
-          </a:fillRef>
-          <a:effectRef idx="2">
-            <a:schemeClr val="accent1"/>
-          </a:effectRef>
-          <a:fontRef idx="minor">
-            <a:schemeClr val="lt1"/>
-          </a:fontRef>
-        </p:style>
-        <p:txBody>
-          <a:bodyPr rtlCol="0" anchor="ctr"/>
-          <a:lstStyle/>
-          <a:p>
-            <a:pPr algn="ctr"/>
-          </a:p>
-        </p:txBody>
-      </p:sp>
-      <p:sp>
-        <p:nvSpPr>
-          <p:cNvPr id="133" name="TextBox 132"/>
-          <p:cNvSpPr txBox="1"/>
-          <p:nvPr/>
-        </p:nvSpPr>
-        <p:spPr>
-          <a:xfrm>
-            <a:off x="4035795" y="5999377"/>
-            <a:ext cx="1164031" cy="121615"/>
-          </a:xfrm>
-          <a:prstGeom prst="rect">
-            <a:avLst/>
-          </a:prstGeom>
-          <a:noFill/>
-        </p:spPr>
-        <p:txBody>
-          <a:bodyPr wrap="square">
-            <a:spAutoFit/>
-          </a:bodyPr>
-          <a:lstStyle/>
-          <a:p>
-            <a:pPr algn="l"/>
-            <a:r>
-              <a:rPr sz="1000" b="0">
-                <a:solidFill>
-                  <a:srgbClr val="FFFFFF"/>
-                </a:solidFill>
-              </a:rPr>
-              <a:t>GPIO</a:t>
-            </a:r>
-          </a:p>
-        </p:txBody>
-      </p:sp>
-      <p:sp>
-        <p:nvSpPr>
-          <p:cNvPr id="134" name="Rectangle 133"/>
-          <p:cNvSpPr/>
-          <p:nvPr/>
-        </p:nvSpPr>
-        <p:spPr>
-          <a:xfrm>
-            <a:off x="5163250" y="5999377"/>
-            <a:ext cx="1164031" cy="121615"/>
-          </a:xfrm>
-          <a:prstGeom prst="rect">
-            <a:avLst/>
-          </a:prstGeom>
-          <a:solidFill>
-            <a:srgbClr val="16213E"/>
-          </a:solidFill>
-          <a:ln>
-            <a:noFill/>
-          </a:ln>
-        </p:spPr>
-        <p:style>
-          <a:lnRef idx="1">
-            <a:schemeClr val="accent1"/>
-          </a:lnRef>
-          <a:fillRef idx="3">
-            <a:schemeClr val="accent1"/>
-          </a:fillRef>
-          <a:effectRef idx="2">
-            <a:schemeClr val="accent1"/>
-          </a:effectRef>
-          <a:fontRef idx="minor">
-            <a:schemeClr val="lt1"/>
-          </a:fontRef>
-        </p:style>
-        <p:txBody>
-          <a:bodyPr rtlCol="0" anchor="ctr"/>
-          <a:lstStyle/>
-          <a:p>
-            <a:pPr algn="ctr"/>
-          </a:p>
-        </p:txBody>
-      </p:sp>
-      <p:sp>
-        <p:nvSpPr>
-          <p:cNvPr id="135" name="TextBox 134"/>
-          <p:cNvSpPr txBox="1"/>
-          <p:nvPr/>
-        </p:nvSpPr>
-        <p:spPr>
-          <a:xfrm>
-            <a:off x="5199826" y="5999377"/>
-            <a:ext cx="1164031" cy="121615"/>
-          </a:xfrm>
-          <a:prstGeom prst="rect">
-            <a:avLst/>
-          </a:prstGeom>
-          <a:noFill/>
-        </p:spPr>
-        <p:txBody>
-          <a:bodyPr wrap="square">
-            <a:spAutoFit/>
-          </a:bodyPr>
-          <a:lstStyle/>
-          <a:p>
-            <a:pPr algn="l"/>
-            <a:r>
-              <a:rPr sz="1000" b="0">
-                <a:solidFill>
-                  <a:srgbClr val="FFFFFF"/>
-                </a:solidFill>
-              </a:rPr>
-              <a:t>3.3V</a:t>
-            </a:r>
-          </a:p>
-        </p:txBody>
-      </p:sp>
-      <p:sp>
-        <p:nvSpPr>
-          <p:cNvPr id="136" name="Rectangle 135"/>
-          <p:cNvSpPr/>
-          <p:nvPr/>
-        </p:nvSpPr>
-        <p:spPr>
-          <a:xfrm>
-            <a:off x="6327281" y="5999377"/>
-            <a:ext cx="5587349" cy="121615"/>
-          </a:xfrm>
-          <a:prstGeom prst="rect">
-            <a:avLst/>
-          </a:prstGeom>
-          <a:solidFill>
-            <a:srgbClr val="16213E"/>
-          </a:solidFill>
-          <a:ln>
-            <a:noFill/>
-          </a:ln>
-        </p:spPr>
-        <p:style>
-          <a:lnRef idx="1">
-            <a:schemeClr val="accent1"/>
-          </a:lnRef>
-          <a:fillRef idx="3">
-            <a:schemeClr val="accent1"/>
-          </a:fillRef>
-          <a:effectRef idx="2">
-            <a:schemeClr val="accent1"/>
-          </a:effectRef>
-          <a:fontRef idx="minor">
-            <a:schemeClr val="lt1"/>
-          </a:fontRef>
-        </p:style>
-        <p:txBody>
-          <a:bodyPr rtlCol="0" anchor="ctr"/>
-          <a:lstStyle/>
-          <a:p>
-            <a:pPr algn="ctr"/>
-          </a:p>
-        </p:txBody>
-      </p:sp>
-      <p:sp>
-        <p:nvSpPr>
-          <p:cNvPr id="137" name="TextBox 136"/>
-          <p:cNvSpPr txBox="1"/>
-          <p:nvPr/>
-        </p:nvSpPr>
-        <p:spPr>
-          <a:xfrm>
-            <a:off x="6363857" y="5999377"/>
-            <a:ext cx="5587349" cy="121615"/>
-          </a:xfrm>
-          <a:prstGeom prst="rect">
-            <a:avLst/>
-          </a:prstGeom>
-          <a:noFill/>
-        </p:spPr>
-        <p:txBody>
-          <a:bodyPr wrap="square">
-            <a:spAutoFit/>
-          </a:bodyPr>
-          <a:lstStyle/>
-          <a:p>
-            <a:pPr algn="l"/>
-            <a:r>
-              <a:rPr sz="1000" b="0">
-                <a:solidFill>
-                  <a:srgbClr val="AAAAAA"/>
-                </a:solidFill>
-              </a:rPr>
-              <a:t>active LOW</a:t>
-            </a:r>
-          </a:p>
-        </p:txBody>
-      </p:sp>
-      <p:sp>
-        <p:nvSpPr>
-          <p:cNvPr id="138" name="Rectangle 137"/>
-          <p:cNvSpPr/>
-          <p:nvPr/>
-        </p:nvSpPr>
-        <p:spPr>
-          <a:xfrm>
-            <a:off x="274320" y="6120992"/>
-            <a:ext cx="2560868" cy="121615"/>
-          </a:xfrm>
-          <a:prstGeom prst="rect">
-            <a:avLst/>
-          </a:prstGeom>
-          <a:solidFill>
-            <a:srgbClr val="0F3460"/>
-          </a:solidFill>
-          <a:ln>
-            <a:noFill/>
-          </a:ln>
-        </p:spPr>
-        <p:style>
-          <a:lnRef idx="1">
-            <a:schemeClr val="accent1"/>
-          </a:lnRef>
-          <a:fillRef idx="3">
-            <a:schemeClr val="accent1"/>
-          </a:fillRef>
-          <a:effectRef idx="2">
-            <a:schemeClr val="accent1"/>
-          </a:effectRef>
-          <a:fontRef idx="minor">
-            <a:schemeClr val="lt1"/>
-          </a:fontRef>
-        </p:style>
-        <p:txBody>
-          <a:bodyPr rtlCol="0" anchor="ctr"/>
-          <a:lstStyle/>
-          <a:p>
-            <a:pPr algn="ctr"/>
-          </a:p>
-        </p:txBody>
-      </p:sp>
-      <p:sp>
-        <p:nvSpPr>
-          <p:cNvPr id="139" name="TextBox 138"/>
-          <p:cNvSpPr txBox="1"/>
-          <p:nvPr/>
-        </p:nvSpPr>
-        <p:spPr>
-          <a:xfrm>
-            <a:off x="310896" y="6120992"/>
-            <a:ext cx="2560868" cy="121615"/>
-          </a:xfrm>
-          <a:prstGeom prst="rect">
-            <a:avLst/>
-          </a:prstGeom>
-          <a:noFill/>
-        </p:spPr>
-        <p:txBody>
-          <a:bodyPr wrap="square">
-            <a:spAutoFit/>
-          </a:bodyPr>
-          <a:lstStyle/>
-          <a:p>
-            <a:pPr algn="l"/>
-            <a:r>
-              <a:rPr sz="1000" b="0">
-                <a:solidFill>
-                  <a:srgbClr val="FFFFFF"/>
-                </a:solidFill>
-              </a:rPr>
-              <a:t>Relay Pump IN</a:t>
-            </a:r>
-          </a:p>
-        </p:txBody>
-      </p:sp>
-      <p:sp>
-        <p:nvSpPr>
-          <p:cNvPr id="140" name="Rectangle 139"/>
-          <p:cNvSpPr/>
-          <p:nvPr/>
-        </p:nvSpPr>
-        <p:spPr>
-          <a:xfrm>
-            <a:off x="2835188" y="6120992"/>
-            <a:ext cx="1164031" cy="121615"/>
-          </a:xfrm>
-          <a:prstGeom prst="rect">
-            <a:avLst/>
-          </a:prstGeom>
-          <a:solidFill>
-            <a:srgbClr val="0F3460"/>
-          </a:solidFill>
-          <a:ln>
-            <a:noFill/>
-          </a:ln>
-        </p:spPr>
-        <p:style>
-          <a:lnRef idx="1">
-            <a:schemeClr val="accent1"/>
-          </a:lnRef>
-          <a:fillRef idx="3">
-            <a:schemeClr val="accent1"/>
-          </a:fillRef>
-          <a:effectRef idx="2">
-            <a:schemeClr val="accent1"/>
-          </a:effectRef>
-          <a:fontRef idx="minor">
-            <a:schemeClr val="lt1"/>
-          </a:fontRef>
-        </p:style>
-        <p:txBody>
-          <a:bodyPr rtlCol="0" anchor="ctr"/>
-          <a:lstStyle/>
-          <a:p>
-            <a:pPr algn="ctr"/>
-          </a:p>
-        </p:txBody>
-      </p:sp>
-      <p:sp>
-        <p:nvSpPr>
-          <p:cNvPr id="141" name="TextBox 140"/>
-          <p:cNvSpPr txBox="1"/>
-          <p:nvPr/>
-        </p:nvSpPr>
-        <p:spPr>
-          <a:xfrm>
-            <a:off x="2871764" y="6120992"/>
-            <a:ext cx="1164031" cy="121615"/>
-          </a:xfrm>
-          <a:prstGeom prst="rect">
-            <a:avLst/>
-          </a:prstGeom>
-          <a:noFill/>
-        </p:spPr>
-        <p:txBody>
-          <a:bodyPr wrap="square">
-            <a:spAutoFit/>
-          </a:bodyPr>
-          <a:lstStyle/>
-          <a:p>
-            <a:pPr algn="l"/>
-            <a:r>
-              <a:rPr sz="1000" b="0">
-                <a:solidFill>
-                  <a:srgbClr val="A8DADC"/>
-                </a:solidFill>
-              </a:rPr>
-              <a:t>GPIO27</a:t>
-            </a:r>
-          </a:p>
-        </p:txBody>
-      </p:sp>
-      <p:sp>
-        <p:nvSpPr>
-          <p:cNvPr id="142" name="Rectangle 141"/>
-          <p:cNvSpPr/>
-          <p:nvPr/>
-        </p:nvSpPr>
-        <p:spPr>
-          <a:xfrm>
-            <a:off x="3999219" y="6120992"/>
-            <a:ext cx="1164031" cy="121615"/>
-          </a:xfrm>
-          <a:prstGeom prst="rect">
-            <a:avLst/>
-          </a:prstGeom>
-          <a:solidFill>
-            <a:srgbClr val="0F3460"/>
-          </a:solidFill>
-          <a:ln>
-            <a:noFill/>
-          </a:ln>
-        </p:spPr>
-        <p:style>
-          <a:lnRef idx="1">
-            <a:schemeClr val="accent1"/>
-          </a:lnRef>
-          <a:fillRef idx="3">
-            <a:schemeClr val="accent1"/>
-          </a:fillRef>
-          <a:effectRef idx="2">
-            <a:schemeClr val="accent1"/>
-          </a:effectRef>
-          <a:fontRef idx="minor">
-            <a:schemeClr val="lt1"/>
-          </a:fontRef>
-        </p:style>
-        <p:txBody>
-          <a:bodyPr rtlCol="0" anchor="ctr"/>
-          <a:lstStyle/>
-          <a:p>
-            <a:pPr algn="ctr"/>
-          </a:p>
-        </p:txBody>
-      </p:sp>
-      <p:sp>
-        <p:nvSpPr>
-          <p:cNvPr id="143" name="TextBox 142"/>
-          <p:cNvSpPr txBox="1"/>
-          <p:nvPr/>
-        </p:nvSpPr>
-        <p:spPr>
-          <a:xfrm>
-            <a:off x="4035795" y="6120992"/>
-            <a:ext cx="1164031" cy="121615"/>
-          </a:xfrm>
-          <a:prstGeom prst="rect">
-            <a:avLst/>
-          </a:prstGeom>
-          <a:noFill/>
-        </p:spPr>
-        <p:txBody>
-          <a:bodyPr wrap="square">
-            <a:spAutoFit/>
-          </a:bodyPr>
-          <a:lstStyle/>
-          <a:p>
-            <a:pPr algn="l"/>
-            <a:r>
-              <a:rPr sz="1000" b="0">
-                <a:solidFill>
-                  <a:srgbClr val="FFFFFF"/>
-                </a:solidFill>
-              </a:rPr>
-              <a:t>GPIO</a:t>
-            </a:r>
-          </a:p>
-        </p:txBody>
-      </p:sp>
-      <p:sp>
-        <p:nvSpPr>
-          <p:cNvPr id="144" name="Rectangle 143"/>
-          <p:cNvSpPr/>
-          <p:nvPr/>
-        </p:nvSpPr>
-        <p:spPr>
-          <a:xfrm>
-            <a:off x="5163250" y="6120992"/>
-            <a:ext cx="1164031" cy="121615"/>
-          </a:xfrm>
-          <a:prstGeom prst="rect">
-            <a:avLst/>
-          </a:prstGeom>
-          <a:solidFill>
-            <a:srgbClr val="0F3460"/>
-          </a:solidFill>
-          <a:ln>
-            <a:noFill/>
-          </a:ln>
-        </p:spPr>
-        <p:style>
-          <a:lnRef idx="1">
-            <a:schemeClr val="accent1"/>
-          </a:lnRef>
-          <a:fillRef idx="3">
-            <a:schemeClr val="accent1"/>
-          </a:fillRef>
-          <a:effectRef idx="2">
-            <a:schemeClr val="accent1"/>
-          </a:effectRef>
-          <a:fontRef idx="minor">
-            <a:schemeClr val="lt1"/>
-          </a:fontRef>
-        </p:style>
-        <p:txBody>
-          <a:bodyPr rtlCol="0" anchor="ctr"/>
-          <a:lstStyle/>
-          <a:p>
-            <a:pPr algn="ctr"/>
-          </a:p>
-        </p:txBody>
-      </p:sp>
-      <p:sp>
-        <p:nvSpPr>
-          <p:cNvPr id="145" name="TextBox 144"/>
-          <p:cNvSpPr txBox="1"/>
-          <p:nvPr/>
-        </p:nvSpPr>
-        <p:spPr>
-          <a:xfrm>
-            <a:off x="5199826" y="6120992"/>
-            <a:ext cx="1164031" cy="121615"/>
-          </a:xfrm>
-          <a:prstGeom prst="rect">
-            <a:avLst/>
-          </a:prstGeom>
-          <a:noFill/>
-        </p:spPr>
-        <p:txBody>
-          <a:bodyPr wrap="square">
-            <a:spAutoFit/>
-          </a:bodyPr>
-          <a:lstStyle/>
-          <a:p>
-            <a:pPr algn="l"/>
-            <a:r>
-              <a:rPr sz="1000" b="0">
-                <a:solidFill>
-                  <a:srgbClr val="FFFFFF"/>
-                </a:solidFill>
-              </a:rPr>
-              <a:t>3.3V</a:t>
-            </a:r>
-          </a:p>
-        </p:txBody>
-      </p:sp>
-      <p:sp>
-        <p:nvSpPr>
-          <p:cNvPr id="146" name="Rectangle 145"/>
-          <p:cNvSpPr/>
-          <p:nvPr/>
-        </p:nvSpPr>
-        <p:spPr>
-          <a:xfrm>
-            <a:off x="6327281" y="6120992"/>
-            <a:ext cx="5587349" cy="121615"/>
-          </a:xfrm>
-          <a:prstGeom prst="rect">
-            <a:avLst/>
-          </a:prstGeom>
-          <a:solidFill>
-            <a:srgbClr val="0F3460"/>
-          </a:solidFill>
-          <a:ln>
-            <a:noFill/>
-          </a:ln>
-        </p:spPr>
-        <p:style>
-          <a:lnRef idx="1">
-            <a:schemeClr val="accent1"/>
-          </a:lnRef>
-          <a:fillRef idx="3">
-            <a:schemeClr val="accent1"/>
-          </a:fillRef>
-          <a:effectRef idx="2">
-            <a:schemeClr val="accent1"/>
-          </a:effectRef>
-          <a:fontRef idx="minor">
-            <a:schemeClr val="lt1"/>
-          </a:fontRef>
-        </p:style>
-        <p:txBody>
-          <a:bodyPr rtlCol="0" anchor="ctr"/>
-          <a:lstStyle/>
-          <a:p>
-            <a:pPr algn="ctr"/>
-          </a:p>
-        </p:txBody>
-      </p:sp>
-      <p:sp>
-        <p:nvSpPr>
-          <p:cNvPr id="147" name="TextBox 146"/>
-          <p:cNvSpPr txBox="1"/>
-          <p:nvPr/>
-        </p:nvSpPr>
-        <p:spPr>
-          <a:xfrm>
-            <a:off x="6363857" y="6120992"/>
-            <a:ext cx="5587349" cy="121615"/>
-          </a:xfrm>
-          <a:prstGeom prst="rect">
-            <a:avLst/>
-          </a:prstGeom>
-          <a:noFill/>
-        </p:spPr>
-        <p:txBody>
-          <a:bodyPr wrap="square">
-            <a:spAutoFit/>
-          </a:bodyPr>
-          <a:lstStyle/>
-          <a:p>
-            <a:pPr algn="l"/>
-            <a:r>
-              <a:rPr sz="1000" b="0">
-                <a:solidFill>
-                  <a:srgbClr val="AAAAAA"/>
-                </a:solidFill>
-              </a:rPr>
-              <a:t>active LOW</a:t>
-            </a:r>
-          </a:p>
-        </p:txBody>
-      </p:sp>
-      <p:sp>
-        <p:nvSpPr>
-          <p:cNvPr id="148" name="Rectangle 147"/>
-          <p:cNvSpPr/>
-          <p:nvPr/>
-        </p:nvSpPr>
-        <p:spPr>
-          <a:xfrm>
-            <a:off x="274320" y="6242607"/>
-            <a:ext cx="2560868" cy="121615"/>
-          </a:xfrm>
-          <a:prstGeom prst="rect">
-            <a:avLst/>
-          </a:prstGeom>
-          <a:solidFill>
-            <a:srgbClr val="16213E"/>
-          </a:solidFill>
-          <a:ln>
-            <a:noFill/>
-          </a:ln>
-        </p:spPr>
-        <p:style>
-          <a:lnRef idx="1">
-            <a:schemeClr val="accent1"/>
-          </a:lnRef>
-          <a:fillRef idx="3">
-            <a:schemeClr val="accent1"/>
-          </a:fillRef>
-          <a:effectRef idx="2">
-            <a:schemeClr val="accent1"/>
-          </a:effectRef>
-          <a:fontRef idx="minor">
-            <a:schemeClr val="lt1"/>
-          </a:fontRef>
-        </p:style>
-        <p:txBody>
-          <a:bodyPr rtlCol="0" anchor="ctr"/>
-          <a:lstStyle/>
-          <a:p>
-            <a:pPr algn="ctr"/>
-          </a:p>
-        </p:txBody>
-      </p:sp>
-      <p:sp>
-        <p:nvSpPr>
-          <p:cNvPr id="149" name="TextBox 148"/>
-          <p:cNvSpPr txBox="1"/>
-          <p:nvPr/>
-        </p:nvSpPr>
-        <p:spPr>
-          <a:xfrm>
-            <a:off x="310896" y="6242607"/>
-            <a:ext cx="2560868" cy="121615"/>
-          </a:xfrm>
-          <a:prstGeom prst="rect">
-            <a:avLst/>
-          </a:prstGeom>
-          <a:noFill/>
-        </p:spPr>
-        <p:txBody>
-          <a:bodyPr wrap="square">
-            <a:spAutoFit/>
-          </a:bodyPr>
-          <a:lstStyle/>
-          <a:p>
-            <a:pPr algn="l"/>
-            <a:r>
-              <a:rPr sz="1000" b="0">
-                <a:solidFill>
-                  <a:srgbClr val="FFFFFF"/>
-                </a:solidFill>
-              </a:rPr>
-              <a:t>TRIAC gate</a:t>
-            </a:r>
-          </a:p>
-        </p:txBody>
-      </p:sp>
-      <p:sp>
-        <p:nvSpPr>
-          <p:cNvPr id="150" name="Rectangle 149"/>
-          <p:cNvSpPr/>
-          <p:nvPr/>
-        </p:nvSpPr>
-        <p:spPr>
-          <a:xfrm>
-            <a:off x="2835188" y="6242607"/>
-            <a:ext cx="1164031" cy="121615"/>
-          </a:xfrm>
-          <a:prstGeom prst="rect">
-            <a:avLst/>
-          </a:prstGeom>
-          <a:solidFill>
-            <a:srgbClr val="16213E"/>
-          </a:solidFill>
-          <a:ln>
-            <a:noFill/>
-          </a:ln>
-        </p:spPr>
-        <p:style>
-          <a:lnRef idx="1">
-            <a:schemeClr val="accent1"/>
-          </a:lnRef>
-          <a:fillRef idx="3">
-            <a:schemeClr val="accent1"/>
-          </a:fillRef>
-          <a:effectRef idx="2">
-            <a:schemeClr val="accent1"/>
-          </a:effectRef>
-          <a:fontRef idx="minor">
-            <a:schemeClr val="lt1"/>
-          </a:fontRef>
-        </p:style>
-        <p:txBody>
-          <a:bodyPr rtlCol="0" anchor="ctr"/>
-          <a:lstStyle/>
-          <a:p>
-            <a:pPr algn="ctr"/>
-          </a:p>
-        </p:txBody>
-      </p:sp>
-      <p:sp>
-        <p:nvSpPr>
-          <p:cNvPr id="151" name="TextBox 150"/>
-          <p:cNvSpPr txBox="1"/>
-          <p:nvPr/>
-        </p:nvSpPr>
-        <p:spPr>
-          <a:xfrm>
-            <a:off x="2871764" y="6242607"/>
-            <a:ext cx="1164031" cy="121615"/>
-          </a:xfrm>
-          <a:prstGeom prst="rect">
-            <a:avLst/>
-          </a:prstGeom>
-          <a:noFill/>
-        </p:spPr>
-        <p:txBody>
-          <a:bodyPr wrap="square">
-            <a:spAutoFit/>
-          </a:bodyPr>
-          <a:lstStyle/>
-          <a:p>
-            <a:pPr algn="l"/>
-            <a:r>
-              <a:rPr sz="1000" b="0">
-                <a:solidFill>
-                  <a:srgbClr val="A8DADC"/>
-                </a:solidFill>
-              </a:rPr>
-              <a:t>GPIO33</a:t>
-            </a:r>
-          </a:p>
-        </p:txBody>
-      </p:sp>
-      <p:sp>
-        <p:nvSpPr>
-          <p:cNvPr id="152" name="Rectangle 151"/>
-          <p:cNvSpPr/>
-          <p:nvPr/>
-        </p:nvSpPr>
-        <p:spPr>
-          <a:xfrm>
-            <a:off x="3999219" y="6242607"/>
-            <a:ext cx="1164031" cy="121615"/>
-          </a:xfrm>
-          <a:prstGeom prst="rect">
-            <a:avLst/>
-          </a:prstGeom>
-          <a:solidFill>
-            <a:srgbClr val="16213E"/>
-          </a:solidFill>
-          <a:ln>
-            <a:noFill/>
-          </a:ln>
-        </p:spPr>
-        <p:style>
-          <a:lnRef idx="1">
-            <a:schemeClr val="accent1"/>
-          </a:lnRef>
-          <a:fillRef idx="3">
-            <a:schemeClr val="accent1"/>
-          </a:fillRef>
-          <a:effectRef idx="2">
-            <a:schemeClr val="accent1"/>
-          </a:effectRef>
-          <a:fontRef idx="minor">
-            <a:schemeClr val="lt1"/>
-          </a:fontRef>
-        </p:style>
-        <p:txBody>
-          <a:bodyPr rtlCol="0" anchor="ctr"/>
-          <a:lstStyle/>
-          <a:p>
-            <a:pPr algn="ctr"/>
-          </a:p>
-        </p:txBody>
-      </p:sp>
-      <p:sp>
-        <p:nvSpPr>
-          <p:cNvPr id="153" name="TextBox 152"/>
-          <p:cNvSpPr txBox="1"/>
-          <p:nvPr/>
-        </p:nvSpPr>
-        <p:spPr>
-          <a:xfrm>
-            <a:off x="4035795" y="6242607"/>
-            <a:ext cx="1164031" cy="121615"/>
-          </a:xfrm>
-          <a:prstGeom prst="rect">
-            <a:avLst/>
-          </a:prstGeom>
-          <a:noFill/>
-        </p:spPr>
-        <p:txBody>
-          <a:bodyPr wrap="square">
-            <a:spAutoFit/>
-          </a:bodyPr>
-          <a:lstStyle/>
-          <a:p>
-            <a:pPr algn="l"/>
-            <a:r>
-              <a:rPr sz="1000" b="0">
-                <a:solidFill>
-                  <a:srgbClr val="FFFFFF"/>
-                </a:solidFill>
-              </a:rPr>
-              <a:t>GPIO</a:t>
-            </a:r>
-          </a:p>
-        </p:txBody>
-      </p:sp>
-      <p:sp>
-        <p:nvSpPr>
-          <p:cNvPr id="154" name="Rectangle 153"/>
-          <p:cNvSpPr/>
-          <p:nvPr/>
-        </p:nvSpPr>
-        <p:spPr>
-          <a:xfrm>
-            <a:off x="5163250" y="6242607"/>
-            <a:ext cx="1164031" cy="121615"/>
-          </a:xfrm>
-          <a:prstGeom prst="rect">
-            <a:avLst/>
-          </a:prstGeom>
-          <a:solidFill>
-            <a:srgbClr val="16213E"/>
-          </a:solidFill>
-          <a:ln>
-            <a:noFill/>
-          </a:ln>
-        </p:spPr>
-        <p:style>
-          <a:lnRef idx="1">
-            <a:schemeClr val="accent1"/>
-          </a:lnRef>
-          <a:fillRef idx="3">
-            <a:schemeClr val="accent1"/>
-          </a:fillRef>
-          <a:effectRef idx="2">
-            <a:schemeClr val="accent1"/>
-          </a:effectRef>
-          <a:fontRef idx="minor">
-            <a:schemeClr val="lt1"/>
-          </a:fontRef>
-        </p:style>
-        <p:txBody>
-          <a:bodyPr rtlCol="0" anchor="ctr"/>
-          <a:lstStyle/>
-          <a:p>
-            <a:pPr algn="ctr"/>
-          </a:p>
-        </p:txBody>
-      </p:sp>
-      <p:sp>
-        <p:nvSpPr>
-          <p:cNvPr id="155" name="TextBox 154"/>
-          <p:cNvSpPr txBox="1"/>
-          <p:nvPr/>
-        </p:nvSpPr>
-        <p:spPr>
-          <a:xfrm>
-            <a:off x="5199826" y="6242607"/>
-            <a:ext cx="1164031" cy="121615"/>
-          </a:xfrm>
-          <a:prstGeom prst="rect">
-            <a:avLst/>
-          </a:prstGeom>
-          <a:noFill/>
-        </p:spPr>
-        <p:txBody>
-          <a:bodyPr wrap="square">
-            <a:spAutoFit/>
-          </a:bodyPr>
-          <a:lstStyle/>
-          <a:p>
-            <a:pPr algn="l"/>
-            <a:r>
-              <a:rPr sz="1000" b="0">
-                <a:solidFill>
-                  <a:srgbClr val="FFFFFF"/>
-                </a:solidFill>
-              </a:rPr>
-              <a:t>3.3V</a:t>
-            </a:r>
-          </a:p>
-        </p:txBody>
-      </p:sp>
-      <p:sp>
-        <p:nvSpPr>
-          <p:cNvPr id="156" name="Rectangle 155"/>
-          <p:cNvSpPr/>
-          <p:nvPr/>
-        </p:nvSpPr>
-        <p:spPr>
-          <a:xfrm>
-            <a:off x="6327281" y="6242607"/>
-            <a:ext cx="5587349" cy="121615"/>
-          </a:xfrm>
-          <a:prstGeom prst="rect">
-            <a:avLst/>
-          </a:prstGeom>
-          <a:solidFill>
-            <a:srgbClr val="16213E"/>
-          </a:solidFill>
-          <a:ln>
-            <a:noFill/>
-          </a:ln>
-        </p:spPr>
-        <p:style>
-          <a:lnRef idx="1">
-            <a:schemeClr val="accent1"/>
-          </a:lnRef>
-          <a:fillRef idx="3">
-            <a:schemeClr val="accent1"/>
-          </a:fillRef>
-          <a:effectRef idx="2">
-            <a:schemeClr val="accent1"/>
-          </a:effectRef>
-          <a:fontRef idx="minor">
-            <a:schemeClr val="lt1"/>
-          </a:fontRef>
-        </p:style>
-        <p:txBody>
-          <a:bodyPr rtlCol="0" anchor="ctr"/>
-          <a:lstStyle/>
-          <a:p>
-            <a:pPr algn="ctr"/>
-          </a:p>
-        </p:txBody>
-      </p:sp>
-      <p:sp>
-        <p:nvSpPr>
-          <p:cNvPr id="157" name="TextBox 156"/>
-          <p:cNvSpPr txBox="1"/>
-          <p:nvPr/>
-        </p:nvSpPr>
-        <p:spPr>
-          <a:xfrm>
-            <a:off x="6363857" y="6242607"/>
-            <a:ext cx="5587349" cy="121615"/>
-          </a:xfrm>
-          <a:prstGeom prst="rect">
-            <a:avLst/>
-          </a:prstGeom>
-          <a:noFill/>
-        </p:spPr>
-        <p:txBody>
-          <a:bodyPr wrap="square">
-            <a:spAutoFit/>
-          </a:bodyPr>
-          <a:lstStyle/>
-          <a:p>
-            <a:pPr algn="l"/>
-            <a:r>
-              <a:rPr sz="1000" b="0">
-                <a:solidFill>
-                  <a:srgbClr val="AAAAAA"/>
-                </a:solidFill>
-              </a:rPr>
-              <a:t>330Ω + MOC3021</a:t>
-            </a:r>
-          </a:p>
-        </p:txBody>
-      </p:sp>
-      <p:sp>
-        <p:nvSpPr>
-          <p:cNvPr id="158" name="Rectangle 157"/>
-          <p:cNvSpPr/>
-          <p:nvPr/>
-        </p:nvSpPr>
-        <p:spPr>
-          <a:xfrm>
-            <a:off x="274320" y="6364222"/>
-            <a:ext cx="2560868" cy="121615"/>
-          </a:xfrm>
-          <a:prstGeom prst="rect">
-            <a:avLst/>
-          </a:prstGeom>
-          <a:solidFill>
-            <a:srgbClr val="0F3460"/>
-          </a:solidFill>
-          <a:ln>
-            <a:noFill/>
-          </a:ln>
-        </p:spPr>
-        <p:style>
-          <a:lnRef idx="1">
-            <a:schemeClr val="accent1"/>
-          </a:lnRef>
-          <a:fillRef idx="3">
-            <a:schemeClr val="accent1"/>
-          </a:fillRef>
-          <a:effectRef idx="2">
-            <a:schemeClr val="accent1"/>
-          </a:effectRef>
-          <a:fontRef idx="minor">
-            <a:schemeClr val="lt1"/>
-          </a:fontRef>
-        </p:style>
-        <p:txBody>
-          <a:bodyPr rtlCol="0" anchor="ctr"/>
-          <a:lstStyle/>
-          <a:p>
-            <a:pPr algn="ctr"/>
-          </a:p>
-        </p:txBody>
-      </p:sp>
-      <p:sp>
-        <p:nvSpPr>
-          <p:cNvPr id="159" name="TextBox 158"/>
-          <p:cNvSpPr txBox="1"/>
-          <p:nvPr/>
-        </p:nvSpPr>
-        <p:spPr>
-          <a:xfrm>
-            <a:off x="310896" y="6364222"/>
-            <a:ext cx="2560868" cy="121615"/>
-          </a:xfrm>
-          <a:prstGeom prst="rect">
-            <a:avLst/>
-          </a:prstGeom>
-          <a:noFill/>
-        </p:spPr>
-        <p:txBody>
-          <a:bodyPr wrap="square">
-            <a:spAutoFit/>
-          </a:bodyPr>
-          <a:lstStyle/>
-          <a:p>
-            <a:pPr algn="l"/>
-            <a:r>
-              <a:rPr sz="1000" b="0">
-                <a:solidFill>
-                  <a:srgbClr val="FFFFFF"/>
-                </a:solidFill>
-              </a:rPr>
-              <a:t>Zero-cross detect</a:t>
-            </a:r>
-          </a:p>
-        </p:txBody>
-      </p:sp>
-      <p:sp>
-        <p:nvSpPr>
-          <p:cNvPr id="160" name="Rectangle 159"/>
-          <p:cNvSpPr/>
-          <p:nvPr/>
-        </p:nvSpPr>
-        <p:spPr>
-          <a:xfrm>
-            <a:off x="2835188" y="6364222"/>
-            <a:ext cx="1164031" cy="121615"/>
-          </a:xfrm>
-          <a:prstGeom prst="rect">
-            <a:avLst/>
-          </a:prstGeom>
-          <a:solidFill>
-            <a:srgbClr val="0F3460"/>
-          </a:solidFill>
-          <a:ln>
-            <a:noFill/>
-          </a:ln>
-        </p:spPr>
-        <p:style>
-          <a:lnRef idx="1">
-            <a:schemeClr val="accent1"/>
-          </a:lnRef>
-          <a:fillRef idx="3">
-            <a:schemeClr val="accent1"/>
-          </a:fillRef>
-          <a:effectRef idx="2">
-            <a:schemeClr val="accent1"/>
-          </a:effectRef>
-          <a:fontRef idx="minor">
-            <a:schemeClr val="lt1"/>
-          </a:fontRef>
-        </p:style>
-        <p:txBody>
-          <a:bodyPr rtlCol="0" anchor="ctr"/>
-          <a:lstStyle/>
-          <a:p>
-            <a:pPr algn="ctr"/>
-          </a:p>
-        </p:txBody>
-      </p:sp>
-      <p:sp>
-        <p:nvSpPr>
-          <p:cNvPr id="161" name="TextBox 160"/>
-          <p:cNvSpPr txBox="1"/>
-          <p:nvPr/>
-        </p:nvSpPr>
-        <p:spPr>
-          <a:xfrm>
-            <a:off x="2871764" y="6364222"/>
-            <a:ext cx="1164031" cy="121615"/>
-          </a:xfrm>
-          <a:prstGeom prst="rect">
-            <a:avLst/>
-          </a:prstGeom>
-          <a:noFill/>
-        </p:spPr>
-        <p:txBody>
-          <a:bodyPr wrap="square">
-            <a:spAutoFit/>
-          </a:bodyPr>
-          <a:lstStyle/>
-          <a:p>
-            <a:pPr algn="l"/>
-            <a:r>
-              <a:rPr sz="1000" b="0">
-                <a:solidFill>
-                  <a:srgbClr val="A8DADC"/>
-                </a:solidFill>
-              </a:rPr>
-              <a:t>GPIO35</a:t>
-            </a:r>
-          </a:p>
-        </p:txBody>
-      </p:sp>
-      <p:sp>
-        <p:nvSpPr>
-          <p:cNvPr id="162" name="Rectangle 161"/>
-          <p:cNvSpPr/>
-          <p:nvPr/>
-        </p:nvSpPr>
-        <p:spPr>
-          <a:xfrm>
-            <a:off x="3999219" y="6364222"/>
-            <a:ext cx="1164031" cy="121615"/>
-          </a:xfrm>
-          <a:prstGeom prst="rect">
-            <a:avLst/>
-          </a:prstGeom>
-          <a:solidFill>
-            <a:srgbClr val="0F3460"/>
-          </a:solidFill>
-          <a:ln>
-            <a:noFill/>
-          </a:ln>
-        </p:spPr>
-        <p:style>
-          <a:lnRef idx="1">
-            <a:schemeClr val="accent1"/>
-          </a:lnRef>
-          <a:fillRef idx="3">
-            <a:schemeClr val="accent1"/>
-          </a:fillRef>
-          <a:effectRef idx="2">
-            <a:schemeClr val="accent1"/>
-          </a:effectRef>
-          <a:fontRef idx="minor">
-            <a:schemeClr val="lt1"/>
-          </a:fontRef>
-        </p:style>
-        <p:txBody>
-          <a:bodyPr rtlCol="0" anchor="ctr"/>
-          <a:lstStyle/>
-          <a:p>
-            <a:pPr algn="ctr"/>
-          </a:p>
-        </p:txBody>
-      </p:sp>
-      <p:sp>
-        <p:nvSpPr>
-          <p:cNvPr id="163" name="TextBox 162"/>
-          <p:cNvSpPr txBox="1"/>
-          <p:nvPr/>
-        </p:nvSpPr>
-        <p:spPr>
-          <a:xfrm>
-            <a:off x="4035795" y="6364222"/>
-            <a:ext cx="1164031" cy="121615"/>
-          </a:xfrm>
-          <a:prstGeom prst="rect">
-            <a:avLst/>
-          </a:prstGeom>
-          <a:noFill/>
-        </p:spPr>
-        <p:txBody>
-          <a:bodyPr wrap="square">
-            <a:spAutoFit/>
-          </a:bodyPr>
-          <a:lstStyle/>
-          <a:p>
-            <a:pPr algn="l"/>
-            <a:r>
-              <a:rPr sz="1000" b="0">
-                <a:solidFill>
-                  <a:srgbClr val="FFFFFF"/>
-                </a:solidFill>
-              </a:rPr>
-              <a:t>GPIO</a:t>
-            </a:r>
-          </a:p>
-        </p:txBody>
-      </p:sp>
-      <p:sp>
-        <p:nvSpPr>
-          <p:cNvPr id="164" name="Rectangle 163"/>
-          <p:cNvSpPr/>
-          <p:nvPr/>
-        </p:nvSpPr>
-        <p:spPr>
-          <a:xfrm>
-            <a:off x="5163250" y="6364222"/>
-            <a:ext cx="1164031" cy="121615"/>
-          </a:xfrm>
-          <a:prstGeom prst="rect">
-            <a:avLst/>
-          </a:prstGeom>
-          <a:solidFill>
-            <a:srgbClr val="0F3460"/>
-          </a:solidFill>
-          <a:ln>
-            <a:noFill/>
-          </a:ln>
-        </p:spPr>
-        <p:style>
-          <a:lnRef idx="1">
-            <a:schemeClr val="accent1"/>
-          </a:lnRef>
-          <a:fillRef idx="3">
-            <a:schemeClr val="accent1"/>
-          </a:fillRef>
-          <a:effectRef idx="2">
-            <a:schemeClr val="accent1"/>
-          </a:effectRef>
-          <a:fontRef idx="minor">
-            <a:schemeClr val="lt1"/>
-          </a:fontRef>
-        </p:style>
-        <p:txBody>
-          <a:bodyPr rtlCol="0" anchor="ctr"/>
-          <a:lstStyle/>
-          <a:p>
-            <a:pPr algn="ctr"/>
-          </a:p>
-        </p:txBody>
-      </p:sp>
-      <p:sp>
-        <p:nvSpPr>
-          <p:cNvPr id="165" name="TextBox 164"/>
-          <p:cNvSpPr txBox="1"/>
-          <p:nvPr/>
-        </p:nvSpPr>
-        <p:spPr>
-          <a:xfrm>
-            <a:off x="5199826" y="6364222"/>
-            <a:ext cx="1164031" cy="121615"/>
-          </a:xfrm>
-          <a:prstGeom prst="rect">
-            <a:avLst/>
-          </a:prstGeom>
-          <a:noFill/>
-        </p:spPr>
-        <p:txBody>
-          <a:bodyPr wrap="square">
-            <a:spAutoFit/>
-          </a:bodyPr>
-          <a:lstStyle/>
-          <a:p>
-            <a:pPr algn="l"/>
-            <a:r>
-              <a:rPr sz="1000" b="0">
-                <a:solidFill>
-                  <a:srgbClr val="FFFFFF"/>
-                </a:solidFill>
-              </a:rPr>
-              <a:t>3.3V</a:t>
-            </a:r>
-          </a:p>
-        </p:txBody>
-      </p:sp>
-      <p:sp>
-        <p:nvSpPr>
-          <p:cNvPr id="166" name="Rectangle 165"/>
-          <p:cNvSpPr/>
-          <p:nvPr/>
-        </p:nvSpPr>
-        <p:spPr>
-          <a:xfrm>
-            <a:off x="6327281" y="6364222"/>
-            <a:ext cx="5587349" cy="121615"/>
-          </a:xfrm>
-          <a:prstGeom prst="rect">
-            <a:avLst/>
-          </a:prstGeom>
-          <a:solidFill>
-            <a:srgbClr val="0F3460"/>
-          </a:solidFill>
-          <a:ln>
-            <a:noFill/>
-          </a:ln>
-        </p:spPr>
-        <p:style>
-          <a:lnRef idx="1">
-            <a:schemeClr val="accent1"/>
-          </a:lnRef>
-          <a:fillRef idx="3">
-            <a:schemeClr val="accent1"/>
-          </a:fillRef>
-          <a:effectRef idx="2">
-            <a:schemeClr val="accent1"/>
-          </a:effectRef>
-          <a:fontRef idx="minor">
-            <a:schemeClr val="lt1"/>
-          </a:fontRef>
-        </p:style>
-        <p:txBody>
-          <a:bodyPr rtlCol="0" anchor="ctr"/>
-          <a:lstStyle/>
-          <a:p>
-            <a:pPr algn="ctr"/>
-          </a:p>
-        </p:txBody>
-      </p:sp>
-      <p:sp>
-        <p:nvSpPr>
-          <p:cNvPr id="167" name="TextBox 166"/>
-          <p:cNvSpPr txBox="1"/>
-          <p:nvPr/>
-        </p:nvSpPr>
-        <p:spPr>
-          <a:xfrm>
-            <a:off x="6363857" y="6364222"/>
-            <a:ext cx="5587349" cy="121615"/>
-          </a:xfrm>
-          <a:prstGeom prst="rect">
-            <a:avLst/>
-          </a:prstGeom>
-          <a:noFill/>
-        </p:spPr>
-        <p:txBody>
-          <a:bodyPr wrap="square">
-            <a:spAutoFit/>
-          </a:bodyPr>
-          <a:lstStyle/>
-          <a:p>
-            <a:pPr algn="l"/>
-            <a:r>
-              <a:rPr sz="1000" b="0">
-                <a:solidFill>
-                  <a:srgbClr val="AAAAAA"/>
-                </a:solidFill>
-              </a:rPr>
-              <a:t>input only</a:t>
-            </a:r>
-          </a:p>
-        </p:txBody>
-      </p:sp>
-      <p:sp>
-        <p:nvSpPr>
-          <p:cNvPr id="168" name="Rectangle 167"/>
-          <p:cNvSpPr/>
-          <p:nvPr/>
-        </p:nvSpPr>
-        <p:spPr>
-          <a:xfrm>
-            <a:off x="274320" y="6485837"/>
-            <a:ext cx="2560868" cy="121615"/>
-          </a:xfrm>
-          <a:prstGeom prst="rect">
-            <a:avLst/>
-          </a:prstGeom>
-          <a:solidFill>
-            <a:srgbClr val="16213E"/>
-          </a:solidFill>
-          <a:ln>
-            <a:noFill/>
-          </a:ln>
-        </p:spPr>
-        <p:style>
-          <a:lnRef idx="1">
-            <a:schemeClr val="accent1"/>
-          </a:lnRef>
-          <a:fillRef idx="3">
-            <a:schemeClr val="accent1"/>
-          </a:fillRef>
-          <a:effectRef idx="2">
-            <a:schemeClr val="accent1"/>
-          </a:effectRef>
-          <a:fontRef idx="minor">
-            <a:schemeClr val="lt1"/>
-          </a:fontRef>
-        </p:style>
-        <p:txBody>
-          <a:bodyPr rtlCol="0" anchor="ctr"/>
-          <a:lstStyle/>
-          <a:p>
-            <a:pPr algn="ctr"/>
-          </a:p>
-        </p:txBody>
-      </p:sp>
-      <p:sp>
-        <p:nvSpPr>
-          <p:cNvPr id="169" name="TextBox 168"/>
-          <p:cNvSpPr txBox="1"/>
-          <p:nvPr/>
-        </p:nvSpPr>
-        <p:spPr>
-          <a:xfrm>
-            <a:off x="310896" y="6485837"/>
-            <a:ext cx="2560868" cy="121615"/>
-          </a:xfrm>
-          <a:prstGeom prst="rect">
-            <a:avLst/>
-          </a:prstGeom>
-          <a:noFill/>
-        </p:spPr>
-        <p:txBody>
-          <a:bodyPr wrap="square">
-            <a:spAutoFit/>
-          </a:bodyPr>
-          <a:lstStyle/>
-          <a:p>
-            <a:pPr algn="l"/>
-            <a:r>
-              <a:rPr sz="1000" b="0">
-                <a:solidFill>
-                  <a:srgbClr val="FFFFFF"/>
-                </a:solidFill>
-              </a:rPr>
-              <a:t>Button On/Off</a:t>
-            </a:r>
-          </a:p>
-        </p:txBody>
-      </p:sp>
-      <p:sp>
-        <p:nvSpPr>
-          <p:cNvPr id="170" name="Rectangle 169"/>
-          <p:cNvSpPr/>
-          <p:nvPr/>
-        </p:nvSpPr>
-        <p:spPr>
-          <a:xfrm>
-            <a:off x="2835188" y="6485837"/>
-            <a:ext cx="1164031" cy="121615"/>
-          </a:xfrm>
-          <a:prstGeom prst="rect">
-            <a:avLst/>
-          </a:prstGeom>
-          <a:solidFill>
-            <a:srgbClr val="16213E"/>
-          </a:solidFill>
-          <a:ln>
-            <a:noFill/>
-          </a:ln>
-        </p:spPr>
-        <p:style>
-          <a:lnRef idx="1">
-            <a:schemeClr val="accent1"/>
-          </a:lnRef>
-          <a:fillRef idx="3">
-            <a:schemeClr val="accent1"/>
-          </a:fillRef>
-          <a:effectRef idx="2">
-            <a:schemeClr val="accent1"/>
-          </a:effectRef>
-          <a:fontRef idx="minor">
-            <a:schemeClr val="lt1"/>
-          </a:fontRef>
-        </p:style>
-        <p:txBody>
-          <a:bodyPr rtlCol="0" anchor="ctr"/>
-          <a:lstStyle/>
-          <a:p>
-            <a:pPr algn="ctr"/>
-          </a:p>
-        </p:txBody>
-      </p:sp>
-      <p:sp>
-        <p:nvSpPr>
-          <p:cNvPr id="171" name="TextBox 170"/>
-          <p:cNvSpPr txBox="1"/>
-          <p:nvPr/>
-        </p:nvSpPr>
-        <p:spPr>
-          <a:xfrm>
-            <a:off x="2871764" y="6485837"/>
-            <a:ext cx="1164031" cy="121615"/>
-          </a:xfrm>
-          <a:prstGeom prst="rect">
-            <a:avLst/>
-          </a:prstGeom>
-          <a:noFill/>
-        </p:spPr>
-        <p:txBody>
-          <a:bodyPr wrap="square">
-            <a:spAutoFit/>
-          </a:bodyPr>
-          <a:lstStyle/>
-          <a:p>
-            <a:pPr algn="l"/>
-            <a:r>
-              <a:rPr sz="1000" b="0">
-                <a:solidFill>
-                  <a:srgbClr val="A8DADC"/>
-                </a:solidFill>
-              </a:rPr>
-              <a:t>GPIO13</a:t>
-            </a:r>
-          </a:p>
-        </p:txBody>
-      </p:sp>
-      <p:sp>
-        <p:nvSpPr>
-          <p:cNvPr id="172" name="Rectangle 171"/>
-          <p:cNvSpPr/>
-          <p:nvPr/>
-        </p:nvSpPr>
-        <p:spPr>
-          <a:xfrm>
-            <a:off x="3999219" y="6485837"/>
-            <a:ext cx="1164031" cy="121615"/>
-          </a:xfrm>
-          <a:prstGeom prst="rect">
-            <a:avLst/>
-          </a:prstGeom>
-          <a:solidFill>
-            <a:srgbClr val="16213E"/>
-          </a:solidFill>
-          <a:ln>
-            <a:noFill/>
-          </a:ln>
-        </p:spPr>
-        <p:style>
-          <a:lnRef idx="1">
-            <a:schemeClr val="accent1"/>
-          </a:lnRef>
-          <a:fillRef idx="3">
-            <a:schemeClr val="accent1"/>
-          </a:fillRef>
-          <a:effectRef idx="2">
-            <a:schemeClr val="accent1"/>
-          </a:effectRef>
-          <a:fontRef idx="minor">
-            <a:schemeClr val="lt1"/>
-          </a:fontRef>
-        </p:style>
-        <p:txBody>
-          <a:bodyPr rtlCol="0" anchor="ctr"/>
-          <a:lstStyle/>
-          <a:p>
-            <a:pPr algn="ctr"/>
-          </a:p>
-        </p:txBody>
-      </p:sp>
-      <p:sp>
-        <p:nvSpPr>
-          <p:cNvPr id="173" name="TextBox 172"/>
-          <p:cNvSpPr txBox="1"/>
-          <p:nvPr/>
-        </p:nvSpPr>
-        <p:spPr>
-          <a:xfrm>
-            <a:off x="4035795" y="6485837"/>
-            <a:ext cx="1164031" cy="121615"/>
-          </a:xfrm>
-          <a:prstGeom prst="rect">
-            <a:avLst/>
-          </a:prstGeom>
-          <a:noFill/>
-        </p:spPr>
-        <p:txBody>
-          <a:bodyPr wrap="square">
-            <a:spAutoFit/>
-          </a:bodyPr>
-          <a:lstStyle/>
-          <a:p>
-            <a:pPr algn="l"/>
-            <a:r>
-              <a:rPr sz="1000" b="0">
-                <a:solidFill>
-                  <a:srgbClr val="FFFFFF"/>
-                </a:solidFill>
-              </a:rPr>
-              <a:t>GPIO</a:t>
-            </a:r>
-          </a:p>
-        </p:txBody>
-      </p:sp>
-      <p:sp>
-        <p:nvSpPr>
-          <p:cNvPr id="174" name="Rectangle 173"/>
-          <p:cNvSpPr/>
-          <p:nvPr/>
-        </p:nvSpPr>
-        <p:spPr>
-          <a:xfrm>
-            <a:off x="5163250" y="6485837"/>
-            <a:ext cx="1164031" cy="121615"/>
-          </a:xfrm>
-          <a:prstGeom prst="rect">
-            <a:avLst/>
-          </a:prstGeom>
-          <a:solidFill>
-            <a:srgbClr val="16213E"/>
-          </a:solidFill>
-          <a:ln>
-            <a:noFill/>
-          </a:ln>
-        </p:spPr>
-        <p:style>
-          <a:lnRef idx="1">
-            <a:schemeClr val="accent1"/>
-          </a:lnRef>
-          <a:fillRef idx="3">
-            <a:schemeClr val="accent1"/>
-          </a:fillRef>
-          <a:effectRef idx="2">
-            <a:schemeClr val="accent1"/>
-          </a:effectRef>
-          <a:fontRef idx="minor">
-            <a:schemeClr val="lt1"/>
-          </a:fontRef>
-        </p:style>
-        <p:txBody>
-          <a:bodyPr rtlCol="0" anchor="ctr"/>
-          <a:lstStyle/>
-          <a:p>
-            <a:pPr algn="ctr"/>
-          </a:p>
-        </p:txBody>
-      </p:sp>
-      <p:sp>
-        <p:nvSpPr>
-          <p:cNvPr id="175" name="TextBox 174"/>
-          <p:cNvSpPr txBox="1"/>
-          <p:nvPr/>
-        </p:nvSpPr>
-        <p:spPr>
-          <a:xfrm>
-            <a:off x="5199826" y="6485837"/>
-            <a:ext cx="1164031" cy="121615"/>
-          </a:xfrm>
-          <a:prstGeom prst="rect">
-            <a:avLst/>
-          </a:prstGeom>
-          <a:noFill/>
-        </p:spPr>
-        <p:txBody>
-          <a:bodyPr wrap="square">
-            <a:spAutoFit/>
-          </a:bodyPr>
-          <a:lstStyle/>
-          <a:p>
-            <a:pPr algn="l"/>
-            <a:r>
-              <a:rPr sz="1000" b="0">
-                <a:solidFill>
-                  <a:srgbClr val="FFFFFF"/>
-                </a:solidFill>
-              </a:rPr>
-              <a:t>3.3V</a:t>
-            </a:r>
-          </a:p>
-        </p:txBody>
-      </p:sp>
-      <p:sp>
-        <p:nvSpPr>
-          <p:cNvPr id="176" name="Rectangle 175"/>
-          <p:cNvSpPr/>
-          <p:nvPr/>
-        </p:nvSpPr>
-        <p:spPr>
-          <a:xfrm>
-            <a:off x="6327281" y="6485837"/>
-            <a:ext cx="5587349" cy="121615"/>
-          </a:xfrm>
-          <a:prstGeom prst="rect">
-            <a:avLst/>
-          </a:prstGeom>
-          <a:solidFill>
-            <a:srgbClr val="16213E"/>
-          </a:solidFill>
-          <a:ln>
-            <a:noFill/>
-          </a:ln>
-        </p:spPr>
-        <p:style>
-          <a:lnRef idx="1">
-            <a:schemeClr val="accent1"/>
-          </a:lnRef>
-          <a:fillRef idx="3">
-            <a:schemeClr val="accent1"/>
-          </a:fillRef>
-          <a:effectRef idx="2">
-            <a:schemeClr val="accent1"/>
-          </a:effectRef>
-          <a:fontRef idx="minor">
-            <a:schemeClr val="lt1"/>
-          </a:fontRef>
-        </p:style>
-        <p:txBody>
-          <a:bodyPr rtlCol="0" anchor="ctr"/>
-          <a:lstStyle/>
-          <a:p>
-            <a:pPr algn="ctr"/>
-          </a:p>
-        </p:txBody>
-      </p:sp>
-      <p:sp>
-        <p:nvSpPr>
-          <p:cNvPr id="177" name="TextBox 176"/>
-          <p:cNvSpPr txBox="1"/>
-          <p:nvPr/>
-        </p:nvSpPr>
-        <p:spPr>
-          <a:xfrm>
-            <a:off x="6363857" y="6485837"/>
-            <a:ext cx="5587349" cy="121615"/>
-          </a:xfrm>
-          <a:prstGeom prst="rect">
-            <a:avLst/>
-          </a:prstGeom>
-          <a:noFill/>
-        </p:spPr>
-        <p:txBody>
-          <a:bodyPr wrap="square">
-            <a:spAutoFit/>
-          </a:bodyPr>
-          <a:lstStyle/>
-          <a:p>
-            <a:pPr algn="l"/>
-            <a:r>
-              <a:rPr sz="1000" b="0">
-                <a:solidFill>
-                  <a:srgbClr val="AAAAAA"/>
-                </a:solidFill>
-              </a:rPr>
-              <a:t>internal pull-up</a:t>
-            </a:r>
-          </a:p>
-        </p:txBody>
-      </p:sp>
-      <p:sp>
-        <p:nvSpPr>
-          <p:cNvPr id="178" name="Rectangle 177"/>
-          <p:cNvSpPr/>
-          <p:nvPr/>
-        </p:nvSpPr>
-        <p:spPr>
-          <a:xfrm>
-            <a:off x="274320" y="6607452"/>
-            <a:ext cx="2560868" cy="121615"/>
-          </a:xfrm>
-          <a:prstGeom prst="rect">
-            <a:avLst/>
-          </a:prstGeom>
-          <a:solidFill>
-            <a:srgbClr val="0F3460"/>
-          </a:solidFill>
-          <a:ln>
-            <a:noFill/>
-          </a:ln>
-        </p:spPr>
-        <p:style>
-          <a:lnRef idx="1">
-            <a:schemeClr val="accent1"/>
-          </a:lnRef>
-          <a:fillRef idx="3">
-            <a:schemeClr val="accent1"/>
-          </a:fillRef>
-          <a:effectRef idx="2">
-            <a:schemeClr val="accent1"/>
-          </a:effectRef>
-          <a:fontRef idx="minor">
-            <a:schemeClr val="lt1"/>
-          </a:fontRef>
-        </p:style>
-        <p:txBody>
-          <a:bodyPr rtlCol="0" anchor="ctr"/>
-          <a:lstStyle/>
-          <a:p>
-            <a:pPr algn="ctr"/>
-          </a:p>
-        </p:txBody>
-      </p:sp>
-      <p:sp>
-        <p:nvSpPr>
-          <p:cNvPr id="179" name="TextBox 178"/>
-          <p:cNvSpPr txBox="1"/>
-          <p:nvPr/>
-        </p:nvSpPr>
-        <p:spPr>
-          <a:xfrm>
-            <a:off x="310896" y="6607452"/>
-            <a:ext cx="2560868" cy="121615"/>
-          </a:xfrm>
-          <a:prstGeom prst="rect">
-            <a:avLst/>
-          </a:prstGeom>
-          <a:noFill/>
-        </p:spPr>
-        <p:txBody>
-          <a:bodyPr wrap="square">
-            <a:spAutoFit/>
-          </a:bodyPr>
-          <a:lstStyle/>
-          <a:p>
-            <a:pPr algn="l"/>
-            <a:r>
-              <a:rPr sz="1000" b="0">
-                <a:solidFill>
-                  <a:srgbClr val="FFFFFF"/>
-                </a:solidFill>
-              </a:rPr>
-              <a:t>Button E-Stop</a:t>
-            </a:r>
-          </a:p>
-        </p:txBody>
-      </p:sp>
-      <p:sp>
-        <p:nvSpPr>
-          <p:cNvPr id="180" name="Rectangle 179"/>
-          <p:cNvSpPr/>
-          <p:nvPr/>
-        </p:nvSpPr>
-        <p:spPr>
-          <a:xfrm>
-            <a:off x="2835188" y="6607452"/>
-            <a:ext cx="1164031" cy="121615"/>
-          </a:xfrm>
-          <a:prstGeom prst="rect">
-            <a:avLst/>
-          </a:prstGeom>
-          <a:solidFill>
-            <a:srgbClr val="0F3460"/>
-          </a:solidFill>
-          <a:ln>
-            <a:noFill/>
-          </a:ln>
-        </p:spPr>
-        <p:style>
-          <a:lnRef idx="1">
-            <a:schemeClr val="accent1"/>
-          </a:lnRef>
-          <a:fillRef idx="3">
-            <a:schemeClr val="accent1"/>
-          </a:fillRef>
-          <a:effectRef idx="2">
-            <a:schemeClr val="accent1"/>
-          </a:effectRef>
-          <a:fontRef idx="minor">
-            <a:schemeClr val="lt1"/>
-          </a:fontRef>
-        </p:style>
-        <p:txBody>
-          <a:bodyPr rtlCol="0" anchor="ctr"/>
-          <a:lstStyle/>
-          <a:p>
-            <a:pPr algn="ctr"/>
-          </a:p>
-        </p:txBody>
-      </p:sp>
-      <p:sp>
-        <p:nvSpPr>
-          <p:cNvPr id="181" name="TextBox 180"/>
-          <p:cNvSpPr txBox="1"/>
-          <p:nvPr/>
-        </p:nvSpPr>
-        <p:spPr>
-          <a:xfrm>
-            <a:off x="2871764" y="6607452"/>
-            <a:ext cx="1164031" cy="121615"/>
-          </a:xfrm>
-          <a:prstGeom prst="rect">
-            <a:avLst/>
-          </a:prstGeom>
-          <a:noFill/>
-        </p:spPr>
-        <p:txBody>
-          <a:bodyPr wrap="square">
-            <a:spAutoFit/>
-          </a:bodyPr>
-          <a:lstStyle/>
-          <a:p>
-            <a:pPr algn="l"/>
-            <a:r>
-              <a:rPr sz="1000" b="0">
-                <a:solidFill>
-                  <a:srgbClr val="A8DADC"/>
-                </a:solidFill>
-              </a:rPr>
-              <a:t>GPIO14</a:t>
-            </a:r>
-          </a:p>
-        </p:txBody>
-      </p:sp>
-      <p:sp>
-        <p:nvSpPr>
-          <p:cNvPr id="182" name="Rectangle 181"/>
-          <p:cNvSpPr/>
-          <p:nvPr/>
-        </p:nvSpPr>
-        <p:spPr>
-          <a:xfrm>
-            <a:off x="3999219" y="6607452"/>
-            <a:ext cx="1164031" cy="121615"/>
-          </a:xfrm>
-          <a:prstGeom prst="rect">
-            <a:avLst/>
-          </a:prstGeom>
-          <a:solidFill>
-            <a:srgbClr val="0F3460"/>
-          </a:solidFill>
-          <a:ln>
-            <a:noFill/>
-          </a:ln>
-        </p:spPr>
-        <p:style>
-          <a:lnRef idx="1">
-            <a:schemeClr val="accent1"/>
-          </a:lnRef>
-          <a:fillRef idx="3">
-            <a:schemeClr val="accent1"/>
-          </a:fillRef>
-          <a:effectRef idx="2">
-            <a:schemeClr val="accent1"/>
-          </a:effectRef>
-          <a:fontRef idx="minor">
-            <a:schemeClr val="lt1"/>
-          </a:fontRef>
-        </p:style>
-        <p:txBody>
-          <a:bodyPr rtlCol="0" anchor="ctr"/>
-          <a:lstStyle/>
-          <a:p>
-            <a:pPr algn="ctr"/>
-          </a:p>
-        </p:txBody>
-      </p:sp>
-      <p:sp>
-        <p:nvSpPr>
-          <p:cNvPr id="183" name="TextBox 182"/>
-          <p:cNvSpPr txBox="1"/>
-          <p:nvPr/>
-        </p:nvSpPr>
-        <p:spPr>
-          <a:xfrm>
-            <a:off x="4035795" y="6607452"/>
-            <a:ext cx="1164031" cy="121615"/>
-          </a:xfrm>
-          <a:prstGeom prst="rect">
-            <a:avLst/>
-          </a:prstGeom>
-          <a:noFill/>
-        </p:spPr>
-        <p:txBody>
-          <a:bodyPr wrap="square">
-            <a:spAutoFit/>
-          </a:bodyPr>
-          <a:lstStyle/>
-          <a:p>
-            <a:pPr algn="l"/>
-            <a:r>
-              <a:rPr sz="1000" b="0">
-                <a:solidFill>
-                  <a:srgbClr val="FFFFFF"/>
-                </a:solidFill>
-              </a:rPr>
-              <a:t>GPIO</a:t>
-            </a:r>
-          </a:p>
-        </p:txBody>
-      </p:sp>
-      <p:sp>
-        <p:nvSpPr>
-          <p:cNvPr id="184" name="Rectangle 183"/>
-          <p:cNvSpPr/>
-          <p:nvPr/>
-        </p:nvSpPr>
-        <p:spPr>
-          <a:xfrm>
-            <a:off x="5163250" y="6607452"/>
-            <a:ext cx="1164031" cy="121615"/>
-          </a:xfrm>
-          <a:prstGeom prst="rect">
-            <a:avLst/>
-          </a:prstGeom>
-          <a:solidFill>
-            <a:srgbClr val="0F3460"/>
-          </a:solidFill>
-          <a:ln>
-            <a:noFill/>
-          </a:ln>
-        </p:spPr>
-        <p:style>
-          <a:lnRef idx="1">
-            <a:schemeClr val="accent1"/>
-          </a:lnRef>
-          <a:fillRef idx="3">
-            <a:schemeClr val="accent1"/>
-          </a:fillRef>
-          <a:effectRef idx="2">
-            <a:schemeClr val="accent1"/>
-          </a:effectRef>
-          <a:fontRef idx="minor">
-            <a:schemeClr val="lt1"/>
-          </a:fontRef>
-        </p:style>
-        <p:txBody>
-          <a:bodyPr rtlCol="0" anchor="ctr"/>
-          <a:lstStyle/>
-          <a:p>
-            <a:pPr algn="ctr"/>
-          </a:p>
-        </p:txBody>
-      </p:sp>
-      <p:sp>
-        <p:nvSpPr>
-          <p:cNvPr id="185" name="TextBox 184"/>
-          <p:cNvSpPr txBox="1"/>
-          <p:nvPr/>
-        </p:nvSpPr>
-        <p:spPr>
-          <a:xfrm>
-            <a:off x="5199826" y="6607452"/>
-            <a:ext cx="1164031" cy="121615"/>
-          </a:xfrm>
-          <a:prstGeom prst="rect">
-            <a:avLst/>
-          </a:prstGeom>
-          <a:noFill/>
-        </p:spPr>
-        <p:txBody>
-          <a:bodyPr wrap="square">
-            <a:spAutoFit/>
-          </a:bodyPr>
-          <a:lstStyle/>
-          <a:p>
-            <a:pPr algn="l"/>
-            <a:r>
-              <a:rPr sz="1000" b="0">
-                <a:solidFill>
-                  <a:srgbClr val="FFFFFF"/>
-                </a:solidFill>
-              </a:rPr>
-              <a:t>3.3V</a:t>
-            </a:r>
-          </a:p>
-        </p:txBody>
-      </p:sp>
-      <p:sp>
-        <p:nvSpPr>
-          <p:cNvPr id="186" name="Rectangle 185"/>
-          <p:cNvSpPr/>
-          <p:nvPr/>
-        </p:nvSpPr>
-        <p:spPr>
-          <a:xfrm>
-            <a:off x="6327281" y="6607452"/>
-            <a:ext cx="5587349" cy="121615"/>
-          </a:xfrm>
-          <a:prstGeom prst="rect">
-            <a:avLst/>
-          </a:prstGeom>
-          <a:solidFill>
-            <a:srgbClr val="0F3460"/>
-          </a:solidFill>
-          <a:ln>
-            <a:noFill/>
-          </a:ln>
-        </p:spPr>
-        <p:style>
-          <a:lnRef idx="1">
-            <a:schemeClr val="accent1"/>
-          </a:lnRef>
-          <a:fillRef idx="3">
-            <a:schemeClr val="accent1"/>
-          </a:fillRef>
-          <a:effectRef idx="2">
-            <a:schemeClr val="accent1"/>
-          </a:effectRef>
-          <a:fontRef idx="minor">
-            <a:schemeClr val="lt1"/>
-          </a:fontRef>
-        </p:style>
-        <p:txBody>
-          <a:bodyPr rtlCol="0" anchor="ctr"/>
-          <a:lstStyle/>
-          <a:p>
-            <a:pPr algn="ctr"/>
-          </a:p>
-        </p:txBody>
-      </p:sp>
-      <p:sp>
-        <p:nvSpPr>
-          <p:cNvPr id="187" name="TextBox 186"/>
-          <p:cNvSpPr txBox="1"/>
-          <p:nvPr/>
-        </p:nvSpPr>
-        <p:spPr>
-          <a:xfrm>
-            <a:off x="6363857" y="6607452"/>
-            <a:ext cx="5587349" cy="121615"/>
-          </a:xfrm>
-          <a:prstGeom prst="rect">
-            <a:avLst/>
-          </a:prstGeom>
-          <a:noFill/>
-        </p:spPr>
-        <p:txBody>
-          <a:bodyPr wrap="square">
-            <a:spAutoFit/>
-          </a:bodyPr>
-          <a:lstStyle/>
-          <a:p>
-            <a:pPr algn="l"/>
-            <a:r>
-              <a:rPr sz="1000" b="0">
-                <a:solidFill>
-                  <a:srgbClr val="AAAAAA"/>
-                </a:solidFill>
-              </a:rPr>
-              <a:t>internal pull-up</a:t>
             </a:r>
           </a:p>
         </p:txBody>

--- a/docs/Pellet_Burner_Components.pptx
+++ b/docs/Pellet_Burner_Components.pptx
@@ -3234,7 +3234,7 @@
         </p:nvSpPr>
         <p:spPr>
           <a:xfrm>
-            <a:off x="914400" y="2011680"/>
+            <a:off x="914400" y="1920240"/>
             <a:ext cx="10360152" cy="1097280"/>
           </a:xfrm>
           <a:prstGeom prst="rect">
@@ -3268,7 +3268,7 @@
         </p:nvSpPr>
         <p:spPr>
           <a:xfrm>
-            <a:off x="914400" y="3200400"/>
+            <a:off x="914400" y="3108960"/>
             <a:ext cx="10360152" cy="640080"/>
           </a:xfrm>
           <a:prstGeom prst="rect">
@@ -3302,7 +3302,7 @@
         </p:nvSpPr>
         <p:spPr>
           <a:xfrm>
-            <a:off x="914400" y="3977639"/>
+            <a:off x="914400" y="3840480"/>
             <a:ext cx="10360152" cy="457200"/>
           </a:xfrm>
           <a:prstGeom prst="rect">
@@ -3398,7 +3398,7 @@
         <p:spPr>
           <a:xfrm>
             <a:off x="365760" y="137160"/>
-            <a:ext cx="8229600" cy="502920"/>
+            <a:ext cx="11430000" cy="502920"/>
           </a:xfrm>
           <a:prstGeom prst="rect">
             <a:avLst/>
@@ -3475,8 +3475,8 @@
           <p:nvPr/>
         </p:nvGraphicFramePr>
         <p:xfrm>
-          <a:off x="274320" y="822960"/>
-          <a:ext cx="11640311" cy="5852154"/>
+          <a:off x="274320" y="804672"/>
+          <a:ext cx="11640311" cy="5897872"/>
         </p:xfrm>
         <a:graphic>
           <a:graphicData uri="http://schemas.openxmlformats.org/drawingml/2006/table">
@@ -3491,7 +3491,7 @@
                 <a:gridCol w="1047628"/>
                 <a:gridCol w="5238140"/>
               </a:tblGrid>
-              <a:tr h="420624">
+              <a:tr h="438912">
                 <a:tc>
                   <a:txBody>
                     <a:bodyPr wrap="square"/>
@@ -3663,7 +3663,7 @@
                   </a:tcPr>
                 </a:tc>
               </a:tr>
-              <a:tr h="417810">
+              <a:tr h="419920">
                 <a:tc>
                   <a:txBody>
                     <a:bodyPr wrap="square"/>
@@ -3835,7 +3835,7 @@
                   </a:tcPr>
                 </a:tc>
               </a:tr>
-              <a:tr h="417810">
+              <a:tr h="419920">
                 <a:tc>
                   <a:txBody>
                     <a:bodyPr wrap="square"/>
@@ -4007,7 +4007,7 @@
                   </a:tcPr>
                 </a:tc>
               </a:tr>
-              <a:tr h="417810">
+              <a:tr h="419920">
                 <a:tc>
                   <a:txBody>
                     <a:bodyPr wrap="square"/>
@@ -4179,7 +4179,7 @@
                   </a:tcPr>
                 </a:tc>
               </a:tr>
-              <a:tr h="417810">
+              <a:tr h="419920">
                 <a:tc>
                   <a:txBody>
                     <a:bodyPr wrap="square"/>
@@ -4351,7 +4351,7 @@
                   </a:tcPr>
                 </a:tc>
               </a:tr>
-              <a:tr h="417810">
+              <a:tr h="419920">
                 <a:tc>
                   <a:txBody>
                     <a:bodyPr wrap="square"/>
@@ -4523,7 +4523,7 @@
                   </a:tcPr>
                 </a:tc>
               </a:tr>
-              <a:tr h="417810">
+              <a:tr h="419920">
                 <a:tc>
                   <a:txBody>
                     <a:bodyPr wrap="square"/>
@@ -4695,7 +4695,7 @@
                   </a:tcPr>
                 </a:tc>
               </a:tr>
-              <a:tr h="417810">
+              <a:tr h="419920">
                 <a:tc>
                   <a:txBody>
                     <a:bodyPr wrap="square"/>
@@ -4867,7 +4867,7 @@
                   </a:tcPr>
                 </a:tc>
               </a:tr>
-              <a:tr h="417810">
+              <a:tr h="419920">
                 <a:tc>
                   <a:txBody>
                     <a:bodyPr wrap="square"/>
@@ -5039,7 +5039,7 @@
                   </a:tcPr>
                 </a:tc>
               </a:tr>
-              <a:tr h="417810">
+              <a:tr h="419920">
                 <a:tc>
                   <a:txBody>
                     <a:bodyPr wrap="square"/>
@@ -5211,7 +5211,7 @@
                   </a:tcPr>
                 </a:tc>
               </a:tr>
-              <a:tr h="417810">
+              <a:tr h="419920">
                 <a:tc>
                   <a:txBody>
                     <a:bodyPr wrap="square"/>
@@ -5383,7 +5383,7 @@
                   </a:tcPr>
                 </a:tc>
               </a:tr>
-              <a:tr h="417810">
+              <a:tr h="419920">
                 <a:tc>
                   <a:txBody>
                     <a:bodyPr wrap="square"/>
@@ -5555,7 +5555,7 @@
                   </a:tcPr>
                 </a:tc>
               </a:tr>
-              <a:tr h="417810">
+              <a:tr h="419920">
                 <a:tc>
                   <a:txBody>
                     <a:bodyPr wrap="square"/>
@@ -5727,7 +5727,7 @@
                   </a:tcPr>
                 </a:tc>
               </a:tr>
-              <a:tr h="417810">
+              <a:tr h="419920">
                 <a:tc>
                   <a:txBody>
                     <a:bodyPr wrap="square"/>
@@ -5973,7 +5973,7 @@
         <p:spPr>
           <a:xfrm>
             <a:off x="365760" y="137160"/>
-            <a:ext cx="7315200" cy="502920"/>
+            <a:ext cx="11430000" cy="502920"/>
           </a:xfrm>
           <a:prstGeom prst="rect">
             <a:avLst/>
@@ -5993,7 +5993,7 @@
                   <a:srgbClr val="E94560"/>
                 </a:solidFill>
               </a:rPr>
-              <a:t>ESP32 DevKit V1</a:t>
+              <a:t>ESP32 DevKit V1  —  Main Controller</a:t>
             </a:r>
           </a:p>
         </p:txBody>
@@ -6057,8 +6057,8 @@
         </p:blipFill>
         <p:spPr>
           <a:xfrm>
-            <a:off x="8503920" y="822960"/>
-            <a:ext cx="3291840" cy="5303520"/>
+            <a:off x="8732520" y="804672"/>
+            <a:ext cx="3108960" cy="5394960"/>
           </a:xfrm>
           <a:prstGeom prst="rect">
             <a:avLst/>
@@ -6074,7 +6074,7 @@
         <p:spPr>
           <a:xfrm>
             <a:off x="274320" y="749808"/>
-            <a:ext cx="5029200" cy="5120640"/>
+            <a:ext cx="5029200" cy="3758183"/>
           </a:xfrm>
           <a:prstGeom prst="rect">
             <a:avLst/>
@@ -6116,23 +6116,23 @@
         </p:nvSpPr>
         <p:spPr>
           <a:xfrm>
-            <a:off x="438912" y="859536"/>
-            <a:ext cx="4700016" cy="256032"/>
-          </a:xfrm>
-          <a:prstGeom prst="rect">
-            <a:avLst/>
-          </a:prstGeom>
-          <a:noFill/>
-        </p:spPr>
-        <p:txBody>
-          <a:bodyPr wrap="square">
-            <a:spAutoFit/>
-          </a:bodyPr>
-          <a:lstStyle/>
-          <a:p>
-            <a:pPr algn="l"/>
-            <a:r>
-              <a:rPr sz="1200" b="1">
+            <a:off x="438912" y="877824"/>
+            <a:ext cx="4700016" cy="302513"/>
+          </a:xfrm>
+          <a:prstGeom prst="rect">
+            <a:avLst/>
+          </a:prstGeom>
+          <a:noFill/>
+        </p:spPr>
+        <p:txBody>
+          <a:bodyPr wrap="square">
+            <a:spAutoFit/>
+          </a:bodyPr>
+          <a:lstStyle/>
+          <a:p>
+            <a:pPr algn="l"/>
+            <a:r>
+              <a:rPr sz="1300" b="1">
                 <a:solidFill>
                   <a:srgbClr val="A8DADC"/>
                 </a:solidFill>
@@ -6150,8 +6150,8 @@
         </p:nvSpPr>
         <p:spPr>
           <a:xfrm>
-            <a:off x="438912" y="1106424"/>
-            <a:ext cx="4700016" cy="256032"/>
+            <a:off x="438912" y="1125473"/>
+            <a:ext cx="4700016" cy="321564"/>
           </a:xfrm>
           <a:prstGeom prst="rect">
             <a:avLst/>
@@ -6184,8 +6184,8 @@
         </p:nvSpPr>
         <p:spPr>
           <a:xfrm>
-            <a:off x="438912" y="1353312"/>
-            <a:ext cx="4700016" cy="256032"/>
+            <a:off x="438912" y="1392173"/>
+            <a:ext cx="4700016" cy="321564"/>
           </a:xfrm>
           <a:prstGeom prst="rect">
             <a:avLst/>
@@ -6218,8 +6218,8 @@
         </p:nvSpPr>
         <p:spPr>
           <a:xfrm>
-            <a:off x="438912" y="1600200"/>
-            <a:ext cx="4700016" cy="256032"/>
+            <a:off x="438912" y="1658873"/>
+            <a:ext cx="4700016" cy="321564"/>
           </a:xfrm>
           <a:prstGeom prst="rect">
             <a:avLst/>
@@ -6239,7 +6239,7 @@
                   <a:srgbClr val="FFFFFF"/>
                 </a:solidFill>
               </a:rPr>
-              <a:t>• Built-in 802.11 b/g/n WiFi + Bluetooth 4.2</a:t>
+              <a:t>• 802.11 b/g/n WiFi + Bluetooth 4.2</a:t>
             </a:r>
           </a:p>
         </p:txBody>
@@ -6252,8 +6252,8 @@
         </p:nvSpPr>
         <p:spPr>
           <a:xfrm>
-            <a:off x="438912" y="1847088"/>
-            <a:ext cx="4700016" cy="256032"/>
+            <a:off x="438912" y="1925573"/>
+            <a:ext cx="4700016" cy="321564"/>
           </a:xfrm>
           <a:prstGeom prst="rect">
             <a:avLst/>
@@ -6286,8 +6286,8 @@
         </p:nvSpPr>
         <p:spPr>
           <a:xfrm>
-            <a:off x="438912" y="2093976"/>
-            <a:ext cx="4700016" cy="256032"/>
+            <a:off x="438912" y="2192273"/>
+            <a:ext cx="4700016" cy="321564"/>
           </a:xfrm>
           <a:prstGeom prst="rect">
             <a:avLst/>
@@ -6320,8 +6320,8 @@
         </p:nvSpPr>
         <p:spPr>
           <a:xfrm>
-            <a:off x="438912" y="2340864"/>
-            <a:ext cx="4700016" cy="256032"/>
+            <a:off x="438912" y="2458973"/>
+            <a:ext cx="4700016" cy="321564"/>
           </a:xfrm>
           <a:prstGeom prst="rect">
             <a:avLst/>
@@ -6341,7 +6341,7 @@
                   <a:srgbClr val="FFFFFF"/>
                 </a:solidFill>
               </a:rPr>
-              <a:t>• ADC, DAC, SPI, I2C, UART, PWM, touch</a:t>
+              <a:t>• ADC, DAC, SPI, I2C, UART, PWM</a:t>
             </a:r>
           </a:p>
         </p:txBody>
@@ -6354,23 +6354,23 @@
         </p:nvSpPr>
         <p:spPr>
           <a:xfrm>
-            <a:off x="438912" y="2587752"/>
-            <a:ext cx="4700016" cy="256032"/>
-          </a:xfrm>
-          <a:prstGeom prst="rect">
-            <a:avLst/>
-          </a:prstGeom>
-          <a:noFill/>
-        </p:spPr>
-        <p:txBody>
-          <a:bodyPr wrap="square">
-            <a:spAutoFit/>
-          </a:bodyPr>
-          <a:lstStyle/>
-          <a:p>
-            <a:pPr algn="l"/>
-            <a:r>
-              <a:rPr sz="1200" b="1">
+            <a:off x="438912" y="2725673"/>
+            <a:ext cx="4700016" cy="302513"/>
+          </a:xfrm>
+          <a:prstGeom prst="rect">
+            <a:avLst/>
+          </a:prstGeom>
+          <a:noFill/>
+        </p:spPr>
+        <p:txBody>
+          <a:bodyPr wrap="square">
+            <a:spAutoFit/>
+          </a:bodyPr>
+          <a:lstStyle/>
+          <a:p>
+            <a:pPr algn="l"/>
+            <a:r>
+              <a:rPr sz="1300" b="1">
                 <a:solidFill>
                   <a:srgbClr val="A8DADC"/>
                 </a:solidFill>
@@ -6388,8 +6388,8 @@
         </p:nvSpPr>
         <p:spPr>
           <a:xfrm>
-            <a:off x="438912" y="2834640"/>
-            <a:ext cx="4700016" cy="256032"/>
+            <a:off x="438912" y="2973322"/>
+            <a:ext cx="4700016" cy="321564"/>
           </a:xfrm>
           <a:prstGeom prst="rect">
             <a:avLst/>
@@ -6409,7 +6409,7 @@
                   <a:srgbClr val="FFFFFF"/>
                 </a:solidFill>
               </a:rPr>
-              <a:t>• Main controller — runs FreeRTOS tasks</a:t>
+              <a:t>• Main controller — FreeRTOS tasks</a:t>
             </a:r>
           </a:p>
         </p:txBody>
@@ -6422,8 +6422,8 @@
         </p:nvSpPr>
         <p:spPr>
           <a:xfrm>
-            <a:off x="438912" y="3081528"/>
-            <a:ext cx="4700016" cy="256032"/>
+            <a:off x="438912" y="3240022"/>
+            <a:ext cx="4700016" cy="321564"/>
           </a:xfrm>
           <a:prstGeom prst="rect">
             <a:avLst/>
@@ -6443,7 +6443,7 @@
                   <a:srgbClr val="FFFFFF"/>
                 </a:solidFill>
               </a:rPr>
-              <a:t>• Hosts HTTP web server for settings UI</a:t>
+              <a:t>• HTTP web server for settings UI</a:t>
             </a:r>
           </a:p>
         </p:txBody>
@@ -6456,8 +6456,8 @@
         </p:nvSpPr>
         <p:spPr>
           <a:xfrm>
-            <a:off x="438912" y="3328416"/>
-            <a:ext cx="4700016" cy="256032"/>
+            <a:off x="438912" y="3506722"/>
+            <a:ext cx="4700016" cy="321564"/>
           </a:xfrm>
           <a:prstGeom prst="rect">
             <a:avLst/>
@@ -6477,7 +6477,7 @@
                   <a:srgbClr val="FFFFFF"/>
                 </a:solidFill>
               </a:rPr>
-              <a:t>• Controls all outputs (relays, TRIAC)</a:t>
+              <a:t>• Controls relays and TRIAC output</a:t>
             </a:r>
           </a:p>
         </p:txBody>
@@ -6490,8 +6490,8 @@
         </p:nvSpPr>
         <p:spPr>
           <a:xfrm>
-            <a:off x="438912" y="3575304"/>
-            <a:ext cx="4700016" cy="256032"/>
+            <a:off x="438912" y="3773422"/>
+            <a:ext cx="4700016" cy="321564"/>
           </a:xfrm>
           <a:prstGeom prst="rect">
             <a:avLst/>
@@ -6511,7 +6511,7 @@
                   <a:srgbClr val="FFFFFF"/>
                 </a:solidFill>
               </a:rPr>
-              <a:t>• Reads all sensors (DS18B20, MAX6675)</a:t>
+              <a:t>• Reads DS18B20 and MAX6675 sensors</a:t>
             </a:r>
           </a:p>
         </p:txBody>
@@ -6524,8 +6524,8 @@
         </p:nvSpPr>
         <p:spPr>
           <a:xfrm>
-            <a:off x="438912" y="3822192"/>
-            <a:ext cx="4700016" cy="256032"/>
+            <a:off x="438912" y="4040122"/>
+            <a:ext cx="4700016" cy="321564"/>
           </a:xfrm>
           <a:prstGeom prst="rect">
             <a:avLst/>
@@ -6545,7 +6545,7 @@
                   <a:srgbClr val="FFFFFF"/>
                 </a:solidFill>
               </a:rPr>
-              <a:t>• Drives OLED display via I2C</a:t>
+              <a:t>• Drives OLED display over I2C</a:t>
             </a:r>
           </a:p>
         </p:txBody>
@@ -6559,7 +6559,7 @@
         <p:spPr>
           <a:xfrm>
             <a:off x="5394960" y="749808"/>
-            <a:ext cx="2926080" cy="2834640"/>
+            <a:ext cx="3108960" cy="1910334"/>
           </a:xfrm>
           <a:prstGeom prst="rect">
             <a:avLst/>
@@ -6601,23 +6601,23 @@
         </p:nvSpPr>
         <p:spPr>
           <a:xfrm>
-            <a:off x="5559552" y="859536"/>
-            <a:ext cx="2596896" cy="256032"/>
-          </a:xfrm>
-          <a:prstGeom prst="rect">
-            <a:avLst/>
-          </a:prstGeom>
-          <a:noFill/>
-        </p:spPr>
-        <p:txBody>
-          <a:bodyPr wrap="square">
-            <a:spAutoFit/>
-          </a:bodyPr>
-          <a:lstStyle/>
-          <a:p>
-            <a:pPr algn="l"/>
-            <a:r>
-              <a:rPr sz="1200" b="1">
+            <a:off x="5559552" y="877824"/>
+            <a:ext cx="2779776" cy="302513"/>
+          </a:xfrm>
+          <a:prstGeom prst="rect">
+            <a:avLst/>
+          </a:prstGeom>
+          <a:noFill/>
+        </p:spPr>
+        <p:txBody>
+          <a:bodyPr wrap="square">
+            <a:spAutoFit/>
+          </a:bodyPr>
+          <a:lstStyle/>
+          <a:p>
+            <a:pPr algn="l"/>
+            <a:r>
+              <a:rPr sz="1300" b="1">
                 <a:solidFill>
                   <a:srgbClr val="A8DADC"/>
                 </a:solidFill>
@@ -6635,23 +6635,23 @@
         </p:nvSpPr>
         <p:spPr>
           <a:xfrm>
-            <a:off x="5559552" y="1106424"/>
-            <a:ext cx="2596896" cy="256032"/>
-          </a:xfrm>
-          <a:prstGeom prst="rect">
-            <a:avLst/>
-          </a:prstGeom>
-          <a:noFill/>
-        </p:spPr>
-        <p:txBody>
-          <a:bodyPr wrap="square">
-            <a:spAutoFit/>
-          </a:bodyPr>
-          <a:lstStyle/>
-          <a:p>
-            <a:pPr algn="l"/>
-            <a:r>
-              <a:rPr sz="1300" b="0">
+            <a:off x="5559552" y="1125473"/>
+            <a:ext cx="2779776" cy="321564"/>
+          </a:xfrm>
+          <a:prstGeom prst="rect">
+            <a:avLst/>
+          </a:prstGeom>
+          <a:noFill/>
+        </p:spPr>
+        <p:txBody>
+          <a:bodyPr wrap="square">
+            <a:spAutoFit/>
+          </a:bodyPr>
+          <a:lstStyle/>
+          <a:p>
+            <a:pPr algn="l"/>
+            <a:r>
+              <a:rPr sz="1400" b="0">
                 <a:solidFill>
                   <a:srgbClr val="FFFFFF"/>
                 </a:solidFill>
@@ -6669,23 +6669,23 @@
         </p:nvSpPr>
         <p:spPr>
           <a:xfrm>
-            <a:off x="5559552" y="1353312"/>
-            <a:ext cx="2596896" cy="256032"/>
-          </a:xfrm>
-          <a:prstGeom prst="rect">
-            <a:avLst/>
-          </a:prstGeom>
-          <a:noFill/>
-        </p:spPr>
-        <p:txBody>
-          <a:bodyPr wrap="square">
-            <a:spAutoFit/>
-          </a:bodyPr>
-          <a:lstStyle/>
-          <a:p>
-            <a:pPr algn="l"/>
-            <a:r>
-              <a:rPr sz="1300" b="0">
+            <a:off x="5559552" y="1392173"/>
+            <a:ext cx="2779776" cy="321564"/>
+          </a:xfrm>
+          <a:prstGeom prst="rect">
+            <a:avLst/>
+          </a:prstGeom>
+          <a:noFill/>
+        </p:spPr>
+        <p:txBody>
+          <a:bodyPr wrap="square">
+            <a:spAutoFit/>
+          </a:bodyPr>
+          <a:lstStyle/>
+          <a:p>
+            <a:pPr algn="l"/>
+            <a:r>
+              <a:rPr sz="1400" b="0">
                 <a:solidFill>
                   <a:srgbClr val="FFFFFF"/>
                 </a:solidFill>
@@ -6703,28 +6703,28 @@
         </p:nvSpPr>
         <p:spPr>
           <a:xfrm>
-            <a:off x="5559552" y="1600200"/>
-            <a:ext cx="2596896" cy="256032"/>
-          </a:xfrm>
-          <a:prstGeom prst="rect">
-            <a:avLst/>
-          </a:prstGeom>
-          <a:noFill/>
-        </p:spPr>
-        <p:txBody>
-          <a:bodyPr wrap="square">
-            <a:spAutoFit/>
-          </a:bodyPr>
-          <a:lstStyle/>
-          <a:p>
-            <a:pPr algn="l"/>
-            <a:r>
-              <a:rPr sz="1300" b="0">
-                <a:solidFill>
-                  <a:srgbClr val="FFFFFF"/>
-                </a:solidFill>
-              </a:rPr>
-              <a:t>• 3.3V pin: output — do NOT feed 5V here</a:t>
+            <a:off x="5559552" y="1658873"/>
+            <a:ext cx="2779776" cy="321564"/>
+          </a:xfrm>
+          <a:prstGeom prst="rect">
+            <a:avLst/>
+          </a:prstGeom>
+          <a:noFill/>
+        </p:spPr>
+        <p:txBody>
+          <a:bodyPr wrap="square">
+            <a:spAutoFit/>
+          </a:bodyPr>
+          <a:lstStyle/>
+          <a:p>
+            <a:pPr algn="l"/>
+            <a:r>
+              <a:rPr sz="1400" b="0">
+                <a:solidFill>
+                  <a:srgbClr val="FFFFFF"/>
+                </a:solidFill>
+              </a:rPr>
+              <a:t>• 3.3V pin: output — do NOT feed 5V</a:t>
             </a:r>
           </a:p>
         </p:txBody>
@@ -6737,28 +6737,28 @@
         </p:nvSpPr>
         <p:spPr>
           <a:xfrm>
-            <a:off x="5559552" y="1847088"/>
-            <a:ext cx="2596896" cy="256032"/>
-          </a:xfrm>
-          <a:prstGeom prst="rect">
-            <a:avLst/>
-          </a:prstGeom>
-          <a:noFill/>
-        </p:spPr>
-        <p:txBody>
-          <a:bodyPr wrap="square">
-            <a:spAutoFit/>
-          </a:bodyPr>
-          <a:lstStyle/>
-          <a:p>
-            <a:pPr algn="l"/>
-            <a:r>
-              <a:rPr sz="1300" b="0">
-                <a:solidFill>
-                  <a:srgbClr val="FFFFFF"/>
-                </a:solidFill>
-              </a:rPr>
-              <a:t>• Recommended: separate 5V/3A PSU for</a:t>
+            <a:off x="5559552" y="1925573"/>
+            <a:ext cx="2779776" cy="321564"/>
+          </a:xfrm>
+          <a:prstGeom prst="rect">
+            <a:avLst/>
+          </a:prstGeom>
+          <a:noFill/>
+        </p:spPr>
+        <p:txBody>
+          <a:bodyPr wrap="square">
+            <a:spAutoFit/>
+          </a:bodyPr>
+          <a:lstStyle/>
+          <a:p>
+            <a:pPr algn="l"/>
+            <a:r>
+              <a:rPr sz="1400" b="0">
+                <a:solidFill>
+                  <a:srgbClr val="FFFFFF"/>
+                </a:solidFill>
+              </a:rPr>
+              <a:t>• Use separate 5V/3A PSU in production</a:t>
             </a:r>
           </a:p>
         </p:txBody>
@@ -6771,28 +6771,28 @@
         </p:nvSpPr>
         <p:spPr>
           <a:xfrm>
-            <a:off x="5559552" y="2093976"/>
-            <a:ext cx="2596896" cy="256032"/>
-          </a:xfrm>
-          <a:prstGeom prst="rect">
-            <a:avLst/>
-          </a:prstGeom>
-          <a:noFill/>
-        </p:spPr>
-        <p:txBody>
-          <a:bodyPr wrap="square">
-            <a:spAutoFit/>
-          </a:bodyPr>
-          <a:lstStyle/>
-          <a:p>
-            <a:pPr algn="l"/>
-            <a:r>
-              <a:rPr sz="1300" b="0">
-                <a:solidFill>
-                  <a:srgbClr val="FFFFFF"/>
-                </a:solidFill>
-              </a:rPr>
-              <a:t>• production (relays draw surge current)</a:t>
+            <a:off x="5559552" y="2192273"/>
+            <a:ext cx="2779776" cy="321564"/>
+          </a:xfrm>
+          <a:prstGeom prst="rect">
+            <a:avLst/>
+          </a:prstGeom>
+          <a:noFill/>
+        </p:spPr>
+        <p:txBody>
+          <a:bodyPr wrap="square">
+            <a:spAutoFit/>
+          </a:bodyPr>
+          <a:lstStyle/>
+          <a:p>
+            <a:pPr algn="l"/>
+            <a:r>
+              <a:rPr sz="1400" b="0">
+                <a:solidFill>
+                  <a:srgbClr val="FFFFFF"/>
+                </a:solidFill>
+              </a:rPr>
+              <a:t>• (relay coils draw surge current)</a:t>
             </a:r>
           </a:p>
         </p:txBody>
@@ -6805,8 +6805,8 @@
         </p:nvSpPr>
         <p:spPr>
           <a:xfrm>
-            <a:off x="5394960" y="3703320"/>
-            <a:ext cx="2926080" cy="2167128"/>
+            <a:off x="5394960" y="2769870"/>
+            <a:ext cx="3108960" cy="3243834"/>
           </a:xfrm>
           <a:prstGeom prst="rect">
             <a:avLst/>
@@ -6848,23 +6848,23 @@
         </p:nvSpPr>
         <p:spPr>
           <a:xfrm>
-            <a:off x="5559552" y="3813048"/>
-            <a:ext cx="2596896" cy="256032"/>
-          </a:xfrm>
-          <a:prstGeom prst="rect">
-            <a:avLst/>
-          </a:prstGeom>
-          <a:noFill/>
-        </p:spPr>
-        <p:txBody>
-          <a:bodyPr wrap="square">
-            <a:spAutoFit/>
-          </a:bodyPr>
-          <a:lstStyle/>
-          <a:p>
-            <a:pPr algn="l"/>
-            <a:r>
-              <a:rPr sz="1200" b="1">
+            <a:off x="5559552" y="2897886"/>
+            <a:ext cx="2779776" cy="245364"/>
+          </a:xfrm>
+          <a:prstGeom prst="rect">
+            <a:avLst/>
+          </a:prstGeom>
+          <a:noFill/>
+        </p:spPr>
+        <p:txBody>
+          <a:bodyPr wrap="square">
+            <a:spAutoFit/>
+          </a:bodyPr>
+          <a:lstStyle/>
+          <a:p>
+            <a:pPr algn="l"/>
+            <a:r>
+              <a:rPr sz="1000" b="1">
                 <a:solidFill>
                   <a:srgbClr val="A8DADC"/>
                 </a:solidFill>
@@ -6882,8 +6882,8 @@
         </p:nvSpPr>
         <p:spPr>
           <a:xfrm>
-            <a:off x="5559552" y="4059936"/>
-            <a:ext cx="2596896" cy="256032"/>
+            <a:off x="5559552" y="3088386"/>
+            <a:ext cx="2779776" cy="264414"/>
           </a:xfrm>
           <a:prstGeom prst="rect">
             <a:avLst/>
@@ -6916,8 +6916,8 @@
         </p:nvSpPr>
         <p:spPr>
           <a:xfrm>
-            <a:off x="5559552" y="4306824"/>
-            <a:ext cx="2596896" cy="256032"/>
+            <a:off x="5559552" y="3297936"/>
+            <a:ext cx="2779776" cy="264414"/>
           </a:xfrm>
           <a:prstGeom prst="rect">
             <a:avLst/>
@@ -6950,8 +6950,8 @@
         </p:nvSpPr>
         <p:spPr>
           <a:xfrm>
-            <a:off x="5559552" y="4553712"/>
-            <a:ext cx="2596896" cy="256032"/>
+            <a:off x="5559552" y="3507486"/>
+            <a:ext cx="2779776" cy="264414"/>
           </a:xfrm>
           <a:prstGeom prst="rect">
             <a:avLst/>
@@ -6984,8 +6984,8 @@
         </p:nvSpPr>
         <p:spPr>
           <a:xfrm>
-            <a:off x="5559552" y="4800600"/>
-            <a:ext cx="2596896" cy="256032"/>
+            <a:off x="5559552" y="3717036"/>
+            <a:ext cx="2779776" cy="264414"/>
           </a:xfrm>
           <a:prstGeom prst="rect">
             <a:avLst/>
@@ -7018,8 +7018,8 @@
         </p:nvSpPr>
         <p:spPr>
           <a:xfrm>
-            <a:off x="5559552" y="5047488"/>
-            <a:ext cx="2596896" cy="256032"/>
+            <a:off x="5559552" y="3926586"/>
+            <a:ext cx="2779776" cy="264414"/>
           </a:xfrm>
           <a:prstGeom prst="rect">
             <a:avLst/>
@@ -7052,8 +7052,8 @@
         </p:nvSpPr>
         <p:spPr>
           <a:xfrm>
-            <a:off x="5559552" y="5294376"/>
-            <a:ext cx="2596896" cy="256032"/>
+            <a:off x="5559552" y="4136136"/>
+            <a:ext cx="2779776" cy="264414"/>
           </a:xfrm>
           <a:prstGeom prst="rect">
             <a:avLst/>
@@ -7086,8 +7086,8 @@
         </p:nvSpPr>
         <p:spPr>
           <a:xfrm>
-            <a:off x="5559552" y="5541264"/>
-            <a:ext cx="2596896" cy="256032"/>
+            <a:off x="5559552" y="4345686"/>
+            <a:ext cx="2779776" cy="264414"/>
           </a:xfrm>
           <a:prstGeom prst="rect">
             <a:avLst/>
@@ -7120,8 +7120,8 @@
         </p:nvSpPr>
         <p:spPr>
           <a:xfrm>
-            <a:off x="5559552" y="5788152"/>
-            <a:ext cx="2596896" cy="256032"/>
+            <a:off x="5559552" y="4555236"/>
+            <a:ext cx="2779776" cy="264414"/>
           </a:xfrm>
           <a:prstGeom prst="rect">
             <a:avLst/>
@@ -7154,8 +7154,8 @@
         </p:nvSpPr>
         <p:spPr>
           <a:xfrm>
-            <a:off x="5559552" y="6035040"/>
-            <a:ext cx="2596896" cy="256032"/>
+            <a:off x="5559552" y="4764786"/>
+            <a:ext cx="2779776" cy="264414"/>
           </a:xfrm>
           <a:prstGeom prst="rect">
             <a:avLst/>
@@ -7188,8 +7188,8 @@
         </p:nvSpPr>
         <p:spPr>
           <a:xfrm>
-            <a:off x="5559552" y="6281928"/>
-            <a:ext cx="2596896" cy="256032"/>
+            <a:off x="5559552" y="4974336"/>
+            <a:ext cx="2779776" cy="264414"/>
           </a:xfrm>
           <a:prstGeom prst="rect">
             <a:avLst/>
@@ -7222,8 +7222,8 @@
         </p:nvSpPr>
         <p:spPr>
           <a:xfrm>
-            <a:off x="5559552" y="6528816"/>
-            <a:ext cx="2596896" cy="256032"/>
+            <a:off x="5559552" y="5183886"/>
+            <a:ext cx="2779776" cy="264414"/>
           </a:xfrm>
           <a:prstGeom prst="rect">
             <a:avLst/>
@@ -7256,8 +7256,8 @@
         </p:nvSpPr>
         <p:spPr>
           <a:xfrm>
-            <a:off x="5559552" y="6775704"/>
-            <a:ext cx="2596896" cy="256032"/>
+            <a:off x="5559552" y="5393436"/>
+            <a:ext cx="2779776" cy="264414"/>
           </a:xfrm>
           <a:prstGeom prst="rect">
             <a:avLst/>
@@ -7290,8 +7290,8 @@
         </p:nvSpPr>
         <p:spPr>
           <a:xfrm>
-            <a:off x="5559552" y="7022592"/>
-            <a:ext cx="2596896" cy="256032"/>
+            <a:off x="5559552" y="5602986"/>
+            <a:ext cx="2779776" cy="264414"/>
           </a:xfrm>
           <a:prstGeom prst="rect">
             <a:avLst/>
@@ -7386,7 +7386,7 @@
         <p:spPr>
           <a:xfrm>
             <a:off x="365760" y="137160"/>
-            <a:ext cx="8229600" cy="502920"/>
+            <a:ext cx="11430000" cy="502920"/>
           </a:xfrm>
           <a:prstGeom prst="rect">
             <a:avLst/>
@@ -7470,8 +7470,8 @@
         </p:blipFill>
         <p:spPr>
           <a:xfrm>
-            <a:off x="8503920" y="822960"/>
-            <a:ext cx="3291840" cy="3200400"/>
+            <a:off x="8732520" y="804672"/>
+            <a:ext cx="3108960" cy="3108960"/>
           </a:xfrm>
           <a:prstGeom prst="rect">
             <a:avLst/>
@@ -7487,7 +7487,7 @@
         <p:spPr>
           <a:xfrm>
             <a:off x="274320" y="749808"/>
-            <a:ext cx="5029200" cy="3291840"/>
+            <a:ext cx="4937760" cy="2177034"/>
           </a:xfrm>
           <a:prstGeom prst="rect">
             <a:avLst/>
@@ -7529,23 +7529,23 @@
         </p:nvSpPr>
         <p:spPr>
           <a:xfrm>
-            <a:off x="438912" y="859536"/>
-            <a:ext cx="4700016" cy="256032"/>
-          </a:xfrm>
-          <a:prstGeom prst="rect">
-            <a:avLst/>
-          </a:prstGeom>
-          <a:noFill/>
-        </p:spPr>
-        <p:txBody>
-          <a:bodyPr wrap="square">
-            <a:spAutoFit/>
-          </a:bodyPr>
-          <a:lstStyle/>
-          <a:p>
-            <a:pPr algn="l"/>
-            <a:r>
-              <a:rPr sz="1200" b="1">
+            <a:off x="438912" y="877824"/>
+            <a:ext cx="4608576" cy="302513"/>
+          </a:xfrm>
+          <a:prstGeom prst="rect">
+            <a:avLst/>
+          </a:prstGeom>
+          <a:noFill/>
+        </p:spPr>
+        <p:txBody>
+          <a:bodyPr wrap="square">
+            <a:spAutoFit/>
+          </a:bodyPr>
+          <a:lstStyle/>
+          <a:p>
+            <a:pPr algn="l"/>
+            <a:r>
+              <a:rPr sz="1300" b="1">
                 <a:solidFill>
                   <a:srgbClr val="A8DADC"/>
                 </a:solidFill>
@@ -7563,8 +7563,8 @@
         </p:nvSpPr>
         <p:spPr>
           <a:xfrm>
-            <a:off x="438912" y="1106424"/>
-            <a:ext cx="4700016" cy="256032"/>
+            <a:off x="438912" y="1125473"/>
+            <a:ext cx="4608576" cy="321564"/>
           </a:xfrm>
           <a:prstGeom prst="rect">
             <a:avLst/>
@@ -7584,7 +7584,7 @@
                   <a:srgbClr val="FFFFFF"/>
                 </a:solidFill>
               </a:rPr>
-              <a:t>• Driver IC: SH1106  (note: NOT SSD1306)</a:t>
+              <a:t>• Driver IC: SH1106  (not SSD1306)</a:t>
             </a:r>
           </a:p>
         </p:txBody>
@@ -7597,8 +7597,8 @@
         </p:nvSpPr>
         <p:spPr>
           <a:xfrm>
-            <a:off x="438912" y="1353312"/>
-            <a:ext cx="4700016" cy="256032"/>
+            <a:off x="438912" y="1392173"/>
+            <a:ext cx="4608576" cy="321564"/>
           </a:xfrm>
           <a:prstGeom prst="rect">
             <a:avLst/>
@@ -7631,8 +7631,8 @@
         </p:nvSpPr>
         <p:spPr>
           <a:xfrm>
-            <a:off x="438912" y="1600200"/>
-            <a:ext cx="4700016" cy="256032"/>
+            <a:off x="438912" y="1658873"/>
+            <a:ext cx="4608576" cy="321564"/>
           </a:xfrm>
           <a:prstGeom prst="rect">
             <a:avLst/>
@@ -7652,7 +7652,7 @@
                   <a:srgbClr val="FFFFFF"/>
                 </a:solidFill>
               </a:rPr>
-              <a:t>• Resolution: 128 × 64 pixels  (monochrome)</a:t>
+              <a:t>• Resolution: 128 × 64 pixels, monochrome</a:t>
             </a:r>
           </a:p>
         </p:txBody>
@@ -7665,8 +7665,8 @@
         </p:nvSpPr>
         <p:spPr>
           <a:xfrm>
-            <a:off x="438912" y="1847088"/>
-            <a:ext cx="4700016" cy="256032"/>
+            <a:off x="438912" y="1925573"/>
+            <a:ext cx="4608576" cy="321564"/>
           </a:xfrm>
           <a:prstGeom prst="rect">
             <a:avLst/>
@@ -7699,8 +7699,8 @@
         </p:nvSpPr>
         <p:spPr>
           <a:xfrm>
-            <a:off x="438912" y="2093976"/>
-            <a:ext cx="4700016" cy="256032"/>
+            <a:off x="438912" y="2192273"/>
+            <a:ext cx="4608576" cy="321564"/>
           </a:xfrm>
           <a:prstGeom prst="rect">
             <a:avLst/>
@@ -7733,8 +7733,8 @@
         </p:nvSpPr>
         <p:spPr>
           <a:xfrm>
-            <a:off x="438912" y="2340864"/>
-            <a:ext cx="4700016" cy="256032"/>
+            <a:off x="438912" y="2458973"/>
+            <a:ext cx="4608576" cy="321564"/>
           </a:xfrm>
           <a:prstGeom prst="rect">
             <a:avLst/>
@@ -7754,55 +7754,21 @@
                   <a:srgbClr val="FFFFFF"/>
                 </a:solidFill>
               </a:rPr>
-              <a:t>• Display area: ~26.8 × 15.1 mm</a:t>
-            </a:r>
-          </a:p>
-        </p:txBody>
-      </p:sp>
-      <p:sp>
-        <p:nvSpPr>
-          <p:cNvPr id="14" name="TextBox 13"/>
-          <p:cNvSpPr txBox="1"/>
-          <p:nvPr/>
-        </p:nvSpPr>
-        <p:spPr>
-          <a:xfrm>
-            <a:off x="438912" y="2587752"/>
-            <a:ext cx="4700016" cy="256032"/>
-          </a:xfrm>
-          <a:prstGeom prst="rect">
-            <a:avLst/>
-          </a:prstGeom>
-          <a:noFill/>
-        </p:spPr>
-        <p:txBody>
-          <a:bodyPr wrap="square">
-            <a:spAutoFit/>
-          </a:bodyPr>
-          <a:lstStyle/>
-          <a:p>
-            <a:pPr algn="l"/>
-            <a:r>
-              <a:rPr sz="1400" b="0">
-                <a:solidFill>
-                  <a:srgbClr val="FFFFFF"/>
-                </a:solidFill>
-              </a:rPr>
-              <a:t>• Library: U8g2 (configured for SH1106)</a:t>
-            </a:r>
-          </a:p>
-        </p:txBody>
-      </p:sp>
-      <p:sp>
-        <p:nvSpPr>
-          <p:cNvPr id="15" name="Rectangle 14"/>
+              <a:t>• Library: U8g2 (SH1106 constructor)</a:t>
+            </a:r>
+          </a:p>
+        </p:txBody>
+      </p:sp>
+      <p:sp>
+        <p:nvSpPr>
+          <p:cNvPr id="14" name="Rectangle 13"/>
           <p:cNvSpPr/>
           <p:nvPr/>
         </p:nvSpPr>
         <p:spPr>
           <a:xfrm>
-            <a:off x="5394960" y="749808"/>
-            <a:ext cx="2926080" cy="3291840"/>
+            <a:off x="5349240" y="749808"/>
+            <a:ext cx="3200400" cy="2691384"/>
           </a:xfrm>
           <a:prstGeom prst="rect">
             <a:avLst/>
@@ -7838,170 +7804,204 @@
       </p:sp>
       <p:sp>
         <p:nvSpPr>
+          <p:cNvPr id="15" name="TextBox 14"/>
+          <p:cNvSpPr txBox="1"/>
+          <p:nvPr/>
+        </p:nvSpPr>
+        <p:spPr>
+          <a:xfrm>
+            <a:off x="5513832" y="877824"/>
+            <a:ext cx="2871216" cy="302513"/>
+          </a:xfrm>
+          <a:prstGeom prst="rect">
+            <a:avLst/>
+          </a:prstGeom>
+          <a:noFill/>
+        </p:spPr>
+        <p:txBody>
+          <a:bodyPr wrap="square">
+            <a:spAutoFit/>
+          </a:bodyPr>
+          <a:lstStyle/>
+          <a:p>
+            <a:pPr algn="l"/>
+            <a:r>
+              <a:rPr sz="1300" b="1">
+                <a:solidFill>
+                  <a:srgbClr val="A8DADC"/>
+                </a:solidFill>
+              </a:rPr>
+              <a:t>Wiring to ESP32</a:t>
+            </a:r>
+          </a:p>
+        </p:txBody>
+      </p:sp>
+      <p:sp>
+        <p:nvSpPr>
           <p:cNvPr id="16" name="TextBox 15"/>
           <p:cNvSpPr txBox="1"/>
           <p:nvPr/>
         </p:nvSpPr>
         <p:spPr>
           <a:xfrm>
-            <a:off x="5559552" y="859536"/>
-            <a:ext cx="2596896" cy="256032"/>
-          </a:xfrm>
-          <a:prstGeom prst="rect">
-            <a:avLst/>
-          </a:prstGeom>
-          <a:noFill/>
-        </p:spPr>
-        <p:txBody>
-          <a:bodyPr wrap="square">
-            <a:spAutoFit/>
-          </a:bodyPr>
-          <a:lstStyle/>
-          <a:p>
-            <a:pPr algn="l"/>
-            <a:r>
-              <a:rPr sz="1200" b="1">
+            <a:off x="5513832" y="1125473"/>
+            <a:ext cx="2871216" cy="321564"/>
+          </a:xfrm>
+          <a:prstGeom prst="rect">
+            <a:avLst/>
+          </a:prstGeom>
+          <a:noFill/>
+        </p:spPr>
+        <p:txBody>
+          <a:bodyPr wrap="square">
+            <a:spAutoFit/>
+          </a:bodyPr>
+          <a:lstStyle/>
+          <a:p>
+            <a:pPr algn="l"/>
+            <a:r>
+              <a:rPr sz="1400" b="0">
+                <a:solidFill>
+                  <a:srgbClr val="FFFFFF"/>
+                </a:solidFill>
+              </a:rPr>
+              <a:t>• VCC  →  3.3V</a:t>
+            </a:r>
+          </a:p>
+        </p:txBody>
+      </p:sp>
+      <p:sp>
+        <p:nvSpPr>
+          <p:cNvPr id="17" name="TextBox 16"/>
+          <p:cNvSpPr txBox="1"/>
+          <p:nvPr/>
+        </p:nvSpPr>
+        <p:spPr>
+          <a:xfrm>
+            <a:off x="5513832" y="1392173"/>
+            <a:ext cx="2871216" cy="321564"/>
+          </a:xfrm>
+          <a:prstGeom prst="rect">
+            <a:avLst/>
+          </a:prstGeom>
+          <a:noFill/>
+        </p:spPr>
+        <p:txBody>
+          <a:bodyPr wrap="square">
+            <a:spAutoFit/>
+          </a:bodyPr>
+          <a:lstStyle/>
+          <a:p>
+            <a:pPr algn="l"/>
+            <a:r>
+              <a:rPr sz="1400" b="0">
+                <a:solidFill>
+                  <a:srgbClr val="FFFFFF"/>
+                </a:solidFill>
+              </a:rPr>
+              <a:t>• GND  →  GND</a:t>
+            </a:r>
+          </a:p>
+        </p:txBody>
+      </p:sp>
+      <p:sp>
+        <p:nvSpPr>
+          <p:cNvPr id="18" name="TextBox 17"/>
+          <p:cNvSpPr txBox="1"/>
+          <p:nvPr/>
+        </p:nvSpPr>
+        <p:spPr>
+          <a:xfrm>
+            <a:off x="5513832" y="1658873"/>
+            <a:ext cx="2871216" cy="321564"/>
+          </a:xfrm>
+          <a:prstGeom prst="rect">
+            <a:avLst/>
+          </a:prstGeom>
+          <a:noFill/>
+        </p:spPr>
+        <p:txBody>
+          <a:bodyPr wrap="square">
+            <a:spAutoFit/>
+          </a:bodyPr>
+          <a:lstStyle/>
+          <a:p>
+            <a:pPr algn="l"/>
+            <a:r>
+              <a:rPr sz="1400" b="0">
+                <a:solidFill>
+                  <a:srgbClr val="FFFFFF"/>
+                </a:solidFill>
+              </a:rPr>
+              <a:t>• SDA  →  GPIO21</a:t>
+            </a:r>
+          </a:p>
+        </p:txBody>
+      </p:sp>
+      <p:sp>
+        <p:nvSpPr>
+          <p:cNvPr id="19" name="TextBox 18"/>
+          <p:cNvSpPr txBox="1"/>
+          <p:nvPr/>
+        </p:nvSpPr>
+        <p:spPr>
+          <a:xfrm>
+            <a:off x="5513832" y="1925573"/>
+            <a:ext cx="2871216" cy="321564"/>
+          </a:xfrm>
+          <a:prstGeom prst="rect">
+            <a:avLst/>
+          </a:prstGeom>
+          <a:noFill/>
+        </p:spPr>
+        <p:txBody>
+          <a:bodyPr wrap="square">
+            <a:spAutoFit/>
+          </a:bodyPr>
+          <a:lstStyle/>
+          <a:p>
+            <a:pPr algn="l"/>
+            <a:r>
+              <a:rPr sz="1400" b="0">
+                <a:solidFill>
+                  <a:srgbClr val="FFFFFF"/>
+                </a:solidFill>
+              </a:rPr>
+              <a:t>• SCL  →  GPIO22</a:t>
+            </a:r>
+          </a:p>
+        </p:txBody>
+      </p:sp>
+      <p:sp>
+        <p:nvSpPr>
+          <p:cNvPr id="20" name="TextBox 19"/>
+          <p:cNvSpPr txBox="1"/>
+          <p:nvPr/>
+        </p:nvSpPr>
+        <p:spPr>
+          <a:xfrm>
+            <a:off x="5513832" y="2192273"/>
+            <a:ext cx="2871216" cy="302513"/>
+          </a:xfrm>
+          <a:prstGeom prst="rect">
+            <a:avLst/>
+          </a:prstGeom>
+          <a:noFill/>
+        </p:spPr>
+        <p:txBody>
+          <a:bodyPr wrap="square">
+            <a:spAutoFit/>
+          </a:bodyPr>
+          <a:lstStyle/>
+          <a:p>
+            <a:pPr algn="l"/>
+            <a:r>
+              <a:rPr sz="1300" b="1">
                 <a:solidFill>
                   <a:srgbClr val="A8DADC"/>
                 </a:solidFill>
               </a:rPr>
-              <a:t>Wiring to ESP32</a:t>
-            </a:r>
-          </a:p>
-        </p:txBody>
-      </p:sp>
-      <p:sp>
-        <p:nvSpPr>
-          <p:cNvPr id="17" name="TextBox 16"/>
-          <p:cNvSpPr txBox="1"/>
-          <p:nvPr/>
-        </p:nvSpPr>
-        <p:spPr>
-          <a:xfrm>
-            <a:off x="5559552" y="1106424"/>
-            <a:ext cx="2596896" cy="256032"/>
-          </a:xfrm>
-          <a:prstGeom prst="rect">
-            <a:avLst/>
-          </a:prstGeom>
-          <a:noFill/>
-        </p:spPr>
-        <p:txBody>
-          <a:bodyPr wrap="square">
-            <a:spAutoFit/>
-          </a:bodyPr>
-          <a:lstStyle/>
-          <a:p>
-            <a:pPr algn="l"/>
-            <a:r>
-              <a:rPr sz="1300" b="0">
-                <a:solidFill>
-                  <a:srgbClr val="FFFFFF"/>
-                </a:solidFill>
-              </a:rPr>
-              <a:t>• VCC  →  3.3V</a:t>
-            </a:r>
-          </a:p>
-        </p:txBody>
-      </p:sp>
-      <p:sp>
-        <p:nvSpPr>
-          <p:cNvPr id="18" name="TextBox 17"/>
-          <p:cNvSpPr txBox="1"/>
-          <p:nvPr/>
-        </p:nvSpPr>
-        <p:spPr>
-          <a:xfrm>
-            <a:off x="5559552" y="1353312"/>
-            <a:ext cx="2596896" cy="256032"/>
-          </a:xfrm>
-          <a:prstGeom prst="rect">
-            <a:avLst/>
-          </a:prstGeom>
-          <a:noFill/>
-        </p:spPr>
-        <p:txBody>
-          <a:bodyPr wrap="square">
-            <a:spAutoFit/>
-          </a:bodyPr>
-          <a:lstStyle/>
-          <a:p>
-            <a:pPr algn="l"/>
-            <a:r>
-              <a:rPr sz="1300" b="0">
-                <a:solidFill>
-                  <a:srgbClr val="FFFFFF"/>
-                </a:solidFill>
-              </a:rPr>
-              <a:t>• GND  →  GND</a:t>
-            </a:r>
-          </a:p>
-        </p:txBody>
-      </p:sp>
-      <p:sp>
-        <p:nvSpPr>
-          <p:cNvPr id="19" name="TextBox 18"/>
-          <p:cNvSpPr txBox="1"/>
-          <p:nvPr/>
-        </p:nvSpPr>
-        <p:spPr>
-          <a:xfrm>
-            <a:off x="5559552" y="1600200"/>
-            <a:ext cx="2596896" cy="256032"/>
-          </a:xfrm>
-          <a:prstGeom prst="rect">
-            <a:avLst/>
-          </a:prstGeom>
-          <a:noFill/>
-        </p:spPr>
-        <p:txBody>
-          <a:bodyPr wrap="square">
-            <a:spAutoFit/>
-          </a:bodyPr>
-          <a:lstStyle/>
-          <a:p>
-            <a:pPr algn="l"/>
-            <a:r>
-              <a:rPr sz="1300" b="0">
-                <a:solidFill>
-                  <a:srgbClr val="FFFFFF"/>
-                </a:solidFill>
-              </a:rPr>
-              <a:t>• SDA  →  GPIO21</a:t>
-            </a:r>
-          </a:p>
-        </p:txBody>
-      </p:sp>
-      <p:sp>
-        <p:nvSpPr>
-          <p:cNvPr id="20" name="TextBox 19"/>
-          <p:cNvSpPr txBox="1"/>
-          <p:nvPr/>
-        </p:nvSpPr>
-        <p:spPr>
-          <a:xfrm>
-            <a:off x="5559552" y="1847088"/>
-            <a:ext cx="2596896" cy="256032"/>
-          </a:xfrm>
-          <a:prstGeom prst="rect">
-            <a:avLst/>
-          </a:prstGeom>
-          <a:noFill/>
-        </p:spPr>
-        <p:txBody>
-          <a:bodyPr wrap="square">
-            <a:spAutoFit/>
-          </a:bodyPr>
-          <a:lstStyle/>
-          <a:p>
-            <a:pPr algn="l"/>
-            <a:r>
-              <a:rPr sz="1300" b="0">
-                <a:solidFill>
-                  <a:srgbClr val="FFFFFF"/>
-                </a:solidFill>
-              </a:rPr>
-              <a:t>• SCL  →  GPIO22</a:t>
+              <a:t>Notes</a:t>
             </a:r>
           </a:p>
         </p:txBody>
@@ -8014,28 +8014,28 @@
         </p:nvSpPr>
         <p:spPr>
           <a:xfrm>
-            <a:off x="5559552" y="2093976"/>
-            <a:ext cx="2596896" cy="256032"/>
-          </a:xfrm>
-          <a:prstGeom prst="rect">
-            <a:avLst/>
-          </a:prstGeom>
-          <a:noFill/>
-        </p:spPr>
-        <p:txBody>
-          <a:bodyPr wrap="square">
-            <a:spAutoFit/>
-          </a:bodyPr>
-          <a:lstStyle/>
-          <a:p>
-            <a:pPr algn="l"/>
-            <a:r>
-              <a:rPr sz="1200" b="1">
-                <a:solidFill>
-                  <a:srgbClr val="A8DADC"/>
-                </a:solidFill>
-              </a:rPr>
-              <a:t>Notes</a:t>
+            <a:off x="5513832" y="2439922"/>
+            <a:ext cx="2871216" cy="321564"/>
+          </a:xfrm>
+          <a:prstGeom prst="rect">
+            <a:avLst/>
+          </a:prstGeom>
+          <a:noFill/>
+        </p:spPr>
+        <p:txBody>
+          <a:bodyPr wrap="square">
+            <a:spAutoFit/>
+          </a:bodyPr>
+          <a:lstStyle/>
+          <a:p>
+            <a:pPr algn="l"/>
+            <a:r>
+              <a:rPr sz="1400" b="0">
+                <a:solidFill>
+                  <a:srgbClr val="FFFFFF"/>
+                </a:solidFill>
+              </a:rPr>
+              <a:t>• No pull-up resistors needed</a:t>
             </a:r>
           </a:p>
         </p:txBody>
@@ -8048,28 +8048,28 @@
         </p:nvSpPr>
         <p:spPr>
           <a:xfrm>
-            <a:off x="5559552" y="2340864"/>
-            <a:ext cx="2596896" cy="256032"/>
-          </a:xfrm>
-          <a:prstGeom prst="rect">
-            <a:avLst/>
-          </a:prstGeom>
-          <a:noFill/>
-        </p:spPr>
-        <p:txBody>
-          <a:bodyPr wrap="square">
-            <a:spAutoFit/>
-          </a:bodyPr>
-          <a:lstStyle/>
-          <a:p>
-            <a:pPr algn="l"/>
-            <a:r>
-              <a:rPr sz="1300" b="0">
-                <a:solidFill>
-                  <a:srgbClr val="FFFFFF"/>
-                </a:solidFill>
-              </a:rPr>
-              <a:t>• No additional pull-up resistors needed</a:t>
+            <a:off x="5513832" y="2706622"/>
+            <a:ext cx="2871216" cy="321564"/>
+          </a:xfrm>
+          <a:prstGeom prst="rect">
+            <a:avLst/>
+          </a:prstGeom>
+          <a:noFill/>
+        </p:spPr>
+        <p:txBody>
+          <a:bodyPr wrap="square">
+            <a:spAutoFit/>
+          </a:bodyPr>
+          <a:lstStyle/>
+          <a:p>
+            <a:pPr algn="l"/>
+            <a:r>
+              <a:rPr sz="1400" b="0">
+                <a:solidFill>
+                  <a:srgbClr val="FFFFFF"/>
+                </a:solidFill>
+              </a:rPr>
+              <a:t>• (ESP32 internal pull-ups sufficient)</a:t>
             </a:r>
           </a:p>
         </p:txBody>
@@ -8082,91 +8082,23 @@
         </p:nvSpPr>
         <p:spPr>
           <a:xfrm>
-            <a:off x="5559552" y="2587752"/>
-            <a:ext cx="2596896" cy="256032"/>
-          </a:xfrm>
-          <a:prstGeom prst="rect">
-            <a:avLst/>
-          </a:prstGeom>
-          <a:noFill/>
-        </p:spPr>
-        <p:txBody>
-          <a:bodyPr wrap="square">
-            <a:spAutoFit/>
-          </a:bodyPr>
-          <a:lstStyle/>
-          <a:p>
-            <a:pPr algn="l"/>
-            <a:r>
-              <a:rPr sz="1300" b="0">
-                <a:solidFill>
-                  <a:srgbClr val="FFFFFF"/>
-                </a:solidFill>
-              </a:rPr>
-              <a:t>• (ESP32 internal pull-ups sufficient at</a:t>
-            </a:r>
-          </a:p>
-        </p:txBody>
-      </p:sp>
-      <p:sp>
-        <p:nvSpPr>
-          <p:cNvPr id="24" name="TextBox 23"/>
-          <p:cNvSpPr txBox="1"/>
-          <p:nvPr/>
-        </p:nvSpPr>
-        <p:spPr>
-          <a:xfrm>
-            <a:off x="5559552" y="2834640"/>
-            <a:ext cx="2596896" cy="256032"/>
-          </a:xfrm>
-          <a:prstGeom prst="rect">
-            <a:avLst/>
-          </a:prstGeom>
-          <a:noFill/>
-        </p:spPr>
-        <p:txBody>
-          <a:bodyPr wrap="square">
-            <a:spAutoFit/>
-          </a:bodyPr>
-          <a:lstStyle/>
-          <a:p>
-            <a:pPr algn="l"/>
-            <a:r>
-              <a:rPr sz="1300" b="0">
-                <a:solidFill>
-                  <a:srgbClr val="FFFFFF"/>
-                </a:solidFill>
-              </a:rPr>
-              <a:t>• 400 kHz I2C — or add 4.7kΩ externally)</a:t>
-            </a:r>
-          </a:p>
-        </p:txBody>
-      </p:sp>
-      <p:sp>
-        <p:nvSpPr>
-          <p:cNvPr id="25" name="TextBox 24"/>
-          <p:cNvSpPr txBox="1"/>
-          <p:nvPr/>
-        </p:nvSpPr>
-        <p:spPr>
-          <a:xfrm>
-            <a:off x="5559552" y="3081528"/>
-            <a:ext cx="2596896" cy="256032"/>
-          </a:xfrm>
-          <a:prstGeom prst="rect">
-            <a:avLst/>
-          </a:prstGeom>
-          <a:noFill/>
-        </p:spPr>
-        <p:txBody>
-          <a:bodyPr wrap="square">
-            <a:spAutoFit/>
-          </a:bodyPr>
-          <a:lstStyle/>
-          <a:p>
-            <a:pPr algn="l"/>
-            <a:r>
-              <a:rPr sz="1300" b="0">
+            <a:off x="5513832" y="2973322"/>
+            <a:ext cx="2871216" cy="321564"/>
+          </a:xfrm>
+          <a:prstGeom prst="rect">
+            <a:avLst/>
+          </a:prstGeom>
+          <a:noFill/>
+        </p:spPr>
+        <p:txBody>
+          <a:bodyPr wrap="square">
+            <a:spAutoFit/>
+          </a:bodyPr>
+          <a:lstStyle/>
+          <a:p>
+            <a:pPr algn="l"/>
+            <a:r>
+              <a:rPr sz="1400" b="0">
                 <a:solidFill>
                   <a:srgbClr val="FFFFFF"/>
                 </a:solidFill>
@@ -8178,14 +8110,14 @@
       </p:sp>
       <p:sp>
         <p:nvSpPr>
-          <p:cNvPr id="26" name="Rectangle 25"/>
+          <p:cNvPr id="24" name="Rectangle 23"/>
           <p:cNvSpPr/>
           <p:nvPr/>
         </p:nvSpPr>
         <p:spPr>
           <a:xfrm>
-            <a:off x="274320" y="4160520"/>
-            <a:ext cx="8046720" cy="2560320"/>
+            <a:off x="274320" y="3569208"/>
+            <a:ext cx="8229600" cy="2958084"/>
           </a:xfrm>
           <a:prstGeom prst="rect">
             <a:avLst/>
@@ -8221,204 +8153,272 @@
       </p:sp>
       <p:sp>
         <p:nvSpPr>
+          <p:cNvPr id="25" name="TextBox 24"/>
+          <p:cNvSpPr txBox="1"/>
+          <p:nvPr/>
+        </p:nvSpPr>
+        <p:spPr>
+          <a:xfrm>
+            <a:off x="438912" y="3697224"/>
+            <a:ext cx="7900416" cy="302513"/>
+          </a:xfrm>
+          <a:prstGeom prst="rect">
+            <a:avLst/>
+          </a:prstGeom>
+          <a:noFill/>
+        </p:spPr>
+        <p:txBody>
+          <a:bodyPr wrap="square">
+            <a:spAutoFit/>
+          </a:bodyPr>
+          <a:lstStyle/>
+          <a:p>
+            <a:pPr algn="l"/>
+            <a:r>
+              <a:rPr sz="1300" b="1">
+                <a:solidFill>
+                  <a:srgbClr val="A8DADC"/>
+                </a:solidFill>
+              </a:rPr>
+              <a:t>Role in this project</a:t>
+            </a:r>
+          </a:p>
+        </p:txBody>
+      </p:sp>
+      <p:sp>
+        <p:nvSpPr>
+          <p:cNvPr id="26" name="TextBox 25"/>
+          <p:cNvSpPr txBox="1"/>
+          <p:nvPr/>
+        </p:nvSpPr>
+        <p:spPr>
+          <a:xfrm>
+            <a:off x="438912" y="3944873"/>
+            <a:ext cx="7900416" cy="321564"/>
+          </a:xfrm>
+          <a:prstGeom prst="rect">
+            <a:avLst/>
+          </a:prstGeom>
+          <a:noFill/>
+        </p:spPr>
+        <p:txBody>
+          <a:bodyPr wrap="square">
+            <a:spAutoFit/>
+          </a:bodyPr>
+          <a:lstStyle/>
+          <a:p>
+            <a:pPr algn="l"/>
+            <a:r>
+              <a:rPr sz="1400" b="0">
+                <a:solidFill>
+                  <a:srgbClr val="FFFFFF"/>
+                </a:solidFill>
+              </a:rPr>
+              <a:t>• At-a-glance live status without phone/browser:</a:t>
+            </a:r>
+          </a:p>
+        </p:txBody>
+      </p:sp>
+      <p:sp>
+        <p:nvSpPr>
           <p:cNvPr id="27" name="TextBox 26"/>
           <p:cNvSpPr txBox="1"/>
           <p:nvPr/>
         </p:nvSpPr>
         <p:spPr>
           <a:xfrm>
-            <a:off x="438912" y="4270248"/>
-            <a:ext cx="7717536" cy="256032"/>
-          </a:xfrm>
-          <a:prstGeom prst="rect">
-            <a:avLst/>
-          </a:prstGeom>
-          <a:noFill/>
-        </p:spPr>
-        <p:txBody>
-          <a:bodyPr wrap="square">
-            <a:spAutoFit/>
-          </a:bodyPr>
-          <a:lstStyle/>
-          <a:p>
-            <a:pPr algn="l"/>
-            <a:r>
-              <a:rPr sz="1200" b="1">
+            <a:off x="438912" y="4211573"/>
+            <a:ext cx="7900416" cy="321564"/>
+          </a:xfrm>
+          <a:prstGeom prst="rect">
+            <a:avLst/>
+          </a:prstGeom>
+          <a:noFill/>
+        </p:spPr>
+        <p:txBody>
+          <a:bodyPr wrap="square">
+            <a:spAutoFit/>
+          </a:bodyPr>
+          <a:lstStyle/>
+          <a:p>
+            <a:pPr algn="l"/>
+            <a:r>
+              <a:rPr sz="1400" b="0">
+                <a:solidFill>
+                  <a:srgbClr val="FFFFFF"/>
+                </a:solidFill>
+              </a:rPr>
+              <a:t>• • Water temp (DS18B20) and flame temp (MAX6675)</a:t>
+            </a:r>
+          </a:p>
+        </p:txBody>
+      </p:sp>
+      <p:sp>
+        <p:nvSpPr>
+          <p:cNvPr id="28" name="TextBox 27"/>
+          <p:cNvSpPr txBox="1"/>
+          <p:nvPr/>
+        </p:nvSpPr>
+        <p:spPr>
+          <a:xfrm>
+            <a:off x="438912" y="4478273"/>
+            <a:ext cx="7900416" cy="321564"/>
+          </a:xfrm>
+          <a:prstGeom prst="rect">
+            <a:avLst/>
+          </a:prstGeom>
+          <a:noFill/>
+        </p:spPr>
+        <p:txBody>
+          <a:bodyPr wrap="square">
+            <a:spAutoFit/>
+          </a:bodyPr>
+          <a:lstStyle/>
+          <a:p>
+            <a:pPr algn="l"/>
+            <a:r>
+              <a:rPr sz="1400" b="0">
+                <a:solidFill>
+                  <a:srgbClr val="FFFFFF"/>
+                </a:solidFill>
+              </a:rPr>
+              <a:t>• • Pump / Feeder / Blower state indicators</a:t>
+            </a:r>
+          </a:p>
+        </p:txBody>
+      </p:sp>
+      <p:sp>
+        <p:nvSpPr>
+          <p:cNvPr id="29" name="TextBox 28"/>
+          <p:cNvSpPr txBox="1"/>
+          <p:nvPr/>
+        </p:nvSpPr>
+        <p:spPr>
+          <a:xfrm>
+            <a:off x="438912" y="4744973"/>
+            <a:ext cx="7900416" cy="321564"/>
+          </a:xfrm>
+          <a:prstGeom prst="rect">
+            <a:avLst/>
+          </a:prstGeom>
+          <a:noFill/>
+        </p:spPr>
+        <p:txBody>
+          <a:bodyPr wrap="square">
+            <a:spAutoFit/>
+          </a:bodyPr>
+          <a:lstStyle/>
+          <a:p>
+            <a:pPr algn="l"/>
+            <a:r>
+              <a:rPr sz="1400" b="0">
+                <a:solidFill>
+                  <a:srgbClr val="FFFFFF"/>
+                </a:solidFill>
+              </a:rPr>
+              <a:t>• • Current state machine state</a:t>
+            </a:r>
+          </a:p>
+        </p:txBody>
+      </p:sp>
+      <p:sp>
+        <p:nvSpPr>
+          <p:cNvPr id="30" name="TextBox 29"/>
+          <p:cNvSpPr txBox="1"/>
+          <p:nvPr/>
+        </p:nvSpPr>
+        <p:spPr>
+          <a:xfrm>
+            <a:off x="438912" y="5011673"/>
+            <a:ext cx="7900416" cy="321564"/>
+          </a:xfrm>
+          <a:prstGeom prst="rect">
+            <a:avLst/>
+          </a:prstGeom>
+          <a:noFill/>
+        </p:spPr>
+        <p:txBody>
+          <a:bodyPr wrap="square">
+            <a:spAutoFit/>
+          </a:bodyPr>
+          <a:lstStyle/>
+          <a:p>
+            <a:pPr algn="l"/>
+            <a:r>
+              <a:rPr sz="1400" b="0">
+                <a:solidFill>
+                  <a:srgbClr val="FFFFFF"/>
+                </a:solidFill>
+              </a:rPr>
+              <a:t>• • Active operation mode (Standby / Auto / Timer)</a:t>
+            </a:r>
+          </a:p>
+        </p:txBody>
+      </p:sp>
+      <p:sp>
+        <p:nvSpPr>
+          <p:cNvPr id="31" name="TextBox 30"/>
+          <p:cNvSpPr txBox="1"/>
+          <p:nvPr/>
+        </p:nvSpPr>
+        <p:spPr>
+          <a:xfrm>
+            <a:off x="438912" y="5278373"/>
+            <a:ext cx="7900416" cy="321564"/>
+          </a:xfrm>
+          <a:prstGeom prst="rect">
+            <a:avLst/>
+          </a:prstGeom>
+          <a:noFill/>
+        </p:spPr>
+        <p:txBody>
+          <a:bodyPr wrap="square">
+            <a:spAutoFit/>
+          </a:bodyPr>
+          <a:lstStyle/>
+          <a:p>
+            <a:pPr algn="l"/>
+            <a:r>
+              <a:rPr sz="1400" b="0">
+                <a:solidFill>
+                  <a:srgbClr val="FFFFFF"/>
+                </a:solidFill>
+              </a:rPr>
+              <a:t>• • Error icons (custom bitmap) on fault conditions</a:t>
+            </a:r>
+          </a:p>
+        </p:txBody>
+      </p:sp>
+      <p:sp>
+        <p:nvSpPr>
+          <p:cNvPr id="32" name="TextBox 31"/>
+          <p:cNvSpPr txBox="1"/>
+          <p:nvPr/>
+        </p:nvSpPr>
+        <p:spPr>
+          <a:xfrm>
+            <a:off x="438912" y="5545073"/>
+            <a:ext cx="7900416" cy="302513"/>
+          </a:xfrm>
+          <a:prstGeom prst="rect">
+            <a:avLst/>
+          </a:prstGeom>
+          <a:noFill/>
+        </p:spPr>
+        <p:txBody>
+          <a:bodyPr wrap="square">
+            <a:spAutoFit/>
+          </a:bodyPr>
+          <a:lstStyle/>
+          <a:p>
+            <a:pPr algn="l"/>
+            <a:r>
+              <a:rPr sz="1300" b="1">
                 <a:solidFill>
                   <a:srgbClr val="A8DADC"/>
                 </a:solidFill>
               </a:rPr>
-              <a:t>Role in this project</a:t>
-            </a:r>
-          </a:p>
-        </p:txBody>
-      </p:sp>
-      <p:sp>
-        <p:nvSpPr>
-          <p:cNvPr id="28" name="TextBox 27"/>
-          <p:cNvSpPr txBox="1"/>
-          <p:nvPr/>
-        </p:nvSpPr>
-        <p:spPr>
-          <a:xfrm>
-            <a:off x="438912" y="4517136"/>
-            <a:ext cx="7717536" cy="256032"/>
-          </a:xfrm>
-          <a:prstGeom prst="rect">
-            <a:avLst/>
-          </a:prstGeom>
-          <a:noFill/>
-        </p:spPr>
-        <p:txBody>
-          <a:bodyPr wrap="square">
-            <a:spAutoFit/>
-          </a:bodyPr>
-          <a:lstStyle/>
-          <a:p>
-            <a:pPr algn="l"/>
-            <a:r>
-              <a:rPr sz="1300" b="0">
-                <a:solidFill>
-                  <a:srgbClr val="FFFFFF"/>
-                </a:solidFill>
-              </a:rPr>
-              <a:t>• At-a-glance live status without phone/browser:</a:t>
-            </a:r>
-          </a:p>
-        </p:txBody>
-      </p:sp>
-      <p:sp>
-        <p:nvSpPr>
-          <p:cNvPr id="29" name="TextBox 28"/>
-          <p:cNvSpPr txBox="1"/>
-          <p:nvPr/>
-        </p:nvSpPr>
-        <p:spPr>
-          <a:xfrm>
-            <a:off x="438912" y="4764024"/>
-            <a:ext cx="7717536" cy="256032"/>
-          </a:xfrm>
-          <a:prstGeom prst="rect">
-            <a:avLst/>
-          </a:prstGeom>
-          <a:noFill/>
-        </p:spPr>
-        <p:txBody>
-          <a:bodyPr wrap="square">
-            <a:spAutoFit/>
-          </a:bodyPr>
-          <a:lstStyle/>
-          <a:p>
-            <a:pPr algn="l"/>
-            <a:r>
-              <a:rPr sz="1300" b="0">
-                <a:solidFill>
-                  <a:srgbClr val="FFFFFF"/>
-                </a:solidFill>
-              </a:rPr>
-              <a:t>• • Water temperature  (DS18B20)</a:t>
-            </a:r>
-          </a:p>
-        </p:txBody>
-      </p:sp>
-      <p:sp>
-        <p:nvSpPr>
-          <p:cNvPr id="30" name="TextBox 29"/>
-          <p:cNvSpPr txBox="1"/>
-          <p:nvPr/>
-        </p:nvSpPr>
-        <p:spPr>
-          <a:xfrm>
-            <a:off x="438912" y="5010912"/>
-            <a:ext cx="7717536" cy="256032"/>
-          </a:xfrm>
-          <a:prstGeom prst="rect">
-            <a:avLst/>
-          </a:prstGeom>
-          <a:noFill/>
-        </p:spPr>
-        <p:txBody>
-          <a:bodyPr wrap="square">
-            <a:spAutoFit/>
-          </a:bodyPr>
-          <a:lstStyle/>
-          <a:p>
-            <a:pPr algn="l"/>
-            <a:r>
-              <a:rPr sz="1300" b="0">
-                <a:solidFill>
-                  <a:srgbClr val="FFFFFF"/>
-                </a:solidFill>
-              </a:rPr>
-              <a:t>• • Flame temperature  (MAX6675)</a:t>
-            </a:r>
-          </a:p>
-        </p:txBody>
-      </p:sp>
-      <p:sp>
-        <p:nvSpPr>
-          <p:cNvPr id="31" name="TextBox 30"/>
-          <p:cNvSpPr txBox="1"/>
-          <p:nvPr/>
-        </p:nvSpPr>
-        <p:spPr>
-          <a:xfrm>
-            <a:off x="438912" y="5257800"/>
-            <a:ext cx="7717536" cy="256032"/>
-          </a:xfrm>
-          <a:prstGeom prst="rect">
-            <a:avLst/>
-          </a:prstGeom>
-          <a:noFill/>
-        </p:spPr>
-        <p:txBody>
-          <a:bodyPr wrap="square">
-            <a:spAutoFit/>
-          </a:bodyPr>
-          <a:lstStyle/>
-          <a:p>
-            <a:pPr algn="l"/>
-            <a:r>
-              <a:rPr sz="1300" b="0">
-                <a:solidFill>
-                  <a:srgbClr val="FFFFFF"/>
-                </a:solidFill>
-              </a:rPr>
-              <a:t>• • Pump / Feeder / Blower state</a:t>
-            </a:r>
-          </a:p>
-        </p:txBody>
-      </p:sp>
-      <p:sp>
-        <p:nvSpPr>
-          <p:cNvPr id="32" name="TextBox 31"/>
-          <p:cNvSpPr txBox="1"/>
-          <p:nvPr/>
-        </p:nvSpPr>
-        <p:spPr>
-          <a:xfrm>
-            <a:off x="438912" y="5504688"/>
-            <a:ext cx="7717536" cy="256032"/>
-          </a:xfrm>
-          <a:prstGeom prst="rect">
-            <a:avLst/>
-          </a:prstGeom>
-          <a:noFill/>
-        </p:spPr>
-        <p:txBody>
-          <a:bodyPr wrap="square">
-            <a:spAutoFit/>
-          </a:bodyPr>
-          <a:lstStyle/>
-          <a:p>
-            <a:pPr algn="l"/>
-            <a:r>
-              <a:rPr sz="1300" b="0">
-                <a:solidFill>
-                  <a:srgbClr val="FFFFFF"/>
-                </a:solidFill>
-              </a:rPr>
-              <a:t>• • Current state machine state</a:t>
+              <a:t>Important: SH1106 ≠ SSD1306</a:t>
             </a:r>
           </a:p>
         </p:txBody>
@@ -8431,28 +8431,28 @@
         </p:nvSpPr>
         <p:spPr>
           <a:xfrm>
-            <a:off x="438912" y="5751576"/>
-            <a:ext cx="7717536" cy="256032"/>
-          </a:xfrm>
-          <a:prstGeom prst="rect">
-            <a:avLst/>
-          </a:prstGeom>
-          <a:noFill/>
-        </p:spPr>
-        <p:txBody>
-          <a:bodyPr wrap="square">
-            <a:spAutoFit/>
-          </a:bodyPr>
-          <a:lstStyle/>
-          <a:p>
-            <a:pPr algn="l"/>
-            <a:r>
-              <a:rPr sz="1300" b="0">
-                <a:solidFill>
-                  <a:srgbClr val="FFFFFF"/>
-                </a:solidFill>
-              </a:rPr>
-              <a:t>• • Active operation mode</a:t>
+            <a:off x="438912" y="5792722"/>
+            <a:ext cx="7900416" cy="321564"/>
+          </a:xfrm>
+          <a:prstGeom prst="rect">
+            <a:avLst/>
+          </a:prstGeom>
+          <a:noFill/>
+        </p:spPr>
+        <p:txBody>
+          <a:bodyPr wrap="square">
+            <a:spAutoFit/>
+          </a:bodyPr>
+          <a:lstStyle/>
+          <a:p>
+            <a:pPr algn="l"/>
+            <a:r>
+              <a:rPr sz="1400" b="0">
+                <a:solidFill>
+                  <a:srgbClr val="FFFFFF"/>
+                </a:solidFill>
+              </a:rPr>
+              <a:t>• Many cheap 1.3" modules use SH1106.</a:t>
             </a:r>
           </a:p>
         </p:txBody>
@@ -8465,125 +8465,23 @@
         </p:nvSpPr>
         <p:spPr>
           <a:xfrm>
-            <a:off x="438912" y="5998464"/>
-            <a:ext cx="7717536" cy="256032"/>
-          </a:xfrm>
-          <a:prstGeom prst="rect">
-            <a:avLst/>
-          </a:prstGeom>
-          <a:noFill/>
-        </p:spPr>
-        <p:txBody>
-          <a:bodyPr wrap="square">
-            <a:spAutoFit/>
-          </a:bodyPr>
-          <a:lstStyle/>
-          <a:p>
-            <a:pPr algn="l"/>
-            <a:r>
-              <a:rPr sz="1300" b="0">
-                <a:solidFill>
-                  <a:srgbClr val="FFFFFF"/>
-                </a:solidFill>
-              </a:rPr>
-              <a:t>• • Error icons (custom bitmap) on faults</a:t>
-            </a:r>
-          </a:p>
-        </p:txBody>
-      </p:sp>
-      <p:sp>
-        <p:nvSpPr>
-          <p:cNvPr id="35" name="TextBox 34"/>
-          <p:cNvSpPr txBox="1"/>
-          <p:nvPr/>
-        </p:nvSpPr>
-        <p:spPr>
-          <a:xfrm>
-            <a:off x="438912" y="6245352"/>
-            <a:ext cx="7717536" cy="256032"/>
-          </a:xfrm>
-          <a:prstGeom prst="rect">
-            <a:avLst/>
-          </a:prstGeom>
-          <a:noFill/>
-        </p:spPr>
-        <p:txBody>
-          <a:bodyPr wrap="square">
-            <a:spAutoFit/>
-          </a:bodyPr>
-          <a:lstStyle/>
-          <a:p>
-            <a:pPr algn="l"/>
-            <a:r>
-              <a:rPr sz="1200" b="1">
-                <a:solidFill>
-                  <a:srgbClr val="A8DADC"/>
-                </a:solidFill>
-              </a:rPr>
-              <a:t>Important: SH1106 ≠ SSD1306</a:t>
-            </a:r>
-          </a:p>
-        </p:txBody>
-      </p:sp>
-      <p:sp>
-        <p:nvSpPr>
-          <p:cNvPr id="36" name="TextBox 35"/>
-          <p:cNvSpPr txBox="1"/>
-          <p:nvPr/>
-        </p:nvSpPr>
-        <p:spPr>
-          <a:xfrm>
-            <a:off x="438912" y="6492240"/>
-            <a:ext cx="7717536" cy="256032"/>
-          </a:xfrm>
-          <a:prstGeom prst="rect">
-            <a:avLst/>
-          </a:prstGeom>
-          <a:noFill/>
-        </p:spPr>
-        <p:txBody>
-          <a:bodyPr wrap="square">
-            <a:spAutoFit/>
-          </a:bodyPr>
-          <a:lstStyle/>
-          <a:p>
-            <a:pPr algn="l"/>
-            <a:r>
-              <a:rPr sz="1300" b="0">
-                <a:solidFill>
-                  <a:srgbClr val="FFFFFF"/>
-                </a:solidFill>
-              </a:rPr>
-              <a:t>• Many cheap 1.3" modules use SH1106.</a:t>
-            </a:r>
-          </a:p>
-        </p:txBody>
-      </p:sp>
-      <p:sp>
-        <p:nvSpPr>
-          <p:cNvPr id="37" name="TextBox 36"/>
-          <p:cNvSpPr txBox="1"/>
-          <p:nvPr/>
-        </p:nvSpPr>
-        <p:spPr>
-          <a:xfrm>
-            <a:off x="438912" y="6739128"/>
-            <a:ext cx="7717536" cy="256032"/>
-          </a:xfrm>
-          <a:prstGeom prst="rect">
-            <a:avLst/>
-          </a:prstGeom>
-          <a:noFill/>
-        </p:spPr>
-        <p:txBody>
-          <a:bodyPr wrap="square">
-            <a:spAutoFit/>
-          </a:bodyPr>
-          <a:lstStyle/>
-          <a:p>
-            <a:pPr algn="l"/>
-            <a:r>
-              <a:rPr sz="1300" b="0">
+            <a:off x="438912" y="6059422"/>
+            <a:ext cx="7900416" cy="321564"/>
+          </a:xfrm>
+          <a:prstGeom prst="rect">
+            <a:avLst/>
+          </a:prstGeom>
+          <a:noFill/>
+        </p:spPr>
+        <p:txBody>
+          <a:bodyPr wrap="square">
+            <a:spAutoFit/>
+          </a:bodyPr>
+          <a:lstStyle/>
+          <a:p>
+            <a:pPr algn="l"/>
+            <a:r>
+              <a:rPr sz="1400" b="0">
                 <a:solidFill>
                   <a:srgbClr val="FFFFFF"/>
                 </a:solidFill>
@@ -8663,7 +8561,7 @@
         <p:spPr>
           <a:xfrm>
             <a:off x="365760" y="137160"/>
-            <a:ext cx="8229600" cy="502920"/>
+            <a:ext cx="11430000" cy="502920"/>
           </a:xfrm>
           <a:prstGeom prst="rect">
             <a:avLst/>
@@ -8747,8 +8645,8 @@
         </p:blipFill>
         <p:spPr>
           <a:xfrm>
-            <a:off x="8503920" y="822960"/>
-            <a:ext cx="3291840" cy="3474720"/>
+            <a:off x="8732520" y="804672"/>
+            <a:ext cx="3108960" cy="3200400"/>
           </a:xfrm>
           <a:prstGeom prst="rect">
             <a:avLst/>
@@ -8764,7 +8662,7 @@
         <p:spPr>
           <a:xfrm>
             <a:off x="274320" y="749808"/>
-            <a:ext cx="5029200" cy="3474720"/>
+            <a:ext cx="4937760" cy="2443734"/>
           </a:xfrm>
           <a:prstGeom prst="rect">
             <a:avLst/>
@@ -8806,23 +8704,23 @@
         </p:nvSpPr>
         <p:spPr>
           <a:xfrm>
-            <a:off x="438912" y="859536"/>
-            <a:ext cx="4700016" cy="256032"/>
-          </a:xfrm>
-          <a:prstGeom prst="rect">
-            <a:avLst/>
-          </a:prstGeom>
-          <a:noFill/>
-        </p:spPr>
-        <p:txBody>
-          <a:bodyPr wrap="square">
-            <a:spAutoFit/>
-          </a:bodyPr>
-          <a:lstStyle/>
-          <a:p>
-            <a:pPr algn="l"/>
-            <a:r>
-              <a:rPr sz="1200" b="1">
+            <a:off x="438912" y="877824"/>
+            <a:ext cx="4608576" cy="302513"/>
+          </a:xfrm>
+          <a:prstGeom prst="rect">
+            <a:avLst/>
+          </a:prstGeom>
+          <a:noFill/>
+        </p:spPr>
+        <p:txBody>
+          <a:bodyPr wrap="square">
+            <a:spAutoFit/>
+          </a:bodyPr>
+          <a:lstStyle/>
+          <a:p>
+            <a:pPr algn="l"/>
+            <a:r>
+              <a:rPr sz="1300" b="1">
                 <a:solidFill>
                   <a:srgbClr val="A8DADC"/>
                 </a:solidFill>
@@ -8840,8 +8738,8 @@
         </p:nvSpPr>
         <p:spPr>
           <a:xfrm>
-            <a:off x="438912" y="1106424"/>
-            <a:ext cx="4700016" cy="256032"/>
+            <a:off x="438912" y="1125473"/>
+            <a:ext cx="4608576" cy="321564"/>
           </a:xfrm>
           <a:prstGeom prst="rect">
             <a:avLst/>
@@ -8874,8 +8772,8 @@
         </p:nvSpPr>
         <p:spPr>
           <a:xfrm>
-            <a:off x="438912" y="1353312"/>
-            <a:ext cx="4700016" cy="256032"/>
+            <a:off x="438912" y="1392173"/>
+            <a:ext cx="4608576" cy="321564"/>
           </a:xfrm>
           <a:prstGeom prst="rect">
             <a:avLst/>
@@ -8908,8 +8806,8 @@
         </p:nvSpPr>
         <p:spPr>
           <a:xfrm>
-            <a:off x="438912" y="1600200"/>
-            <a:ext cx="4700016" cy="256032"/>
+            <a:off x="438912" y="1658873"/>
+            <a:ext cx="4608576" cy="321564"/>
           </a:xfrm>
           <a:prstGeom prst="rect">
             <a:avLst/>
@@ -8929,7 +8827,7 @@
                   <a:srgbClr val="FFFFFF"/>
                 </a:solidFill>
               </a:rPr>
-              <a:t>• Accuracy: ±0.5°C from –10°C to +85°C</a:t>
+              <a:t>• Accuracy: ±0.5°C (–10°C to +85°C)</a:t>
             </a:r>
           </a:p>
         </p:txBody>
@@ -8942,8 +8840,8 @@
         </p:nvSpPr>
         <p:spPr>
           <a:xfrm>
-            <a:off x="438912" y="1847088"/>
-            <a:ext cx="4700016" cy="256032"/>
+            <a:off x="438912" y="1925573"/>
+            <a:ext cx="4608576" cy="321564"/>
           </a:xfrm>
           <a:prstGeom prst="rect">
             <a:avLst/>
@@ -8976,8 +8874,8 @@
         </p:nvSpPr>
         <p:spPr>
           <a:xfrm>
-            <a:off x="438912" y="2093976"/>
-            <a:ext cx="4700016" cy="256032"/>
+            <a:off x="438912" y="2192273"/>
+            <a:ext cx="4608576" cy="321564"/>
           </a:xfrm>
           <a:prstGeom prst="rect">
             <a:avLst/>
@@ -8997,7 +8895,7 @@
                   <a:srgbClr val="FFFFFF"/>
                 </a:solidFill>
               </a:rPr>
-              <a:t>• Supply: 3.0V – 5.5V (or parasitic 2-wire)</a:t>
+              <a:t>• Supply: 3.0V – 5.5V or parasitic (2-wire)</a:t>
             </a:r>
           </a:p>
         </p:txBody>
@@ -9010,8 +8908,8 @@
         </p:nvSpPr>
         <p:spPr>
           <a:xfrm>
-            <a:off x="438912" y="2340864"/>
-            <a:ext cx="4700016" cy="256032"/>
+            <a:off x="438912" y="2458973"/>
+            <a:ext cx="4608576" cy="321564"/>
           </a:xfrm>
           <a:prstGeom prst="rect">
             <a:avLst/>
@@ -9031,7 +8929,7 @@
                   <a:srgbClr val="FFFFFF"/>
                 </a:solidFill>
               </a:rPr>
-              <a:t>• Package: TO-92 or waterproof probe (DS18B20+PAR)</a:t>
+              <a:t>• Multiple sensors per bus (unique 64-bit ROM)</a:t>
             </a:r>
           </a:p>
         </p:txBody>
@@ -9044,8 +8942,8 @@
         </p:nvSpPr>
         <p:spPr>
           <a:xfrm>
-            <a:off x="438912" y="2587752"/>
-            <a:ext cx="4700016" cy="256032"/>
+            <a:off x="438912" y="2725673"/>
+            <a:ext cx="4608576" cy="321564"/>
           </a:xfrm>
           <a:prstGeom prst="rect">
             <a:avLst/>
@@ -9065,55 +8963,21 @@
                   <a:srgbClr val="FFFFFF"/>
                 </a:solidFill>
               </a:rPr>
-              <a:t>• Multiple sensors on one wire (unique 64-bit ROM)</a:t>
-            </a:r>
-          </a:p>
-        </p:txBody>
-      </p:sp>
-      <p:sp>
-        <p:nvSpPr>
-          <p:cNvPr id="15" name="TextBox 14"/>
-          <p:cNvSpPr txBox="1"/>
-          <p:nvPr/>
-        </p:nvSpPr>
-        <p:spPr>
-          <a:xfrm>
-            <a:off x="438912" y="2834640"/>
-            <a:ext cx="4700016" cy="256032"/>
-          </a:xfrm>
-          <a:prstGeom prst="rect">
-            <a:avLst/>
-          </a:prstGeom>
-          <a:noFill/>
-        </p:spPr>
-        <p:txBody>
-          <a:bodyPr wrap="square">
-            <a:spAutoFit/>
-          </a:bodyPr>
-          <a:lstStyle/>
-          <a:p>
-            <a:pPr algn="l"/>
-            <a:r>
-              <a:rPr sz="1400" b="0">
-                <a:solidFill>
-                  <a:srgbClr val="FFFFFF"/>
-                </a:solidFill>
-              </a:rPr>
-              <a:t>• Conversion time: 94ms (9-bit) to 750ms (12-bit)</a:t>
-            </a:r>
-          </a:p>
-        </p:txBody>
-      </p:sp>
-      <p:sp>
-        <p:nvSpPr>
-          <p:cNvPr id="16" name="Rectangle 15"/>
+              <a:t>• Conversion: 94ms (9-bit) to 750ms (12-bit)</a:t>
+            </a:r>
+          </a:p>
+        </p:txBody>
+      </p:sp>
+      <p:sp>
+        <p:nvSpPr>
+          <p:cNvPr id="15" name="Rectangle 14"/>
           <p:cNvSpPr/>
           <p:nvPr/>
         </p:nvSpPr>
         <p:spPr>
           <a:xfrm>
-            <a:off x="5394960" y="749808"/>
-            <a:ext cx="2926080" cy="3474720"/>
+            <a:off x="5349240" y="749808"/>
+            <a:ext cx="3200400" cy="2958084"/>
           </a:xfrm>
           <a:prstGeom prst="rect">
             <a:avLst/>
@@ -9149,131 +9013,301 @@
       </p:sp>
       <p:sp>
         <p:nvSpPr>
+          <p:cNvPr id="16" name="TextBox 15"/>
+          <p:cNvSpPr txBox="1"/>
+          <p:nvPr/>
+        </p:nvSpPr>
+        <p:spPr>
+          <a:xfrm>
+            <a:off x="5513832" y="877824"/>
+            <a:ext cx="2871216" cy="302513"/>
+          </a:xfrm>
+          <a:prstGeom prst="rect">
+            <a:avLst/>
+          </a:prstGeom>
+          <a:noFill/>
+        </p:spPr>
+        <p:txBody>
+          <a:bodyPr wrap="square">
+            <a:spAutoFit/>
+          </a:bodyPr>
+          <a:lstStyle/>
+          <a:p>
+            <a:pPr algn="l"/>
+            <a:r>
+              <a:rPr sz="1300" b="1">
+                <a:solidFill>
+                  <a:srgbClr val="A8DADC"/>
+                </a:solidFill>
+              </a:rPr>
+              <a:t>Wiring — normal (3-wire) mode</a:t>
+            </a:r>
+          </a:p>
+        </p:txBody>
+      </p:sp>
+      <p:sp>
+        <p:nvSpPr>
           <p:cNvPr id="17" name="TextBox 16"/>
           <p:cNvSpPr txBox="1"/>
           <p:nvPr/>
         </p:nvSpPr>
         <p:spPr>
           <a:xfrm>
-            <a:off x="5559552" y="859536"/>
-            <a:ext cx="2596896" cy="256032"/>
-          </a:xfrm>
-          <a:prstGeom prst="rect">
-            <a:avLst/>
-          </a:prstGeom>
-          <a:noFill/>
-        </p:spPr>
-        <p:txBody>
-          <a:bodyPr wrap="square">
-            <a:spAutoFit/>
-          </a:bodyPr>
-          <a:lstStyle/>
-          <a:p>
-            <a:pPr algn="l"/>
-            <a:r>
-              <a:rPr sz="1200" b="1">
+            <a:off x="5513832" y="1125473"/>
+            <a:ext cx="2871216" cy="321564"/>
+          </a:xfrm>
+          <a:prstGeom prst="rect">
+            <a:avLst/>
+          </a:prstGeom>
+          <a:noFill/>
+        </p:spPr>
+        <p:txBody>
+          <a:bodyPr wrap="square">
+            <a:spAutoFit/>
+          </a:bodyPr>
+          <a:lstStyle/>
+          <a:p>
+            <a:pPr algn="l"/>
+            <a:r>
+              <a:rPr sz="1400" b="0">
+                <a:solidFill>
+                  <a:srgbClr val="FFFFFF"/>
+                </a:solidFill>
+              </a:rPr>
+              <a:t>• VCC (red)     →  3.3V</a:t>
+            </a:r>
+          </a:p>
+        </p:txBody>
+      </p:sp>
+      <p:sp>
+        <p:nvSpPr>
+          <p:cNvPr id="18" name="TextBox 17"/>
+          <p:cNvSpPr txBox="1"/>
+          <p:nvPr/>
+        </p:nvSpPr>
+        <p:spPr>
+          <a:xfrm>
+            <a:off x="5513832" y="1392173"/>
+            <a:ext cx="2871216" cy="321564"/>
+          </a:xfrm>
+          <a:prstGeom prst="rect">
+            <a:avLst/>
+          </a:prstGeom>
+          <a:noFill/>
+        </p:spPr>
+        <p:txBody>
+          <a:bodyPr wrap="square">
+            <a:spAutoFit/>
+          </a:bodyPr>
+          <a:lstStyle/>
+          <a:p>
+            <a:pPr algn="l"/>
+            <a:r>
+              <a:rPr sz="1400" b="0">
+                <a:solidFill>
+                  <a:srgbClr val="FFFFFF"/>
+                </a:solidFill>
+              </a:rPr>
+              <a:t>• GND (black)   →  GND</a:t>
+            </a:r>
+          </a:p>
+        </p:txBody>
+      </p:sp>
+      <p:sp>
+        <p:nvSpPr>
+          <p:cNvPr id="19" name="TextBox 18"/>
+          <p:cNvSpPr txBox="1"/>
+          <p:nvPr/>
+        </p:nvSpPr>
+        <p:spPr>
+          <a:xfrm>
+            <a:off x="5513832" y="1658873"/>
+            <a:ext cx="2871216" cy="321564"/>
+          </a:xfrm>
+          <a:prstGeom prst="rect">
+            <a:avLst/>
+          </a:prstGeom>
+          <a:noFill/>
+        </p:spPr>
+        <p:txBody>
+          <a:bodyPr wrap="square">
+            <a:spAutoFit/>
+          </a:bodyPr>
+          <a:lstStyle/>
+          <a:p>
+            <a:pPr algn="l"/>
+            <a:r>
+              <a:rPr sz="1400" b="0">
+                <a:solidFill>
+                  <a:srgbClr val="FFFFFF"/>
+                </a:solidFill>
+              </a:rPr>
+              <a:t>• DATA (yellow) →  GPIO4</a:t>
+            </a:r>
+          </a:p>
+        </p:txBody>
+      </p:sp>
+      <p:sp>
+        <p:nvSpPr>
+          <p:cNvPr id="20" name="TextBox 19"/>
+          <p:cNvSpPr txBox="1"/>
+          <p:nvPr/>
+        </p:nvSpPr>
+        <p:spPr>
+          <a:xfrm>
+            <a:off x="5513832" y="1925573"/>
+            <a:ext cx="2871216" cy="321564"/>
+          </a:xfrm>
+          <a:prstGeom prst="rect">
+            <a:avLst/>
+          </a:prstGeom>
+          <a:noFill/>
+        </p:spPr>
+        <p:txBody>
+          <a:bodyPr wrap="square">
+            <a:spAutoFit/>
+          </a:bodyPr>
+          <a:lstStyle/>
+          <a:p>
+            <a:pPr algn="l"/>
+            <a:r>
+              <a:rPr sz="1400" b="0">
+                <a:solidFill>
+                  <a:srgbClr val="FFFFFF"/>
+                </a:solidFill>
+              </a:rPr>
+              <a:t>• 4.7 kΩ pull-up: DATA ↔ 3.3V</a:t>
+            </a:r>
+          </a:p>
+        </p:txBody>
+      </p:sp>
+      <p:sp>
+        <p:nvSpPr>
+          <p:cNvPr id="21" name="TextBox 20"/>
+          <p:cNvSpPr txBox="1"/>
+          <p:nvPr/>
+        </p:nvSpPr>
+        <p:spPr>
+          <a:xfrm>
+            <a:off x="5513832" y="2192273"/>
+            <a:ext cx="2871216" cy="302513"/>
+          </a:xfrm>
+          <a:prstGeom prst="rect">
+            <a:avLst/>
+          </a:prstGeom>
+          <a:noFill/>
+        </p:spPr>
+        <p:txBody>
+          <a:bodyPr wrap="square">
+            <a:spAutoFit/>
+          </a:bodyPr>
+          <a:lstStyle/>
+          <a:p>
+            <a:pPr algn="l"/>
+            <a:r>
+              <a:rPr sz="1300" b="1">
                 <a:solidFill>
                   <a:srgbClr val="A8DADC"/>
                 </a:solidFill>
               </a:rPr>
-              <a:t>Wiring to ESP32 (normal mode)</a:t>
-            </a:r>
-          </a:p>
-        </p:txBody>
-      </p:sp>
-      <p:sp>
-        <p:nvSpPr>
-          <p:cNvPr id="18" name="TextBox 17"/>
-          <p:cNvSpPr txBox="1"/>
-          <p:nvPr/>
-        </p:nvSpPr>
-        <p:spPr>
-          <a:xfrm>
-            <a:off x="5559552" y="1106424"/>
-            <a:ext cx="2596896" cy="256032"/>
-          </a:xfrm>
-          <a:prstGeom prst="rect">
-            <a:avLst/>
-          </a:prstGeom>
-          <a:noFill/>
-        </p:spPr>
-        <p:txBody>
-          <a:bodyPr wrap="square">
-            <a:spAutoFit/>
-          </a:bodyPr>
-          <a:lstStyle/>
-          <a:p>
-            <a:pPr algn="l"/>
-            <a:r>
-              <a:rPr sz="1300" b="0">
-                <a:solidFill>
-                  <a:srgbClr val="FFFFFF"/>
-                </a:solidFill>
-              </a:rPr>
-              <a:t>• VCC (red)   →  3.3V</a:t>
-            </a:r>
-          </a:p>
-        </p:txBody>
-      </p:sp>
-      <p:sp>
-        <p:nvSpPr>
-          <p:cNvPr id="19" name="TextBox 18"/>
-          <p:cNvSpPr txBox="1"/>
-          <p:nvPr/>
-        </p:nvSpPr>
-        <p:spPr>
-          <a:xfrm>
-            <a:off x="5559552" y="1353312"/>
-            <a:ext cx="2596896" cy="256032"/>
-          </a:xfrm>
-          <a:prstGeom prst="rect">
-            <a:avLst/>
-          </a:prstGeom>
-          <a:noFill/>
-        </p:spPr>
-        <p:txBody>
-          <a:bodyPr wrap="square">
-            <a:spAutoFit/>
-          </a:bodyPr>
-          <a:lstStyle/>
-          <a:p>
-            <a:pPr algn="l"/>
-            <a:r>
-              <a:rPr sz="1300" b="0">
-                <a:solidFill>
-                  <a:srgbClr val="FFFFFF"/>
-                </a:solidFill>
-              </a:rPr>
-              <a:t>• GND (black) →  GND</a:t>
-            </a:r>
-          </a:p>
-        </p:txBody>
-      </p:sp>
-      <p:sp>
-        <p:nvSpPr>
-          <p:cNvPr id="20" name="TextBox 19"/>
-          <p:cNvSpPr txBox="1"/>
-          <p:nvPr/>
-        </p:nvSpPr>
-        <p:spPr>
-          <a:xfrm>
-            <a:off x="5559552" y="1600200"/>
-            <a:ext cx="2596896" cy="256032"/>
-          </a:xfrm>
-          <a:prstGeom prst="rect">
-            <a:avLst/>
-          </a:prstGeom>
-          <a:noFill/>
-        </p:spPr>
-        <p:txBody>
-          <a:bodyPr wrap="square">
-            <a:spAutoFit/>
-          </a:bodyPr>
-          <a:lstStyle/>
-          <a:p>
-            <a:pPr algn="l"/>
-            <a:r>
-              <a:rPr sz="1300" b="0">
+              <a:t>Wiring — parasitic (2-wire) mode</a:t>
+            </a:r>
+          </a:p>
+        </p:txBody>
+      </p:sp>
+      <p:sp>
+        <p:nvSpPr>
+          <p:cNvPr id="22" name="TextBox 21"/>
+          <p:cNvSpPr txBox="1"/>
+          <p:nvPr/>
+        </p:nvSpPr>
+        <p:spPr>
+          <a:xfrm>
+            <a:off x="5513832" y="2439922"/>
+            <a:ext cx="2871216" cy="321564"/>
+          </a:xfrm>
+          <a:prstGeom prst="rect">
+            <a:avLst/>
+          </a:prstGeom>
+          <a:noFill/>
+        </p:spPr>
+        <p:txBody>
+          <a:bodyPr wrap="square">
+            <a:spAutoFit/>
+          </a:bodyPr>
+          <a:lstStyle/>
+          <a:p>
+            <a:pPr algn="l"/>
+            <a:r>
+              <a:rPr sz="1400" b="0">
+                <a:solidFill>
+                  <a:srgbClr val="FFFFFF"/>
+                </a:solidFill>
+              </a:rPr>
+              <a:t>• VCC (red)     →  GND  (tied low)</a:t>
+            </a:r>
+          </a:p>
+        </p:txBody>
+      </p:sp>
+      <p:sp>
+        <p:nvSpPr>
+          <p:cNvPr id="23" name="TextBox 22"/>
+          <p:cNvSpPr txBox="1"/>
+          <p:nvPr/>
+        </p:nvSpPr>
+        <p:spPr>
+          <a:xfrm>
+            <a:off x="5513832" y="2706622"/>
+            <a:ext cx="2871216" cy="321564"/>
+          </a:xfrm>
+          <a:prstGeom prst="rect">
+            <a:avLst/>
+          </a:prstGeom>
+          <a:noFill/>
+        </p:spPr>
+        <p:txBody>
+          <a:bodyPr wrap="square">
+            <a:spAutoFit/>
+          </a:bodyPr>
+          <a:lstStyle/>
+          <a:p>
+            <a:pPr algn="l"/>
+            <a:r>
+              <a:rPr sz="1400" b="0">
+                <a:solidFill>
+                  <a:srgbClr val="FFFFFF"/>
+                </a:solidFill>
+              </a:rPr>
+              <a:t>• GND (black)   →  GND</a:t>
+            </a:r>
+          </a:p>
+        </p:txBody>
+      </p:sp>
+      <p:sp>
+        <p:nvSpPr>
+          <p:cNvPr id="24" name="TextBox 23"/>
+          <p:cNvSpPr txBox="1"/>
+          <p:nvPr/>
+        </p:nvSpPr>
+        <p:spPr>
+          <a:xfrm>
+            <a:off x="5513832" y="2973322"/>
+            <a:ext cx="2871216" cy="321564"/>
+          </a:xfrm>
+          <a:prstGeom prst="rect">
+            <a:avLst/>
+          </a:prstGeom>
+          <a:noFill/>
+        </p:spPr>
+        <p:txBody>
+          <a:bodyPr wrap="square">
+            <a:spAutoFit/>
+          </a:bodyPr>
+          <a:lstStyle/>
+          <a:p>
+            <a:pPr algn="l"/>
+            <a:r>
+              <a:rPr sz="1400" b="0">
                 <a:solidFill>
                   <a:srgbClr val="FFFFFF"/>
                 </a:solidFill>
@@ -9285,199 +9319,29 @@
       </p:sp>
       <p:sp>
         <p:nvSpPr>
-          <p:cNvPr id="21" name="TextBox 20"/>
-          <p:cNvSpPr txBox="1"/>
-          <p:nvPr/>
-        </p:nvSpPr>
-        <p:spPr>
-          <a:xfrm>
-            <a:off x="5559552" y="1847088"/>
-            <a:ext cx="2596896" cy="256032"/>
-          </a:xfrm>
-          <a:prstGeom prst="rect">
-            <a:avLst/>
-          </a:prstGeom>
-          <a:noFill/>
-        </p:spPr>
-        <p:txBody>
-          <a:bodyPr wrap="square">
-            <a:spAutoFit/>
-          </a:bodyPr>
-          <a:lstStyle/>
-          <a:p>
-            <a:pPr algn="l"/>
-            <a:r>
-              <a:rPr sz="1300" b="0">
-                <a:solidFill>
-                  <a:srgbClr val="FFFFFF"/>
-                </a:solidFill>
-              </a:rPr>
-              <a:t>• 4.7 kΩ pull-up: DATA ↔ VCC</a:t>
-            </a:r>
-          </a:p>
-        </p:txBody>
-      </p:sp>
-      <p:sp>
-        <p:nvSpPr>
-          <p:cNvPr id="22" name="TextBox 21"/>
-          <p:cNvSpPr txBox="1"/>
-          <p:nvPr/>
-        </p:nvSpPr>
-        <p:spPr>
-          <a:xfrm>
-            <a:off x="5559552" y="2093976"/>
-            <a:ext cx="2596896" cy="256032"/>
-          </a:xfrm>
-          <a:prstGeom prst="rect">
-            <a:avLst/>
-          </a:prstGeom>
-          <a:noFill/>
-        </p:spPr>
-        <p:txBody>
-          <a:bodyPr wrap="square">
-            <a:spAutoFit/>
-          </a:bodyPr>
-          <a:lstStyle/>
-          <a:p>
-            <a:pPr algn="l"/>
-            <a:r>
-              <a:rPr sz="1200" b="1">
-                <a:solidFill>
-                  <a:srgbClr val="A8DADC"/>
-                </a:solidFill>
-              </a:rPr>
-              <a:t>Parasitic / 2-wire mode</a:t>
-            </a:r>
-          </a:p>
-        </p:txBody>
-      </p:sp>
-      <p:sp>
-        <p:nvSpPr>
-          <p:cNvPr id="23" name="TextBox 22"/>
-          <p:cNvSpPr txBox="1"/>
-          <p:nvPr/>
-        </p:nvSpPr>
-        <p:spPr>
-          <a:xfrm>
-            <a:off x="5559552" y="2340864"/>
-            <a:ext cx="2596896" cy="256032"/>
-          </a:xfrm>
-          <a:prstGeom prst="rect">
-            <a:avLst/>
-          </a:prstGeom>
-          <a:noFill/>
-        </p:spPr>
-        <p:txBody>
-          <a:bodyPr wrap="square">
-            <a:spAutoFit/>
-          </a:bodyPr>
-          <a:lstStyle/>
-          <a:p>
-            <a:pPr algn="l"/>
-            <a:r>
-              <a:rPr sz="1300" b="0">
-                <a:solidFill>
-                  <a:srgbClr val="FFFFFF"/>
-                </a:solidFill>
-              </a:rPr>
-              <a:t>• GND (black) →  GND</a:t>
-            </a:r>
-          </a:p>
-        </p:txBody>
-      </p:sp>
-      <p:sp>
-        <p:nvSpPr>
-          <p:cNvPr id="24" name="TextBox 23"/>
-          <p:cNvSpPr txBox="1"/>
-          <p:nvPr/>
-        </p:nvSpPr>
-        <p:spPr>
-          <a:xfrm>
-            <a:off x="5559552" y="2587752"/>
-            <a:ext cx="2596896" cy="256032"/>
-          </a:xfrm>
-          <a:prstGeom prst="rect">
-            <a:avLst/>
-          </a:prstGeom>
-          <a:noFill/>
-        </p:spPr>
-        <p:txBody>
-          <a:bodyPr wrap="square">
-            <a:spAutoFit/>
-          </a:bodyPr>
-          <a:lstStyle/>
-          <a:p>
-            <a:pPr algn="l"/>
-            <a:r>
-              <a:rPr sz="1300" b="0">
-                <a:solidFill>
-                  <a:srgbClr val="FFFFFF"/>
-                </a:solidFill>
-              </a:rPr>
-              <a:t>• VCC (red)   →  GND  (tied low)</a:t>
-            </a:r>
-          </a:p>
-        </p:txBody>
-      </p:sp>
-      <p:sp>
-        <p:nvSpPr>
           <p:cNvPr id="25" name="TextBox 24"/>
           <p:cNvSpPr txBox="1"/>
           <p:nvPr/>
         </p:nvSpPr>
         <p:spPr>
           <a:xfrm>
-            <a:off x="5559552" y="2834640"/>
-            <a:ext cx="2596896" cy="256032"/>
-          </a:xfrm>
-          <a:prstGeom prst="rect">
-            <a:avLst/>
-          </a:prstGeom>
-          <a:noFill/>
-        </p:spPr>
-        <p:txBody>
-          <a:bodyPr wrap="square">
-            <a:spAutoFit/>
-          </a:bodyPr>
-          <a:lstStyle/>
-          <a:p>
-            <a:pPr algn="l"/>
-            <a:r>
-              <a:rPr sz="1300" b="0">
-                <a:solidFill>
-                  <a:srgbClr val="FFFFFF"/>
-                </a:solidFill>
-              </a:rPr>
-              <a:t>• DATA (yellow) →  GPIO4</a:t>
-            </a:r>
-          </a:p>
-        </p:txBody>
-      </p:sp>
-      <p:sp>
-        <p:nvSpPr>
-          <p:cNvPr id="26" name="TextBox 25"/>
-          <p:cNvSpPr txBox="1"/>
-          <p:nvPr/>
-        </p:nvSpPr>
-        <p:spPr>
-          <a:xfrm>
-            <a:off x="5559552" y="3081528"/>
-            <a:ext cx="2596896" cy="256032"/>
-          </a:xfrm>
-          <a:prstGeom prst="rect">
-            <a:avLst/>
-          </a:prstGeom>
-          <a:noFill/>
-        </p:spPr>
-        <p:txBody>
-          <a:bodyPr wrap="square">
-            <a:spAutoFit/>
-          </a:bodyPr>
-          <a:lstStyle/>
-          <a:p>
-            <a:pPr algn="l"/>
-            <a:r>
-              <a:rPr sz="1300" b="0">
+            <a:off x="5513832" y="3240022"/>
+            <a:ext cx="2871216" cy="321564"/>
+          </a:xfrm>
+          <a:prstGeom prst="rect">
+            <a:avLst/>
+          </a:prstGeom>
+          <a:noFill/>
+        </p:spPr>
+        <p:txBody>
+          <a:bodyPr wrap="square">
+            <a:spAutoFit/>
+          </a:bodyPr>
+          <a:lstStyle/>
+          <a:p>
+            <a:pPr algn="l"/>
+            <a:r>
+              <a:rPr sz="1400" b="0">
                 <a:solidFill>
                   <a:srgbClr val="FFFFFF"/>
                 </a:solidFill>
@@ -9489,14 +9353,14 @@
       </p:sp>
       <p:sp>
         <p:nvSpPr>
-          <p:cNvPr id="27" name="Rectangle 26"/>
+          <p:cNvPr id="26" name="Rectangle 25"/>
           <p:cNvSpPr/>
           <p:nvPr/>
         </p:nvSpPr>
         <p:spPr>
           <a:xfrm>
-            <a:off x="274320" y="4343400"/>
-            <a:ext cx="8046720" cy="2377440"/>
+            <a:off x="274320" y="3835908"/>
+            <a:ext cx="8229600" cy="2767584"/>
           </a:xfrm>
           <a:prstGeom prst="rect">
             <a:avLst/>
@@ -9532,14 +9396,218 @@
       </p:sp>
       <p:sp>
         <p:nvSpPr>
+          <p:cNvPr id="27" name="TextBox 26"/>
+          <p:cNvSpPr txBox="1"/>
+          <p:nvPr/>
+        </p:nvSpPr>
+        <p:spPr>
+          <a:xfrm>
+            <a:off x="438912" y="3963924"/>
+            <a:ext cx="7900416" cy="283464"/>
+          </a:xfrm>
+          <a:prstGeom prst="rect">
+            <a:avLst/>
+          </a:prstGeom>
+          <a:noFill/>
+        </p:spPr>
+        <p:txBody>
+          <a:bodyPr wrap="square">
+            <a:spAutoFit/>
+          </a:bodyPr>
+          <a:lstStyle/>
+          <a:p>
+            <a:pPr algn="l"/>
+            <a:r>
+              <a:rPr sz="1200" b="1">
+                <a:solidFill>
+                  <a:srgbClr val="A8DADC"/>
+                </a:solidFill>
+              </a:rPr>
+              <a:t>Role in this project</a:t>
+            </a:r>
+          </a:p>
+        </p:txBody>
+      </p:sp>
+      <p:sp>
+        <p:nvSpPr>
           <p:cNvPr id="28" name="TextBox 27"/>
           <p:cNvSpPr txBox="1"/>
           <p:nvPr/>
         </p:nvSpPr>
         <p:spPr>
           <a:xfrm>
-            <a:off x="438912" y="4453128"/>
-            <a:ext cx="7717536" cy="256032"/>
+            <a:off x="438912" y="4192524"/>
+            <a:ext cx="7900416" cy="302513"/>
+          </a:xfrm>
+          <a:prstGeom prst="rect">
+            <a:avLst/>
+          </a:prstGeom>
+          <a:noFill/>
+        </p:spPr>
+        <p:txBody>
+          <a:bodyPr wrap="square">
+            <a:spAutoFit/>
+          </a:bodyPr>
+          <a:lstStyle/>
+          <a:p>
+            <a:pPr algn="l"/>
+            <a:r>
+              <a:rPr sz="1300" b="0">
+                <a:solidFill>
+                  <a:srgbClr val="FFFFFF"/>
+                </a:solidFill>
+              </a:rPr>
+              <a:t>• Measures water / boiler temperature</a:t>
+            </a:r>
+          </a:p>
+        </p:txBody>
+      </p:sp>
+      <p:sp>
+        <p:nvSpPr>
+          <p:cNvPr id="29" name="TextBox 28"/>
+          <p:cNvSpPr txBox="1"/>
+          <p:nvPr/>
+        </p:nvSpPr>
+        <p:spPr>
+          <a:xfrm>
+            <a:off x="438912" y="4440173"/>
+            <a:ext cx="7900416" cy="302513"/>
+          </a:xfrm>
+          <a:prstGeom prst="rect">
+            <a:avLst/>
+          </a:prstGeom>
+          <a:noFill/>
+        </p:spPr>
+        <p:txBody>
+          <a:bodyPr wrap="square">
+            <a:spAutoFit/>
+          </a:bodyPr>
+          <a:lstStyle/>
+          <a:p>
+            <a:pPr algn="l"/>
+            <a:r>
+              <a:rPr sz="1300" b="0">
+                <a:solidFill>
+                  <a:srgbClr val="FFFFFF"/>
+                </a:solidFill>
+              </a:rPr>
+              <a:t>• Used for: pump start/stop hysteresis,</a:t>
+            </a:r>
+          </a:p>
+        </p:txBody>
+      </p:sp>
+      <p:sp>
+        <p:nvSpPr>
+          <p:cNvPr id="30" name="TextBox 29"/>
+          <p:cNvSpPr txBox="1"/>
+          <p:nvPr/>
+        </p:nvSpPr>
+        <p:spPr>
+          <a:xfrm>
+            <a:off x="438912" y="4687822"/>
+            <a:ext cx="7900416" cy="302513"/>
+          </a:xfrm>
+          <a:prstGeom prst="rect">
+            <a:avLst/>
+          </a:prstGeom>
+          <a:noFill/>
+        </p:spPr>
+        <p:txBody>
+          <a:bodyPr wrap="square">
+            <a:spAutoFit/>
+          </a:bodyPr>
+          <a:lstStyle/>
+          <a:p>
+            <a:pPr algn="l"/>
+            <a:r>
+              <a:rPr sz="1300" b="0">
+                <a:solidFill>
+                  <a:srgbClr val="FFFFFF"/>
+                </a:solidFill>
+              </a:rPr>
+              <a:t>• power level selection (P1/P2/P3),</a:t>
+            </a:r>
+          </a:p>
+        </p:txBody>
+      </p:sp>
+      <p:sp>
+        <p:nvSpPr>
+          <p:cNvPr id="31" name="TextBox 30"/>
+          <p:cNvSpPr txBox="1"/>
+          <p:nvPr/>
+        </p:nvSpPr>
+        <p:spPr>
+          <a:xfrm>
+            <a:off x="438912" y="4935471"/>
+            <a:ext cx="7900416" cy="302513"/>
+          </a:xfrm>
+          <a:prstGeom prst="rect">
+            <a:avLst/>
+          </a:prstGeom>
+          <a:noFill/>
+        </p:spPr>
+        <p:txBody>
+          <a:bodyPr wrap="square">
+            <a:spAutoFit/>
+          </a:bodyPr>
+          <a:lstStyle/>
+          <a:p>
+            <a:pPr algn="l"/>
+            <a:r>
+              <a:rPr sz="1300" b="0">
+                <a:solidFill>
+                  <a:srgbClr val="FFFFFF"/>
+                </a:solidFill>
+              </a:rPr>
+              <a:t>• economy mode logic,</a:t>
+            </a:r>
+          </a:p>
+        </p:txBody>
+      </p:sp>
+      <p:sp>
+        <p:nvSpPr>
+          <p:cNvPr id="32" name="TextBox 31"/>
+          <p:cNvSpPr txBox="1"/>
+          <p:nvPr/>
+        </p:nvSpPr>
+        <p:spPr>
+          <a:xfrm>
+            <a:off x="438912" y="5183120"/>
+            <a:ext cx="7900416" cy="302513"/>
+          </a:xfrm>
+          <a:prstGeom prst="rect">
+            <a:avLst/>
+          </a:prstGeom>
+          <a:noFill/>
+        </p:spPr>
+        <p:txBody>
+          <a:bodyPr wrap="square">
+            <a:spAutoFit/>
+          </a:bodyPr>
+          <a:lstStyle/>
+          <a:p>
+            <a:pPr algn="l"/>
+            <a:r>
+              <a:rPr sz="1300" b="0">
+                <a:solidFill>
+                  <a:srgbClr val="FFFFFF"/>
+                </a:solidFill>
+              </a:rPr>
+              <a:t>• target temperature control loop</a:t>
+            </a:r>
+          </a:p>
+        </p:txBody>
+      </p:sp>
+      <p:sp>
+        <p:nvSpPr>
+          <p:cNvPr id="33" name="TextBox 32"/>
+          <p:cNvSpPr txBox="1"/>
+          <p:nvPr/>
+        </p:nvSpPr>
+        <p:spPr>
+          <a:xfrm>
+            <a:off x="438912" y="5430769"/>
+            <a:ext cx="7900416" cy="283464"/>
           </a:xfrm>
           <a:prstGeom prst="rect">
             <a:avLst/>
@@ -9559,21 +9627,21 @@
                   <a:srgbClr val="A8DADC"/>
                 </a:solidFill>
               </a:rPr>
-              <a:t>Role in this project</a:t>
-            </a:r>
-          </a:p>
-        </p:txBody>
-      </p:sp>
-      <p:sp>
-        <p:nvSpPr>
-          <p:cNvPr id="29" name="TextBox 28"/>
-          <p:cNvSpPr txBox="1"/>
-          <p:nvPr/>
-        </p:nvSpPr>
-        <p:spPr>
-          <a:xfrm>
-            <a:off x="438912" y="4700016"/>
-            <a:ext cx="7717536" cy="256032"/>
+              <a:t>Recommendation</a:t>
+            </a:r>
+          </a:p>
+        </p:txBody>
+      </p:sp>
+      <p:sp>
+        <p:nvSpPr>
+          <p:cNvPr id="34" name="TextBox 33"/>
+          <p:cNvSpPr txBox="1"/>
+          <p:nvPr/>
+        </p:nvSpPr>
+        <p:spPr>
+          <a:xfrm>
+            <a:off x="438912" y="5659369"/>
+            <a:ext cx="7900416" cy="302513"/>
           </a:xfrm>
           <a:prstGeom prst="rect">
             <a:avLst/>
@@ -9593,21 +9661,21 @@
                   <a:srgbClr val="FFFFFF"/>
                 </a:solidFill>
               </a:rPr>
-              <a:t>• Measures water / boiler temperature</a:t>
-            </a:r>
-          </a:p>
-        </p:txBody>
-      </p:sp>
-      <p:sp>
-        <p:nvSpPr>
-          <p:cNvPr id="30" name="TextBox 29"/>
-          <p:cNvSpPr txBox="1"/>
-          <p:nvPr/>
-        </p:nvSpPr>
-        <p:spPr>
-          <a:xfrm>
-            <a:off x="438912" y="4946904"/>
-            <a:ext cx="7717536" cy="256032"/>
+              <a:t>• Use waterproof stainless steel probe version.</a:t>
+            </a:r>
+          </a:p>
+        </p:txBody>
+      </p:sp>
+      <p:sp>
+        <p:nvSpPr>
+          <p:cNvPr id="35" name="TextBox 34"/>
+          <p:cNvSpPr txBox="1"/>
+          <p:nvPr/>
+        </p:nvSpPr>
+        <p:spPr>
+          <a:xfrm>
+            <a:off x="438912" y="5907018"/>
+            <a:ext cx="7900416" cy="302513"/>
           </a:xfrm>
           <a:prstGeom prst="rect">
             <a:avLst/>
@@ -9627,21 +9695,21 @@
                   <a:srgbClr val="FFFFFF"/>
                 </a:solidFill>
               </a:rPr>
-              <a:t>• Used for: pump start/stop hysteresis,</a:t>
-            </a:r>
-          </a:p>
-        </p:txBody>
-      </p:sp>
-      <p:sp>
-        <p:nvSpPr>
-          <p:cNvPr id="31" name="TextBox 30"/>
-          <p:cNvSpPr txBox="1"/>
-          <p:nvPr/>
-        </p:nvSpPr>
-        <p:spPr>
-          <a:xfrm>
-            <a:off x="438912" y="5193792"/>
-            <a:ext cx="7717536" cy="256032"/>
+              <a:t>• Route cable away from mains wiring.</a:t>
+            </a:r>
+          </a:p>
+        </p:txBody>
+      </p:sp>
+      <p:sp>
+        <p:nvSpPr>
+          <p:cNvPr id="36" name="TextBox 35"/>
+          <p:cNvSpPr txBox="1"/>
+          <p:nvPr/>
+        </p:nvSpPr>
+        <p:spPr>
+          <a:xfrm>
+            <a:off x="438912" y="6154667"/>
+            <a:ext cx="7900416" cy="302513"/>
           </a:xfrm>
           <a:prstGeom prst="rect">
             <a:avLst/>
@@ -9661,211 +9729,7 @@
                   <a:srgbClr val="FFFFFF"/>
                 </a:solidFill>
               </a:rPr>
-              <a:t>• power level selection (P1/P2/P3),</a:t>
-            </a:r>
-          </a:p>
-        </p:txBody>
-      </p:sp>
-      <p:sp>
-        <p:nvSpPr>
-          <p:cNvPr id="32" name="TextBox 31"/>
-          <p:cNvSpPr txBox="1"/>
-          <p:nvPr/>
-        </p:nvSpPr>
-        <p:spPr>
-          <a:xfrm>
-            <a:off x="438912" y="5440680"/>
-            <a:ext cx="7717536" cy="256032"/>
-          </a:xfrm>
-          <a:prstGeom prst="rect">
-            <a:avLst/>
-          </a:prstGeom>
-          <a:noFill/>
-        </p:spPr>
-        <p:txBody>
-          <a:bodyPr wrap="square">
-            <a:spAutoFit/>
-          </a:bodyPr>
-          <a:lstStyle/>
-          <a:p>
-            <a:pPr algn="l"/>
-            <a:r>
-              <a:rPr sz="1300" b="0">
-                <a:solidFill>
-                  <a:srgbClr val="FFFFFF"/>
-                </a:solidFill>
-              </a:rPr>
-              <a:t>• economy mode logic,</a:t>
-            </a:r>
-          </a:p>
-        </p:txBody>
-      </p:sp>
-      <p:sp>
-        <p:nvSpPr>
-          <p:cNvPr id="33" name="TextBox 32"/>
-          <p:cNvSpPr txBox="1"/>
-          <p:nvPr/>
-        </p:nvSpPr>
-        <p:spPr>
-          <a:xfrm>
-            <a:off x="438912" y="5687568"/>
-            <a:ext cx="7717536" cy="256032"/>
-          </a:xfrm>
-          <a:prstGeom prst="rect">
-            <a:avLst/>
-          </a:prstGeom>
-          <a:noFill/>
-        </p:spPr>
-        <p:txBody>
-          <a:bodyPr wrap="square">
-            <a:spAutoFit/>
-          </a:bodyPr>
-          <a:lstStyle/>
-          <a:p>
-            <a:pPr algn="l"/>
-            <a:r>
-              <a:rPr sz="1300" b="0">
-                <a:solidFill>
-                  <a:srgbClr val="FFFFFF"/>
-                </a:solidFill>
-              </a:rPr>
-              <a:t>• target temperature control loop</a:t>
-            </a:r>
-          </a:p>
-        </p:txBody>
-      </p:sp>
-      <p:sp>
-        <p:nvSpPr>
-          <p:cNvPr id="34" name="TextBox 33"/>
-          <p:cNvSpPr txBox="1"/>
-          <p:nvPr/>
-        </p:nvSpPr>
-        <p:spPr>
-          <a:xfrm>
-            <a:off x="438912" y="5934456"/>
-            <a:ext cx="7717536" cy="256032"/>
-          </a:xfrm>
-          <a:prstGeom prst="rect">
-            <a:avLst/>
-          </a:prstGeom>
-          <a:noFill/>
-        </p:spPr>
-        <p:txBody>
-          <a:bodyPr wrap="square">
-            <a:spAutoFit/>
-          </a:bodyPr>
-          <a:lstStyle/>
-          <a:p>
-            <a:pPr algn="l"/>
-            <a:r>
-              <a:rPr sz="1200" b="1">
-                <a:solidFill>
-                  <a:srgbClr val="A8DADC"/>
-                </a:solidFill>
-              </a:rPr>
-              <a:t>Recommendation</a:t>
-            </a:r>
-          </a:p>
-        </p:txBody>
-      </p:sp>
-      <p:sp>
-        <p:nvSpPr>
-          <p:cNvPr id="35" name="TextBox 34"/>
-          <p:cNvSpPr txBox="1"/>
-          <p:nvPr/>
-        </p:nvSpPr>
-        <p:spPr>
-          <a:xfrm>
-            <a:off x="438912" y="6181344"/>
-            <a:ext cx="7717536" cy="256032"/>
-          </a:xfrm>
-          <a:prstGeom prst="rect">
-            <a:avLst/>
-          </a:prstGeom>
-          <a:noFill/>
-        </p:spPr>
-        <p:txBody>
-          <a:bodyPr wrap="square">
-            <a:spAutoFit/>
-          </a:bodyPr>
-          <a:lstStyle/>
-          <a:p>
-            <a:pPr algn="l"/>
-            <a:r>
-              <a:rPr sz="1300" b="0">
-                <a:solidFill>
-                  <a:srgbClr val="FFFFFF"/>
-                </a:solidFill>
-              </a:rPr>
-              <a:t>• Use waterproof stainless steel probe version.</a:t>
-            </a:r>
-          </a:p>
-        </p:txBody>
-      </p:sp>
-      <p:sp>
-        <p:nvSpPr>
-          <p:cNvPr id="36" name="TextBox 35"/>
-          <p:cNvSpPr txBox="1"/>
-          <p:nvPr/>
-        </p:nvSpPr>
-        <p:spPr>
-          <a:xfrm>
-            <a:off x="438912" y="6428232"/>
-            <a:ext cx="7717536" cy="256032"/>
-          </a:xfrm>
-          <a:prstGeom prst="rect">
-            <a:avLst/>
-          </a:prstGeom>
-          <a:noFill/>
-        </p:spPr>
-        <p:txBody>
-          <a:bodyPr wrap="square">
-            <a:spAutoFit/>
-          </a:bodyPr>
-          <a:lstStyle/>
-          <a:p>
-            <a:pPr algn="l"/>
-            <a:r>
-              <a:rPr sz="1300" b="0">
-                <a:solidFill>
-                  <a:srgbClr val="FFFFFF"/>
-                </a:solidFill>
-              </a:rPr>
-              <a:t>• Route cable away from mains wiring.</a:t>
-            </a:r>
-          </a:p>
-        </p:txBody>
-      </p:sp>
-      <p:sp>
-        <p:nvSpPr>
-          <p:cNvPr id="37" name="TextBox 36"/>
-          <p:cNvSpPr txBox="1"/>
-          <p:nvPr/>
-        </p:nvSpPr>
-        <p:spPr>
-          <a:xfrm>
-            <a:off x="438912" y="6675120"/>
-            <a:ext cx="7717536" cy="256032"/>
-          </a:xfrm>
-          <a:prstGeom prst="rect">
-            <a:avLst/>
-          </a:prstGeom>
-          <a:noFill/>
-        </p:spPr>
-        <p:txBody>
-          <a:bodyPr wrap="square">
-            <a:spAutoFit/>
-          </a:bodyPr>
-          <a:lstStyle/>
-          <a:p>
-            <a:pPr algn="l"/>
-            <a:r>
-              <a:rPr sz="1300" b="0">
-                <a:solidFill>
-                  <a:srgbClr val="FFFFFF"/>
-                </a:solidFill>
-              </a:rPr>
-              <a:t>• 12-bit resolution (0.0625°C) preferred.</a:t>
+              <a:t>• Use 12-bit resolution (0.0625°C steps).</a:t>
             </a:r>
           </a:p>
         </p:txBody>
@@ -9940,7 +9804,7 @@
         <p:spPr>
           <a:xfrm>
             <a:off x="365760" y="137160"/>
-            <a:ext cx="8229600" cy="502920"/>
+            <a:ext cx="11430000" cy="502920"/>
           </a:xfrm>
           <a:prstGeom prst="rect">
             <a:avLst/>
@@ -10016,8 +9880,8 @@
         </p:nvSpPr>
         <p:spPr>
           <a:xfrm>
-            <a:off x="8503920" y="822960"/>
-            <a:ext cx="3291840" cy="3200400"/>
+            <a:off x="8732520" y="804672"/>
+            <a:ext cx="3108960" cy="3108960"/>
           </a:xfrm>
           <a:prstGeom prst="rect">
             <a:avLst/>
@@ -10061,8 +9925,8 @@
         </p:nvSpPr>
         <p:spPr>
           <a:xfrm>
-            <a:off x="8503920" y="2240280"/>
-            <a:ext cx="3291840" cy="365760"/>
+            <a:off x="8732520" y="2176272"/>
+            <a:ext cx="3108960" cy="365760"/>
           </a:xfrm>
           <a:prstGeom prst="rect">
             <a:avLst/>
@@ -10096,7 +9960,7 @@
         <p:spPr>
           <a:xfrm>
             <a:off x="274320" y="749808"/>
-            <a:ext cx="5029200" cy="3291840"/>
+            <a:ext cx="4937760" cy="2710434"/>
           </a:xfrm>
           <a:prstGeom prst="rect">
             <a:avLst/>
@@ -10138,23 +10002,23 @@
         </p:nvSpPr>
         <p:spPr>
           <a:xfrm>
-            <a:off x="438912" y="859536"/>
-            <a:ext cx="4700016" cy="256032"/>
-          </a:xfrm>
-          <a:prstGeom prst="rect">
-            <a:avLst/>
-          </a:prstGeom>
-          <a:noFill/>
-        </p:spPr>
-        <p:txBody>
-          <a:bodyPr wrap="square">
-            <a:spAutoFit/>
-          </a:bodyPr>
-          <a:lstStyle/>
-          <a:p>
-            <a:pPr algn="l"/>
-            <a:r>
-              <a:rPr sz="1200" b="1">
+            <a:off x="438912" y="877824"/>
+            <a:ext cx="4608576" cy="302513"/>
+          </a:xfrm>
+          <a:prstGeom prst="rect">
+            <a:avLst/>
+          </a:prstGeom>
+          <a:noFill/>
+        </p:spPr>
+        <p:txBody>
+          <a:bodyPr wrap="square">
+            <a:spAutoFit/>
+          </a:bodyPr>
+          <a:lstStyle/>
+          <a:p>
+            <a:pPr algn="l"/>
+            <a:r>
+              <a:rPr sz="1300" b="1">
                 <a:solidFill>
                   <a:srgbClr val="A8DADC"/>
                 </a:solidFill>
@@ -10172,8 +10036,8 @@
         </p:nvSpPr>
         <p:spPr>
           <a:xfrm>
-            <a:off x="438912" y="1106424"/>
-            <a:ext cx="4700016" cy="256032"/>
+            <a:off x="438912" y="1125473"/>
+            <a:ext cx="4608576" cy="321564"/>
           </a:xfrm>
           <a:prstGeom prst="rect">
             <a:avLst/>
@@ -10206,8 +10070,8 @@
         </p:nvSpPr>
         <p:spPr>
           <a:xfrm>
-            <a:off x="438912" y="1353312"/>
-            <a:ext cx="4700016" cy="256032"/>
+            <a:off x="438912" y="1392173"/>
+            <a:ext cx="4608576" cy="321564"/>
           </a:xfrm>
           <a:prstGeom prst="rect">
             <a:avLst/>
@@ -10227,7 +10091,7 @@
                   <a:srgbClr val="FFFFFF"/>
                 </a:solidFill>
               </a:rPr>
-              <a:t>• Temperature range: 0°C to +1023.75°C</a:t>
+              <a:t>• Range: 0°C to +1023.75°C</a:t>
             </a:r>
           </a:p>
         </p:txBody>
@@ -10240,8 +10104,8 @@
         </p:nvSpPr>
         <p:spPr>
           <a:xfrm>
-            <a:off x="438912" y="1600200"/>
-            <a:ext cx="4700016" cy="256032"/>
+            <a:off x="438912" y="1658873"/>
+            <a:ext cx="4608576" cy="321564"/>
           </a:xfrm>
           <a:prstGeom prst="rect">
             <a:avLst/>
@@ -10274,8 +10138,8 @@
         </p:nvSpPr>
         <p:spPr>
           <a:xfrm>
-            <a:off x="438912" y="1847088"/>
-            <a:ext cx="4700016" cy="256032"/>
+            <a:off x="438912" y="1925573"/>
+            <a:ext cx="4608576" cy="321564"/>
           </a:xfrm>
           <a:prstGeom prst="rect">
             <a:avLst/>
@@ -10308,8 +10172,8 @@
         </p:nvSpPr>
         <p:spPr>
           <a:xfrm>
-            <a:off x="438912" y="2093976"/>
-            <a:ext cx="4700016" cy="256032"/>
+            <a:off x="438912" y="2192273"/>
+            <a:ext cx="4608576" cy="321564"/>
           </a:xfrm>
           <a:prstGeom prst="rect">
             <a:avLst/>
@@ -10329,7 +10193,7 @@
                   <a:srgbClr val="FFFFFF"/>
                 </a:solidFill>
               </a:rPr>
-              <a:t>• Supply voltage: 3.0V – 5.5V</a:t>
+              <a:t>• Supply: 3.0V – 5.5V</a:t>
             </a:r>
           </a:p>
         </p:txBody>
@@ -10342,8 +10206,8 @@
         </p:nvSpPr>
         <p:spPr>
           <a:xfrm>
-            <a:off x="438912" y="2340864"/>
-            <a:ext cx="4700016" cy="256032"/>
+            <a:off x="438912" y="2458973"/>
+            <a:ext cx="4608576" cy="321564"/>
           </a:xfrm>
           <a:prstGeom prst="rect">
             <a:avLst/>
@@ -10363,7 +10227,7 @@
                   <a:srgbClr val="FFFFFF"/>
                 </a:solidFill>
               </a:rPr>
-              <a:t>• Internal cold-junction compensation</a:t>
+              <a:t>• Cold-junction compensation: internal</a:t>
             </a:r>
           </a:p>
         </p:txBody>
@@ -10376,8 +10240,8 @@
         </p:nvSpPr>
         <p:spPr>
           <a:xfrm>
-            <a:off x="438912" y="2587752"/>
-            <a:ext cx="4700016" cy="256032"/>
+            <a:off x="438912" y="2725673"/>
+            <a:ext cx="4608576" cy="321564"/>
           </a:xfrm>
           <a:prstGeom prst="rect">
             <a:avLst/>
@@ -10410,8 +10274,8 @@
         </p:nvSpPr>
         <p:spPr>
           <a:xfrm>
-            <a:off x="438912" y="2834640"/>
-            <a:ext cx="4700016" cy="256032"/>
+            <a:off x="438912" y="2992373"/>
+            <a:ext cx="4608576" cy="321564"/>
           </a:xfrm>
           <a:prstGeom prst="rect">
             <a:avLst/>
@@ -10444,8 +10308,8 @@
         </p:nvSpPr>
         <p:spPr>
           <a:xfrm>
-            <a:off x="5394960" y="749808"/>
-            <a:ext cx="2926080" cy="3291840"/>
+            <a:off x="5349240" y="749808"/>
+            <a:ext cx="3200400" cy="2958084"/>
           </a:xfrm>
           <a:prstGeom prst="rect">
             <a:avLst/>
@@ -10487,23 +10351,23 @@
         </p:nvSpPr>
         <p:spPr>
           <a:xfrm>
-            <a:off x="5559552" y="859536"/>
-            <a:ext cx="2596896" cy="256032"/>
-          </a:xfrm>
-          <a:prstGeom prst="rect">
-            <a:avLst/>
-          </a:prstGeom>
-          <a:noFill/>
-        </p:spPr>
-        <p:txBody>
-          <a:bodyPr wrap="square">
-            <a:spAutoFit/>
-          </a:bodyPr>
-          <a:lstStyle/>
-          <a:p>
-            <a:pPr algn="l"/>
-            <a:r>
-              <a:rPr sz="1200" b="1">
+            <a:off x="5513832" y="877824"/>
+            <a:ext cx="2871216" cy="302513"/>
+          </a:xfrm>
+          <a:prstGeom prst="rect">
+            <a:avLst/>
+          </a:prstGeom>
+          <a:noFill/>
+        </p:spPr>
+        <p:txBody>
+          <a:bodyPr wrap="square">
+            <a:spAutoFit/>
+          </a:bodyPr>
+          <a:lstStyle/>
+          <a:p>
+            <a:pPr algn="l"/>
+            <a:r>
+              <a:rPr sz="1300" b="1">
                 <a:solidFill>
                   <a:srgbClr val="A8DADC"/>
                 </a:solidFill>
@@ -10521,28 +10385,28 @@
         </p:nvSpPr>
         <p:spPr>
           <a:xfrm>
-            <a:off x="5559552" y="1106424"/>
-            <a:ext cx="2596896" cy="256032"/>
-          </a:xfrm>
-          <a:prstGeom prst="rect">
-            <a:avLst/>
-          </a:prstGeom>
-          <a:noFill/>
-        </p:spPr>
-        <p:txBody>
-          <a:bodyPr wrap="square">
-            <a:spAutoFit/>
-          </a:bodyPr>
-          <a:lstStyle/>
-          <a:p>
-            <a:pPr algn="l"/>
-            <a:r>
-              <a:rPr sz="1300" b="0">
-                <a:solidFill>
-                  <a:srgbClr val="FFFFFF"/>
-                </a:solidFill>
-              </a:rPr>
-              <a:t>• VCC   →  3.3V</a:t>
+            <a:off x="5513832" y="1125473"/>
+            <a:ext cx="2871216" cy="321564"/>
+          </a:xfrm>
+          <a:prstGeom prst="rect">
+            <a:avLst/>
+          </a:prstGeom>
+          <a:noFill/>
+        </p:spPr>
+        <p:txBody>
+          <a:bodyPr wrap="square">
+            <a:spAutoFit/>
+          </a:bodyPr>
+          <a:lstStyle/>
+          <a:p>
+            <a:pPr algn="l"/>
+            <a:r>
+              <a:rPr sz="1400" b="0">
+                <a:solidFill>
+                  <a:srgbClr val="FFFFFF"/>
+                </a:solidFill>
+              </a:rPr>
+              <a:t>• VCC       →  3.3V</a:t>
             </a:r>
           </a:p>
         </p:txBody>
@@ -10555,28 +10419,28 @@
         </p:nvSpPr>
         <p:spPr>
           <a:xfrm>
-            <a:off x="5559552" y="1353312"/>
-            <a:ext cx="2596896" cy="256032"/>
-          </a:xfrm>
-          <a:prstGeom prst="rect">
-            <a:avLst/>
-          </a:prstGeom>
-          <a:noFill/>
-        </p:spPr>
-        <p:txBody>
-          <a:bodyPr wrap="square">
-            <a:spAutoFit/>
-          </a:bodyPr>
-          <a:lstStyle/>
-          <a:p>
-            <a:pPr algn="l"/>
-            <a:r>
-              <a:rPr sz="1300" b="0">
-                <a:solidFill>
-                  <a:srgbClr val="FFFFFF"/>
-                </a:solidFill>
-              </a:rPr>
-              <a:t>• GND   →  GND</a:t>
+            <a:off x="5513832" y="1392173"/>
+            <a:ext cx="2871216" cy="321564"/>
+          </a:xfrm>
+          <a:prstGeom prst="rect">
+            <a:avLst/>
+          </a:prstGeom>
+          <a:noFill/>
+        </p:spPr>
+        <p:txBody>
+          <a:bodyPr wrap="square">
+            <a:spAutoFit/>
+          </a:bodyPr>
+          <a:lstStyle/>
+          <a:p>
+            <a:pPr algn="l"/>
+            <a:r>
+              <a:rPr sz="1400" b="0">
+                <a:solidFill>
+                  <a:srgbClr val="FFFFFF"/>
+                </a:solidFill>
+              </a:rPr>
+              <a:t>• GND       →  GND</a:t>
             </a:r>
           </a:p>
         </p:txBody>
@@ -10589,28 +10453,28 @@
         </p:nvSpPr>
         <p:spPr>
           <a:xfrm>
-            <a:off x="5559552" y="1600200"/>
-            <a:ext cx="2596896" cy="256032"/>
-          </a:xfrm>
-          <a:prstGeom prst="rect">
-            <a:avLst/>
-          </a:prstGeom>
-          <a:noFill/>
-        </p:spPr>
-        <p:txBody>
-          <a:bodyPr wrap="square">
-            <a:spAutoFit/>
-          </a:bodyPr>
-          <a:lstStyle/>
-          <a:p>
-            <a:pPr algn="l"/>
-            <a:r>
-              <a:rPr sz="1300" b="0">
-                <a:solidFill>
-                  <a:srgbClr val="FFFFFF"/>
-                </a:solidFill>
-              </a:rPr>
-              <a:t>• CS    →  GPIO5</a:t>
+            <a:off x="5513832" y="1658873"/>
+            <a:ext cx="2871216" cy="321564"/>
+          </a:xfrm>
+          <a:prstGeom prst="rect">
+            <a:avLst/>
+          </a:prstGeom>
+          <a:noFill/>
+        </p:spPr>
+        <p:txBody>
+          <a:bodyPr wrap="square">
+            <a:spAutoFit/>
+          </a:bodyPr>
+          <a:lstStyle/>
+          <a:p>
+            <a:pPr algn="l"/>
+            <a:r>
+              <a:rPr sz="1400" b="0">
+                <a:solidFill>
+                  <a:srgbClr val="FFFFFF"/>
+                </a:solidFill>
+              </a:rPr>
+              <a:t>• CS        →  GPIO5</a:t>
             </a:r>
           </a:p>
         </p:txBody>
@@ -10623,28 +10487,28 @@
         </p:nvSpPr>
         <p:spPr>
           <a:xfrm>
-            <a:off x="5559552" y="1847088"/>
-            <a:ext cx="2596896" cy="256032"/>
-          </a:xfrm>
-          <a:prstGeom prst="rect">
-            <a:avLst/>
-          </a:prstGeom>
-          <a:noFill/>
-        </p:spPr>
-        <p:txBody>
-          <a:bodyPr wrap="square">
-            <a:spAutoFit/>
-          </a:bodyPr>
-          <a:lstStyle/>
-          <a:p>
-            <a:pPr algn="l"/>
-            <a:r>
-              <a:rPr sz="1300" b="0">
-                <a:solidFill>
-                  <a:srgbClr val="FFFFFF"/>
-                </a:solidFill>
-              </a:rPr>
-              <a:t>• SCK   →  GPIO18</a:t>
+            <a:off x="5513832" y="1925573"/>
+            <a:ext cx="2871216" cy="321564"/>
+          </a:xfrm>
+          <a:prstGeom prst="rect">
+            <a:avLst/>
+          </a:prstGeom>
+          <a:noFill/>
+        </p:spPr>
+        <p:txBody>
+          <a:bodyPr wrap="square">
+            <a:spAutoFit/>
+          </a:bodyPr>
+          <a:lstStyle/>
+          <a:p>
+            <a:pPr algn="l"/>
+            <a:r>
+              <a:rPr sz="1400" b="0">
+                <a:solidFill>
+                  <a:srgbClr val="FFFFFF"/>
+                </a:solidFill>
+              </a:rPr>
+              <a:t>• SCK       →  GPIO18</a:t>
             </a:r>
           </a:p>
         </p:txBody>
@@ -10657,23 +10521,23 @@
         </p:nvSpPr>
         <p:spPr>
           <a:xfrm>
-            <a:off x="5559552" y="2093976"/>
-            <a:ext cx="2596896" cy="256032"/>
-          </a:xfrm>
-          <a:prstGeom prst="rect">
-            <a:avLst/>
-          </a:prstGeom>
-          <a:noFill/>
-        </p:spPr>
-        <p:txBody>
-          <a:bodyPr wrap="square">
-            <a:spAutoFit/>
-          </a:bodyPr>
-          <a:lstStyle/>
-          <a:p>
-            <a:pPr algn="l"/>
-            <a:r>
-              <a:rPr sz="1300" b="0">
+            <a:off x="5513832" y="2192273"/>
+            <a:ext cx="2871216" cy="321564"/>
+          </a:xfrm>
+          <a:prstGeom prst="rect">
+            <a:avLst/>
+          </a:prstGeom>
+          <a:noFill/>
+        </p:spPr>
+        <p:txBody>
+          <a:bodyPr wrap="square">
+            <a:spAutoFit/>
+          </a:bodyPr>
+          <a:lstStyle/>
+          <a:p>
+            <a:pPr algn="l"/>
+            <a:r>
+              <a:rPr sz="1400" b="0">
                 <a:solidFill>
                   <a:srgbClr val="FFFFFF"/>
                 </a:solidFill>
@@ -10691,23 +10555,23 @@
         </p:nvSpPr>
         <p:spPr>
           <a:xfrm>
-            <a:off x="5559552" y="2340864"/>
-            <a:ext cx="2596896" cy="256032"/>
-          </a:xfrm>
-          <a:prstGeom prst="rect">
-            <a:avLst/>
-          </a:prstGeom>
-          <a:noFill/>
-        </p:spPr>
-        <p:txBody>
-          <a:bodyPr wrap="square">
-            <a:spAutoFit/>
-          </a:bodyPr>
-          <a:lstStyle/>
-          <a:p>
-            <a:pPr algn="l"/>
-            <a:r>
-              <a:rPr sz="1200" b="1">
+            <a:off x="5513832" y="2458973"/>
+            <a:ext cx="2871216" cy="302513"/>
+          </a:xfrm>
+          <a:prstGeom prst="rect">
+            <a:avLst/>
+          </a:prstGeom>
+          <a:noFill/>
+        </p:spPr>
+        <p:txBody>
+          <a:bodyPr wrap="square">
+            <a:spAutoFit/>
+          </a:bodyPr>
+          <a:lstStyle/>
+          <a:p>
+            <a:pPr algn="l"/>
+            <a:r>
+              <a:rPr sz="1300" b="1">
                 <a:solidFill>
                   <a:srgbClr val="A8DADC"/>
                 </a:solidFill>
@@ -10725,28 +10589,28 @@
         </p:nvSpPr>
         <p:spPr>
           <a:xfrm>
-            <a:off x="5559552" y="2587752"/>
-            <a:ext cx="2596896" cy="256032"/>
-          </a:xfrm>
-          <a:prstGeom prst="rect">
-            <a:avLst/>
-          </a:prstGeom>
-          <a:noFill/>
-        </p:spPr>
-        <p:txBody>
-          <a:bodyPr wrap="square">
-            <a:spAutoFit/>
-          </a:bodyPr>
-          <a:lstStyle/>
-          <a:p>
-            <a:pPr algn="l"/>
-            <a:r>
-              <a:rPr sz="1300" b="0">
-                <a:solidFill>
-                  <a:srgbClr val="FFFFFF"/>
-                </a:solidFill>
-              </a:rPr>
-              <a:t>• Yellow (+)  →  T+ on module</a:t>
+            <a:off x="5513832" y="2706622"/>
+            <a:ext cx="2871216" cy="321564"/>
+          </a:xfrm>
+          <a:prstGeom prst="rect">
+            <a:avLst/>
+          </a:prstGeom>
+          <a:noFill/>
+        </p:spPr>
+        <p:txBody>
+          <a:bodyPr wrap="square">
+            <a:spAutoFit/>
+          </a:bodyPr>
+          <a:lstStyle/>
+          <a:p>
+            <a:pPr algn="l"/>
+            <a:r>
+              <a:rPr sz="1400" b="0">
+                <a:solidFill>
+                  <a:srgbClr val="FFFFFF"/>
+                </a:solidFill>
+              </a:rPr>
+              <a:t>• Yellow (+)    →  T+ on module</a:t>
             </a:r>
           </a:p>
         </p:txBody>
@@ -10759,23 +10623,23 @@
         </p:nvSpPr>
         <p:spPr>
           <a:xfrm>
-            <a:off x="5559552" y="2834640"/>
-            <a:ext cx="2596896" cy="256032"/>
-          </a:xfrm>
-          <a:prstGeom prst="rect">
-            <a:avLst/>
-          </a:prstGeom>
-          <a:noFill/>
-        </p:spPr>
-        <p:txBody>
-          <a:bodyPr wrap="square">
-            <a:spAutoFit/>
-          </a:bodyPr>
-          <a:lstStyle/>
-          <a:p>
-            <a:pPr algn="l"/>
-            <a:r>
-              <a:rPr sz="1300" b="0">
+            <a:off x="5513832" y="2973322"/>
+            <a:ext cx="2871216" cy="321564"/>
+          </a:xfrm>
+          <a:prstGeom prst="rect">
+            <a:avLst/>
+          </a:prstGeom>
+          <a:noFill/>
+        </p:spPr>
+        <p:txBody>
+          <a:bodyPr wrap="square">
+            <a:spAutoFit/>
+          </a:bodyPr>
+          <a:lstStyle/>
+          <a:p>
+            <a:pPr algn="l"/>
+            <a:r>
+              <a:rPr sz="1400" b="0">
                 <a:solidFill>
                   <a:srgbClr val="FFFFFF"/>
                 </a:solidFill>
@@ -10793,23 +10657,23 @@
         </p:nvSpPr>
         <p:spPr>
           <a:xfrm>
-            <a:off x="5559552" y="3081528"/>
-            <a:ext cx="2596896" cy="256032"/>
-          </a:xfrm>
-          <a:prstGeom prst="rect">
-            <a:avLst/>
-          </a:prstGeom>
-          <a:noFill/>
-        </p:spPr>
-        <p:txBody>
-          <a:bodyPr wrap="square">
-            <a:spAutoFit/>
-          </a:bodyPr>
-          <a:lstStyle/>
-          <a:p>
-            <a:pPr algn="l"/>
-            <a:r>
-              <a:rPr sz="1300" b="0">
+            <a:off x="5513832" y="3240022"/>
+            <a:ext cx="2871216" cy="321564"/>
+          </a:xfrm>
+          <a:prstGeom prst="rect">
+            <a:avLst/>
+          </a:prstGeom>
+          <a:noFill/>
+        </p:spPr>
+        <p:txBody>
+          <a:bodyPr wrap="square">
+            <a:spAutoFit/>
+          </a:bodyPr>
+          <a:lstStyle/>
+          <a:p>
+            <a:pPr algn="l"/>
+            <a:r>
+              <a:rPr sz="1400" b="0">
                 <a:solidFill>
                   <a:srgbClr val="FFFFFF"/>
                 </a:solidFill>
@@ -10827,8 +10691,8 @@
         </p:nvSpPr>
         <p:spPr>
           <a:xfrm>
-            <a:off x="274320" y="4160520"/>
-            <a:ext cx="8046720" cy="2560320"/>
+            <a:off x="274320" y="3835908"/>
+            <a:ext cx="8229600" cy="2767584"/>
           </a:xfrm>
           <a:prstGeom prst="rect">
             <a:avLst/>
@@ -10870,8 +10734,8 @@
         </p:nvSpPr>
         <p:spPr>
           <a:xfrm>
-            <a:off x="438912" y="4270248"/>
-            <a:ext cx="7717536" cy="256032"/>
+            <a:off x="438912" y="3963924"/>
+            <a:ext cx="7900416" cy="283464"/>
           </a:xfrm>
           <a:prstGeom prst="rect">
             <a:avLst/>
@@ -10904,8 +10768,8 @@
         </p:nvSpPr>
         <p:spPr>
           <a:xfrm>
-            <a:off x="438912" y="4517136"/>
-            <a:ext cx="7717536" cy="256032"/>
+            <a:off x="438912" y="4192524"/>
+            <a:ext cx="7900416" cy="302513"/>
           </a:xfrm>
           <a:prstGeom prst="rect">
             <a:avLst/>
@@ -10925,7 +10789,7 @@
                   <a:srgbClr val="FFFFFF"/>
                 </a:solidFill>
               </a:rPr>
-              <a:t>• Measures flame / combustion chamber temperature</a:t>
+              <a:t>• Measures flame / combustion temperature</a:t>
             </a:r>
           </a:p>
         </p:txBody>
@@ -10938,8 +10802,8 @@
         </p:nvSpPr>
         <p:spPr>
           <a:xfrm>
-            <a:off x="438912" y="4764024"/>
-            <a:ext cx="7717536" cy="256032"/>
+            <a:off x="438912" y="4440173"/>
+            <a:ext cx="7900416" cy="302513"/>
           </a:xfrm>
           <a:prstGeom prst="rect">
             <a:avLst/>
@@ -10959,7 +10823,7 @@
                   <a:srgbClr val="FFFFFF"/>
                 </a:solidFill>
               </a:rPr>
-              <a:t>• Used for: flame detection (above ~100°C = flame on),</a:t>
+              <a:t>• Flame detection: above ~100°C = flame on</a:t>
             </a:r>
           </a:p>
         </p:txBody>
@@ -10972,8 +10836,8 @@
         </p:nvSpPr>
         <p:spPr>
           <a:xfrm>
-            <a:off x="438912" y="5010912"/>
-            <a:ext cx="7717536" cy="256032"/>
+            <a:off x="438912" y="4687822"/>
+            <a:ext cx="7900416" cy="302513"/>
           </a:xfrm>
           <a:prstGeom prst="rect">
             <a:avLst/>
@@ -10993,7 +10857,7 @@
                   <a:srgbClr val="FFFFFF"/>
                 </a:solidFill>
               </a:rPr>
-              <a:t>• ignition confirmation, overheat protection,</a:t>
+              <a:t>• Used for: ignition confirmation,</a:t>
             </a:r>
           </a:p>
         </p:txBody>
@@ -11006,8 +10870,8 @@
         </p:nvSpPr>
         <p:spPr>
           <a:xfrm>
-            <a:off x="438912" y="5257800"/>
-            <a:ext cx="7717536" cy="256032"/>
+            <a:off x="438912" y="4935471"/>
+            <a:ext cx="7900416" cy="302513"/>
           </a:xfrm>
           <a:prstGeom prst="rect">
             <a:avLst/>
@@ -11027,7 +10891,7 @@
                   <a:srgbClr val="FFFFFF"/>
                 </a:solidFill>
               </a:rPr>
-              <a:t>• OLED display readout</a:t>
+              <a:t>• overheat protection, OLED readout</a:t>
             </a:r>
           </a:p>
         </p:txBody>
@@ -11040,8 +10904,8 @@
         </p:nvSpPr>
         <p:spPr>
           <a:xfrm>
-            <a:off x="438912" y="5504688"/>
-            <a:ext cx="7717536" cy="256032"/>
+            <a:off x="438912" y="5183120"/>
+            <a:ext cx="7900416" cy="283464"/>
           </a:xfrm>
           <a:prstGeom prst="rect">
             <a:avLst/>
@@ -11074,8 +10938,8 @@
         </p:nvSpPr>
         <p:spPr>
           <a:xfrm>
-            <a:off x="438912" y="5751576"/>
-            <a:ext cx="7717536" cy="256032"/>
+            <a:off x="438912" y="5411720"/>
+            <a:ext cx="7900416" cy="302513"/>
           </a:xfrm>
           <a:prstGeom prst="rect">
             <a:avLst/>
@@ -11095,7 +10959,7 @@
                   <a:srgbClr val="FFFFFF"/>
                 </a:solidFill>
               </a:rPr>
-              <a:t>• Module uses dedicated SPI — no sharing with other devices.</a:t>
+              <a:t>• Dedicated SPI bus — no sharing.</a:t>
             </a:r>
           </a:p>
         </p:txBody>
@@ -11108,8 +10972,8 @@
         </p:nvSpPr>
         <p:spPr>
           <a:xfrm>
-            <a:off x="438912" y="5998464"/>
-            <a:ext cx="7717536" cy="256032"/>
+            <a:off x="438912" y="5659369"/>
+            <a:ext cx="7900416" cy="302513"/>
           </a:xfrm>
           <a:prstGeom prst="rect">
             <a:avLst/>
@@ -11129,7 +10993,7 @@
                   <a:srgbClr val="FFFFFF"/>
                 </a:solidFill>
               </a:rPr>
-              <a:t>• Keep thermocouple wiring short and twisted-pair.</a:t>
+              <a:t>• Keep thermocouple wiring short and twisted.</a:t>
             </a:r>
           </a:p>
         </p:txBody>
@@ -11142,8 +11006,8 @@
         </p:nvSpPr>
         <p:spPr>
           <a:xfrm>
-            <a:off x="438912" y="6245352"/>
-            <a:ext cx="7717536" cy="256032"/>
+            <a:off x="438912" y="5907018"/>
+            <a:ext cx="7900416" cy="302513"/>
           </a:xfrm>
           <a:prstGeom prst="rect">
             <a:avLst/>
@@ -11163,7 +11027,7 @@
                   <a:srgbClr val="FFFFFF"/>
                 </a:solidFill>
               </a:rPr>
-              <a:t>• MAX6675 reads bit-15=0 as fault (open thermocouple).</a:t>
+              <a:t>• Bit-15=0 signals open thermocouple fault.</a:t>
             </a:r>
           </a:p>
         </p:txBody>
@@ -11176,8 +11040,8 @@
         </p:nvSpPr>
         <p:spPr>
           <a:xfrm>
-            <a:off x="438912" y="6492240"/>
-            <a:ext cx="7717536" cy="256032"/>
+            <a:off x="438912" y="6154667"/>
+            <a:ext cx="7900416" cy="302513"/>
           </a:xfrm>
           <a:prstGeom prst="rect">
             <a:avLst/>
@@ -11197,7 +11061,7 @@
                   <a:srgbClr val="FFFFFF"/>
                 </a:solidFill>
               </a:rPr>
-              <a:t>• Use alumel/chromel K-type, rated to at least 900°C.</a:t>
+              <a:t>• Use K-type rated to at least 900°C.</a:t>
             </a:r>
           </a:p>
         </p:txBody>
@@ -11272,7 +11136,7 @@
         <p:spPr>
           <a:xfrm>
             <a:off x="365760" y="137160"/>
-            <a:ext cx="8229600" cy="502920"/>
+            <a:ext cx="11430000" cy="502920"/>
           </a:xfrm>
           <a:prstGeom prst="rect">
             <a:avLst/>
@@ -11356,8 +11220,8 @@
         </p:blipFill>
         <p:spPr>
           <a:xfrm>
-            <a:off x="8503920" y="822960"/>
-            <a:ext cx="3291840" cy="3200400"/>
+            <a:off x="8732520" y="804672"/>
+            <a:ext cx="3108960" cy="2926080"/>
           </a:xfrm>
           <a:prstGeom prst="rect">
             <a:avLst/>
@@ -11373,7 +11237,7 @@
         <p:spPr>
           <a:xfrm>
             <a:off x="274320" y="749808"/>
-            <a:ext cx="5029200" cy="3017520"/>
+            <a:ext cx="4937760" cy="2177034"/>
           </a:xfrm>
           <a:prstGeom prst="rect">
             <a:avLst/>
@@ -11415,23 +11279,23 @@
         </p:nvSpPr>
         <p:spPr>
           <a:xfrm>
-            <a:off x="438912" y="859536"/>
-            <a:ext cx="4700016" cy="256032"/>
-          </a:xfrm>
-          <a:prstGeom prst="rect">
-            <a:avLst/>
-          </a:prstGeom>
-          <a:noFill/>
-        </p:spPr>
-        <p:txBody>
-          <a:bodyPr wrap="square">
-            <a:spAutoFit/>
-          </a:bodyPr>
-          <a:lstStyle/>
-          <a:p>
-            <a:pPr algn="l"/>
-            <a:r>
-              <a:rPr sz="1200" b="1">
+            <a:off x="438912" y="877824"/>
+            <a:ext cx="4608576" cy="302513"/>
+          </a:xfrm>
+          <a:prstGeom prst="rect">
+            <a:avLst/>
+          </a:prstGeom>
+          <a:noFill/>
+        </p:spPr>
+        <p:txBody>
+          <a:bodyPr wrap="square">
+            <a:spAutoFit/>
+          </a:bodyPr>
+          <a:lstStyle/>
+          <a:p>
+            <a:pPr algn="l"/>
+            <a:r>
+              <a:rPr sz="1300" b="1">
                 <a:solidFill>
                   <a:srgbClr val="A8DADC"/>
                 </a:solidFill>
@@ -11449,8 +11313,8 @@
         </p:nvSpPr>
         <p:spPr>
           <a:xfrm>
-            <a:off x="438912" y="1106424"/>
-            <a:ext cx="4700016" cy="256032"/>
+            <a:off x="438912" y="1125473"/>
+            <a:ext cx="4608576" cy="321564"/>
           </a:xfrm>
           <a:prstGeom prst="rect">
             <a:avLst/>
@@ -11470,7 +11334,7 @@
                   <a:srgbClr val="FFFFFF"/>
                 </a:solidFill>
               </a:rPr>
-              <a:t>• Coil voltage: 5V DC  (logic-level trigger)</a:t>
+              <a:t>• Coil voltage: 5V DC (logic-level trigger)</a:t>
             </a:r>
           </a:p>
         </p:txBody>
@@ -11483,8 +11347,8 @@
         </p:nvSpPr>
         <p:spPr>
           <a:xfrm>
-            <a:off x="438912" y="1353312"/>
-            <a:ext cx="4700016" cy="256032"/>
+            <a:off x="438912" y="1392173"/>
+            <a:ext cx="4608576" cy="321564"/>
           </a:xfrm>
           <a:prstGeom prst="rect">
             <a:avLst/>
@@ -11517,8 +11381,8 @@
         </p:nvSpPr>
         <p:spPr>
           <a:xfrm>
-            <a:off x="438912" y="1600200"/>
-            <a:ext cx="4700016" cy="256032"/>
+            <a:off x="438912" y="1658873"/>
+            <a:ext cx="4608576" cy="321564"/>
           </a:xfrm>
           <a:prstGeom prst="rect">
             <a:avLst/>
@@ -11538,7 +11402,7 @@
                   <a:srgbClr val="FFFFFF"/>
                 </a:solidFill>
               </a:rPr>
-              <a:t>• Contact rating: 10A @ 250V AC / 10A @ 30V DC</a:t>
+              <a:t>• Contact rating: 10A @ 250V AC</a:t>
             </a:r>
           </a:p>
         </p:txBody>
@@ -11551,8 +11415,8 @@
         </p:nvSpPr>
         <p:spPr>
           <a:xfrm>
-            <a:off x="438912" y="1847088"/>
-            <a:ext cx="4700016" cy="256032"/>
+            <a:off x="438912" y="1925573"/>
+            <a:ext cx="4608576" cy="321564"/>
           </a:xfrm>
           <a:prstGeom prst="rect">
             <a:avLst/>
@@ -11572,7 +11436,7 @@
                   <a:srgbClr val="FFFFFF"/>
                 </a:solidFill>
               </a:rPr>
-              <a:t>• Isolation: optocoupler between ESP32 and coil</a:t>
+              <a:t>• Isolation: optocoupler (ESP32 ↔ coil)</a:t>
             </a:r>
           </a:p>
         </p:txBody>
@@ -11585,8 +11449,8 @@
         </p:nvSpPr>
         <p:spPr>
           <a:xfrm>
-            <a:off x="438912" y="2093976"/>
-            <a:ext cx="4700016" cy="256032"/>
+            <a:off x="438912" y="2192273"/>
+            <a:ext cx="4608576" cy="321564"/>
           </a:xfrm>
           <a:prstGeom prst="rect">
             <a:avLst/>
@@ -11606,7 +11470,7 @@
                   <a:srgbClr val="FFFFFF"/>
                 </a:solidFill>
               </a:rPr>
-              <a:t>• Channels: 1 or 3 (one module per relay or 3-ch board)</a:t>
+              <a:t>• Flyback diode: included on module</a:t>
             </a:r>
           </a:p>
         </p:txBody>
@@ -11619,8 +11483,8 @@
         </p:nvSpPr>
         <p:spPr>
           <a:xfrm>
-            <a:off x="438912" y="2340864"/>
-            <a:ext cx="4700016" cy="256032"/>
+            <a:off x="438912" y="2458973"/>
+            <a:ext cx="4608576" cy="321564"/>
           </a:xfrm>
           <a:prstGeom prst="rect">
             <a:avLst/>
@@ -11640,40 +11504,6 @@
                   <a:srgbClr val="FFFFFF"/>
                 </a:solidFill>
               </a:rPr>
-              <a:t>• Flyback diode: included on module</a:t>
-            </a:r>
-          </a:p>
-        </p:txBody>
-      </p:sp>
-      <p:sp>
-        <p:nvSpPr>
-          <p:cNvPr id="14" name="TextBox 13"/>
-          <p:cNvSpPr txBox="1"/>
-          <p:nvPr/>
-        </p:nvSpPr>
-        <p:spPr>
-          <a:xfrm>
-            <a:off x="438912" y="2587752"/>
-            <a:ext cx="4700016" cy="256032"/>
-          </a:xfrm>
-          <a:prstGeom prst="rect">
-            <a:avLst/>
-          </a:prstGeom>
-          <a:noFill/>
-        </p:spPr>
-        <p:txBody>
-          <a:bodyPr wrap="square">
-            <a:spAutoFit/>
-          </a:bodyPr>
-          <a:lstStyle/>
-          <a:p>
-            <a:pPr algn="l"/>
-            <a:r>
-              <a:rPr sz="1400" b="0">
-                <a:solidFill>
-                  <a:srgbClr val="FFFFFF"/>
-                </a:solidFill>
-              </a:rPr>
               <a:t>• Indicator LED per channel</a:t>
             </a:r>
           </a:p>
@@ -11681,14 +11511,14 @@
       </p:sp>
       <p:sp>
         <p:nvSpPr>
-          <p:cNvPr id="15" name="Rectangle 14"/>
+          <p:cNvPr id="14" name="Rectangle 13"/>
           <p:cNvSpPr/>
           <p:nvPr/>
         </p:nvSpPr>
         <p:spPr>
           <a:xfrm>
-            <a:off x="274320" y="3840480"/>
-            <a:ext cx="2606040" cy="2834640"/>
+            <a:off x="274320" y="3054858"/>
+            <a:ext cx="2743200" cy="2043684"/>
           </a:xfrm>
           <a:prstGeom prst="rect">
             <a:avLst/>
@@ -11724,34 +11554,68 @@
       </p:sp>
       <p:sp>
         <p:nvSpPr>
+          <p:cNvPr id="15" name="TextBox 14"/>
+          <p:cNvSpPr txBox="1"/>
+          <p:nvPr/>
+        </p:nvSpPr>
+        <p:spPr>
+          <a:xfrm>
+            <a:off x="438912" y="3182874"/>
+            <a:ext cx="2414016" cy="283464"/>
+          </a:xfrm>
+          <a:prstGeom prst="rect">
+            <a:avLst/>
+          </a:prstGeom>
+          <a:noFill/>
+        </p:spPr>
+        <p:txBody>
+          <a:bodyPr wrap="square">
+            <a:spAutoFit/>
+          </a:bodyPr>
+          <a:lstStyle/>
+          <a:p>
+            <a:pPr algn="l"/>
+            <a:r>
+              <a:rPr sz="1200" b="1">
+                <a:solidFill>
+                  <a:srgbClr val="A8DADC"/>
+                </a:solidFill>
+              </a:rPr>
+              <a:t>Feeder Motor</a:t>
+            </a:r>
+          </a:p>
+        </p:txBody>
+      </p:sp>
+      <p:sp>
+        <p:nvSpPr>
           <p:cNvPr id="16" name="TextBox 15"/>
           <p:cNvSpPr txBox="1"/>
           <p:nvPr/>
         </p:nvSpPr>
         <p:spPr>
           <a:xfrm>
-            <a:off x="438912" y="3950208"/>
-            <a:ext cx="2276856" cy="256032"/>
-          </a:xfrm>
-          <a:prstGeom prst="rect">
-            <a:avLst/>
-          </a:prstGeom>
-          <a:noFill/>
-        </p:spPr>
-        <p:txBody>
-          <a:bodyPr wrap="square">
-            <a:spAutoFit/>
-          </a:bodyPr>
-          <a:lstStyle/>
-          <a:p>
-            <a:pPr algn="l"/>
-            <a:r>
-              <a:rPr sz="1200" b="1">
-                <a:solidFill>
-                  <a:srgbClr val="A8DADC"/>
-                </a:solidFill>
-              </a:rPr>
-              <a:t>Feeder Motor</a:t>
+            <a:off x="438912" y="3411474"/>
+            <a:ext cx="2414016" cy="302513"/>
+          </a:xfrm>
+          <a:prstGeom prst="rect">
+            <a:avLst/>
+          </a:prstGeom>
+          <a:noFill/>
+        </p:spPr>
+        <p:txBody>
+          <a:bodyPr wrap="square">
+            <a:spAutoFit/>
+          </a:bodyPr>
+          <a:lstStyle/>
+          <a:p>
+            <a:pPr algn="l"/>
+            <a:r>
+              <a:rPr sz="1300" b="0">
+                <a:solidFill>
+                  <a:srgbClr val="FFFFFF"/>
+                </a:solidFill>
+              </a:rPr>
+              <a:t>• IN  →  GPIO25</a:t>
             </a:r>
           </a:p>
         </p:txBody>
@@ -11764,8 +11628,8 @@
         </p:nvSpPr>
         <p:spPr>
           <a:xfrm>
-            <a:off x="438912" y="4197096"/>
-            <a:ext cx="2276856" cy="256032"/>
+            <a:off x="438912" y="3659123"/>
+            <a:ext cx="2414016" cy="302513"/>
           </a:xfrm>
           <a:prstGeom prst="rect">
             <a:avLst/>
@@ -11785,7 +11649,7 @@
                   <a:srgbClr val="FFFFFF"/>
                 </a:solidFill>
               </a:rPr>
-              <a:t>• IN  →  GPIO25</a:t>
+              <a:t>• VCC →  5V</a:t>
             </a:r>
           </a:p>
         </p:txBody>
@@ -11798,8 +11662,8 @@
         </p:nvSpPr>
         <p:spPr>
           <a:xfrm>
-            <a:off x="438912" y="4443984"/>
-            <a:ext cx="2276856" cy="256032"/>
+            <a:off x="438912" y="3906772"/>
+            <a:ext cx="2414016" cy="302513"/>
           </a:xfrm>
           <a:prstGeom prst="rect">
             <a:avLst/>
@@ -11819,7 +11683,7 @@
                   <a:srgbClr val="FFFFFF"/>
                 </a:solidFill>
               </a:rPr>
-              <a:t>• VCC →  5V</a:t>
+              <a:t>• GND →  GND</a:t>
             </a:r>
           </a:p>
         </p:txBody>
@@ -11832,8 +11696,8 @@
         </p:nvSpPr>
         <p:spPr>
           <a:xfrm>
-            <a:off x="438912" y="4690872"/>
-            <a:ext cx="2276856" cy="256032"/>
+            <a:off x="438912" y="4154421"/>
+            <a:ext cx="2414016" cy="302513"/>
           </a:xfrm>
           <a:prstGeom prst="rect">
             <a:avLst/>
@@ -11853,7 +11717,7 @@
                   <a:srgbClr val="FFFFFF"/>
                 </a:solidFill>
               </a:rPr>
-              <a:t>• GND →  GND</a:t>
+              <a:t>• COM →  AC Live</a:t>
             </a:r>
           </a:p>
         </p:txBody>
@@ -11866,8 +11730,8 @@
         </p:nvSpPr>
         <p:spPr>
           <a:xfrm>
-            <a:off x="438912" y="4937760"/>
-            <a:ext cx="2276856" cy="256032"/>
+            <a:off x="438912" y="4402070"/>
+            <a:ext cx="2414016" cy="302513"/>
           </a:xfrm>
           <a:prstGeom prst="rect">
             <a:avLst/>
@@ -11887,7 +11751,7 @@
                   <a:srgbClr val="FFFFFF"/>
                 </a:solidFill>
               </a:rPr>
-              <a:t>• COM →  AC Live</a:t>
+              <a:t>• NO  →  Load</a:t>
             </a:r>
           </a:p>
         </p:txBody>
@@ -11900,8 +11764,8 @@
         </p:nvSpPr>
         <p:spPr>
           <a:xfrm>
-            <a:off x="438912" y="5184648"/>
-            <a:ext cx="2276856" cy="256032"/>
+            <a:off x="438912" y="4649719"/>
+            <a:ext cx="2414016" cy="302513"/>
           </a:xfrm>
           <a:prstGeom prst="rect">
             <a:avLst/>
@@ -11921,55 +11785,21 @@
                   <a:srgbClr val="FFFFFF"/>
                 </a:solidFill>
               </a:rPr>
-              <a:t>• NO  →  Load</a:t>
-            </a:r>
-          </a:p>
-        </p:txBody>
-      </p:sp>
-      <p:sp>
-        <p:nvSpPr>
-          <p:cNvPr id="22" name="TextBox 21"/>
-          <p:cNvSpPr txBox="1"/>
-          <p:nvPr/>
-        </p:nvSpPr>
-        <p:spPr>
-          <a:xfrm>
-            <a:off x="438912" y="5431536"/>
-            <a:ext cx="2276856" cy="256032"/>
-          </a:xfrm>
-          <a:prstGeom prst="rect">
-            <a:avLst/>
-          </a:prstGeom>
-          <a:noFill/>
-        </p:spPr>
-        <p:txBody>
-          <a:bodyPr wrap="square">
-            <a:spAutoFit/>
-          </a:bodyPr>
-          <a:lstStyle/>
-          <a:p>
-            <a:pPr algn="l"/>
-            <a:r>
-              <a:rPr sz="1300" b="0">
-                <a:solidFill>
-                  <a:srgbClr val="FFFFFF"/>
-                </a:solidFill>
-              </a:rPr>
-              <a:t>• Pellet auger / screw conveyor</a:t>
-            </a:r>
-          </a:p>
-        </p:txBody>
-      </p:sp>
-      <p:sp>
-        <p:nvSpPr>
-          <p:cNvPr id="23" name="Rectangle 22"/>
+              <a:t>• Pellet auger / conveyor</a:t>
+            </a:r>
+          </a:p>
+        </p:txBody>
+      </p:sp>
+      <p:sp>
+        <p:nvSpPr>
+          <p:cNvPr id="22" name="Rectangle 21"/>
           <p:cNvSpPr/>
           <p:nvPr/>
         </p:nvSpPr>
         <p:spPr>
           <a:xfrm>
-            <a:off x="2971800" y="3840480"/>
-            <a:ext cx="2606040" cy="2834640"/>
+            <a:off x="3108960" y="3054858"/>
+            <a:ext cx="2743200" cy="2043684"/>
           </a:xfrm>
           <a:prstGeom prst="rect">
             <a:avLst/>
@@ -12005,34 +11835,68 @@
       </p:sp>
       <p:sp>
         <p:nvSpPr>
+          <p:cNvPr id="23" name="TextBox 22"/>
+          <p:cNvSpPr txBox="1"/>
+          <p:nvPr/>
+        </p:nvSpPr>
+        <p:spPr>
+          <a:xfrm>
+            <a:off x="3273552" y="3182874"/>
+            <a:ext cx="2414016" cy="283464"/>
+          </a:xfrm>
+          <a:prstGeom prst="rect">
+            <a:avLst/>
+          </a:prstGeom>
+          <a:noFill/>
+        </p:spPr>
+        <p:txBody>
+          <a:bodyPr wrap="square">
+            <a:spAutoFit/>
+          </a:bodyPr>
+          <a:lstStyle/>
+          <a:p>
+            <a:pPr algn="l"/>
+            <a:r>
+              <a:rPr sz="1200" b="1">
+                <a:solidFill>
+                  <a:srgbClr val="A8DADC"/>
+                </a:solidFill>
+              </a:rPr>
+              <a:t>Igniter</a:t>
+            </a:r>
+          </a:p>
+        </p:txBody>
+      </p:sp>
+      <p:sp>
+        <p:nvSpPr>
           <p:cNvPr id="24" name="TextBox 23"/>
           <p:cNvSpPr txBox="1"/>
           <p:nvPr/>
         </p:nvSpPr>
         <p:spPr>
           <a:xfrm>
-            <a:off x="3136392" y="3950208"/>
-            <a:ext cx="2276856" cy="256032"/>
-          </a:xfrm>
-          <a:prstGeom prst="rect">
-            <a:avLst/>
-          </a:prstGeom>
-          <a:noFill/>
-        </p:spPr>
-        <p:txBody>
-          <a:bodyPr wrap="square">
-            <a:spAutoFit/>
-          </a:bodyPr>
-          <a:lstStyle/>
-          <a:p>
-            <a:pPr algn="l"/>
-            <a:r>
-              <a:rPr sz="1200" b="1">
-                <a:solidFill>
-                  <a:srgbClr val="A8DADC"/>
-                </a:solidFill>
-              </a:rPr>
-              <a:t>Igniter</a:t>
+            <a:off x="3273552" y="3411474"/>
+            <a:ext cx="2414016" cy="302513"/>
+          </a:xfrm>
+          <a:prstGeom prst="rect">
+            <a:avLst/>
+          </a:prstGeom>
+          <a:noFill/>
+        </p:spPr>
+        <p:txBody>
+          <a:bodyPr wrap="square">
+            <a:spAutoFit/>
+          </a:bodyPr>
+          <a:lstStyle/>
+          <a:p>
+            <a:pPr algn="l"/>
+            <a:r>
+              <a:rPr sz="1300" b="0">
+                <a:solidFill>
+                  <a:srgbClr val="FFFFFF"/>
+                </a:solidFill>
+              </a:rPr>
+              <a:t>• IN  →  GPIO26</a:t>
             </a:r>
           </a:p>
         </p:txBody>
@@ -12045,8 +11909,8 @@
         </p:nvSpPr>
         <p:spPr>
           <a:xfrm>
-            <a:off x="3136392" y="4197096"/>
-            <a:ext cx="2276856" cy="256032"/>
+            <a:off x="3273552" y="3659123"/>
+            <a:ext cx="2414016" cy="302513"/>
           </a:xfrm>
           <a:prstGeom prst="rect">
             <a:avLst/>
@@ -12066,7 +11930,7 @@
                   <a:srgbClr val="FFFFFF"/>
                 </a:solidFill>
               </a:rPr>
-              <a:t>• IN  →  GPIO26</a:t>
+              <a:t>• VCC →  5V</a:t>
             </a:r>
           </a:p>
         </p:txBody>
@@ -12079,8 +11943,8 @@
         </p:nvSpPr>
         <p:spPr>
           <a:xfrm>
-            <a:off x="3136392" y="4443984"/>
-            <a:ext cx="2276856" cy="256032"/>
+            <a:off x="3273552" y="3906772"/>
+            <a:ext cx="2414016" cy="302513"/>
           </a:xfrm>
           <a:prstGeom prst="rect">
             <a:avLst/>
@@ -12100,7 +11964,7 @@
                   <a:srgbClr val="FFFFFF"/>
                 </a:solidFill>
               </a:rPr>
-              <a:t>• VCC →  5V</a:t>
+              <a:t>• GND →  GND</a:t>
             </a:r>
           </a:p>
         </p:txBody>
@@ -12113,8 +11977,8 @@
         </p:nvSpPr>
         <p:spPr>
           <a:xfrm>
-            <a:off x="3136392" y="4690872"/>
-            <a:ext cx="2276856" cy="256032"/>
+            <a:off x="3273552" y="4154421"/>
+            <a:ext cx="2414016" cy="302513"/>
           </a:xfrm>
           <a:prstGeom prst="rect">
             <a:avLst/>
@@ -12134,7 +11998,7 @@
                   <a:srgbClr val="FFFFFF"/>
                 </a:solidFill>
               </a:rPr>
-              <a:t>• GND →  GND</a:t>
+              <a:t>• COM →  AC Live</a:t>
             </a:r>
           </a:p>
         </p:txBody>
@@ -12147,8 +12011,8 @@
         </p:nvSpPr>
         <p:spPr>
           <a:xfrm>
-            <a:off x="3136392" y="4937760"/>
-            <a:ext cx="2276856" cy="256032"/>
+            <a:off x="3273552" y="4402070"/>
+            <a:ext cx="2414016" cy="302513"/>
           </a:xfrm>
           <a:prstGeom prst="rect">
             <a:avLst/>
@@ -12168,7 +12032,7 @@
                   <a:srgbClr val="FFFFFF"/>
                 </a:solidFill>
               </a:rPr>
-              <a:t>• COM →  AC Live</a:t>
+              <a:t>• NO  →  Load</a:t>
             </a:r>
           </a:p>
         </p:txBody>
@@ -12181,8 +12045,8 @@
         </p:nvSpPr>
         <p:spPr>
           <a:xfrm>
-            <a:off x="3136392" y="5184648"/>
-            <a:ext cx="2276856" cy="256032"/>
+            <a:off x="3273552" y="4649719"/>
+            <a:ext cx="2414016" cy="302513"/>
           </a:xfrm>
           <a:prstGeom prst="rect">
             <a:avLst/>
@@ -12202,40 +12066,6 @@
                   <a:srgbClr val="FFFFFF"/>
                 </a:solidFill>
               </a:rPr>
-              <a:t>• NO  →  Load</a:t>
-            </a:r>
-          </a:p>
-        </p:txBody>
-      </p:sp>
-      <p:sp>
-        <p:nvSpPr>
-          <p:cNvPr id="30" name="TextBox 29"/>
-          <p:cNvSpPr txBox="1"/>
-          <p:nvPr/>
-        </p:nvSpPr>
-        <p:spPr>
-          <a:xfrm>
-            <a:off x="3136392" y="5431536"/>
-            <a:ext cx="2276856" cy="256032"/>
-          </a:xfrm>
-          <a:prstGeom prst="rect">
-            <a:avLst/>
-          </a:prstGeom>
-          <a:noFill/>
-        </p:spPr>
-        <p:txBody>
-          <a:bodyPr wrap="square">
-            <a:spAutoFit/>
-          </a:bodyPr>
-          <a:lstStyle/>
-          <a:p>
-            <a:pPr algn="l"/>
-            <a:r>
-              <a:rPr sz="1300" b="0">
-                <a:solidFill>
-                  <a:srgbClr val="FFFFFF"/>
-                </a:solidFill>
-              </a:rPr>
               <a:t>• Electric heating element</a:t>
             </a:r>
           </a:p>
@@ -12243,14 +12073,14 @@
       </p:sp>
       <p:sp>
         <p:nvSpPr>
-          <p:cNvPr id="31" name="Rectangle 30"/>
+          <p:cNvPr id="30" name="Rectangle 29"/>
           <p:cNvSpPr/>
           <p:nvPr/>
         </p:nvSpPr>
         <p:spPr>
           <a:xfrm>
-            <a:off x="5669280" y="3840480"/>
-            <a:ext cx="2606040" cy="2834640"/>
+            <a:off x="5943600" y="3054858"/>
+            <a:ext cx="2743200" cy="2043684"/>
           </a:xfrm>
           <a:prstGeom prst="rect">
             <a:avLst/>
@@ -12286,34 +12116,68 @@
       </p:sp>
       <p:sp>
         <p:nvSpPr>
+          <p:cNvPr id="31" name="TextBox 30"/>
+          <p:cNvSpPr txBox="1"/>
+          <p:nvPr/>
+        </p:nvSpPr>
+        <p:spPr>
+          <a:xfrm>
+            <a:off x="6108192" y="3182874"/>
+            <a:ext cx="2414016" cy="283464"/>
+          </a:xfrm>
+          <a:prstGeom prst="rect">
+            <a:avLst/>
+          </a:prstGeom>
+          <a:noFill/>
+        </p:spPr>
+        <p:txBody>
+          <a:bodyPr wrap="square">
+            <a:spAutoFit/>
+          </a:bodyPr>
+          <a:lstStyle/>
+          <a:p>
+            <a:pPr algn="l"/>
+            <a:r>
+              <a:rPr sz="1200" b="1">
+                <a:solidFill>
+                  <a:srgbClr val="A8DADC"/>
+                </a:solidFill>
+              </a:rPr>
+              <a:t>Water Pump</a:t>
+            </a:r>
+          </a:p>
+        </p:txBody>
+      </p:sp>
+      <p:sp>
+        <p:nvSpPr>
           <p:cNvPr id="32" name="TextBox 31"/>
           <p:cNvSpPr txBox="1"/>
           <p:nvPr/>
         </p:nvSpPr>
         <p:spPr>
           <a:xfrm>
-            <a:off x="5833872" y="3950208"/>
-            <a:ext cx="2276856" cy="256032"/>
-          </a:xfrm>
-          <a:prstGeom prst="rect">
-            <a:avLst/>
-          </a:prstGeom>
-          <a:noFill/>
-        </p:spPr>
-        <p:txBody>
-          <a:bodyPr wrap="square">
-            <a:spAutoFit/>
-          </a:bodyPr>
-          <a:lstStyle/>
-          <a:p>
-            <a:pPr algn="l"/>
-            <a:r>
-              <a:rPr sz="1200" b="1">
-                <a:solidFill>
-                  <a:srgbClr val="A8DADC"/>
-                </a:solidFill>
-              </a:rPr>
-              <a:t>Water Pump</a:t>
+            <a:off x="6108192" y="3411474"/>
+            <a:ext cx="2414016" cy="302513"/>
+          </a:xfrm>
+          <a:prstGeom prst="rect">
+            <a:avLst/>
+          </a:prstGeom>
+          <a:noFill/>
+        </p:spPr>
+        <p:txBody>
+          <a:bodyPr wrap="square">
+            <a:spAutoFit/>
+          </a:bodyPr>
+          <a:lstStyle/>
+          <a:p>
+            <a:pPr algn="l"/>
+            <a:r>
+              <a:rPr sz="1300" b="0">
+                <a:solidFill>
+                  <a:srgbClr val="FFFFFF"/>
+                </a:solidFill>
+              </a:rPr>
+              <a:t>• IN  →  GPIO27</a:t>
             </a:r>
           </a:p>
         </p:txBody>
@@ -12326,8 +12190,8 @@
         </p:nvSpPr>
         <p:spPr>
           <a:xfrm>
-            <a:off x="5833872" y="4197096"/>
-            <a:ext cx="2276856" cy="256032"/>
+            <a:off x="6108192" y="3659123"/>
+            <a:ext cx="2414016" cy="302513"/>
           </a:xfrm>
           <a:prstGeom prst="rect">
             <a:avLst/>
@@ -12347,7 +12211,7 @@
                   <a:srgbClr val="FFFFFF"/>
                 </a:solidFill>
               </a:rPr>
-              <a:t>• IN  →  GPIO27</a:t>
+              <a:t>• VCC →  5V</a:t>
             </a:r>
           </a:p>
         </p:txBody>
@@ -12360,8 +12224,8 @@
         </p:nvSpPr>
         <p:spPr>
           <a:xfrm>
-            <a:off x="5833872" y="4443984"/>
-            <a:ext cx="2276856" cy="256032"/>
+            <a:off x="6108192" y="3906772"/>
+            <a:ext cx="2414016" cy="302513"/>
           </a:xfrm>
           <a:prstGeom prst="rect">
             <a:avLst/>
@@ -12381,7 +12245,7 @@
                   <a:srgbClr val="FFFFFF"/>
                 </a:solidFill>
               </a:rPr>
-              <a:t>• VCC →  5V</a:t>
+              <a:t>• GND →  GND</a:t>
             </a:r>
           </a:p>
         </p:txBody>
@@ -12394,8 +12258,8 @@
         </p:nvSpPr>
         <p:spPr>
           <a:xfrm>
-            <a:off x="5833872" y="4690872"/>
-            <a:ext cx="2276856" cy="256032"/>
+            <a:off x="6108192" y="4154421"/>
+            <a:ext cx="2414016" cy="302513"/>
           </a:xfrm>
           <a:prstGeom prst="rect">
             <a:avLst/>
@@ -12415,7 +12279,7 @@
                   <a:srgbClr val="FFFFFF"/>
                 </a:solidFill>
               </a:rPr>
-              <a:t>• GND →  GND</a:t>
+              <a:t>• COM →  AC Live</a:t>
             </a:r>
           </a:p>
         </p:txBody>
@@ -12428,8 +12292,8 @@
         </p:nvSpPr>
         <p:spPr>
           <a:xfrm>
-            <a:off x="5833872" y="4937760"/>
-            <a:ext cx="2276856" cy="256032"/>
+            <a:off x="6108192" y="4402070"/>
+            <a:ext cx="2414016" cy="302513"/>
           </a:xfrm>
           <a:prstGeom prst="rect">
             <a:avLst/>
@@ -12449,7 +12313,7 @@
                   <a:srgbClr val="FFFFFF"/>
                 </a:solidFill>
               </a:rPr>
-              <a:t>• COM →  AC Live</a:t>
+              <a:t>• NO  →  Load</a:t>
             </a:r>
           </a:p>
         </p:txBody>
@@ -12462,8 +12326,8 @@
         </p:nvSpPr>
         <p:spPr>
           <a:xfrm>
-            <a:off x="5833872" y="5184648"/>
-            <a:ext cx="2276856" cy="256032"/>
+            <a:off x="6108192" y="4649719"/>
+            <a:ext cx="2414016" cy="302513"/>
           </a:xfrm>
           <a:prstGeom prst="rect">
             <a:avLst/>
@@ -12483,40 +12347,6 @@
                   <a:srgbClr val="FFFFFF"/>
                 </a:solidFill>
               </a:rPr>
-              <a:t>• NO  →  Load</a:t>
-            </a:r>
-          </a:p>
-        </p:txBody>
-      </p:sp>
-      <p:sp>
-        <p:nvSpPr>
-          <p:cNvPr id="38" name="TextBox 37"/>
-          <p:cNvSpPr txBox="1"/>
-          <p:nvPr/>
-        </p:nvSpPr>
-        <p:spPr>
-          <a:xfrm>
-            <a:off x="5833872" y="5431536"/>
-            <a:ext cx="2276856" cy="256032"/>
-          </a:xfrm>
-          <a:prstGeom prst="rect">
-            <a:avLst/>
-          </a:prstGeom>
-          <a:noFill/>
-        </p:spPr>
-        <p:txBody>
-          <a:bodyPr wrap="square">
-            <a:spAutoFit/>
-          </a:bodyPr>
-          <a:lstStyle/>
-          <a:p>
-            <a:pPr algn="l"/>
-            <a:r>
-              <a:rPr sz="1300" b="0">
-                <a:solidFill>
-                  <a:srgbClr val="FFFFFF"/>
-                </a:solidFill>
-              </a:rPr>
               <a:t>• Circulation pump</a:t>
             </a:r>
           </a:p>
@@ -12524,14 +12354,14 @@
       </p:sp>
       <p:sp>
         <p:nvSpPr>
-          <p:cNvPr id="39" name="Rectangle 38"/>
+          <p:cNvPr id="38" name="Rectangle 37"/>
           <p:cNvSpPr/>
           <p:nvPr/>
         </p:nvSpPr>
         <p:spPr>
           <a:xfrm>
-            <a:off x="8229600" y="3840480"/>
-            <a:ext cx="3749039" cy="2834640"/>
+            <a:off x="8732520" y="3054858"/>
+            <a:ext cx="3108960" cy="2024633"/>
           </a:xfrm>
           <a:prstGeom prst="rect">
             <a:avLst/>
@@ -12567,14 +12397,150 @@
       </p:sp>
       <p:sp>
         <p:nvSpPr>
+          <p:cNvPr id="39" name="TextBox 38"/>
+          <p:cNvSpPr txBox="1"/>
+          <p:nvPr/>
+        </p:nvSpPr>
+        <p:spPr>
+          <a:xfrm>
+            <a:off x="8897112" y="3182874"/>
+            <a:ext cx="2779776" cy="283464"/>
+          </a:xfrm>
+          <a:prstGeom prst="rect">
+            <a:avLst/>
+          </a:prstGeom>
+          <a:noFill/>
+        </p:spPr>
+        <p:txBody>
+          <a:bodyPr wrap="square">
+            <a:spAutoFit/>
+          </a:bodyPr>
+          <a:lstStyle/>
+          <a:p>
+            <a:pPr algn="l"/>
+            <a:r>
+              <a:rPr sz="1200" b="1">
+                <a:solidFill>
+                  <a:srgbClr val="A8DADC"/>
+                </a:solidFill>
+              </a:rPr>
+              <a:t>Active LOW wiring note</a:t>
+            </a:r>
+          </a:p>
+        </p:txBody>
+      </p:sp>
+      <p:sp>
+        <p:nvSpPr>
           <p:cNvPr id="40" name="TextBox 39"/>
           <p:cNvSpPr txBox="1"/>
           <p:nvPr/>
         </p:nvSpPr>
         <p:spPr>
           <a:xfrm>
-            <a:off x="8394192" y="3950208"/>
-            <a:ext cx="3419855" cy="256032"/>
+            <a:off x="8897112" y="3411474"/>
+            <a:ext cx="2779776" cy="302513"/>
+          </a:xfrm>
+          <a:prstGeom prst="rect">
+            <a:avLst/>
+          </a:prstGeom>
+          <a:noFill/>
+        </p:spPr>
+        <p:txBody>
+          <a:bodyPr wrap="square">
+            <a:spAutoFit/>
+          </a:bodyPr>
+          <a:lstStyle/>
+          <a:p>
+            <a:pPr algn="l"/>
+            <a:r>
+              <a:rPr sz="1300" b="0">
+                <a:solidFill>
+                  <a:srgbClr val="FFFFFF"/>
+                </a:solidFill>
+              </a:rPr>
+              <a:t>• ESP32 GPIO init HIGH at boot →</a:t>
+            </a:r>
+          </a:p>
+        </p:txBody>
+      </p:sp>
+      <p:sp>
+        <p:nvSpPr>
+          <p:cNvPr id="41" name="TextBox 40"/>
+          <p:cNvSpPr txBox="1"/>
+          <p:nvPr/>
+        </p:nvSpPr>
+        <p:spPr>
+          <a:xfrm>
+            <a:off x="8897112" y="3659123"/>
+            <a:ext cx="2779776" cy="302513"/>
+          </a:xfrm>
+          <a:prstGeom prst="rect">
+            <a:avLst/>
+          </a:prstGeom>
+          <a:noFill/>
+        </p:spPr>
+        <p:txBody>
+          <a:bodyPr wrap="square">
+            <a:spAutoFit/>
+          </a:bodyPr>
+          <a:lstStyle/>
+          <a:p>
+            <a:pPr algn="l"/>
+            <a:r>
+              <a:rPr sz="1300" b="0">
+                <a:solidFill>
+                  <a:srgbClr val="FFFFFF"/>
+                </a:solidFill>
+              </a:rPr>
+              <a:t>• relay stays OFF during reset/startup</a:t>
+            </a:r>
+          </a:p>
+        </p:txBody>
+      </p:sp>
+      <p:sp>
+        <p:nvSpPr>
+          <p:cNvPr id="42" name="TextBox 41"/>
+          <p:cNvSpPr txBox="1"/>
+          <p:nvPr/>
+        </p:nvSpPr>
+        <p:spPr>
+          <a:xfrm>
+            <a:off x="8897112" y="3906772"/>
+            <a:ext cx="2779776" cy="302513"/>
+          </a:xfrm>
+          <a:prstGeom prst="rect">
+            <a:avLst/>
+          </a:prstGeom>
+          <a:noFill/>
+        </p:spPr>
+        <p:txBody>
+          <a:bodyPr wrap="square">
+            <a:spAutoFit/>
+          </a:bodyPr>
+          <a:lstStyle/>
+          <a:p>
+            <a:pPr algn="l"/>
+            <a:r>
+              <a:rPr sz="1300" b="0">
+                <a:solidFill>
+                  <a:srgbClr val="FFFFFF"/>
+                </a:solidFill>
+              </a:rPr>
+              <a:t>• LOW = relay ON,  HIGH = relay OFF</a:t>
+            </a:r>
+          </a:p>
+        </p:txBody>
+      </p:sp>
+      <p:sp>
+        <p:nvSpPr>
+          <p:cNvPr id="43" name="TextBox 42"/>
+          <p:cNvSpPr txBox="1"/>
+          <p:nvPr/>
+        </p:nvSpPr>
+        <p:spPr>
+          <a:xfrm>
+            <a:off x="8897112" y="4154421"/>
+            <a:ext cx="2779776" cy="283464"/>
           </a:xfrm>
           <a:prstGeom prst="rect">
             <a:avLst/>
@@ -12594,21 +12560,21 @@
                   <a:srgbClr val="A8DADC"/>
                 </a:solidFill>
               </a:rPr>
-              <a:t>Active LOW wiring note</a:t>
-            </a:r>
-          </a:p>
-        </p:txBody>
-      </p:sp>
-      <p:sp>
-        <p:nvSpPr>
-          <p:cNvPr id="41" name="TextBox 40"/>
-          <p:cNvSpPr txBox="1"/>
-          <p:nvPr/>
-        </p:nvSpPr>
-        <p:spPr>
-          <a:xfrm>
-            <a:off x="8394192" y="4197096"/>
-            <a:ext cx="3419855" cy="256032"/>
+              <a:t>Safety</a:t>
+            </a:r>
+          </a:p>
+        </p:txBody>
+      </p:sp>
+      <p:sp>
+        <p:nvSpPr>
+          <p:cNvPr id="44" name="TextBox 43"/>
+          <p:cNvSpPr txBox="1"/>
+          <p:nvPr/>
+        </p:nvSpPr>
+        <p:spPr>
+          <a:xfrm>
+            <a:off x="8897112" y="4383021"/>
+            <a:ext cx="2779776" cy="302513"/>
           </a:xfrm>
           <a:prstGeom prst="rect">
             <a:avLst/>
@@ -12628,21 +12594,21 @@
                   <a:srgbClr val="FFFFFF"/>
                 </a:solidFill>
               </a:rPr>
-              <a:t>• ESP32 GPIO initialised HIGH at boot →</a:t>
-            </a:r>
-          </a:p>
-        </p:txBody>
-      </p:sp>
-      <p:sp>
-        <p:nvSpPr>
-          <p:cNvPr id="42" name="TextBox 41"/>
-          <p:cNvSpPr txBox="1"/>
-          <p:nvPr/>
-        </p:nvSpPr>
-        <p:spPr>
-          <a:xfrm>
-            <a:off x="8394192" y="4443984"/>
-            <a:ext cx="3419855" cy="256032"/>
+              <a:t>• All relays default OFF on power-up</a:t>
+            </a:r>
+          </a:p>
+        </p:txBody>
+      </p:sp>
+      <p:sp>
+        <p:nvSpPr>
+          <p:cNvPr id="45" name="TextBox 44"/>
+          <p:cNvSpPr txBox="1"/>
+          <p:nvPr/>
+        </p:nvSpPr>
+        <p:spPr>
+          <a:xfrm>
+            <a:off x="8897112" y="4630670"/>
+            <a:ext cx="2779776" cy="302513"/>
           </a:xfrm>
           <a:prstGeom prst="rect">
             <a:avLst/>
@@ -12662,177 +12628,7 @@
                   <a:srgbClr val="FFFFFF"/>
                 </a:solidFill>
               </a:rPr>
-              <a:t>• relay stays OFF during startup / reset</a:t>
-            </a:r>
-          </a:p>
-        </p:txBody>
-      </p:sp>
-      <p:sp>
-        <p:nvSpPr>
-          <p:cNvPr id="43" name="TextBox 42"/>
-          <p:cNvSpPr txBox="1"/>
-          <p:nvPr/>
-        </p:nvSpPr>
-        <p:spPr>
-          <a:xfrm>
-            <a:off x="8394192" y="4690872"/>
-            <a:ext cx="3419855" cy="256032"/>
-          </a:xfrm>
-          <a:prstGeom prst="rect">
-            <a:avLst/>
-          </a:prstGeom>
-          <a:noFill/>
-        </p:spPr>
-        <p:txBody>
-          <a:bodyPr wrap="square">
-            <a:spAutoFit/>
-          </a:bodyPr>
-          <a:lstStyle/>
-          <a:p>
-            <a:pPr algn="l"/>
-            <a:r>
-              <a:rPr sz="1300" b="0">
-                <a:solidFill>
-                  <a:srgbClr val="FFFFFF"/>
-                </a:solidFill>
-              </a:rPr>
-              <a:t>• Set GPIO LOW to activate (energise) relay</a:t>
-            </a:r>
-          </a:p>
-        </p:txBody>
-      </p:sp>
-      <p:sp>
-        <p:nvSpPr>
-          <p:cNvPr id="44" name="TextBox 43"/>
-          <p:cNvSpPr txBox="1"/>
-          <p:nvPr/>
-        </p:nvSpPr>
-        <p:spPr>
-          <a:xfrm>
-            <a:off x="8394192" y="4937760"/>
-            <a:ext cx="3419855" cy="256032"/>
-          </a:xfrm>
-          <a:prstGeom prst="rect">
-            <a:avLst/>
-          </a:prstGeom>
-          <a:noFill/>
-        </p:spPr>
-        <p:txBody>
-          <a:bodyPr wrap="square">
-            <a:spAutoFit/>
-          </a:bodyPr>
-          <a:lstStyle/>
-          <a:p>
-            <a:pPr algn="l"/>
-            <a:r>
-              <a:rPr sz="1300" b="0">
-                <a:solidFill>
-                  <a:srgbClr val="FFFFFF"/>
-                </a:solidFill>
-              </a:rPr>
-              <a:t>• Set GPIO HIGH to deactivate</a:t>
-            </a:r>
-          </a:p>
-        </p:txBody>
-      </p:sp>
-      <p:sp>
-        <p:nvSpPr>
-          <p:cNvPr id="45" name="TextBox 44"/>
-          <p:cNvSpPr txBox="1"/>
-          <p:nvPr/>
-        </p:nvSpPr>
-        <p:spPr>
-          <a:xfrm>
-            <a:off x="8394192" y="5184648"/>
-            <a:ext cx="3419855" cy="256032"/>
-          </a:xfrm>
-          <a:prstGeom prst="rect">
-            <a:avLst/>
-          </a:prstGeom>
-          <a:noFill/>
-        </p:spPr>
-        <p:txBody>
-          <a:bodyPr wrap="square">
-            <a:spAutoFit/>
-          </a:bodyPr>
-          <a:lstStyle/>
-          <a:p>
-            <a:pPr algn="l"/>
-            <a:r>
-              <a:rPr sz="1200" b="1">
-                <a:solidFill>
-                  <a:srgbClr val="A8DADC"/>
-                </a:solidFill>
-              </a:rPr>
-              <a:t>Safety</a:t>
-            </a:r>
-          </a:p>
-        </p:txBody>
-      </p:sp>
-      <p:sp>
-        <p:nvSpPr>
-          <p:cNvPr id="46" name="TextBox 45"/>
-          <p:cNvSpPr txBox="1"/>
-          <p:nvPr/>
-        </p:nvSpPr>
-        <p:spPr>
-          <a:xfrm>
-            <a:off x="8394192" y="5431536"/>
-            <a:ext cx="3419855" cy="256032"/>
-          </a:xfrm>
-          <a:prstGeom prst="rect">
-            <a:avLst/>
-          </a:prstGeom>
-          <a:noFill/>
-        </p:spPr>
-        <p:txBody>
-          <a:bodyPr wrap="square">
-            <a:spAutoFit/>
-          </a:bodyPr>
-          <a:lstStyle/>
-          <a:p>
-            <a:pPr algn="l"/>
-            <a:r>
-              <a:rPr sz="1300" b="0">
-                <a:solidFill>
-                  <a:srgbClr val="FFFFFF"/>
-                </a:solidFill>
-              </a:rPr>
-              <a:t>• All relays default OFF on power-up</a:t>
-            </a:r>
-          </a:p>
-        </p:txBody>
-      </p:sp>
-      <p:sp>
-        <p:nvSpPr>
-          <p:cNvPr id="47" name="TextBox 46"/>
-          <p:cNvSpPr txBox="1"/>
-          <p:nvPr/>
-        </p:nvSpPr>
-        <p:spPr>
-          <a:xfrm>
-            <a:off x="8394192" y="5678424"/>
-            <a:ext cx="3419855" cy="256032"/>
-          </a:xfrm>
-          <a:prstGeom prst="rect">
-            <a:avLst/>
-          </a:prstGeom>
-          <a:noFill/>
-        </p:spPr>
-        <p:txBody>
-          <a:bodyPr wrap="square">
-            <a:spAutoFit/>
-          </a:bodyPr>
-          <a:lstStyle/>
-          <a:p>
-            <a:pPr algn="l"/>
-            <a:r>
-              <a:rPr sz="1300" b="0">
-                <a:solidFill>
-                  <a:srgbClr val="FFFFFF"/>
-                </a:solidFill>
-              </a:rPr>
-              <a:t>• Emergency stop → all GPIOs HIGH immediately</a:t>
+              <a:t>• Emergency stop: all GPIOs → HIGH</a:t>
             </a:r>
           </a:p>
         </p:txBody>
@@ -12907,7 +12703,7 @@
         <p:spPr>
           <a:xfrm>
             <a:off x="365760" y="137160"/>
-            <a:ext cx="8229600" cy="502920"/>
+            <a:ext cx="11430000" cy="502920"/>
           </a:xfrm>
           <a:prstGeom prst="rect">
             <a:avLst/>
@@ -12983,8 +12779,8 @@
         </p:nvSpPr>
         <p:spPr>
           <a:xfrm>
-            <a:off x="8503920" y="822960"/>
-            <a:ext cx="3291840" cy="3657600"/>
+            <a:off x="8732520" y="804672"/>
+            <a:ext cx="3108960" cy="3474720"/>
           </a:xfrm>
           <a:prstGeom prst="rect">
             <a:avLst/>
@@ -13028,8 +12824,8 @@
         </p:nvSpPr>
         <p:spPr>
           <a:xfrm>
-            <a:off x="8503920" y="2468880"/>
-            <a:ext cx="3291840" cy="365760"/>
+            <a:off x="8732520" y="2359152"/>
+            <a:ext cx="3108960" cy="365760"/>
           </a:xfrm>
           <a:prstGeom prst="rect">
             <a:avLst/>
@@ -13049,7 +12845,7 @@
                   <a:srgbClr val="A8DADC"/>
                 </a:solidFill>
               </a:rPr>
-              <a:t>TRIAC / AC Dimmer Module</a:t>
+              <a:t>TRIAC / AC Dimmer</a:t>
             </a:r>
           </a:p>
         </p:txBody>
@@ -13063,7 +12859,7 @@
         <p:spPr>
           <a:xfrm>
             <a:off x="274320" y="749808"/>
-            <a:ext cx="5029200" cy="5212080"/>
+            <a:ext cx="4937760" cy="4005834"/>
           </a:xfrm>
           <a:prstGeom prst="rect">
             <a:avLst/>
@@ -13105,8 +12901,8 @@
         </p:nvSpPr>
         <p:spPr>
           <a:xfrm>
-            <a:off x="438912" y="859536"/>
-            <a:ext cx="4700016" cy="256032"/>
+            <a:off x="438912" y="877824"/>
+            <a:ext cx="4608576" cy="283464"/>
           </a:xfrm>
           <a:prstGeom prst="rect">
             <a:avLst/>
@@ -13140,7 +12936,7 @@
         <p:spPr>
           <a:xfrm>
             <a:off x="438912" y="1106424"/>
-            <a:ext cx="4700016" cy="256032"/>
+            <a:ext cx="4608576" cy="302513"/>
           </a:xfrm>
           <a:prstGeom prst="rect">
             <a:avLst/>
@@ -13160,7 +12956,7 @@
                   <a:srgbClr val="FFFFFF"/>
                 </a:solidFill>
               </a:rPr>
-              <a:t>• The AC waveform is 'chopped' each half-cycle.</a:t>
+              <a:t>• The AC waveform is chopped each half-cycle.</a:t>
             </a:r>
           </a:p>
         </p:txBody>
@@ -13173,8 +12969,8 @@
         </p:nvSpPr>
         <p:spPr>
           <a:xfrm>
-            <a:off x="438912" y="1353312"/>
-            <a:ext cx="4700016" cy="256032"/>
+            <a:off x="438912" y="1354073"/>
+            <a:ext cx="4608576" cy="302513"/>
           </a:xfrm>
           <a:prstGeom prst="rect">
             <a:avLst/>
@@ -13194,7 +12990,7 @@
                   <a:srgbClr val="FFFFFF"/>
                 </a:solidFill>
               </a:rPr>
-              <a:t>• The TRIAC fires later in the cycle → less power.</a:t>
+              <a:t>• TRIAC fires later in the cycle → less power.</a:t>
             </a:r>
           </a:p>
         </p:txBody>
@@ -13207,8 +13003,8 @@
         </p:nvSpPr>
         <p:spPr>
           <a:xfrm>
-            <a:off x="438912" y="1600200"/>
-            <a:ext cx="4700016" cy="256032"/>
+            <a:off x="438912" y="1601722"/>
+            <a:ext cx="4608576" cy="302513"/>
           </a:xfrm>
           <a:prstGeom prst="rect">
             <a:avLst/>
@@ -13228,7 +13024,7 @@
                   <a:srgbClr val="FFFFFF"/>
                 </a:solidFill>
               </a:rPr>
-              <a:t>• A zero-cross detector tells the ESP32 exactly</a:t>
+              <a:t>• Zero-cross detector tells ESP32 exactly when</a:t>
             </a:r>
           </a:p>
         </p:txBody>
@@ -13241,8 +13037,8 @@
         </p:nvSpPr>
         <p:spPr>
           <a:xfrm>
-            <a:off x="438912" y="1847088"/>
-            <a:ext cx="4700016" cy="256032"/>
+            <a:off x="438912" y="1849371"/>
+            <a:ext cx="4608576" cy="302513"/>
           </a:xfrm>
           <a:prstGeom prst="rect">
             <a:avLst/>
@@ -13262,7 +13058,7 @@
                   <a:srgbClr val="FFFFFF"/>
                 </a:solidFill>
               </a:rPr>
-              <a:t>• when the AC wave crosses 0V.</a:t>
+              <a:t>• the AC wave crosses 0V.</a:t>
             </a:r>
           </a:p>
         </p:txBody>
@@ -13275,8 +13071,8 @@
         </p:nvSpPr>
         <p:spPr>
           <a:xfrm>
-            <a:off x="438912" y="2093976"/>
-            <a:ext cx="4700016" cy="256032"/>
+            <a:off x="438912" y="2097020"/>
+            <a:ext cx="4608576" cy="302513"/>
           </a:xfrm>
           <a:prstGeom prst="rect">
             <a:avLst/>
@@ -13296,7 +13092,7 @@
                   <a:srgbClr val="FFFFFF"/>
                 </a:solidFill>
               </a:rPr>
-              <a:t>• ESP32 waits N microseconds, then pulses the</a:t>
+              <a:t>• ESP32 waits N µs, then pulses the TRIAC gate</a:t>
             </a:r>
           </a:p>
         </p:txBody>
@@ -13309,8 +13105,8 @@
         </p:nvSpPr>
         <p:spPr>
           <a:xfrm>
-            <a:off x="438912" y="2340864"/>
-            <a:ext cx="4700016" cy="256032"/>
+            <a:off x="438912" y="2344669"/>
+            <a:ext cx="4608576" cy="302513"/>
           </a:xfrm>
           <a:prstGeom prst="rect">
             <a:avLst/>
@@ -13330,7 +13126,7 @@
                   <a:srgbClr val="FFFFFF"/>
                 </a:solidFill>
               </a:rPr>
-              <a:t>• TRIAC gate → conducts for the rest of the cycle.</a:t>
+              <a:t>• → conducts for the rest of the half-cycle.</a:t>
             </a:r>
           </a:p>
         </p:txBody>
@@ -13343,8 +13139,8 @@
         </p:nvSpPr>
         <p:spPr>
           <a:xfrm>
-            <a:off x="438912" y="2587752"/>
-            <a:ext cx="4700016" cy="256032"/>
+            <a:off x="438912" y="2592318"/>
+            <a:ext cx="4608576" cy="302513"/>
           </a:xfrm>
           <a:prstGeom prst="rect">
             <a:avLst/>
@@ -13364,7 +13160,7 @@
                   <a:srgbClr val="FFFFFF"/>
                 </a:solidFill>
               </a:rPr>
-              <a:t>• Larger delay = lower speed.  Delay = 0 = full power.</a:t>
+              <a:t>• Larger delay = lower fan speed.</a:t>
             </a:r>
           </a:p>
         </p:txBody>
@@ -13377,8 +13173,42 @@
         </p:nvSpPr>
         <p:spPr>
           <a:xfrm>
-            <a:off x="438912" y="2834640"/>
-            <a:ext cx="4700016" cy="256032"/>
+            <a:off x="438912" y="2839967"/>
+            <a:ext cx="4608576" cy="302513"/>
+          </a:xfrm>
+          <a:prstGeom prst="rect">
+            <a:avLst/>
+          </a:prstGeom>
+          <a:noFill/>
+        </p:spPr>
+        <p:txBody>
+          <a:bodyPr wrap="square">
+            <a:spAutoFit/>
+          </a:bodyPr>
+          <a:lstStyle/>
+          <a:p>
+            <a:pPr algn="l"/>
+            <a:r>
+              <a:rPr sz="1300" b="0">
+                <a:solidFill>
+                  <a:srgbClr val="FFFFFF"/>
+                </a:solidFill>
+              </a:rPr>
+              <a:t>• Delay = 0 = full power.</a:t>
+            </a:r>
+          </a:p>
+        </p:txBody>
+      </p:sp>
+      <p:sp>
+        <p:nvSpPr>
+          <p:cNvPr id="17" name="TextBox 16"/>
+          <p:cNvSpPr txBox="1"/>
+          <p:nvPr/>
+        </p:nvSpPr>
+        <p:spPr>
+          <a:xfrm>
+            <a:off x="438912" y="3087616"/>
+            <a:ext cx="4608576" cy="283464"/>
           </a:xfrm>
           <a:prstGeom prst="rect">
             <a:avLst/>
@@ -13405,14 +13235,14 @@
       </p:sp>
       <p:sp>
         <p:nvSpPr>
-          <p:cNvPr id="17" name="TextBox 16"/>
-          <p:cNvSpPr txBox="1"/>
-          <p:nvPr/>
-        </p:nvSpPr>
-        <p:spPr>
-          <a:xfrm>
-            <a:off x="438912" y="3081528"/>
-            <a:ext cx="4700016" cy="256032"/>
+          <p:cNvPr id="18" name="TextBox 17"/>
+          <p:cNvSpPr txBox="1"/>
+          <p:nvPr/>
+        </p:nvSpPr>
+        <p:spPr>
+          <a:xfrm>
+            <a:off x="438912" y="3316216"/>
+            <a:ext cx="4608576" cy="302513"/>
           </a:xfrm>
           <a:prstGeom prst="rect">
             <a:avLst/>
@@ -13432,21 +13262,21 @@
                   <a:srgbClr val="FFFFFF"/>
                 </a:solidFill>
               </a:rPr>
-              <a:t>• BT136 or BTA16 TRIAC (TO-220, isolated tab)</a:t>
-            </a:r>
-          </a:p>
-        </p:txBody>
-      </p:sp>
-      <p:sp>
-        <p:nvSpPr>
-          <p:cNvPr id="18" name="TextBox 17"/>
-          <p:cNvSpPr txBox="1"/>
-          <p:nvPr/>
-        </p:nvSpPr>
-        <p:spPr>
-          <a:xfrm>
-            <a:off x="438912" y="3328416"/>
-            <a:ext cx="4700016" cy="256032"/>
+              <a:t>• BT136 or BTA16 TRIAC (TO-220)</a:t>
+            </a:r>
+          </a:p>
+        </p:txBody>
+      </p:sp>
+      <p:sp>
+        <p:nvSpPr>
+          <p:cNvPr id="19" name="TextBox 18"/>
+          <p:cNvSpPr txBox="1"/>
+          <p:nvPr/>
+        </p:nvSpPr>
+        <p:spPr>
+          <a:xfrm>
+            <a:off x="438912" y="3563865"/>
+            <a:ext cx="4608576" cy="302513"/>
           </a:xfrm>
           <a:prstGeom prst="rect">
             <a:avLst/>
@@ -13473,14 +13303,14 @@
       </p:sp>
       <p:sp>
         <p:nvSpPr>
-          <p:cNvPr id="19" name="TextBox 18"/>
-          <p:cNvSpPr txBox="1"/>
-          <p:nvPr/>
-        </p:nvSpPr>
-        <p:spPr>
-          <a:xfrm>
-            <a:off x="438912" y="3575304"/>
-            <a:ext cx="4700016" cy="256032"/>
+          <p:cNvPr id="20" name="TextBox 19"/>
+          <p:cNvSpPr txBox="1"/>
+          <p:nvPr/>
+        </p:nvSpPr>
+        <p:spPr>
+          <a:xfrm>
+            <a:off x="438912" y="3811514"/>
+            <a:ext cx="4608576" cy="302513"/>
           </a:xfrm>
           <a:prstGeom prst="rect">
             <a:avLst/>
@@ -13507,14 +13337,14 @@
       </p:sp>
       <p:sp>
         <p:nvSpPr>
-          <p:cNvPr id="20" name="TextBox 19"/>
-          <p:cNvSpPr txBox="1"/>
-          <p:nvPr/>
-        </p:nvSpPr>
-        <p:spPr>
-          <a:xfrm>
-            <a:off x="438912" y="3822192"/>
-            <a:ext cx="4700016" cy="256032"/>
+          <p:cNvPr id="21" name="TextBox 20"/>
+          <p:cNvSpPr txBox="1"/>
+          <p:nvPr/>
+        </p:nvSpPr>
+        <p:spPr>
+          <a:xfrm>
+            <a:off x="438912" y="4059163"/>
+            <a:ext cx="4608576" cy="302513"/>
           </a:xfrm>
           <a:prstGeom prst="rect">
             <a:avLst/>
@@ -13541,14 +13371,14 @@
       </p:sp>
       <p:sp>
         <p:nvSpPr>
-          <p:cNvPr id="21" name="TextBox 20"/>
-          <p:cNvSpPr txBox="1"/>
-          <p:nvPr/>
-        </p:nvSpPr>
-        <p:spPr>
-          <a:xfrm>
-            <a:off x="438912" y="4069080"/>
-            <a:ext cx="4700016" cy="256032"/>
+          <p:cNvPr id="22" name="TextBox 21"/>
+          <p:cNvSpPr txBox="1"/>
+          <p:nvPr/>
+        </p:nvSpPr>
+        <p:spPr>
+          <a:xfrm>
+            <a:off x="438912" y="4306812"/>
+            <a:ext cx="4608576" cy="302513"/>
           </a:xfrm>
           <a:prstGeom prst="rect">
             <a:avLst/>
@@ -13568,21 +13398,21 @@
                   <a:srgbClr val="FFFFFF"/>
                 </a:solidFill>
               </a:rPr>
-              <a:t>• Gate resistor: 330Ω between optocoupler and gate</a:t>
-            </a:r>
-          </a:p>
-        </p:txBody>
-      </p:sp>
-      <p:sp>
-        <p:nvSpPr>
-          <p:cNvPr id="22" name="Rectangle 21"/>
+              <a:t>• Gate resistor: 330Ω before MOC3021</a:t>
+            </a:r>
+          </a:p>
+        </p:txBody>
+      </p:sp>
+      <p:sp>
+        <p:nvSpPr>
+          <p:cNvPr id="23" name="Rectangle 22"/>
           <p:cNvSpPr/>
           <p:nvPr/>
         </p:nvSpPr>
         <p:spPr>
           <a:xfrm>
-            <a:off x="5394960" y="749808"/>
-            <a:ext cx="2926080" cy="5212080"/>
+            <a:off x="5349240" y="749808"/>
+            <a:ext cx="3200400" cy="3739134"/>
           </a:xfrm>
           <a:prstGeom prst="rect">
             <a:avLst/>
@@ -13618,14 +13448,14 @@
       </p:sp>
       <p:sp>
         <p:nvSpPr>
-          <p:cNvPr id="23" name="TextBox 22"/>
-          <p:cNvSpPr txBox="1"/>
-          <p:nvPr/>
-        </p:nvSpPr>
-        <p:spPr>
-          <a:xfrm>
-            <a:off x="5559552" y="859536"/>
-            <a:ext cx="2596896" cy="256032"/>
+          <p:cNvPr id="24" name="TextBox 23"/>
+          <p:cNvSpPr txBox="1"/>
+          <p:nvPr/>
+        </p:nvSpPr>
+        <p:spPr>
+          <a:xfrm>
+            <a:off x="5513832" y="877824"/>
+            <a:ext cx="2871216" cy="283464"/>
           </a:xfrm>
           <a:prstGeom prst="rect">
             <a:avLst/>
@@ -13652,14 +13482,14 @@
       </p:sp>
       <p:sp>
         <p:nvSpPr>
-          <p:cNvPr id="24" name="TextBox 23"/>
-          <p:cNvSpPr txBox="1"/>
-          <p:nvPr/>
-        </p:nvSpPr>
-        <p:spPr>
-          <a:xfrm>
-            <a:off x="5559552" y="1106424"/>
-            <a:ext cx="2596896" cy="256032"/>
+          <p:cNvPr id="25" name="TextBox 24"/>
+          <p:cNvSpPr txBox="1"/>
+          <p:nvPr/>
+        </p:nvSpPr>
+        <p:spPr>
+          <a:xfrm>
+            <a:off x="5513832" y="1106424"/>
+            <a:ext cx="2871216" cy="302513"/>
           </a:xfrm>
           <a:prstGeom prst="rect">
             <a:avLst/>
@@ -13686,14 +13516,14 @@
       </p:sp>
       <p:sp>
         <p:nvSpPr>
-          <p:cNvPr id="25" name="TextBox 24"/>
-          <p:cNvSpPr txBox="1"/>
-          <p:nvPr/>
-        </p:nvSpPr>
-        <p:spPr>
-          <a:xfrm>
-            <a:off x="5559552" y="1353312"/>
-            <a:ext cx="2596896" cy="256032"/>
+          <p:cNvPr id="26" name="TextBox 25"/>
+          <p:cNvSpPr txBox="1"/>
+          <p:nvPr/>
+        </p:nvSpPr>
+        <p:spPr>
+          <a:xfrm>
+            <a:off x="5513832" y="1354073"/>
+            <a:ext cx="2871216" cy="302513"/>
           </a:xfrm>
           <a:prstGeom prst="rect">
             <a:avLst/>
@@ -13720,14 +13550,14 @@
       </p:sp>
       <p:sp>
         <p:nvSpPr>
-          <p:cNvPr id="26" name="TextBox 25"/>
-          <p:cNvSpPr txBox="1"/>
-          <p:nvPr/>
-        </p:nvSpPr>
-        <p:spPr>
-          <a:xfrm>
-            <a:off x="5559552" y="1600200"/>
-            <a:ext cx="2596896" cy="256032"/>
+          <p:cNvPr id="27" name="TextBox 26"/>
+          <p:cNvSpPr txBox="1"/>
+          <p:nvPr/>
+        </p:nvSpPr>
+        <p:spPr>
+          <a:xfrm>
+            <a:off x="5513832" y="1601722"/>
+            <a:ext cx="2871216" cy="302513"/>
           </a:xfrm>
           <a:prstGeom prst="rect">
             <a:avLst/>
@@ -13747,21 +13577,21 @@
                   <a:srgbClr val="FFFFFF"/>
                 </a:solidFill>
               </a:rPr>
-              <a:t>• Signal: 3.3V HIGH, drops to LOW at</a:t>
-            </a:r>
-          </a:p>
-        </p:txBody>
-      </p:sp>
-      <p:sp>
-        <p:nvSpPr>
-          <p:cNvPr id="27" name="TextBox 26"/>
-          <p:cNvSpPr txBox="1"/>
-          <p:nvPr/>
-        </p:nvSpPr>
-        <p:spPr>
-          <a:xfrm>
-            <a:off x="5559552" y="1847088"/>
-            <a:ext cx="2596896" cy="256032"/>
+              <a:t>• Signal: HIGH normally, drops LOW at</a:t>
+            </a:r>
+          </a:p>
+        </p:txBody>
+      </p:sp>
+      <p:sp>
+        <p:nvSpPr>
+          <p:cNvPr id="28" name="TextBox 27"/>
+          <p:cNvSpPr txBox="1"/>
+          <p:nvPr/>
+        </p:nvSpPr>
+        <p:spPr>
+          <a:xfrm>
+            <a:off x="5513832" y="1849371"/>
+            <a:ext cx="2871216" cy="302513"/>
           </a:xfrm>
           <a:prstGeom prst="rect">
             <a:avLst/>
@@ -13788,14 +13618,14 @@
       </p:sp>
       <p:sp>
         <p:nvSpPr>
-          <p:cNvPr id="28" name="TextBox 27"/>
-          <p:cNvSpPr txBox="1"/>
-          <p:nvPr/>
-        </p:nvSpPr>
-        <p:spPr>
-          <a:xfrm>
-            <a:off x="5559552" y="2093976"/>
-            <a:ext cx="2596896" cy="256032"/>
+          <p:cNvPr id="29" name="TextBox 28"/>
+          <p:cNvSpPr txBox="1"/>
+          <p:nvPr/>
+        </p:nvSpPr>
+        <p:spPr>
+          <a:xfrm>
+            <a:off x="5513832" y="2097020"/>
+            <a:ext cx="2871216" cy="302513"/>
           </a:xfrm>
           <a:prstGeom prst="rect">
             <a:avLst/>
@@ -13822,14 +13652,14 @@
       </p:sp>
       <p:sp>
         <p:nvSpPr>
-          <p:cNvPr id="29" name="TextBox 28"/>
-          <p:cNvSpPr txBox="1"/>
-          <p:nvPr/>
-        </p:nvSpPr>
-        <p:spPr>
-          <a:xfrm>
-            <a:off x="5559552" y="2340864"/>
-            <a:ext cx="2596896" cy="256032"/>
+          <p:cNvPr id="30" name="TextBox 29"/>
+          <p:cNvSpPr txBox="1"/>
+          <p:nvPr/>
+        </p:nvSpPr>
+        <p:spPr>
+          <a:xfrm>
+            <a:off x="5513832" y="2344669"/>
+            <a:ext cx="2871216" cy="283464"/>
           </a:xfrm>
           <a:prstGeom prst="rect">
             <a:avLst/>
@@ -13856,14 +13686,14 @@
       </p:sp>
       <p:sp>
         <p:nvSpPr>
-          <p:cNvPr id="30" name="TextBox 29"/>
-          <p:cNvSpPr txBox="1"/>
-          <p:nvPr/>
-        </p:nvSpPr>
-        <p:spPr>
-          <a:xfrm>
-            <a:off x="5559552" y="2587752"/>
-            <a:ext cx="2596896" cy="256032"/>
+          <p:cNvPr id="31" name="TextBox 30"/>
+          <p:cNvSpPr txBox="1"/>
+          <p:nvPr/>
+        </p:nvSpPr>
+        <p:spPr>
+          <a:xfrm>
+            <a:off x="5513832" y="2573269"/>
+            <a:ext cx="2871216" cy="302513"/>
           </a:xfrm>
           <a:prstGeom prst="rect">
             <a:avLst/>
@@ -13883,21 +13713,21 @@
                   <a:srgbClr val="FFFFFF"/>
                 </a:solidFill>
               </a:rPr>
-              <a:t>• GPIO33  →  MOC3021 input LED</a:t>
-            </a:r>
-          </a:p>
-        </p:txBody>
-      </p:sp>
-      <p:sp>
-        <p:nvSpPr>
-          <p:cNvPr id="31" name="TextBox 30"/>
-          <p:cNvSpPr txBox="1"/>
-          <p:nvPr/>
-        </p:nvSpPr>
-        <p:spPr>
-          <a:xfrm>
-            <a:off x="5559552" y="2834640"/>
-            <a:ext cx="2596896" cy="256032"/>
+              <a:t>• GPIO33  →  330Ω  →  MOC3021 LED(+)</a:t>
+            </a:r>
+          </a:p>
+        </p:txBody>
+      </p:sp>
+      <p:sp>
+        <p:nvSpPr>
+          <p:cNvPr id="32" name="TextBox 31"/>
+          <p:cNvSpPr txBox="1"/>
+          <p:nvPr/>
+        </p:nvSpPr>
+        <p:spPr>
+          <a:xfrm>
+            <a:off x="5513832" y="2820918"/>
+            <a:ext cx="2871216" cy="302513"/>
           </a:xfrm>
           <a:prstGeom prst="rect">
             <a:avLst/>
@@ -13917,21 +13747,55 @@
                   <a:srgbClr val="FFFFFF"/>
                 </a:solidFill>
               </a:rPr>
-              <a:t>• via 330Ω resistor</a:t>
-            </a:r>
-          </a:p>
-        </p:txBody>
-      </p:sp>
-      <p:sp>
-        <p:nvSpPr>
-          <p:cNvPr id="32" name="TextBox 31"/>
-          <p:cNvSpPr txBox="1"/>
-          <p:nvPr/>
-        </p:nvSpPr>
-        <p:spPr>
-          <a:xfrm>
-            <a:off x="5559552" y="3081528"/>
-            <a:ext cx="2596896" cy="256032"/>
+              <a:t>• MOC3021 output  →  TRIAC gate</a:t>
+            </a:r>
+          </a:p>
+        </p:txBody>
+      </p:sp>
+      <p:sp>
+        <p:nvSpPr>
+          <p:cNvPr id="33" name="TextBox 32"/>
+          <p:cNvSpPr txBox="1"/>
+          <p:nvPr/>
+        </p:nvSpPr>
+        <p:spPr>
+          <a:xfrm>
+            <a:off x="5513832" y="3068567"/>
+            <a:ext cx="2871216" cy="283464"/>
+          </a:xfrm>
+          <a:prstGeom prst="rect">
+            <a:avLst/>
+          </a:prstGeom>
+          <a:noFill/>
+        </p:spPr>
+        <p:txBody>
+          <a:bodyPr wrap="square">
+            <a:spAutoFit/>
+          </a:bodyPr>
+          <a:lstStyle/>
+          <a:p>
+            <a:pPr algn="l"/>
+            <a:r>
+              <a:rPr sz="1200" b="1">
+                <a:solidFill>
+                  <a:srgbClr val="A8DADC"/>
+                </a:solidFill>
+              </a:rPr>
+              <a:t>Voltage levels</a:t>
+            </a:r>
+          </a:p>
+        </p:txBody>
+      </p:sp>
+      <p:sp>
+        <p:nvSpPr>
+          <p:cNvPr id="34" name="TextBox 33"/>
+          <p:cNvSpPr txBox="1"/>
+          <p:nvPr/>
+        </p:nvSpPr>
+        <p:spPr>
+          <a:xfrm>
+            <a:off x="5513832" y="3297167"/>
+            <a:ext cx="2871216" cy="302513"/>
           </a:xfrm>
           <a:prstGeom prst="rect">
             <a:avLst/>
@@ -13951,55 +13815,21 @@
                   <a:srgbClr val="FFFFFF"/>
                 </a:solidFill>
               </a:rPr>
-              <a:t>• MOC3021 output → TRIAC gate</a:t>
-            </a:r>
-          </a:p>
-        </p:txBody>
-      </p:sp>
-      <p:sp>
-        <p:nvSpPr>
-          <p:cNvPr id="33" name="TextBox 32"/>
-          <p:cNvSpPr txBox="1"/>
-          <p:nvPr/>
-        </p:nvSpPr>
-        <p:spPr>
-          <a:xfrm>
-            <a:off x="5559552" y="3328416"/>
-            <a:ext cx="2596896" cy="256032"/>
-          </a:xfrm>
-          <a:prstGeom prst="rect">
-            <a:avLst/>
-          </a:prstGeom>
-          <a:noFill/>
-        </p:spPr>
-        <p:txBody>
-          <a:bodyPr wrap="square">
-            <a:spAutoFit/>
-          </a:bodyPr>
-          <a:lstStyle/>
-          <a:p>
-            <a:pPr algn="l"/>
-            <a:r>
-              <a:rPr sz="1200" b="1">
-                <a:solidFill>
-                  <a:srgbClr val="A8DADC"/>
-                </a:solidFill>
-              </a:rPr>
-              <a:t>Voltage levels</a:t>
-            </a:r>
-          </a:p>
-        </p:txBody>
-      </p:sp>
-      <p:sp>
-        <p:nvSpPr>
-          <p:cNvPr id="34" name="TextBox 33"/>
-          <p:cNvSpPr txBox="1"/>
-          <p:nvPr/>
-        </p:nvSpPr>
-        <p:spPr>
-          <a:xfrm>
-            <a:off x="5559552" y="3575304"/>
-            <a:ext cx="2596896" cy="256032"/>
+              <a:t>• ESP32 side: 3.3V logic (optocoupled)</a:t>
+            </a:r>
+          </a:p>
+        </p:txBody>
+      </p:sp>
+      <p:sp>
+        <p:nvSpPr>
+          <p:cNvPr id="35" name="TextBox 34"/>
+          <p:cNvSpPr txBox="1"/>
+          <p:nvPr/>
+        </p:nvSpPr>
+        <p:spPr>
+          <a:xfrm>
+            <a:off x="5513832" y="3544816"/>
+            <a:ext cx="2871216" cy="302513"/>
           </a:xfrm>
           <a:prstGeom prst="rect">
             <a:avLst/>
@@ -14019,21 +13849,21 @@
                   <a:srgbClr val="FFFFFF"/>
                 </a:solidFill>
               </a:rPr>
-              <a:t>• ESP32 side: 3.3V logic (optocoupled)</a:t>
-            </a:r>
-          </a:p>
-        </p:txBody>
-      </p:sp>
-      <p:sp>
-        <p:nvSpPr>
-          <p:cNvPr id="35" name="TextBox 34"/>
-          <p:cNvSpPr txBox="1"/>
-          <p:nvPr/>
-        </p:nvSpPr>
-        <p:spPr>
-          <a:xfrm>
-            <a:off x="5559552" y="3822192"/>
-            <a:ext cx="2596896" cy="256032"/>
+              <a:t>• AC side: 230V AC — HIGH VOLTAGE</a:t>
+            </a:r>
+          </a:p>
+        </p:txBody>
+      </p:sp>
+      <p:sp>
+        <p:nvSpPr>
+          <p:cNvPr id="36" name="TextBox 35"/>
+          <p:cNvSpPr txBox="1"/>
+          <p:nvPr/>
+        </p:nvSpPr>
+        <p:spPr>
+          <a:xfrm>
+            <a:off x="5513832" y="3792465"/>
+            <a:ext cx="2871216" cy="302513"/>
           </a:xfrm>
           <a:prstGeom prst="rect">
             <a:avLst/>
@@ -14053,21 +13883,21 @@
                   <a:srgbClr val="FFFFFF"/>
                 </a:solidFill>
               </a:rPr>
-              <a:t>• AC side: 230V AC — DANGER</a:t>
-            </a:r>
-          </a:p>
-        </p:txBody>
-      </p:sp>
-      <p:sp>
-        <p:nvSpPr>
-          <p:cNvPr id="36" name="TextBox 35"/>
-          <p:cNvSpPr txBox="1"/>
-          <p:nvPr/>
-        </p:nvSpPr>
-        <p:spPr>
-          <a:xfrm>
-            <a:off x="5559552" y="4069080"/>
-            <a:ext cx="2596896" cy="256032"/>
+              <a:t>• Keep AC and DC wiring separated</a:t>
+            </a:r>
+          </a:p>
+        </p:txBody>
+      </p:sp>
+      <p:sp>
+        <p:nvSpPr>
+          <p:cNvPr id="37" name="TextBox 36"/>
+          <p:cNvSpPr txBox="1"/>
+          <p:nvPr/>
+        </p:nvSpPr>
+        <p:spPr>
+          <a:xfrm>
+            <a:off x="5513832" y="4040114"/>
+            <a:ext cx="2871216" cy="302513"/>
           </a:xfrm>
           <a:prstGeom prst="rect">
             <a:avLst/>
@@ -14087,7 +13917,7 @@
                   <a:srgbClr val="FFFFFF"/>
                 </a:solidFill>
               </a:rPr>
-              <a:t>• Keep AC and DC wiring separated</a:t>
+              <a:t>• Fuse the AC circuit (5–10A slow blow)</a:t>
             </a:r>
           </a:p>
         </p:txBody>
@@ -14162,7 +13992,7 @@
         <p:spPr>
           <a:xfrm>
             <a:off x="365760" y="137160"/>
-            <a:ext cx="8229600" cy="502920"/>
+            <a:ext cx="11430000" cy="502920"/>
           </a:xfrm>
           <a:prstGeom prst="rect">
             <a:avLst/>
@@ -14246,8 +14076,8 @@
         </p:blipFill>
         <p:spPr>
           <a:xfrm>
-            <a:off x="8503920" y="822960"/>
-            <a:ext cx="3291840" cy="2926080"/>
+            <a:off x="8732520" y="804672"/>
+            <a:ext cx="3108960" cy="2743200"/>
           </a:xfrm>
           <a:prstGeom prst="rect">
             <a:avLst/>
@@ -14263,7 +14093,7 @@
         <p:spPr>
           <a:xfrm>
             <a:off x="274320" y="749808"/>
-            <a:ext cx="5029200" cy="3931920"/>
+            <a:ext cx="4937760" cy="3491483"/>
           </a:xfrm>
           <a:prstGeom prst="rect">
             <a:avLst/>
@@ -14305,23 +14135,23 @@
         </p:nvSpPr>
         <p:spPr>
           <a:xfrm>
-            <a:off x="438912" y="859536"/>
-            <a:ext cx="4700016" cy="256032"/>
-          </a:xfrm>
-          <a:prstGeom prst="rect">
-            <a:avLst/>
-          </a:prstGeom>
-          <a:noFill/>
-        </p:spPr>
-        <p:txBody>
-          <a:bodyPr wrap="square">
-            <a:spAutoFit/>
-          </a:bodyPr>
-          <a:lstStyle/>
-          <a:p>
-            <a:pPr algn="l"/>
-            <a:r>
-              <a:rPr sz="1200" b="1">
+            <a:off x="438912" y="877824"/>
+            <a:ext cx="4608576" cy="302513"/>
+          </a:xfrm>
+          <a:prstGeom prst="rect">
+            <a:avLst/>
+          </a:prstGeom>
+          <a:noFill/>
+        </p:spPr>
+        <p:txBody>
+          <a:bodyPr wrap="square">
+            <a:spAutoFit/>
+          </a:bodyPr>
+          <a:lstStyle/>
+          <a:p>
+            <a:pPr algn="l"/>
+            <a:r>
+              <a:rPr sz="1300" b="1">
                 <a:solidFill>
                   <a:srgbClr val="A8DADC"/>
                 </a:solidFill>
@@ -14339,8 +14169,8 @@
         </p:nvSpPr>
         <p:spPr>
           <a:xfrm>
-            <a:off x="438912" y="1106424"/>
-            <a:ext cx="4700016" cy="256032"/>
+            <a:off x="438912" y="1125473"/>
+            <a:ext cx="4608576" cy="321564"/>
           </a:xfrm>
           <a:prstGeom prst="rect">
             <a:avLst/>
@@ -14373,8 +14203,8 @@
         </p:nvSpPr>
         <p:spPr>
           <a:xfrm>
-            <a:off x="438912" y="1353312"/>
-            <a:ext cx="4700016" cy="256032"/>
+            <a:off x="438912" y="1392173"/>
+            <a:ext cx="4608576" cy="321564"/>
           </a:xfrm>
           <a:prstGeom prst="rect">
             <a:avLst/>
@@ -14407,8 +14237,8 @@
         </p:nvSpPr>
         <p:spPr>
           <a:xfrm>
-            <a:off x="438912" y="1600200"/>
-            <a:ext cx="4700016" cy="256032"/>
+            <a:off x="438912" y="1658873"/>
+            <a:ext cx="4608576" cy="321564"/>
           </a:xfrm>
           <a:prstGeom prst="rect">
             <a:avLst/>
@@ -14428,7 +14258,7 @@
                   <a:srgbClr val="FFFFFF"/>
                 </a:solidFill>
               </a:rPr>
-              <a:t>• Recommended: latching for On/Off,</a:t>
+              <a:t>• On/Off: latching toggle preferred</a:t>
             </a:r>
           </a:p>
         </p:txBody>
@@ -14441,8 +14271,8 @@
         </p:nvSpPr>
         <p:spPr>
           <a:xfrm>
-            <a:off x="438912" y="1847088"/>
-            <a:ext cx="4700016" cy="256032"/>
+            <a:off x="438912" y="1925573"/>
+            <a:ext cx="4608576" cy="321564"/>
           </a:xfrm>
           <a:prstGeom prst="rect">
             <a:avLst/>
@@ -14462,7 +14292,7 @@
                   <a:srgbClr val="FFFFFF"/>
                 </a:solidFill>
               </a:rPr>
-              <a:t>• momentary (NO) for Emergency Stop</a:t>
+              <a:t>• E-Stop: momentary (NO) only</a:t>
             </a:r>
           </a:p>
         </p:txBody>
@@ -14475,28 +14305,28 @@
         </p:nvSpPr>
         <p:spPr>
           <a:xfrm>
-            <a:off x="438912" y="2093976"/>
-            <a:ext cx="4700016" cy="256032"/>
-          </a:xfrm>
-          <a:prstGeom prst="rect">
-            <a:avLst/>
-          </a:prstGeom>
-          <a:noFill/>
-        </p:spPr>
-        <p:txBody>
-          <a:bodyPr wrap="square">
-            <a:spAutoFit/>
-          </a:bodyPr>
-          <a:lstStyle/>
-          <a:p>
-            <a:pPr algn="l"/>
-            <a:r>
-              <a:rPr sz="1200" b="1">
+            <a:off x="438912" y="2192273"/>
+            <a:ext cx="4608576" cy="302513"/>
+          </a:xfrm>
+          <a:prstGeom prst="rect">
+            <a:avLst/>
+          </a:prstGeom>
+          <a:noFill/>
+        </p:spPr>
+        <p:txBody>
+          <a:bodyPr wrap="square">
+            <a:spAutoFit/>
+          </a:bodyPr>
+          <a:lstStyle/>
+          <a:p>
+            <a:pPr algn="l"/>
+            <a:r>
+              <a:rPr sz="1300" b="1">
                 <a:solidFill>
                   <a:srgbClr val="A8DADC"/>
                 </a:solidFill>
               </a:rPr>
-              <a:t>Wiring (active LOW, internal pull-up)</a:t>
+              <a:t>Wiring  (active LOW, internal pull-up)</a:t>
             </a:r>
           </a:p>
         </p:txBody>
@@ -14509,8 +14339,8 @@
         </p:nvSpPr>
         <p:spPr>
           <a:xfrm>
-            <a:off x="438912" y="2340864"/>
-            <a:ext cx="4700016" cy="256032"/>
+            <a:off x="438912" y="2439922"/>
+            <a:ext cx="4608576" cy="321564"/>
           </a:xfrm>
           <a:prstGeom prst="rect">
             <a:avLst/>
@@ -14530,7 +14360,7 @@
                   <a:srgbClr val="FFFFFF"/>
                 </a:solidFill>
               </a:rPr>
-              <a:t>• One terminal → GPIO pin</a:t>
+              <a:t>• One terminal  →  GPIO pin</a:t>
             </a:r>
           </a:p>
         </p:txBody>
@@ -14543,8 +14373,8 @@
         </p:nvSpPr>
         <p:spPr>
           <a:xfrm>
-            <a:off x="438912" y="2587752"/>
-            <a:ext cx="4700016" cy="256032"/>
+            <a:off x="438912" y="2706622"/>
+            <a:ext cx="4608576" cy="321564"/>
           </a:xfrm>
           <a:prstGeom prst="rect">
             <a:avLst/>
@@ -14564,7 +14394,7 @@
                   <a:srgbClr val="FFFFFF"/>
                 </a:solidFill>
               </a:rPr>
-              <a:t>• Other terminal → GND</a:t>
+              <a:t>• Other terminal  →  GND</a:t>
             </a:r>
           </a:p>
         </p:txBody>
@@ -14577,8 +14407,8 @@
         </p:nvSpPr>
         <p:spPr>
           <a:xfrm>
-            <a:off x="438912" y="2834640"/>
-            <a:ext cx="4700016" cy="256032"/>
+            <a:off x="438912" y="2973322"/>
+            <a:ext cx="4608576" cy="321564"/>
           </a:xfrm>
           <a:prstGeom prst="rect">
             <a:avLst/>
@@ -14611,8 +14441,8 @@
         </p:nvSpPr>
         <p:spPr>
           <a:xfrm>
-            <a:off x="438912" y="3081528"/>
-            <a:ext cx="4700016" cy="256032"/>
+            <a:off x="438912" y="3240022"/>
+            <a:ext cx="4608576" cy="321564"/>
           </a:xfrm>
           <a:prstGeom prst="rect">
             <a:avLst/>
@@ -14632,7 +14462,7 @@
                   <a:srgbClr val="FFFFFF"/>
                 </a:solidFill>
               </a:rPr>
-              <a:t>• No external resistors required</a:t>
+              <a:t>• No external resistors needed</a:t>
             </a:r>
           </a:p>
         </p:txBody>
@@ -14645,8 +14475,8 @@
         </p:nvSpPr>
         <p:spPr>
           <a:xfrm>
-            <a:off x="438912" y="3328416"/>
-            <a:ext cx="4700016" cy="256032"/>
+            <a:off x="438912" y="3506722"/>
+            <a:ext cx="4608576" cy="321564"/>
           </a:xfrm>
           <a:prstGeom prst="rect">
             <a:avLst/>
@@ -14666,7 +14496,7 @@
                   <a:srgbClr val="FFFFFF"/>
                 </a:solidFill>
               </a:rPr>
-              <a:t>• Button pressed → GPIO reads LOW</a:t>
+              <a:t>• Button pressed  →  GPIO reads LOW</a:t>
             </a:r>
           </a:p>
         </p:txBody>
@@ -14679,8 +14509,8 @@
         </p:nvSpPr>
         <p:spPr>
           <a:xfrm>
-            <a:off x="438912" y="3575304"/>
-            <a:ext cx="4700016" cy="256032"/>
+            <a:off x="438912" y="3773422"/>
+            <a:ext cx="4608576" cy="321564"/>
           </a:xfrm>
           <a:prstGeom prst="rect">
             <a:avLst/>
@@ -14700,7 +14530,7 @@
                   <a:srgbClr val="FFFFFF"/>
                 </a:solidFill>
               </a:rPr>
-              <a:t>• Button released → GPIO reads HIGH</a:t>
+              <a:t>• Button released  →  GPIO reads HIGH</a:t>
             </a:r>
           </a:p>
         </p:txBody>
@@ -14713,8 +14543,8 @@
         </p:nvSpPr>
         <p:spPr>
           <a:xfrm>
-            <a:off x="5394960" y="749808"/>
-            <a:ext cx="2926080" cy="3931920"/>
+            <a:off x="5349240" y="749808"/>
+            <a:ext cx="3200400" cy="2824733"/>
           </a:xfrm>
           <a:prstGeom prst="rect">
             <a:avLst/>
@@ -14756,23 +14586,23 @@
         </p:nvSpPr>
         <p:spPr>
           <a:xfrm>
-            <a:off x="5559552" y="859536"/>
-            <a:ext cx="2596896" cy="256032"/>
-          </a:xfrm>
-          <a:prstGeom prst="rect">
-            <a:avLst/>
-          </a:prstGeom>
-          <a:noFill/>
-        </p:spPr>
-        <p:txBody>
-          <a:bodyPr wrap="square">
-            <a:spAutoFit/>
-          </a:bodyPr>
-          <a:lstStyle/>
-          <a:p>
-            <a:pPr algn="l"/>
-            <a:r>
-              <a:rPr sz="1200" b="1">
+            <a:off x="5513832" y="877824"/>
+            <a:ext cx="2871216" cy="302513"/>
+          </a:xfrm>
+          <a:prstGeom prst="rect">
+            <a:avLst/>
+          </a:prstGeom>
+          <a:noFill/>
+        </p:spPr>
+        <p:txBody>
+          <a:bodyPr wrap="square">
+            <a:spAutoFit/>
+          </a:bodyPr>
+          <a:lstStyle/>
+          <a:p>
+            <a:pPr algn="l"/>
+            <a:r>
+              <a:rPr sz="1300" b="1">
                 <a:solidFill>
                   <a:srgbClr val="A8DADC"/>
                 </a:solidFill>
@@ -14790,23 +14620,23 @@
         </p:nvSpPr>
         <p:spPr>
           <a:xfrm>
-            <a:off x="5559552" y="1106424"/>
-            <a:ext cx="2596896" cy="256032"/>
-          </a:xfrm>
-          <a:prstGeom prst="rect">
-            <a:avLst/>
-          </a:prstGeom>
-          <a:noFill/>
-        </p:spPr>
-        <p:txBody>
-          <a:bodyPr wrap="square">
-            <a:spAutoFit/>
-          </a:bodyPr>
-          <a:lstStyle/>
-          <a:p>
-            <a:pPr algn="l"/>
-            <a:r>
-              <a:rPr sz="1300" b="0">
+            <a:off x="5513832" y="1125473"/>
+            <a:ext cx="2871216" cy="321564"/>
+          </a:xfrm>
+          <a:prstGeom prst="rect">
+            <a:avLst/>
+          </a:prstGeom>
+          <a:noFill/>
+        </p:spPr>
+        <p:txBody>
+          <a:bodyPr wrap="square">
+            <a:spAutoFit/>
+          </a:bodyPr>
+          <a:lstStyle/>
+          <a:p>
+            <a:pPr algn="l"/>
+            <a:r>
+              <a:rPr sz="1400" b="0">
                 <a:solidFill>
                   <a:srgbClr val="FFFFFF"/>
                 </a:solidFill>
@@ -14824,28 +14654,28 @@
         </p:nvSpPr>
         <p:spPr>
           <a:xfrm>
-            <a:off x="5559552" y="1353312"/>
-            <a:ext cx="2596896" cy="256032"/>
-          </a:xfrm>
-          <a:prstGeom prst="rect">
-            <a:avLst/>
-          </a:prstGeom>
-          <a:noFill/>
-        </p:spPr>
-        <p:txBody>
-          <a:bodyPr wrap="square">
-            <a:spAutoFit/>
-          </a:bodyPr>
-          <a:lstStyle/>
-          <a:p>
-            <a:pPr algn="l"/>
-            <a:r>
-              <a:rPr sz="1300" b="0">
-                <a:solidFill>
-                  <a:srgbClr val="FFFFFF"/>
-                </a:solidFill>
-              </a:rPr>
-              <a:t>• Function: toggle between Standby</a:t>
+            <a:off x="5513832" y="1392173"/>
+            <a:ext cx="2871216" cy="321564"/>
+          </a:xfrm>
+          <a:prstGeom prst="rect">
+            <a:avLst/>
+          </a:prstGeom>
+          <a:noFill/>
+        </p:spPr>
+        <p:txBody>
+          <a:bodyPr wrap="square">
+            <a:spAutoFit/>
+          </a:bodyPr>
+          <a:lstStyle/>
+          <a:p>
+            <a:pPr algn="l"/>
+            <a:r>
+              <a:rPr sz="1400" b="0">
+                <a:solidFill>
+                  <a:srgbClr val="FFFFFF"/>
+                </a:solidFill>
+              </a:rPr>
+              <a:t>• Toggles Standby ↔ previous mode</a:t>
             </a:r>
           </a:p>
         </p:txBody>
@@ -14858,28 +14688,28 @@
         </p:nvSpPr>
         <p:spPr>
           <a:xfrm>
-            <a:off x="5559552" y="1600200"/>
-            <a:ext cx="2596896" cy="256032"/>
-          </a:xfrm>
-          <a:prstGeom prst="rect">
-            <a:avLst/>
-          </a:prstGeom>
-          <a:noFill/>
-        </p:spPr>
-        <p:txBody>
-          <a:bodyPr wrap="square">
-            <a:spAutoFit/>
-          </a:bodyPr>
-          <a:lstStyle/>
-          <a:p>
-            <a:pPr algn="l"/>
-            <a:r>
-              <a:rPr sz="1300" b="0">
-                <a:solidFill>
-                  <a:srgbClr val="FFFFFF"/>
-                </a:solidFill>
-              </a:rPr>
-              <a:t>• and the previously active mode</a:t>
+            <a:off x="5513832" y="1658873"/>
+            <a:ext cx="2871216" cy="321564"/>
+          </a:xfrm>
+          <a:prstGeom prst="rect">
+            <a:avLst/>
+          </a:prstGeom>
+          <a:noFill/>
+        </p:spPr>
+        <p:txBody>
+          <a:bodyPr wrap="square">
+            <a:spAutoFit/>
+          </a:bodyPr>
+          <a:lstStyle/>
+          <a:p>
+            <a:pPr algn="l"/>
+            <a:r>
+              <a:rPr sz="1400" b="0">
+                <a:solidFill>
+                  <a:srgbClr val="FFFFFF"/>
+                </a:solidFill>
+              </a:rPr>
+              <a:t>• (Automatic or Timer)</a:t>
             </a:r>
           </a:p>
         </p:txBody>
@@ -14892,28 +14722,28 @@
         </p:nvSpPr>
         <p:spPr>
           <a:xfrm>
-            <a:off x="5559552" y="1847088"/>
-            <a:ext cx="2596896" cy="256032"/>
-          </a:xfrm>
-          <a:prstGeom prst="rect">
-            <a:avLst/>
-          </a:prstGeom>
-          <a:noFill/>
-        </p:spPr>
-        <p:txBody>
-          <a:bodyPr wrap="square">
-            <a:spAutoFit/>
-          </a:bodyPr>
-          <a:lstStyle/>
-          <a:p>
-            <a:pPr algn="l"/>
-            <a:r>
-              <a:rPr sz="1300" b="0">
-                <a:solidFill>
-                  <a:srgbClr val="FFFFFF"/>
-                </a:solidFill>
-              </a:rPr>
-              <a:t>• (Automatic or Timer)</a:t>
+            <a:off x="5513832" y="2058923"/>
+            <a:ext cx="2871216" cy="302513"/>
+          </a:xfrm>
+          <a:prstGeom prst="rect">
+            <a:avLst/>
+          </a:prstGeom>
+          <a:noFill/>
+        </p:spPr>
+        <p:txBody>
+          <a:bodyPr wrap="square">
+            <a:spAutoFit/>
+          </a:bodyPr>
+          <a:lstStyle/>
+          <a:p>
+            <a:pPr algn="l"/>
+            <a:r>
+              <a:rPr sz="1300" b="1">
+                <a:solidFill>
+                  <a:srgbClr val="A8DADC"/>
+                </a:solidFill>
+              </a:rPr>
+              <a:t>Button 2 — Emergency Stop</a:t>
             </a:r>
           </a:p>
         </p:txBody>
@@ -14926,28 +14756,28 @@
         </p:nvSpPr>
         <p:spPr>
           <a:xfrm>
-            <a:off x="5559552" y="2093976"/>
-            <a:ext cx="2596896" cy="256032"/>
-          </a:xfrm>
-          <a:prstGeom prst="rect">
-            <a:avLst/>
-          </a:prstGeom>
-          <a:noFill/>
-        </p:spPr>
-        <p:txBody>
-          <a:bodyPr wrap="square">
-            <a:spAutoFit/>
-          </a:bodyPr>
-          <a:lstStyle/>
-          <a:p>
-            <a:pPr algn="l"/>
-            <a:r>
-              <a:rPr sz="1300" b="0">
-                <a:solidFill>
-                  <a:srgbClr val="FFFFFF"/>
-                </a:solidFill>
-              </a:rPr>
-              <a:t>• </a:t>
+            <a:off x="5513832" y="2306572"/>
+            <a:ext cx="2871216" cy="321564"/>
+          </a:xfrm>
+          <a:prstGeom prst="rect">
+            <a:avLst/>
+          </a:prstGeom>
+          <a:noFill/>
+        </p:spPr>
+        <p:txBody>
+          <a:bodyPr wrap="square">
+            <a:spAutoFit/>
+          </a:bodyPr>
+          <a:lstStyle/>
+          <a:p>
+            <a:pPr algn="l"/>
+            <a:r>
+              <a:rPr sz="1400" b="0">
+                <a:solidFill>
+                  <a:srgbClr val="FFFFFF"/>
+                </a:solidFill>
+              </a:rPr>
+              <a:t>• GPIO14  ←  button  ←  GND</a:t>
             </a:r>
           </a:p>
         </p:txBody>
@@ -14960,28 +14790,28 @@
         </p:nvSpPr>
         <p:spPr>
           <a:xfrm>
-            <a:off x="5559552" y="2340864"/>
-            <a:ext cx="2596896" cy="256032"/>
-          </a:xfrm>
-          <a:prstGeom prst="rect">
-            <a:avLst/>
-          </a:prstGeom>
-          <a:noFill/>
-        </p:spPr>
-        <p:txBody>
-          <a:bodyPr wrap="square">
-            <a:spAutoFit/>
-          </a:bodyPr>
-          <a:lstStyle/>
-          <a:p>
-            <a:pPr algn="l"/>
-            <a:r>
-              <a:rPr sz="1200" b="1">
-                <a:solidFill>
-                  <a:srgbClr val="A8DADC"/>
-                </a:solidFill>
-              </a:rPr>
-              <a:t>Button 2 — Emergency Stop</a:t>
+            <a:off x="5513832" y="2573272"/>
+            <a:ext cx="2871216" cy="321564"/>
+          </a:xfrm>
+          <a:prstGeom prst="rect">
+            <a:avLst/>
+          </a:prstGeom>
+          <a:noFill/>
+        </p:spPr>
+        <p:txBody>
+          <a:bodyPr wrap="square">
+            <a:spAutoFit/>
+          </a:bodyPr>
+          <a:lstStyle/>
+          <a:p>
+            <a:pPr algn="l"/>
+            <a:r>
+              <a:rPr sz="1400" b="0">
+                <a:solidFill>
+                  <a:srgbClr val="FFFFFF"/>
+                </a:solidFill>
+              </a:rPr>
+              <a:t>• Immediate shutdown — ALL outputs OFF</a:t>
             </a:r>
           </a:p>
         </p:txBody>
@@ -14994,28 +14824,28 @@
         </p:nvSpPr>
         <p:spPr>
           <a:xfrm>
-            <a:off x="5559552" y="2587752"/>
-            <a:ext cx="2596896" cy="256032"/>
-          </a:xfrm>
-          <a:prstGeom prst="rect">
-            <a:avLst/>
-          </a:prstGeom>
-          <a:noFill/>
-        </p:spPr>
-        <p:txBody>
-          <a:bodyPr wrap="square">
-            <a:spAutoFit/>
-          </a:bodyPr>
-          <a:lstStyle/>
-          <a:p>
-            <a:pPr algn="l"/>
-            <a:r>
-              <a:rPr sz="1300" b="0">
-                <a:solidFill>
-                  <a:srgbClr val="FFFFFF"/>
-                </a:solidFill>
-              </a:rPr>
-              <a:t>• GPIO14  ←  button  ←  GND</a:t>
+            <a:off x="5513832" y="2839972"/>
+            <a:ext cx="2871216" cy="321564"/>
+          </a:xfrm>
+          <a:prstGeom prst="rect">
+            <a:avLst/>
+          </a:prstGeom>
+          <a:noFill/>
+        </p:spPr>
+        <p:txBody>
+          <a:bodyPr wrap="square">
+            <a:spAutoFit/>
+          </a:bodyPr>
+          <a:lstStyle/>
+          <a:p>
+            <a:pPr algn="l"/>
+            <a:r>
+              <a:rPr sz="1400" b="0">
+                <a:solidFill>
+                  <a:srgbClr val="FFFFFF"/>
+                </a:solidFill>
+              </a:rPr>
+              <a:t>• State machine → STANDBY instantly</a:t>
             </a:r>
           </a:p>
         </p:txBody>
@@ -15028,144 +14858,42 @@
         </p:nvSpPr>
         <p:spPr>
           <a:xfrm>
-            <a:off x="5559552" y="2834640"/>
-            <a:ext cx="2596896" cy="256032"/>
-          </a:xfrm>
-          <a:prstGeom prst="rect">
-            <a:avLst/>
-          </a:prstGeom>
-          <a:noFill/>
-        </p:spPr>
-        <p:txBody>
-          <a:bodyPr wrap="square">
-            <a:spAutoFit/>
-          </a:bodyPr>
-          <a:lstStyle/>
-          <a:p>
-            <a:pPr algn="l"/>
-            <a:r>
-              <a:rPr sz="1300" b="0">
-                <a:solidFill>
-                  <a:srgbClr val="FFFFFF"/>
-                </a:solidFill>
-              </a:rPr>
-              <a:t>• Function: immediate shutdown —</a:t>
-            </a:r>
-          </a:p>
-        </p:txBody>
-      </p:sp>
-      <p:sp>
-        <p:nvSpPr>
-          <p:cNvPr id="29" name="TextBox 28"/>
-          <p:cNvSpPr txBox="1"/>
-          <p:nvPr/>
-        </p:nvSpPr>
-        <p:spPr>
-          <a:xfrm>
-            <a:off x="5559552" y="3081528"/>
-            <a:ext cx="2596896" cy="256032"/>
-          </a:xfrm>
-          <a:prstGeom prst="rect">
-            <a:avLst/>
-          </a:prstGeom>
-          <a:noFill/>
-        </p:spPr>
-        <p:txBody>
-          <a:bodyPr wrap="square">
-            <a:spAutoFit/>
-          </a:bodyPr>
-          <a:lstStyle/>
-          <a:p>
-            <a:pPr algn="l"/>
-            <a:r>
-              <a:rPr sz="1300" b="0">
-                <a:solidFill>
-                  <a:srgbClr val="FFFFFF"/>
-                </a:solidFill>
-              </a:rPr>
-              <a:t>• ALL outputs OFF, state → STANDBY</a:t>
-            </a:r>
-          </a:p>
-        </p:txBody>
-      </p:sp>
-      <p:sp>
-        <p:nvSpPr>
-          <p:cNvPr id="30" name="TextBox 29"/>
-          <p:cNvSpPr txBox="1"/>
-          <p:nvPr/>
-        </p:nvSpPr>
-        <p:spPr>
-          <a:xfrm>
-            <a:off x="5559552" y="3328416"/>
-            <a:ext cx="2596896" cy="256032"/>
-          </a:xfrm>
-          <a:prstGeom prst="rect">
-            <a:avLst/>
-          </a:prstGeom>
-          <a:noFill/>
-        </p:spPr>
-        <p:txBody>
-          <a:bodyPr wrap="square">
-            <a:spAutoFit/>
-          </a:bodyPr>
-          <a:lstStyle/>
-          <a:p>
-            <a:pPr algn="l"/>
-            <a:r>
-              <a:rPr sz="1300" b="0">
-                <a:solidFill>
-                  <a:srgbClr val="FFFFFF"/>
-                </a:solidFill>
-              </a:rPr>
-              <a:t>• Does NOT save op_mode to NVS</a:t>
-            </a:r>
-          </a:p>
-        </p:txBody>
-      </p:sp>
-      <p:sp>
-        <p:nvSpPr>
-          <p:cNvPr id="31" name="TextBox 30"/>
-          <p:cNvSpPr txBox="1"/>
-          <p:nvPr/>
-        </p:nvSpPr>
-        <p:spPr>
-          <a:xfrm>
-            <a:off x="5559552" y="3575304"/>
-            <a:ext cx="2596896" cy="256032"/>
-          </a:xfrm>
-          <a:prstGeom prst="rect">
-            <a:avLst/>
-          </a:prstGeom>
-          <a:noFill/>
-        </p:spPr>
-        <p:txBody>
-          <a:bodyPr wrap="square">
-            <a:spAutoFit/>
-          </a:bodyPr>
-          <a:lstStyle/>
-          <a:p>
-            <a:pPr algn="l"/>
-            <a:r>
-              <a:rPr sz="1300" b="0">
-                <a:solidFill>
-                  <a:srgbClr val="FFFFFF"/>
-                </a:solidFill>
-              </a:rPr>
-              <a:t>• (avoids writing flash on every estop)</a:t>
-            </a:r>
-          </a:p>
-        </p:txBody>
-      </p:sp>
-      <p:sp>
-        <p:nvSpPr>
-          <p:cNvPr id="32" name="Rectangle 31"/>
+            <a:off x="5513832" y="3106672"/>
+            <a:ext cx="2871216" cy="321564"/>
+          </a:xfrm>
+          <a:prstGeom prst="rect">
+            <a:avLst/>
+          </a:prstGeom>
+          <a:noFill/>
+        </p:spPr>
+        <p:txBody>
+          <a:bodyPr wrap="square">
+            <a:spAutoFit/>
+          </a:bodyPr>
+          <a:lstStyle/>
+          <a:p>
+            <a:pPr algn="l"/>
+            <a:r>
+              <a:rPr sz="1400" b="0">
+                <a:solidFill>
+                  <a:srgbClr val="FFFFFF"/>
+                </a:solidFill>
+              </a:rPr>
+              <a:t>• Does NOT write op_mode to NVS flash</a:t>
+            </a:r>
+          </a:p>
+        </p:txBody>
+      </p:sp>
+      <p:sp>
+        <p:nvSpPr>
+          <p:cNvPr id="29" name="Rectangle 28"/>
           <p:cNvSpPr/>
           <p:nvPr/>
         </p:nvSpPr>
         <p:spPr>
           <a:xfrm>
-            <a:off x="274320" y="4800600"/>
-            <a:ext cx="8046720" cy="1371600"/>
+            <a:off x="274320" y="4369307"/>
+            <a:ext cx="8229600" cy="1300734"/>
           </a:xfrm>
           <a:prstGeom prst="rect">
             <a:avLst/>
@@ -15201,48 +14929,116 @@
       </p:sp>
       <p:sp>
         <p:nvSpPr>
+          <p:cNvPr id="30" name="TextBox 29"/>
+          <p:cNvSpPr txBox="1"/>
+          <p:nvPr/>
+        </p:nvSpPr>
+        <p:spPr>
+          <a:xfrm>
+            <a:off x="438912" y="4497323"/>
+            <a:ext cx="7900416" cy="283464"/>
+          </a:xfrm>
+          <a:prstGeom prst="rect">
+            <a:avLst/>
+          </a:prstGeom>
+          <a:noFill/>
+        </p:spPr>
+        <p:txBody>
+          <a:bodyPr wrap="square">
+            <a:spAutoFit/>
+          </a:bodyPr>
+          <a:lstStyle/>
+          <a:p>
+            <a:pPr algn="l"/>
+            <a:r>
+              <a:rPr sz="1200" b="1">
+                <a:solidFill>
+                  <a:srgbClr val="A8DADC"/>
+                </a:solidFill>
+              </a:rPr>
+              <a:t>Debounce strategy</a:t>
+            </a:r>
+          </a:p>
+        </p:txBody>
+      </p:sp>
+      <p:sp>
+        <p:nvSpPr>
+          <p:cNvPr id="31" name="TextBox 30"/>
+          <p:cNvSpPr txBox="1"/>
+          <p:nvPr/>
+        </p:nvSpPr>
+        <p:spPr>
+          <a:xfrm>
+            <a:off x="438912" y="4725923"/>
+            <a:ext cx="7900416" cy="302513"/>
+          </a:xfrm>
+          <a:prstGeom prst="rect">
+            <a:avLst/>
+          </a:prstGeom>
+          <a:noFill/>
+        </p:spPr>
+        <p:txBody>
+          <a:bodyPr wrap="square">
+            <a:spAutoFit/>
+          </a:bodyPr>
+          <a:lstStyle/>
+          <a:p>
+            <a:pPr algn="l"/>
+            <a:r>
+              <a:rPr sz="1300" b="0">
+                <a:solidFill>
+                  <a:srgbClr val="FFFFFF"/>
+                </a:solidFill>
+              </a:rPr>
+              <a:t>• Hardware: 100nF cap from GPIO pin to GND (optional).</a:t>
+            </a:r>
+          </a:p>
+        </p:txBody>
+      </p:sp>
+      <p:sp>
+        <p:nvSpPr>
+          <p:cNvPr id="32" name="TextBox 31"/>
+          <p:cNvSpPr txBox="1"/>
+          <p:nvPr/>
+        </p:nvSpPr>
+        <p:spPr>
+          <a:xfrm>
+            <a:off x="438912" y="4973572"/>
+            <a:ext cx="7900416" cy="302513"/>
+          </a:xfrm>
+          <a:prstGeom prst="rect">
+            <a:avLst/>
+          </a:prstGeom>
+          <a:noFill/>
+        </p:spPr>
+        <p:txBody>
+          <a:bodyPr wrap="square">
+            <a:spAutoFit/>
+          </a:bodyPr>
+          <a:lstStyle/>
+          <a:p>
+            <a:pPr algn="l"/>
+            <a:r>
+              <a:rPr sz="1300" b="0">
+                <a:solidFill>
+                  <a:srgbClr val="FFFFFF"/>
+                </a:solidFill>
+              </a:rPr>
+              <a:t>• Software: ignore transitions for 50ms after first edge.</a:t>
+            </a:r>
+          </a:p>
+        </p:txBody>
+      </p:sp>
+      <p:sp>
+        <p:nvSpPr>
           <p:cNvPr id="33" name="TextBox 32"/>
           <p:cNvSpPr txBox="1"/>
           <p:nvPr/>
         </p:nvSpPr>
         <p:spPr>
           <a:xfrm>
-            <a:off x="438912" y="4910328"/>
-            <a:ext cx="7717536" cy="256032"/>
-          </a:xfrm>
-          <a:prstGeom prst="rect">
-            <a:avLst/>
-          </a:prstGeom>
-          <a:noFill/>
-        </p:spPr>
-        <p:txBody>
-          <a:bodyPr wrap="square">
-            <a:spAutoFit/>
-          </a:bodyPr>
-          <a:lstStyle/>
-          <a:p>
-            <a:pPr algn="l"/>
-            <a:r>
-              <a:rPr sz="1200" b="1">
-                <a:solidFill>
-                  <a:srgbClr val="A8DADC"/>
-                </a:solidFill>
-              </a:rPr>
-              <a:t>Debounce strategy</a:t>
-            </a:r>
-          </a:p>
-        </p:txBody>
-      </p:sp>
-      <p:sp>
-        <p:nvSpPr>
-          <p:cNvPr id="34" name="TextBox 33"/>
-          <p:cNvSpPr txBox="1"/>
-          <p:nvPr/>
-        </p:nvSpPr>
-        <p:spPr>
-          <a:xfrm>
-            <a:off x="438912" y="5157216"/>
-            <a:ext cx="7717536" cy="256032"/>
+            <a:off x="438912" y="5221221"/>
+            <a:ext cx="7900416" cy="302513"/>
           </a:xfrm>
           <a:prstGeom prst="rect">
             <a:avLst/>
@@ -15262,75 +15058,7 @@
                   <a:srgbClr val="FFFFFF"/>
                 </a:solidFill>
               </a:rPr>
-              <a:t>• Hardware: 100nF capacitor from GPIO pin to GND (optional).</a:t>
-            </a:r>
-          </a:p>
-        </p:txBody>
-      </p:sp>
-      <p:sp>
-        <p:nvSpPr>
-          <p:cNvPr id="35" name="TextBox 34"/>
-          <p:cNvSpPr txBox="1"/>
-          <p:nvPr/>
-        </p:nvSpPr>
-        <p:spPr>
-          <a:xfrm>
-            <a:off x="438912" y="5404104"/>
-            <a:ext cx="7717536" cy="256032"/>
-          </a:xfrm>
-          <a:prstGeom prst="rect">
-            <a:avLst/>
-          </a:prstGeom>
-          <a:noFill/>
-        </p:spPr>
-        <p:txBody>
-          <a:bodyPr wrap="square">
-            <a:spAutoFit/>
-          </a:bodyPr>
-          <a:lstStyle/>
-          <a:p>
-            <a:pPr algn="l"/>
-            <a:r>
-              <a:rPr sz="1300" b="0">
-                <a:solidFill>
-                  <a:srgbClr val="FFFFFF"/>
-                </a:solidFill>
-              </a:rPr>
-              <a:t>• Software: ignore transitions for 50ms after first edge.</a:t>
-            </a:r>
-          </a:p>
-        </p:txBody>
-      </p:sp>
-      <p:sp>
-        <p:nvSpPr>
-          <p:cNvPr id="36" name="TextBox 35"/>
-          <p:cNvSpPr txBox="1"/>
-          <p:nvPr/>
-        </p:nvSpPr>
-        <p:spPr>
-          <a:xfrm>
-            <a:off x="438912" y="5650992"/>
-            <a:ext cx="7717536" cy="256032"/>
-          </a:xfrm>
-          <a:prstGeom prst="rect">
-            <a:avLst/>
-          </a:prstGeom>
-          <a:noFill/>
-        </p:spPr>
-        <p:txBody>
-          <a:bodyPr wrap="square">
-            <a:spAutoFit/>
-          </a:bodyPr>
-          <a:lstStyle/>
-          <a:p>
-            <a:pPr algn="l"/>
-            <a:r>
-              <a:rPr sz="1300" b="0">
-                <a:solidFill>
-                  <a:srgbClr val="FFFFFF"/>
-                </a:solidFill>
-              </a:rPr>
-              <a:t>• Emergency stop: no debounce delay — act immediately on first LOW edge.</a:t>
+              <a:t>• E-Stop: no debounce delay — act on first LOW edge immediately.</a:t>
             </a:r>
           </a:p>
         </p:txBody>
@@ -15405,7 +15133,7 @@
         <p:spPr>
           <a:xfrm>
             <a:off x="365760" y="137160"/>
-            <a:ext cx="8229600" cy="502920"/>
+            <a:ext cx="11430000" cy="502920"/>
           </a:xfrm>
           <a:prstGeom prst="rect">
             <a:avLst/>
@@ -15482,7 +15210,7 @@
         <p:spPr>
           <a:xfrm>
             <a:off x="274320" y="749808"/>
-            <a:ext cx="3749039" cy="2606040"/>
+            <a:ext cx="3749039" cy="2424684"/>
           </a:xfrm>
           <a:prstGeom prst="rect">
             <a:avLst/>
@@ -15524,28 +15252,28 @@
         </p:nvSpPr>
         <p:spPr>
           <a:xfrm>
-            <a:off x="438912" y="859536"/>
-            <a:ext cx="3419855" cy="256032"/>
-          </a:xfrm>
-          <a:prstGeom prst="rect">
-            <a:avLst/>
-          </a:prstGeom>
-          <a:noFill/>
-        </p:spPr>
-        <p:txBody>
-          <a:bodyPr wrap="square">
-            <a:spAutoFit/>
-          </a:bodyPr>
-          <a:lstStyle/>
-          <a:p>
-            <a:pPr algn="l"/>
-            <a:r>
-              <a:rPr sz="1200" b="1">
+            <a:off x="438912" y="877824"/>
+            <a:ext cx="3419855" cy="302513"/>
+          </a:xfrm>
+          <a:prstGeom prst="rect">
+            <a:avLst/>
+          </a:prstGeom>
+          <a:noFill/>
+        </p:spPr>
+        <p:txBody>
+          <a:bodyPr wrap="square">
+            <a:spAutoFit/>
+          </a:bodyPr>
+          <a:lstStyle/>
+          <a:p>
+            <a:pPr algn="l"/>
+            <a:r>
+              <a:rPr sz="1300" b="1">
                 <a:solidFill>
                   <a:srgbClr val="A8DADC"/>
                 </a:solidFill>
               </a:rPr>
-              <a:t>I2C Bus  (SDA=GPIO21, SCL=GPIO22)</a:t>
+              <a:t>I2C Bus  (GPIO21 SDA, GPIO22 SCL)</a:t>
             </a:r>
           </a:p>
         </p:txBody>
@@ -15558,23 +15286,23 @@
         </p:nvSpPr>
         <p:spPr>
           <a:xfrm>
-            <a:off x="438912" y="1106424"/>
-            <a:ext cx="3419855" cy="256032"/>
-          </a:xfrm>
-          <a:prstGeom prst="rect">
-            <a:avLst/>
-          </a:prstGeom>
-          <a:noFill/>
-        </p:spPr>
-        <p:txBody>
-          <a:bodyPr wrap="square">
-            <a:spAutoFit/>
-          </a:bodyPr>
-          <a:lstStyle/>
-          <a:p>
-            <a:pPr algn="l"/>
-            <a:r>
-              <a:rPr sz="1300" b="0">
+            <a:off x="438912" y="1125473"/>
+            <a:ext cx="3419855" cy="321564"/>
+          </a:xfrm>
+          <a:prstGeom prst="rect">
+            <a:avLst/>
+          </a:prstGeom>
+          <a:noFill/>
+        </p:spPr>
+        <p:txBody>
+          <a:bodyPr wrap="square">
+            <a:spAutoFit/>
+          </a:bodyPr>
+          <a:lstStyle/>
+          <a:p>
+            <a:pPr algn="l"/>
+            <a:r>
+              <a:rPr sz="1400" b="0">
                 <a:solidFill>
                   <a:srgbClr val="FFFFFF"/>
                 </a:solidFill>
@@ -15592,23 +15320,23 @@
         </p:nvSpPr>
         <p:spPr>
           <a:xfrm>
-            <a:off x="438912" y="1353312"/>
-            <a:ext cx="3419855" cy="256032"/>
-          </a:xfrm>
-          <a:prstGeom prst="rect">
-            <a:avLst/>
-          </a:prstGeom>
-          <a:noFill/>
-        </p:spPr>
-        <p:txBody>
-          <a:bodyPr wrap="square">
-            <a:spAutoFit/>
-          </a:bodyPr>
-          <a:lstStyle/>
-          <a:p>
-            <a:pPr algn="l"/>
-            <a:r>
-              <a:rPr sz="1300" b="0">
+            <a:off x="438912" y="1392173"/>
+            <a:ext cx="3419855" cy="321564"/>
+          </a:xfrm>
+          <a:prstGeom prst="rect">
+            <a:avLst/>
+          </a:prstGeom>
+          <a:noFill/>
+        </p:spPr>
+        <p:txBody>
+          <a:bodyPr wrap="square">
+            <a:spAutoFit/>
+          </a:bodyPr>
+          <a:lstStyle/>
+          <a:p>
+            <a:pPr algn="l"/>
+            <a:r>
+              <a:rPr sz="1400" b="0">
                 <a:solidFill>
                   <a:srgbClr val="FFFFFF"/>
                 </a:solidFill>
@@ -15626,23 +15354,23 @@
         </p:nvSpPr>
         <p:spPr>
           <a:xfrm>
-            <a:off x="438912" y="1600200"/>
-            <a:ext cx="3419855" cy="256032"/>
-          </a:xfrm>
-          <a:prstGeom prst="rect">
-            <a:avLst/>
-          </a:prstGeom>
-          <a:noFill/>
-        </p:spPr>
-        <p:txBody>
-          <a:bodyPr wrap="square">
-            <a:spAutoFit/>
-          </a:bodyPr>
-          <a:lstStyle/>
-          <a:p>
-            <a:pPr algn="l"/>
-            <a:r>
-              <a:rPr sz="1300" b="0">
+            <a:off x="438912" y="1658873"/>
+            <a:ext cx="3419855" cy="321564"/>
+          </a:xfrm>
+          <a:prstGeom prst="rect">
+            <a:avLst/>
+          </a:prstGeom>
+          <a:noFill/>
+        </p:spPr>
+        <p:txBody>
+          <a:bodyPr wrap="square">
+            <a:spAutoFit/>
+          </a:bodyPr>
+          <a:lstStyle/>
+          <a:p>
+            <a:pPr algn="l"/>
+            <a:r>
+              <a:rPr sz="1400" b="0">
                 <a:solidFill>
                   <a:srgbClr val="FFFFFF"/>
                 </a:solidFill>
@@ -15660,23 +15388,23 @@
         </p:nvSpPr>
         <p:spPr>
           <a:xfrm>
-            <a:off x="438912" y="1847088"/>
-            <a:ext cx="3419855" cy="256032"/>
-          </a:xfrm>
-          <a:prstGeom prst="rect">
-            <a:avLst/>
-          </a:prstGeom>
-          <a:noFill/>
-        </p:spPr>
-        <p:txBody>
-          <a:bodyPr wrap="square">
-            <a:spAutoFit/>
-          </a:bodyPr>
-          <a:lstStyle/>
-          <a:p>
-            <a:pPr algn="l"/>
-            <a:r>
-              <a:rPr sz="1200" b="1">
+            <a:off x="438912" y="1925573"/>
+            <a:ext cx="3419855" cy="302513"/>
+          </a:xfrm>
+          <a:prstGeom prst="rect">
+            <a:avLst/>
+          </a:prstGeom>
+          <a:noFill/>
+        </p:spPr>
+        <p:txBody>
+          <a:bodyPr wrap="square">
+            <a:spAutoFit/>
+          </a:bodyPr>
+          <a:lstStyle/>
+          <a:p>
+            <a:pPr algn="l"/>
+            <a:r>
+              <a:rPr sz="1300" b="1">
                 <a:solidFill>
                   <a:srgbClr val="A8DADC"/>
                 </a:solidFill>
@@ -15694,23 +15422,23 @@
         </p:nvSpPr>
         <p:spPr>
           <a:xfrm>
-            <a:off x="438912" y="2093976"/>
-            <a:ext cx="3419855" cy="256032"/>
-          </a:xfrm>
-          <a:prstGeom prst="rect">
-            <a:avLst/>
-          </a:prstGeom>
-          <a:noFill/>
-        </p:spPr>
-        <p:txBody>
-          <a:bodyPr wrap="square">
-            <a:spAutoFit/>
-          </a:bodyPr>
-          <a:lstStyle/>
-          <a:p>
-            <a:pPr algn="l"/>
-            <a:r>
-              <a:rPr sz="1300" b="0">
+            <a:off x="438912" y="2173222"/>
+            <a:ext cx="3419855" cy="321564"/>
+          </a:xfrm>
+          <a:prstGeom prst="rect">
+            <a:avLst/>
+          </a:prstGeom>
+          <a:noFill/>
+        </p:spPr>
+        <p:txBody>
+          <a:bodyPr wrap="square">
+            <a:spAutoFit/>
+          </a:bodyPr>
+          <a:lstStyle/>
+          <a:p>
+            <a:pPr algn="l"/>
+            <a:r>
+              <a:rPr sz="1400" b="0">
                 <a:solidFill>
                   <a:srgbClr val="FFFFFF"/>
                 </a:solidFill>
@@ -15728,23 +15456,23 @@
         </p:nvSpPr>
         <p:spPr>
           <a:xfrm>
-            <a:off x="438912" y="2340864"/>
-            <a:ext cx="3419855" cy="256032"/>
-          </a:xfrm>
-          <a:prstGeom prst="rect">
-            <a:avLst/>
-          </a:prstGeom>
-          <a:noFill/>
-        </p:spPr>
-        <p:txBody>
-          <a:bodyPr wrap="square">
-            <a:spAutoFit/>
-          </a:bodyPr>
-          <a:lstStyle/>
-          <a:p>
-            <a:pPr algn="l"/>
-            <a:r>
-              <a:rPr sz="1300" b="0">
+            <a:off x="438912" y="2439922"/>
+            <a:ext cx="3419855" cy="321564"/>
+          </a:xfrm>
+          <a:prstGeom prst="rect">
+            <a:avLst/>
+          </a:prstGeom>
+          <a:noFill/>
+        </p:spPr>
+        <p:txBody>
+          <a:bodyPr wrap="square">
+            <a:spAutoFit/>
+          </a:bodyPr>
+          <a:lstStyle/>
+          <a:p>
+            <a:pPr algn="l"/>
+            <a:r>
+              <a:rPr sz="1400" b="0">
                 <a:solidFill>
                   <a:srgbClr val="FFFFFF"/>
                 </a:solidFill>
@@ -15762,23 +15490,23 @@
         </p:nvSpPr>
         <p:spPr>
           <a:xfrm>
-            <a:off x="438912" y="2587752"/>
-            <a:ext cx="3419855" cy="256032"/>
-          </a:xfrm>
-          <a:prstGeom prst="rect">
-            <a:avLst/>
-          </a:prstGeom>
-          <a:noFill/>
-        </p:spPr>
-        <p:txBody>
-          <a:bodyPr wrap="square">
-            <a:spAutoFit/>
-          </a:bodyPr>
-          <a:lstStyle/>
-          <a:p>
-            <a:pPr algn="l"/>
-            <a:r>
-              <a:rPr sz="1300" b="0">
+            <a:off x="438912" y="2706622"/>
+            <a:ext cx="3419855" cy="321564"/>
+          </a:xfrm>
+          <a:prstGeom prst="rect">
+            <a:avLst/>
+          </a:prstGeom>
+          <a:noFill/>
+        </p:spPr>
+        <p:txBody>
+          <a:bodyPr wrap="square">
+            <a:spAutoFit/>
+          </a:bodyPr>
+          <a:lstStyle/>
+          <a:p>
+            <a:pPr algn="l"/>
+            <a:r>
+              <a:rPr sz="1400" b="0">
                 <a:solidFill>
                   <a:srgbClr val="FFFFFF"/>
                 </a:solidFill>
@@ -15797,7 +15525,7 @@
         <p:spPr>
           <a:xfrm>
             <a:off x="4160520" y="749808"/>
-            <a:ext cx="3749039" cy="2606040"/>
+            <a:ext cx="3749039" cy="2691384"/>
           </a:xfrm>
           <a:prstGeom prst="rect">
             <a:avLst/>
@@ -15839,23 +15567,23 @@
         </p:nvSpPr>
         <p:spPr>
           <a:xfrm>
-            <a:off x="4325112" y="859536"/>
-            <a:ext cx="3419855" cy="256032"/>
-          </a:xfrm>
-          <a:prstGeom prst="rect">
-            <a:avLst/>
-          </a:prstGeom>
-          <a:noFill/>
-        </p:spPr>
-        <p:txBody>
-          <a:bodyPr wrap="square">
-            <a:spAutoFit/>
-          </a:bodyPr>
-          <a:lstStyle/>
-          <a:p>
-            <a:pPr algn="l"/>
-            <a:r>
-              <a:rPr sz="1200" b="1">
+            <a:off x="4325112" y="877824"/>
+            <a:ext cx="3419855" cy="302513"/>
+          </a:xfrm>
+          <a:prstGeom prst="rect">
+            <a:avLst/>
+          </a:prstGeom>
+          <a:noFill/>
+        </p:spPr>
+        <p:txBody>
+          <a:bodyPr wrap="square">
+            <a:spAutoFit/>
+          </a:bodyPr>
+          <a:lstStyle/>
+          <a:p>
+            <a:pPr algn="l"/>
+            <a:r>
+              <a:rPr sz="1300" b="1">
                 <a:solidFill>
                   <a:srgbClr val="A8DADC"/>
                 </a:solidFill>
@@ -15873,23 +15601,23 @@
         </p:nvSpPr>
         <p:spPr>
           <a:xfrm>
-            <a:off x="4325112" y="1106424"/>
-            <a:ext cx="3419855" cy="256032"/>
-          </a:xfrm>
-          <a:prstGeom prst="rect">
-            <a:avLst/>
-          </a:prstGeom>
-          <a:noFill/>
-        </p:spPr>
-        <p:txBody>
-          <a:bodyPr wrap="square">
-            <a:spAutoFit/>
-          </a:bodyPr>
-          <a:lstStyle/>
-          <a:p>
-            <a:pPr algn="l"/>
-            <a:r>
-              <a:rPr sz="1300" b="0">
+            <a:off x="4325112" y="1125473"/>
+            <a:ext cx="3419855" cy="321564"/>
+          </a:xfrm>
+          <a:prstGeom prst="rect">
+            <a:avLst/>
+          </a:prstGeom>
+          <a:noFill/>
+        </p:spPr>
+        <p:txBody>
+          <a:bodyPr wrap="square">
+            <a:spAutoFit/>
+          </a:bodyPr>
+          <a:lstStyle/>
+          <a:p>
+            <a:pPr algn="l"/>
+            <a:r>
+              <a:rPr sz="1400" b="0">
                 <a:solidFill>
                   <a:srgbClr val="FFFFFF"/>
                 </a:solidFill>
@@ -15907,23 +15635,23 @@
         </p:nvSpPr>
         <p:spPr>
           <a:xfrm>
-            <a:off x="4325112" y="1353312"/>
-            <a:ext cx="3419855" cy="256032"/>
-          </a:xfrm>
-          <a:prstGeom prst="rect">
-            <a:avLst/>
-          </a:prstGeom>
-          <a:noFill/>
-        </p:spPr>
-        <p:txBody>
-          <a:bodyPr wrap="square">
-            <a:spAutoFit/>
-          </a:bodyPr>
-          <a:lstStyle/>
-          <a:p>
-            <a:pPr algn="l"/>
-            <a:r>
-              <a:rPr sz="1300" b="0">
+            <a:off x="4325112" y="1392173"/>
+            <a:ext cx="3419855" cy="321564"/>
+          </a:xfrm>
+          <a:prstGeom prst="rect">
+            <a:avLst/>
+          </a:prstGeom>
+          <a:noFill/>
+        </p:spPr>
+        <p:txBody>
+          <a:bodyPr wrap="square">
+            <a:spAutoFit/>
+          </a:bodyPr>
+          <a:lstStyle/>
+          <a:p>
+            <a:pPr algn="l"/>
+            <a:r>
+              <a:rPr sz="1400" b="0">
                 <a:solidFill>
                   <a:srgbClr val="FFFFFF"/>
                 </a:solidFill>
@@ -15941,23 +15669,23 @@
         </p:nvSpPr>
         <p:spPr>
           <a:xfrm>
-            <a:off x="4325112" y="1600200"/>
-            <a:ext cx="3419855" cy="256032"/>
-          </a:xfrm>
-          <a:prstGeom prst="rect">
-            <a:avLst/>
-          </a:prstGeom>
-          <a:noFill/>
-        </p:spPr>
-        <p:txBody>
-          <a:bodyPr wrap="square">
-            <a:spAutoFit/>
-          </a:bodyPr>
-          <a:lstStyle/>
-          <a:p>
-            <a:pPr algn="l"/>
-            <a:r>
-              <a:rPr sz="1300" b="0">
+            <a:off x="4325112" y="1658873"/>
+            <a:ext cx="3419855" cy="321564"/>
+          </a:xfrm>
+          <a:prstGeom prst="rect">
+            <a:avLst/>
+          </a:prstGeom>
+          <a:noFill/>
+        </p:spPr>
+        <p:txBody>
+          <a:bodyPr wrap="square">
+            <a:spAutoFit/>
+          </a:bodyPr>
+          <a:lstStyle/>
+          <a:p>
+            <a:pPr algn="l"/>
+            <a:r>
+              <a:rPr sz="1400" b="0">
                 <a:solidFill>
                   <a:srgbClr val="FFFFFF"/>
                 </a:solidFill>
@@ -15975,23 +15703,23 @@
         </p:nvSpPr>
         <p:spPr>
           <a:xfrm>
-            <a:off x="4325112" y="1847088"/>
-            <a:ext cx="3419855" cy="256032"/>
-          </a:xfrm>
-          <a:prstGeom prst="rect">
-            <a:avLst/>
-          </a:prstGeom>
-          <a:noFill/>
-        </p:spPr>
-        <p:txBody>
-          <a:bodyPr wrap="square">
-            <a:spAutoFit/>
-          </a:bodyPr>
-          <a:lstStyle/>
-          <a:p>
-            <a:pPr algn="l"/>
-            <a:r>
-              <a:rPr sz="1300" b="0">
+            <a:off x="4325112" y="1925573"/>
+            <a:ext cx="3419855" cy="321564"/>
+          </a:xfrm>
+          <a:prstGeom prst="rect">
+            <a:avLst/>
+          </a:prstGeom>
+          <a:noFill/>
+        </p:spPr>
+        <p:txBody>
+          <a:bodyPr wrap="square">
+            <a:spAutoFit/>
+          </a:bodyPr>
+          <a:lstStyle/>
+          <a:p>
+            <a:pPr algn="l"/>
+            <a:r>
+              <a:rPr sz="1400" b="0">
                 <a:solidFill>
                   <a:srgbClr val="FFFFFF"/>
                 </a:solidFill>
@@ -16009,23 +15737,23 @@
         </p:nvSpPr>
         <p:spPr>
           <a:xfrm>
-            <a:off x="4325112" y="2093976"/>
-            <a:ext cx="3419855" cy="256032"/>
-          </a:xfrm>
-          <a:prstGeom prst="rect">
-            <a:avLst/>
-          </a:prstGeom>
-          <a:noFill/>
-        </p:spPr>
-        <p:txBody>
-          <a:bodyPr wrap="square">
-            <a:spAutoFit/>
-          </a:bodyPr>
-          <a:lstStyle/>
-          <a:p>
-            <a:pPr algn="l"/>
-            <a:r>
-              <a:rPr sz="1300" b="0">
+            <a:off x="4325112" y="2192273"/>
+            <a:ext cx="3419855" cy="321564"/>
+          </a:xfrm>
+          <a:prstGeom prst="rect">
+            <a:avLst/>
+          </a:prstGeom>
+          <a:noFill/>
+        </p:spPr>
+        <p:txBody>
+          <a:bodyPr wrap="square">
+            <a:spAutoFit/>
+          </a:bodyPr>
+          <a:lstStyle/>
+          <a:p>
+            <a:pPr algn="l"/>
+            <a:r>
+              <a:rPr sz="1400" b="0">
                 <a:solidFill>
                   <a:srgbClr val="FFFFFF"/>
                 </a:solidFill>
@@ -16043,23 +15771,23 @@
         </p:nvSpPr>
         <p:spPr>
           <a:xfrm>
-            <a:off x="4325112" y="2340864"/>
-            <a:ext cx="3419855" cy="256032"/>
-          </a:xfrm>
-          <a:prstGeom prst="rect">
-            <a:avLst/>
-          </a:prstGeom>
-          <a:noFill/>
-        </p:spPr>
-        <p:txBody>
-          <a:bodyPr wrap="square">
-            <a:spAutoFit/>
-          </a:bodyPr>
-          <a:lstStyle/>
-          <a:p>
-            <a:pPr algn="l"/>
-            <a:r>
-              <a:rPr sz="1200" b="1">
+            <a:off x="4325112" y="2458973"/>
+            <a:ext cx="3419855" cy="302513"/>
+          </a:xfrm>
+          <a:prstGeom prst="rect">
+            <a:avLst/>
+          </a:prstGeom>
+          <a:noFill/>
+        </p:spPr>
+        <p:txBody>
+          <a:bodyPr wrap="square">
+            <a:spAutoFit/>
+          </a:bodyPr>
+          <a:lstStyle/>
+          <a:p>
+            <a:pPr algn="l"/>
+            <a:r>
+              <a:rPr sz="1300" b="1">
                 <a:solidFill>
                   <a:srgbClr val="A8DADC"/>
                 </a:solidFill>
@@ -16077,23 +15805,23 @@
         </p:nvSpPr>
         <p:spPr>
           <a:xfrm>
-            <a:off x="4325112" y="2587752"/>
-            <a:ext cx="3419855" cy="256032"/>
-          </a:xfrm>
-          <a:prstGeom prst="rect">
-            <a:avLst/>
-          </a:prstGeom>
-          <a:noFill/>
-        </p:spPr>
-        <p:txBody>
-          <a:bodyPr wrap="square">
-            <a:spAutoFit/>
-          </a:bodyPr>
-          <a:lstStyle/>
-          <a:p>
-            <a:pPr algn="l"/>
-            <a:r>
-              <a:rPr sz="1300" b="0">
+            <a:off x="4325112" y="2706622"/>
+            <a:ext cx="3419855" cy="321564"/>
+          </a:xfrm>
+          <a:prstGeom prst="rect">
+            <a:avLst/>
+          </a:prstGeom>
+          <a:noFill/>
+        </p:spPr>
+        <p:txBody>
+          <a:bodyPr wrap="square">
+            <a:spAutoFit/>
+          </a:bodyPr>
+          <a:lstStyle/>
+          <a:p>
+            <a:pPr algn="l"/>
+            <a:r>
+              <a:rPr sz="1400" b="0">
                 <a:solidFill>
                   <a:srgbClr val="FFFFFF"/>
                 </a:solidFill>
@@ -16111,23 +15839,23 @@
         </p:nvSpPr>
         <p:spPr>
           <a:xfrm>
-            <a:off x="4325112" y="2834640"/>
-            <a:ext cx="3419855" cy="256032"/>
-          </a:xfrm>
-          <a:prstGeom prst="rect">
-            <a:avLst/>
-          </a:prstGeom>
-          <a:noFill/>
-        </p:spPr>
-        <p:txBody>
-          <a:bodyPr wrap="square">
-            <a:spAutoFit/>
-          </a:bodyPr>
-          <a:lstStyle/>
-          <a:p>
-            <a:pPr algn="l"/>
-            <a:r>
-              <a:rPr sz="1300" b="0">
+            <a:off x="4325112" y="2973322"/>
+            <a:ext cx="3419855" cy="321564"/>
+          </a:xfrm>
+          <a:prstGeom prst="rect">
+            <a:avLst/>
+          </a:prstGeom>
+          <a:noFill/>
+        </p:spPr>
+        <p:txBody>
+          <a:bodyPr wrap="square">
+            <a:spAutoFit/>
+          </a:bodyPr>
+          <a:lstStyle/>
+          <a:p>
+            <a:pPr algn="l"/>
+            <a:r>
+              <a:rPr sz="1400" b="0">
                 <a:solidFill>
                   <a:srgbClr val="FFFFFF"/>
                 </a:solidFill>
@@ -16146,7 +15874,7 @@
         <p:spPr>
           <a:xfrm>
             <a:off x="8046720" y="749808"/>
-            <a:ext cx="3749039" cy="2606040"/>
+            <a:ext cx="3840480" cy="2157984"/>
           </a:xfrm>
           <a:prstGeom prst="rect">
             <a:avLst/>
@@ -16188,23 +15916,23 @@
         </p:nvSpPr>
         <p:spPr>
           <a:xfrm>
-            <a:off x="8211312" y="859536"/>
-            <a:ext cx="3419855" cy="256032"/>
-          </a:xfrm>
-          <a:prstGeom prst="rect">
-            <a:avLst/>
-          </a:prstGeom>
-          <a:noFill/>
-        </p:spPr>
-        <p:txBody>
-          <a:bodyPr wrap="square">
-            <a:spAutoFit/>
-          </a:bodyPr>
-          <a:lstStyle/>
-          <a:p>
-            <a:pPr algn="l"/>
-            <a:r>
-              <a:rPr sz="1200" b="1">
+            <a:off x="8211312" y="877824"/>
+            <a:ext cx="3511296" cy="302513"/>
+          </a:xfrm>
+          <a:prstGeom prst="rect">
+            <a:avLst/>
+          </a:prstGeom>
+          <a:noFill/>
+        </p:spPr>
+        <p:txBody>
+          <a:bodyPr wrap="square">
+            <a:spAutoFit/>
+          </a:bodyPr>
+          <a:lstStyle/>
+          <a:p>
+            <a:pPr algn="l"/>
+            <a:r>
+              <a:rPr sz="1300" b="1">
                 <a:solidFill>
                   <a:srgbClr val="A8DADC"/>
                 </a:solidFill>
@@ -16222,28 +15950,28 @@
         </p:nvSpPr>
         <p:spPr>
           <a:xfrm>
-            <a:off x="8211312" y="1106424"/>
-            <a:ext cx="3419855" cy="256032"/>
-          </a:xfrm>
-          <a:prstGeom prst="rect">
-            <a:avLst/>
-          </a:prstGeom>
-          <a:noFill/>
-        </p:spPr>
-        <p:txBody>
-          <a:bodyPr wrap="square">
-            <a:spAutoFit/>
-          </a:bodyPr>
-          <a:lstStyle/>
-          <a:p>
-            <a:pPr algn="l"/>
-            <a:r>
-              <a:rPr sz="1300" b="0">
-                <a:solidFill>
-                  <a:srgbClr val="FFFFFF"/>
-                </a:solidFill>
-              </a:rPr>
-              <a:t>• GPIO25 → Relay IN  — Feeder motor</a:t>
+            <a:off x="8211312" y="1125473"/>
+            <a:ext cx="3511296" cy="321564"/>
+          </a:xfrm>
+          <a:prstGeom prst="rect">
+            <a:avLst/>
+          </a:prstGeom>
+          <a:noFill/>
+        </p:spPr>
+        <p:txBody>
+          <a:bodyPr wrap="square">
+            <a:spAutoFit/>
+          </a:bodyPr>
+          <a:lstStyle/>
+          <a:p>
+            <a:pPr algn="l"/>
+            <a:r>
+              <a:rPr sz="1400" b="0">
+                <a:solidFill>
+                  <a:srgbClr val="FFFFFF"/>
+                </a:solidFill>
+              </a:rPr>
+              <a:t>• GPIO25 → Relay IN — Feeder motor</a:t>
             </a:r>
           </a:p>
         </p:txBody>
@@ -16256,28 +15984,28 @@
         </p:nvSpPr>
         <p:spPr>
           <a:xfrm>
-            <a:off x="8211312" y="1353312"/>
-            <a:ext cx="3419855" cy="256032"/>
-          </a:xfrm>
-          <a:prstGeom prst="rect">
-            <a:avLst/>
-          </a:prstGeom>
-          <a:noFill/>
-        </p:spPr>
-        <p:txBody>
-          <a:bodyPr wrap="square">
-            <a:spAutoFit/>
-          </a:bodyPr>
-          <a:lstStyle/>
-          <a:p>
-            <a:pPr algn="l"/>
-            <a:r>
-              <a:rPr sz="1300" b="0">
-                <a:solidFill>
-                  <a:srgbClr val="FFFFFF"/>
-                </a:solidFill>
-              </a:rPr>
-              <a:t>• GPIO26 → Relay IN  — Igniter</a:t>
+            <a:off x="8211312" y="1392173"/>
+            <a:ext cx="3511296" cy="321564"/>
+          </a:xfrm>
+          <a:prstGeom prst="rect">
+            <a:avLst/>
+          </a:prstGeom>
+          <a:noFill/>
+        </p:spPr>
+        <p:txBody>
+          <a:bodyPr wrap="square">
+            <a:spAutoFit/>
+          </a:bodyPr>
+          <a:lstStyle/>
+          <a:p>
+            <a:pPr algn="l"/>
+            <a:r>
+              <a:rPr sz="1400" b="0">
+                <a:solidFill>
+                  <a:srgbClr val="FFFFFF"/>
+                </a:solidFill>
+              </a:rPr>
+              <a:t>• GPIO26 → Relay IN — Igniter</a:t>
             </a:r>
           </a:p>
         </p:txBody>
@@ -16290,28 +16018,28 @@
         </p:nvSpPr>
         <p:spPr>
           <a:xfrm>
-            <a:off x="8211312" y="1600200"/>
-            <a:ext cx="3419855" cy="256032"/>
-          </a:xfrm>
-          <a:prstGeom prst="rect">
-            <a:avLst/>
-          </a:prstGeom>
-          <a:noFill/>
-        </p:spPr>
-        <p:txBody>
-          <a:bodyPr wrap="square">
-            <a:spAutoFit/>
-          </a:bodyPr>
-          <a:lstStyle/>
-          <a:p>
-            <a:pPr algn="l"/>
-            <a:r>
-              <a:rPr sz="1300" b="0">
-                <a:solidFill>
-                  <a:srgbClr val="FFFFFF"/>
-                </a:solidFill>
-              </a:rPr>
-              <a:t>• GPIO27 → Relay IN  — Pump</a:t>
+            <a:off x="8211312" y="1658873"/>
+            <a:ext cx="3511296" cy="321564"/>
+          </a:xfrm>
+          <a:prstGeom prst="rect">
+            <a:avLst/>
+          </a:prstGeom>
+          <a:noFill/>
+        </p:spPr>
+        <p:txBody>
+          <a:bodyPr wrap="square">
+            <a:spAutoFit/>
+          </a:bodyPr>
+          <a:lstStyle/>
+          <a:p>
+            <a:pPr algn="l"/>
+            <a:r>
+              <a:rPr sz="1400" b="0">
+                <a:solidFill>
+                  <a:srgbClr val="FFFFFF"/>
+                </a:solidFill>
+              </a:rPr>
+              <a:t>• GPIO27 → Relay IN — Pump</a:t>
             </a:r>
           </a:p>
         </p:txBody>
@@ -16324,23 +16052,23 @@
         </p:nvSpPr>
         <p:spPr>
           <a:xfrm>
-            <a:off x="8211312" y="1847088"/>
-            <a:ext cx="3419855" cy="256032"/>
-          </a:xfrm>
-          <a:prstGeom prst="rect">
-            <a:avLst/>
-          </a:prstGeom>
-          <a:noFill/>
-        </p:spPr>
-        <p:txBody>
-          <a:bodyPr wrap="square">
-            <a:spAutoFit/>
-          </a:bodyPr>
-          <a:lstStyle/>
-          <a:p>
-            <a:pPr algn="l"/>
-            <a:r>
-              <a:rPr sz="1300" b="0">
+            <a:off x="8211312" y="1925573"/>
+            <a:ext cx="3511296" cy="321564"/>
+          </a:xfrm>
+          <a:prstGeom prst="rect">
+            <a:avLst/>
+          </a:prstGeom>
+          <a:noFill/>
+        </p:spPr>
+        <p:txBody>
+          <a:bodyPr wrap="square">
+            <a:spAutoFit/>
+          </a:bodyPr>
+          <a:lstStyle/>
+          <a:p>
+            <a:pPr algn="l"/>
+            <a:r>
+              <a:rPr sz="1400" b="0">
                 <a:solidFill>
                   <a:srgbClr val="FFFFFF"/>
                 </a:solidFill>
@@ -16358,23 +16086,23 @@
         </p:nvSpPr>
         <p:spPr>
           <a:xfrm>
-            <a:off x="8211312" y="2093976"/>
-            <a:ext cx="3419855" cy="256032"/>
-          </a:xfrm>
-          <a:prstGeom prst="rect">
-            <a:avLst/>
-          </a:prstGeom>
-          <a:noFill/>
-        </p:spPr>
-        <p:txBody>
-          <a:bodyPr wrap="square">
-            <a:spAutoFit/>
-          </a:bodyPr>
-          <a:lstStyle/>
-          <a:p>
-            <a:pPr algn="l"/>
-            <a:r>
-              <a:rPr sz="1200" b="1">
+            <a:off x="8211312" y="2192273"/>
+            <a:ext cx="3511296" cy="302513"/>
+          </a:xfrm>
+          <a:prstGeom prst="rect">
+            <a:avLst/>
+          </a:prstGeom>
+          <a:noFill/>
+        </p:spPr>
+        <p:txBody>
+          <a:bodyPr wrap="square">
+            <a:spAutoFit/>
+          </a:bodyPr>
+          <a:lstStyle/>
+          <a:p>
+            <a:pPr algn="l"/>
+            <a:r>
+              <a:rPr sz="1300" b="1">
                 <a:solidFill>
                   <a:srgbClr val="A8DADC"/>
                 </a:solidFill>
@@ -16392,76 +16120,42 @@
         </p:nvSpPr>
         <p:spPr>
           <a:xfrm>
-            <a:off x="8211312" y="2340864"/>
-            <a:ext cx="3419855" cy="256032"/>
-          </a:xfrm>
-          <a:prstGeom prst="rect">
-            <a:avLst/>
-          </a:prstGeom>
-          <a:noFill/>
-        </p:spPr>
-        <p:txBody>
-          <a:bodyPr wrap="square">
-            <a:spAutoFit/>
-          </a:bodyPr>
-          <a:lstStyle/>
-          <a:p>
-            <a:pPr algn="l"/>
-            <a:r>
-              <a:rPr sz="1300" b="0">
-                <a:solidFill>
-                  <a:srgbClr val="FFFFFF"/>
-                </a:solidFill>
-              </a:rPr>
-              <a:t>• GPIO33 → 330Ω → MOC3021 LED(+)</a:t>
-            </a:r>
-          </a:p>
-        </p:txBody>
-      </p:sp>
-      <p:sp>
-        <p:nvSpPr>
-          <p:cNvPr id="32" name="TextBox 31"/>
-          <p:cNvSpPr txBox="1"/>
-          <p:nvPr/>
-        </p:nvSpPr>
-        <p:spPr>
-          <a:xfrm>
-            <a:off x="8211312" y="2587752"/>
-            <a:ext cx="3419855" cy="256032"/>
-          </a:xfrm>
-          <a:prstGeom prst="rect">
-            <a:avLst/>
-          </a:prstGeom>
-          <a:noFill/>
-        </p:spPr>
-        <p:txBody>
-          <a:bodyPr wrap="square">
-            <a:spAutoFit/>
-          </a:bodyPr>
-          <a:lstStyle/>
-          <a:p>
-            <a:pPr algn="l"/>
-            <a:r>
-              <a:rPr sz="1300" b="0">
-                <a:solidFill>
-                  <a:srgbClr val="FFFFFF"/>
-                </a:solidFill>
-              </a:rPr>
-              <a:t>• MOC3021 output → TRIAC gate</a:t>
-            </a:r>
-          </a:p>
-        </p:txBody>
-      </p:sp>
-      <p:sp>
-        <p:nvSpPr>
-          <p:cNvPr id="33" name="Rectangle 32"/>
+            <a:off x="8211312" y="2439922"/>
+            <a:ext cx="3511296" cy="321564"/>
+          </a:xfrm>
+          <a:prstGeom prst="rect">
+            <a:avLst/>
+          </a:prstGeom>
+          <a:noFill/>
+        </p:spPr>
+        <p:txBody>
+          <a:bodyPr wrap="square">
+            <a:spAutoFit/>
+          </a:bodyPr>
+          <a:lstStyle/>
+          <a:p>
+            <a:pPr algn="l"/>
+            <a:r>
+              <a:rPr sz="1400" b="0">
+                <a:solidFill>
+                  <a:srgbClr val="FFFFFF"/>
+                </a:solidFill>
+              </a:rPr>
+              <a:t>• GPIO33 → 330Ω → MOC3021 → TRIAC</a:t>
+            </a:r>
+          </a:p>
+        </p:txBody>
+      </p:sp>
+      <p:sp>
+        <p:nvSpPr>
+          <p:cNvPr id="32" name="Rectangle 31"/>
           <p:cNvSpPr/>
           <p:nvPr/>
         </p:nvSpPr>
         <p:spPr>
           <a:xfrm>
-            <a:off x="274320" y="3520440"/>
-            <a:ext cx="3749039" cy="1280160"/>
+            <a:off x="274320" y="3569208"/>
+            <a:ext cx="3749039" cy="1110234"/>
           </a:xfrm>
           <a:prstGeom prst="rect">
             <a:avLst/>
@@ -16497,34 +16191,68 @@
       </p:sp>
       <p:sp>
         <p:nvSpPr>
+          <p:cNvPr id="33" name="TextBox 32"/>
+          <p:cNvSpPr txBox="1"/>
+          <p:nvPr/>
+        </p:nvSpPr>
+        <p:spPr>
+          <a:xfrm>
+            <a:off x="438912" y="3697224"/>
+            <a:ext cx="3419855" cy="302513"/>
+          </a:xfrm>
+          <a:prstGeom prst="rect">
+            <a:avLst/>
+          </a:prstGeom>
+          <a:noFill/>
+        </p:spPr>
+        <p:txBody>
+          <a:bodyPr wrap="square">
+            <a:spAutoFit/>
+          </a:bodyPr>
+          <a:lstStyle/>
+          <a:p>
+            <a:pPr algn="l"/>
+            <a:r>
+              <a:rPr sz="1300" b="1">
+                <a:solidFill>
+                  <a:srgbClr val="A8DADC"/>
+                </a:solidFill>
+              </a:rPr>
+              <a:t>Buttons  (active LOW, internal pull-up)</a:t>
+            </a:r>
+          </a:p>
+        </p:txBody>
+      </p:sp>
+      <p:sp>
+        <p:nvSpPr>
           <p:cNvPr id="34" name="TextBox 33"/>
           <p:cNvSpPr txBox="1"/>
           <p:nvPr/>
         </p:nvSpPr>
         <p:spPr>
           <a:xfrm>
-            <a:off x="438912" y="3630168"/>
-            <a:ext cx="3419855" cy="256032"/>
-          </a:xfrm>
-          <a:prstGeom prst="rect">
-            <a:avLst/>
-          </a:prstGeom>
-          <a:noFill/>
-        </p:spPr>
-        <p:txBody>
-          <a:bodyPr wrap="square">
-            <a:spAutoFit/>
-          </a:bodyPr>
-          <a:lstStyle/>
-          <a:p>
-            <a:pPr algn="l"/>
-            <a:r>
-              <a:rPr sz="1200" b="1">
-                <a:solidFill>
-                  <a:srgbClr val="A8DADC"/>
-                </a:solidFill>
-              </a:rPr>
-              <a:t>Buttons  (active LOW, internal pull-up)</a:t>
+            <a:off x="438912" y="3944873"/>
+            <a:ext cx="3419855" cy="321564"/>
+          </a:xfrm>
+          <a:prstGeom prst="rect">
+            <a:avLst/>
+          </a:prstGeom>
+          <a:noFill/>
+        </p:spPr>
+        <p:txBody>
+          <a:bodyPr wrap="square">
+            <a:spAutoFit/>
+          </a:bodyPr>
+          <a:lstStyle/>
+          <a:p>
+            <a:pPr algn="l"/>
+            <a:r>
+              <a:rPr sz="1400" b="0">
+                <a:solidFill>
+                  <a:srgbClr val="FFFFFF"/>
+                </a:solidFill>
+              </a:rPr>
+              <a:t>• GPIO13 ← On/Off button ← GND</a:t>
             </a:r>
           </a:p>
         </p:txBody>
@@ -16537,57 +16265,23 @@
         </p:nvSpPr>
         <p:spPr>
           <a:xfrm>
-            <a:off x="438912" y="3877056"/>
-            <a:ext cx="3419855" cy="256032"/>
-          </a:xfrm>
-          <a:prstGeom prst="rect">
-            <a:avLst/>
-          </a:prstGeom>
-          <a:noFill/>
-        </p:spPr>
-        <p:txBody>
-          <a:bodyPr wrap="square">
-            <a:spAutoFit/>
-          </a:bodyPr>
-          <a:lstStyle/>
-          <a:p>
-            <a:pPr algn="l"/>
-            <a:r>
-              <a:rPr sz="1300" b="0">
-                <a:solidFill>
-                  <a:srgbClr val="FFFFFF"/>
-                </a:solidFill>
-              </a:rPr>
-              <a:t>• GPIO13 ← On/Off button ← GND</a:t>
-            </a:r>
-          </a:p>
-        </p:txBody>
-      </p:sp>
-      <p:sp>
-        <p:nvSpPr>
-          <p:cNvPr id="36" name="TextBox 35"/>
-          <p:cNvSpPr txBox="1"/>
-          <p:nvPr/>
-        </p:nvSpPr>
-        <p:spPr>
-          <a:xfrm>
-            <a:off x="438912" y="4123944"/>
-            <a:ext cx="3419855" cy="256032"/>
-          </a:xfrm>
-          <a:prstGeom prst="rect">
-            <a:avLst/>
-          </a:prstGeom>
-          <a:noFill/>
-        </p:spPr>
-        <p:txBody>
-          <a:bodyPr wrap="square">
-            <a:spAutoFit/>
-          </a:bodyPr>
-          <a:lstStyle/>
-          <a:p>
-            <a:pPr algn="l"/>
-            <a:r>
-              <a:rPr sz="1300" b="0">
+            <a:off x="438912" y="4211573"/>
+            <a:ext cx="3419855" cy="321564"/>
+          </a:xfrm>
+          <a:prstGeom prst="rect">
+            <a:avLst/>
+          </a:prstGeom>
+          <a:noFill/>
+        </p:spPr>
+        <p:txBody>
+          <a:bodyPr wrap="square">
+            <a:spAutoFit/>
+          </a:bodyPr>
+          <a:lstStyle/>
+          <a:p>
+            <a:pPr algn="l"/>
+            <a:r>
+              <a:rPr sz="1400" b="0">
                 <a:solidFill>
                   <a:srgbClr val="FFFFFF"/>
                 </a:solidFill>
@@ -16599,14 +16293,14 @@
       </p:sp>
       <p:sp>
         <p:nvSpPr>
-          <p:cNvPr id="37" name="Rectangle 36"/>
+          <p:cNvPr id="36" name="Rectangle 35"/>
           <p:cNvSpPr/>
           <p:nvPr/>
         </p:nvSpPr>
         <p:spPr>
           <a:xfrm>
-            <a:off x="4160520" y="3520440"/>
-            <a:ext cx="3749039" cy="1280160"/>
+            <a:off x="4160520" y="3569208"/>
+            <a:ext cx="3749039" cy="1376934"/>
           </a:xfrm>
           <a:prstGeom prst="rect">
             <a:avLst/>
@@ -16642,34 +16336,68 @@
       </p:sp>
       <p:sp>
         <p:nvSpPr>
+          <p:cNvPr id="37" name="TextBox 36"/>
+          <p:cNvSpPr txBox="1"/>
+          <p:nvPr/>
+        </p:nvSpPr>
+        <p:spPr>
+          <a:xfrm>
+            <a:off x="4325112" y="3697224"/>
+            <a:ext cx="3419855" cy="302513"/>
+          </a:xfrm>
+          <a:prstGeom prst="rect">
+            <a:avLst/>
+          </a:prstGeom>
+          <a:noFill/>
+        </p:spPr>
+        <p:txBody>
+          <a:bodyPr wrap="square">
+            <a:spAutoFit/>
+          </a:bodyPr>
+          <a:lstStyle/>
+          <a:p>
+            <a:pPr algn="l"/>
+            <a:r>
+              <a:rPr sz="1300" b="1">
+                <a:solidFill>
+                  <a:srgbClr val="A8DADC"/>
+                </a:solidFill>
+              </a:rPr>
+              <a:t>Power rails</a:t>
+            </a:r>
+          </a:p>
+        </p:txBody>
+      </p:sp>
+      <p:sp>
+        <p:nvSpPr>
           <p:cNvPr id="38" name="TextBox 37"/>
           <p:cNvSpPr txBox="1"/>
           <p:nvPr/>
         </p:nvSpPr>
         <p:spPr>
           <a:xfrm>
-            <a:off x="4325112" y="3630168"/>
-            <a:ext cx="3419855" cy="256032"/>
-          </a:xfrm>
-          <a:prstGeom prst="rect">
-            <a:avLst/>
-          </a:prstGeom>
-          <a:noFill/>
-        </p:spPr>
-        <p:txBody>
-          <a:bodyPr wrap="square">
-            <a:spAutoFit/>
-          </a:bodyPr>
-          <a:lstStyle/>
-          <a:p>
-            <a:pPr algn="l"/>
-            <a:r>
-              <a:rPr sz="1200" b="1">
-                <a:solidFill>
-                  <a:srgbClr val="A8DADC"/>
-                </a:solidFill>
-              </a:rPr>
-              <a:t>Power rails summary</a:t>
+            <a:off x="4325112" y="3944873"/>
+            <a:ext cx="3419855" cy="321564"/>
+          </a:xfrm>
+          <a:prstGeom prst="rect">
+            <a:avLst/>
+          </a:prstGeom>
+          <a:noFill/>
+        </p:spPr>
+        <p:txBody>
+          <a:bodyPr wrap="square">
+            <a:spAutoFit/>
+          </a:bodyPr>
+          <a:lstStyle/>
+          <a:p>
+            <a:pPr algn="l"/>
+            <a:r>
+              <a:rPr sz="1400" b="0">
+                <a:solidFill>
+                  <a:srgbClr val="FFFFFF"/>
+                </a:solidFill>
+              </a:rPr>
+              <a:t>• 3.3V: ESP32 reg, OLED, DS18B20, MAX6675</a:t>
             </a:r>
           </a:p>
         </p:txBody>
@@ -16682,28 +16410,28 @@
         </p:nvSpPr>
         <p:spPr>
           <a:xfrm>
-            <a:off x="4325112" y="3877056"/>
-            <a:ext cx="3419855" cy="256032"/>
-          </a:xfrm>
-          <a:prstGeom prst="rect">
-            <a:avLst/>
-          </a:prstGeom>
-          <a:noFill/>
-        </p:spPr>
-        <p:txBody>
-          <a:bodyPr wrap="square">
-            <a:spAutoFit/>
-          </a:bodyPr>
-          <a:lstStyle/>
-          <a:p>
-            <a:pPr algn="l"/>
-            <a:r>
-              <a:rPr sz="1300" b="0">
-                <a:solidFill>
-                  <a:srgbClr val="FFFFFF"/>
-                </a:solidFill>
-              </a:rPr>
-              <a:t>• 3.3V: ESP32 onboard reg, OLED, DS18B20, MAX6675</a:t>
+            <a:off x="4325112" y="4211573"/>
+            <a:ext cx="3419855" cy="321564"/>
+          </a:xfrm>
+          <a:prstGeom prst="rect">
+            <a:avLst/>
+          </a:prstGeom>
+          <a:noFill/>
+        </p:spPr>
+        <p:txBody>
+          <a:bodyPr wrap="square">
+            <a:spAutoFit/>
+          </a:bodyPr>
+          <a:lstStyle/>
+          <a:p>
+            <a:pPr algn="l"/>
+            <a:r>
+              <a:rPr sz="1400" b="0">
+                <a:solidFill>
+                  <a:srgbClr val="FFFFFF"/>
+                </a:solidFill>
+              </a:rPr>
+              <a:t>• 5V: Relay module VCC</a:t>
             </a:r>
           </a:p>
         </p:txBody>
@@ -16716,76 +16444,42 @@
         </p:nvSpPr>
         <p:spPr>
           <a:xfrm>
-            <a:off x="4325112" y="4123944"/>
-            <a:ext cx="3419855" cy="256032"/>
-          </a:xfrm>
-          <a:prstGeom prst="rect">
-            <a:avLst/>
-          </a:prstGeom>
-          <a:noFill/>
-        </p:spPr>
-        <p:txBody>
-          <a:bodyPr wrap="square">
-            <a:spAutoFit/>
-          </a:bodyPr>
-          <a:lstStyle/>
-          <a:p>
-            <a:pPr algn="l"/>
-            <a:r>
-              <a:rPr sz="1300" b="0">
-                <a:solidFill>
-                  <a:srgbClr val="FFFFFF"/>
-                </a:solidFill>
-              </a:rPr>
-              <a:t>• 5V: Relay module VCC (from USB or regulator)</a:t>
-            </a:r>
-          </a:p>
-        </p:txBody>
-      </p:sp>
-      <p:sp>
-        <p:nvSpPr>
-          <p:cNvPr id="41" name="TextBox 40"/>
-          <p:cNvSpPr txBox="1"/>
-          <p:nvPr/>
-        </p:nvSpPr>
-        <p:spPr>
-          <a:xfrm>
-            <a:off x="4325112" y="4370832"/>
-            <a:ext cx="3419855" cy="256032"/>
-          </a:xfrm>
-          <a:prstGeom prst="rect">
-            <a:avLst/>
-          </a:prstGeom>
-          <a:noFill/>
-        </p:spPr>
-        <p:txBody>
-          <a:bodyPr wrap="square">
-            <a:spAutoFit/>
-          </a:bodyPr>
-          <a:lstStyle/>
-          <a:p>
-            <a:pPr algn="l"/>
-            <a:r>
-              <a:rPr sz="1300" b="0">
-                <a:solidFill>
-                  <a:srgbClr val="FFFFFF"/>
-                </a:solidFill>
-              </a:rPr>
-              <a:t>• AC 230V: TRIAC load side only — fully isolated</a:t>
-            </a:r>
-          </a:p>
-        </p:txBody>
-      </p:sp>
-      <p:sp>
-        <p:nvSpPr>
-          <p:cNvPr id="42" name="Rectangle 41"/>
+            <a:off x="4325112" y="4478273"/>
+            <a:ext cx="3419855" cy="321564"/>
+          </a:xfrm>
+          <a:prstGeom prst="rect">
+            <a:avLst/>
+          </a:prstGeom>
+          <a:noFill/>
+        </p:spPr>
+        <p:txBody>
+          <a:bodyPr wrap="square">
+            <a:spAutoFit/>
+          </a:bodyPr>
+          <a:lstStyle/>
+          <a:p>
+            <a:pPr algn="l"/>
+            <a:r>
+              <a:rPr sz="1400" b="0">
+                <a:solidFill>
+                  <a:srgbClr val="FFFFFF"/>
+                </a:solidFill>
+              </a:rPr>
+              <a:t>• AC 230V: TRIAC load side — isolated</a:t>
+            </a:r>
+          </a:p>
+        </p:txBody>
+      </p:sp>
+      <p:sp>
+        <p:nvSpPr>
+          <p:cNvPr id="41" name="Rectangle 40"/>
           <p:cNvSpPr/>
           <p:nvPr/>
         </p:nvSpPr>
         <p:spPr>
           <a:xfrm>
-            <a:off x="8046720" y="3520440"/>
-            <a:ext cx="3749039" cy="1280160"/>
+            <a:off x="8046720" y="3569208"/>
+            <a:ext cx="3840480" cy="1376934"/>
           </a:xfrm>
           <a:prstGeom prst="rect">
             <a:avLst/>
@@ -16821,34 +16515,68 @@
       </p:sp>
       <p:sp>
         <p:nvSpPr>
+          <p:cNvPr id="42" name="TextBox 41"/>
+          <p:cNvSpPr txBox="1"/>
+          <p:nvPr/>
+        </p:nvSpPr>
+        <p:spPr>
+          <a:xfrm>
+            <a:off x="8211312" y="3697224"/>
+            <a:ext cx="3511296" cy="302513"/>
+          </a:xfrm>
+          <a:prstGeom prst="rect">
+            <a:avLst/>
+          </a:prstGeom>
+          <a:noFill/>
+        </p:spPr>
+        <p:txBody>
+          <a:bodyPr wrap="square">
+            <a:spAutoFit/>
+          </a:bodyPr>
+          <a:lstStyle/>
+          <a:p>
+            <a:pPr algn="l"/>
+            <a:r>
+              <a:rPr sz="1300" b="1">
+                <a:solidFill>
+                  <a:srgbClr val="A8DADC"/>
+                </a:solidFill>
+              </a:rPr>
+              <a:t>Safety reminders</a:t>
+            </a:r>
+          </a:p>
+        </p:txBody>
+      </p:sp>
+      <p:sp>
+        <p:nvSpPr>
           <p:cNvPr id="43" name="TextBox 42"/>
           <p:cNvSpPr txBox="1"/>
           <p:nvPr/>
         </p:nvSpPr>
         <p:spPr>
           <a:xfrm>
-            <a:off x="8211312" y="3630168"/>
-            <a:ext cx="3419855" cy="256032"/>
-          </a:xfrm>
-          <a:prstGeom prst="rect">
-            <a:avLst/>
-          </a:prstGeom>
-          <a:noFill/>
-        </p:spPr>
-        <p:txBody>
-          <a:bodyPr wrap="square">
-            <a:spAutoFit/>
-          </a:bodyPr>
-          <a:lstStyle/>
-          <a:p>
-            <a:pPr algn="l"/>
-            <a:r>
-              <a:rPr sz="1200" b="1">
-                <a:solidFill>
-                  <a:srgbClr val="A8DADC"/>
-                </a:solidFill>
-              </a:rPr>
-              <a:t>Safety reminders</a:t>
+            <a:off x="8211312" y="3944873"/>
+            <a:ext cx="3511296" cy="321564"/>
+          </a:xfrm>
+          <a:prstGeom prst="rect">
+            <a:avLst/>
+          </a:prstGeom>
+          <a:noFill/>
+        </p:spPr>
+        <p:txBody>
+          <a:bodyPr wrap="square">
+            <a:spAutoFit/>
+          </a:bodyPr>
+          <a:lstStyle/>
+          <a:p>
+            <a:pPr algn="l"/>
+            <a:r>
+              <a:rPr sz="1400" b="0">
+                <a:solidFill>
+                  <a:srgbClr val="FFFFFF"/>
+                </a:solidFill>
+              </a:rPr>
+              <a:t>• Never connect 5V to ESP32 3.3V rail</a:t>
             </a:r>
           </a:p>
         </p:txBody>
@@ -16861,28 +16589,28 @@
         </p:nvSpPr>
         <p:spPr>
           <a:xfrm>
-            <a:off x="8211312" y="3877056"/>
-            <a:ext cx="3419855" cy="256032"/>
-          </a:xfrm>
-          <a:prstGeom prst="rect">
-            <a:avLst/>
-          </a:prstGeom>
-          <a:noFill/>
-        </p:spPr>
-        <p:txBody>
-          <a:bodyPr wrap="square">
-            <a:spAutoFit/>
-          </a:bodyPr>
-          <a:lstStyle/>
-          <a:p>
-            <a:pPr algn="l"/>
-            <a:r>
-              <a:rPr sz="1300" b="0">
-                <a:solidFill>
-                  <a:srgbClr val="FFFFFF"/>
-                </a:solidFill>
-              </a:rPr>
-              <a:t>• Never connect 5V to ESP32 3.3V rail</a:t>
+            <a:off x="8211312" y="4211573"/>
+            <a:ext cx="3511296" cy="321564"/>
+          </a:xfrm>
+          <a:prstGeom prst="rect">
+            <a:avLst/>
+          </a:prstGeom>
+          <a:noFill/>
+        </p:spPr>
+        <p:txBody>
+          <a:bodyPr wrap="square">
+            <a:spAutoFit/>
+          </a:bodyPr>
+          <a:lstStyle/>
+          <a:p>
+            <a:pPr algn="l"/>
+            <a:r>
+              <a:rPr sz="1400" b="0">
+                <a:solidFill>
+                  <a:srgbClr val="FFFFFF"/>
+                </a:solidFill>
+              </a:rPr>
+              <a:t>• Optocouplers required on TRIAC side</a:t>
             </a:r>
           </a:p>
         </p:txBody>
@@ -16895,91 +16623,23 @@
         </p:nvSpPr>
         <p:spPr>
           <a:xfrm>
-            <a:off x="8211312" y="4123944"/>
-            <a:ext cx="3419855" cy="256032"/>
-          </a:xfrm>
-          <a:prstGeom prst="rect">
-            <a:avLst/>
-          </a:prstGeom>
-          <a:noFill/>
-        </p:spPr>
-        <p:txBody>
-          <a:bodyPr wrap="square">
-            <a:spAutoFit/>
-          </a:bodyPr>
-          <a:lstStyle/>
-          <a:p>
-            <a:pPr algn="l"/>
-            <a:r>
-              <a:rPr sz="1300" b="0">
-                <a:solidFill>
-                  <a:srgbClr val="FFFFFF"/>
-                </a:solidFill>
-              </a:rPr>
-              <a:t>• Optocouplers required on TRIAC side</a:t>
-            </a:r>
-          </a:p>
-        </p:txBody>
-      </p:sp>
-      <p:sp>
-        <p:nvSpPr>
-          <p:cNvPr id="46" name="TextBox 45"/>
-          <p:cNvSpPr txBox="1"/>
-          <p:nvPr/>
-        </p:nvSpPr>
-        <p:spPr>
-          <a:xfrm>
-            <a:off x="8211312" y="4370832"/>
-            <a:ext cx="3419855" cy="256032"/>
-          </a:xfrm>
-          <a:prstGeom prst="rect">
-            <a:avLst/>
-          </a:prstGeom>
-          <a:noFill/>
-        </p:spPr>
-        <p:txBody>
-          <a:bodyPr wrap="square">
-            <a:spAutoFit/>
-          </a:bodyPr>
-          <a:lstStyle/>
-          <a:p>
-            <a:pPr algn="l"/>
-            <a:r>
-              <a:rPr sz="1300" b="0">
-                <a:solidFill>
-                  <a:srgbClr val="FFFFFF"/>
-                </a:solidFill>
-              </a:rPr>
-              <a:t>• Relay contacts rated for your AC load</a:t>
-            </a:r>
-          </a:p>
-        </p:txBody>
-      </p:sp>
-      <p:sp>
-        <p:nvSpPr>
-          <p:cNvPr id="47" name="TextBox 46"/>
-          <p:cNvSpPr txBox="1"/>
-          <p:nvPr/>
-        </p:nvSpPr>
-        <p:spPr>
-          <a:xfrm>
-            <a:off x="8211312" y="4617720"/>
-            <a:ext cx="3419855" cy="256032"/>
-          </a:xfrm>
-          <a:prstGeom prst="rect">
-            <a:avLst/>
-          </a:prstGeom>
-          <a:noFill/>
-        </p:spPr>
-        <p:txBody>
-          <a:bodyPr wrap="square">
-            <a:spAutoFit/>
-          </a:bodyPr>
-          <a:lstStyle/>
-          <a:p>
-            <a:pPr algn="l"/>
-            <a:r>
-              <a:rPr sz="1300" b="0">
+            <a:off x="8211312" y="4478273"/>
+            <a:ext cx="3511296" cy="321564"/>
+          </a:xfrm>
+          <a:prstGeom prst="rect">
+            <a:avLst/>
+          </a:prstGeom>
+          <a:noFill/>
+        </p:spPr>
+        <p:txBody>
+          <a:bodyPr wrap="square">
+            <a:spAutoFit/>
+          </a:bodyPr>
+          <a:lstStyle/>
+          <a:p>
+            <a:pPr algn="l"/>
+            <a:r>
+              <a:rPr sz="1400" b="0">
                 <a:solidFill>
                   <a:srgbClr val="FFFFFF"/>
                 </a:solidFill>

--- a/docs/Pellet_Burner_Components.pptx
+++ b/docs/Pellet_Burner_Components.pptx
@@ -6074,7 +6074,7 @@
         <p:spPr>
           <a:xfrm>
             <a:off x="274320" y="749808"/>
-            <a:ext cx="5029200" cy="3758183"/>
+            <a:ext cx="5029200" cy="4471415"/>
           </a:xfrm>
           <a:prstGeom prst="rect">
             <a:avLst/>
@@ -6150,7 +6150,7 @@
         </p:nvSpPr>
         <p:spPr>
           <a:xfrm>
-            <a:off x="438912" y="1125473"/>
+            <a:off x="438912" y="1180337"/>
             <a:ext cx="4700016" cy="321564"/>
           </a:xfrm>
           <a:prstGeom prst="rect">
@@ -6184,7 +6184,7 @@
         </p:nvSpPr>
         <p:spPr>
           <a:xfrm>
-            <a:off x="438912" y="1392173"/>
+            <a:off x="438912" y="1501901"/>
             <a:ext cx="4700016" cy="321564"/>
           </a:xfrm>
           <a:prstGeom prst="rect">
@@ -6218,7 +6218,7 @@
         </p:nvSpPr>
         <p:spPr>
           <a:xfrm>
-            <a:off x="438912" y="1658873"/>
+            <a:off x="438912" y="1823465"/>
             <a:ext cx="4700016" cy="321564"/>
           </a:xfrm>
           <a:prstGeom prst="rect">
@@ -6252,7 +6252,7 @@
         </p:nvSpPr>
         <p:spPr>
           <a:xfrm>
-            <a:off x="438912" y="1925573"/>
+            <a:off x="438912" y="2145029"/>
             <a:ext cx="4700016" cy="321564"/>
           </a:xfrm>
           <a:prstGeom prst="rect">
@@ -6286,7 +6286,7 @@
         </p:nvSpPr>
         <p:spPr>
           <a:xfrm>
-            <a:off x="438912" y="2192273"/>
+            <a:off x="438912" y="2466593"/>
             <a:ext cx="4700016" cy="321564"/>
           </a:xfrm>
           <a:prstGeom prst="rect">
@@ -6320,7 +6320,7 @@
         </p:nvSpPr>
         <p:spPr>
           <a:xfrm>
-            <a:off x="438912" y="2458973"/>
+            <a:off x="438912" y="2788157"/>
             <a:ext cx="4700016" cy="321564"/>
           </a:xfrm>
           <a:prstGeom prst="rect">
@@ -6354,7 +6354,7 @@
         </p:nvSpPr>
         <p:spPr>
           <a:xfrm>
-            <a:off x="438912" y="2725673"/>
+            <a:off x="438912" y="3109721"/>
             <a:ext cx="4700016" cy="302513"/>
           </a:xfrm>
           <a:prstGeom prst="rect">
@@ -6388,7 +6388,7 @@
         </p:nvSpPr>
         <p:spPr>
           <a:xfrm>
-            <a:off x="438912" y="2973322"/>
+            <a:off x="438912" y="3412234"/>
             <a:ext cx="4700016" cy="321564"/>
           </a:xfrm>
           <a:prstGeom prst="rect">
@@ -6422,7 +6422,7 @@
         </p:nvSpPr>
         <p:spPr>
           <a:xfrm>
-            <a:off x="438912" y="3240022"/>
+            <a:off x="438912" y="3733798"/>
             <a:ext cx="4700016" cy="321564"/>
           </a:xfrm>
           <a:prstGeom prst="rect">
@@ -6456,7 +6456,7 @@
         </p:nvSpPr>
         <p:spPr>
           <a:xfrm>
-            <a:off x="438912" y="3506722"/>
+            <a:off x="438912" y="4055362"/>
             <a:ext cx="4700016" cy="321564"/>
           </a:xfrm>
           <a:prstGeom prst="rect">
@@ -6490,7 +6490,7 @@
         </p:nvSpPr>
         <p:spPr>
           <a:xfrm>
-            <a:off x="438912" y="3773422"/>
+            <a:off x="438912" y="4376926"/>
             <a:ext cx="4700016" cy="321564"/>
           </a:xfrm>
           <a:prstGeom prst="rect">
@@ -6524,7 +6524,7 @@
         </p:nvSpPr>
         <p:spPr>
           <a:xfrm>
-            <a:off x="438912" y="4040122"/>
+            <a:off x="438912" y="4698490"/>
             <a:ext cx="4700016" cy="321564"/>
           </a:xfrm>
           <a:prstGeom prst="rect">
@@ -6559,7 +6559,7 @@
         <p:spPr>
           <a:xfrm>
             <a:off x="5394960" y="749808"/>
-            <a:ext cx="3108960" cy="1910334"/>
+            <a:ext cx="3108960" cy="2239518"/>
           </a:xfrm>
           <a:prstGeom prst="rect">
             <a:avLst/>
@@ -6635,7 +6635,7 @@
         </p:nvSpPr>
         <p:spPr>
           <a:xfrm>
-            <a:off x="5559552" y="1125473"/>
+            <a:off x="5559552" y="1180337"/>
             <a:ext cx="2779776" cy="321564"/>
           </a:xfrm>
           <a:prstGeom prst="rect">
@@ -6669,7 +6669,7 @@
         </p:nvSpPr>
         <p:spPr>
           <a:xfrm>
-            <a:off x="5559552" y="1392173"/>
+            <a:off x="5559552" y="1501901"/>
             <a:ext cx="2779776" cy="321564"/>
           </a:xfrm>
           <a:prstGeom prst="rect">
@@ -6703,7 +6703,7 @@
         </p:nvSpPr>
         <p:spPr>
           <a:xfrm>
-            <a:off x="5559552" y="1658873"/>
+            <a:off x="5559552" y="1823465"/>
             <a:ext cx="2779776" cy="321564"/>
           </a:xfrm>
           <a:prstGeom prst="rect">
@@ -6737,7 +6737,7 @@
         </p:nvSpPr>
         <p:spPr>
           <a:xfrm>
-            <a:off x="5559552" y="1925573"/>
+            <a:off x="5559552" y="2145029"/>
             <a:ext cx="2779776" cy="321564"/>
           </a:xfrm>
           <a:prstGeom prst="rect">
@@ -6771,7 +6771,7 @@
         </p:nvSpPr>
         <p:spPr>
           <a:xfrm>
-            <a:off x="5559552" y="2192273"/>
+            <a:off x="5559552" y="2466593"/>
             <a:ext cx="2779776" cy="321564"/>
           </a:xfrm>
           <a:prstGeom prst="rect">
@@ -6805,8 +6805,8 @@
         </p:nvSpPr>
         <p:spPr>
           <a:xfrm>
-            <a:off x="5394960" y="2769870"/>
-            <a:ext cx="3108960" cy="3243834"/>
+            <a:off x="5394960" y="3099054"/>
+            <a:ext cx="3108960" cy="4011929"/>
           </a:xfrm>
           <a:prstGeom prst="rect">
             <a:avLst/>
@@ -6848,7 +6848,7 @@
         </p:nvSpPr>
         <p:spPr>
           <a:xfrm>
-            <a:off x="5559552" y="2897886"/>
+            <a:off x="5559552" y="3227070"/>
             <a:ext cx="2779776" cy="245364"/>
           </a:xfrm>
           <a:prstGeom prst="rect">
@@ -6882,7 +6882,7 @@
         </p:nvSpPr>
         <p:spPr>
           <a:xfrm>
-            <a:off x="5559552" y="3088386"/>
+            <a:off x="5559552" y="3472434"/>
             <a:ext cx="2779776" cy="264414"/>
           </a:xfrm>
           <a:prstGeom prst="rect">
@@ -6916,7 +6916,7 @@
         </p:nvSpPr>
         <p:spPr>
           <a:xfrm>
-            <a:off x="5559552" y="3297936"/>
+            <a:off x="5559552" y="3736848"/>
             <a:ext cx="2779776" cy="264414"/>
           </a:xfrm>
           <a:prstGeom prst="rect">
@@ -6950,7 +6950,7 @@
         </p:nvSpPr>
         <p:spPr>
           <a:xfrm>
-            <a:off x="5559552" y="3507486"/>
+            <a:off x="5559552" y="4001262"/>
             <a:ext cx="2779776" cy="264414"/>
           </a:xfrm>
           <a:prstGeom prst="rect">
@@ -6984,7 +6984,7 @@
         </p:nvSpPr>
         <p:spPr>
           <a:xfrm>
-            <a:off x="5559552" y="3717036"/>
+            <a:off x="5559552" y="4265676"/>
             <a:ext cx="2779776" cy="264414"/>
           </a:xfrm>
           <a:prstGeom prst="rect">
@@ -7018,7 +7018,7 @@
         </p:nvSpPr>
         <p:spPr>
           <a:xfrm>
-            <a:off x="5559552" y="3926586"/>
+            <a:off x="5559552" y="4530090"/>
             <a:ext cx="2779776" cy="264414"/>
           </a:xfrm>
           <a:prstGeom prst="rect">
@@ -7052,7 +7052,7 @@
         </p:nvSpPr>
         <p:spPr>
           <a:xfrm>
-            <a:off x="5559552" y="4136136"/>
+            <a:off x="5559552" y="4794504"/>
             <a:ext cx="2779776" cy="264414"/>
           </a:xfrm>
           <a:prstGeom prst="rect">
@@ -7086,7 +7086,7 @@
         </p:nvSpPr>
         <p:spPr>
           <a:xfrm>
-            <a:off x="5559552" y="4345686"/>
+            <a:off x="5559552" y="5058918"/>
             <a:ext cx="2779776" cy="264414"/>
           </a:xfrm>
           <a:prstGeom prst="rect">
@@ -7120,7 +7120,7 @@
         </p:nvSpPr>
         <p:spPr>
           <a:xfrm>
-            <a:off x="5559552" y="4555236"/>
+            <a:off x="5559552" y="5323332"/>
             <a:ext cx="2779776" cy="264414"/>
           </a:xfrm>
           <a:prstGeom prst="rect">
@@ -7154,7 +7154,7 @@
         </p:nvSpPr>
         <p:spPr>
           <a:xfrm>
-            <a:off x="5559552" y="4764786"/>
+            <a:off x="5559552" y="5587746"/>
             <a:ext cx="2779776" cy="264414"/>
           </a:xfrm>
           <a:prstGeom prst="rect">
@@ -7188,7 +7188,7 @@
         </p:nvSpPr>
         <p:spPr>
           <a:xfrm>
-            <a:off x="5559552" y="4974336"/>
+            <a:off x="5559552" y="5852160"/>
             <a:ext cx="2779776" cy="264414"/>
           </a:xfrm>
           <a:prstGeom prst="rect">
@@ -7222,7 +7222,7 @@
         </p:nvSpPr>
         <p:spPr>
           <a:xfrm>
-            <a:off x="5559552" y="5183886"/>
+            <a:off x="5559552" y="6116574"/>
             <a:ext cx="2779776" cy="264414"/>
           </a:xfrm>
           <a:prstGeom prst="rect">
@@ -7256,7 +7256,7 @@
         </p:nvSpPr>
         <p:spPr>
           <a:xfrm>
-            <a:off x="5559552" y="5393436"/>
+            <a:off x="5559552" y="6380988"/>
             <a:ext cx="2779776" cy="264414"/>
           </a:xfrm>
           <a:prstGeom prst="rect">
@@ -7290,7 +7290,7 @@
         </p:nvSpPr>
         <p:spPr>
           <a:xfrm>
-            <a:off x="5559552" y="5602986"/>
+            <a:off x="5559552" y="6645402"/>
             <a:ext cx="2779776" cy="264414"/>
           </a:xfrm>
           <a:prstGeom prst="rect">
@@ -7487,7 +7487,7 @@
         <p:spPr>
           <a:xfrm>
             <a:off x="274320" y="749808"/>
-            <a:ext cx="4937760" cy="2177034"/>
+            <a:ext cx="4937760" cy="2561082"/>
           </a:xfrm>
           <a:prstGeom prst="rect">
             <a:avLst/>
@@ -7563,7 +7563,7 @@
         </p:nvSpPr>
         <p:spPr>
           <a:xfrm>
-            <a:off x="438912" y="1125473"/>
+            <a:off x="438912" y="1180337"/>
             <a:ext cx="4608576" cy="321564"/>
           </a:xfrm>
           <a:prstGeom prst="rect">
@@ -7597,7 +7597,7 @@
         </p:nvSpPr>
         <p:spPr>
           <a:xfrm>
-            <a:off x="438912" y="1392173"/>
+            <a:off x="438912" y="1501901"/>
             <a:ext cx="4608576" cy="321564"/>
           </a:xfrm>
           <a:prstGeom prst="rect">
@@ -7631,7 +7631,7 @@
         </p:nvSpPr>
         <p:spPr>
           <a:xfrm>
-            <a:off x="438912" y="1658873"/>
+            <a:off x="438912" y="1823465"/>
             <a:ext cx="4608576" cy="321564"/>
           </a:xfrm>
           <a:prstGeom prst="rect">
@@ -7665,7 +7665,7 @@
         </p:nvSpPr>
         <p:spPr>
           <a:xfrm>
-            <a:off x="438912" y="1925573"/>
+            <a:off x="438912" y="2145029"/>
             <a:ext cx="4608576" cy="321564"/>
           </a:xfrm>
           <a:prstGeom prst="rect">
@@ -7699,7 +7699,7 @@
         </p:nvSpPr>
         <p:spPr>
           <a:xfrm>
-            <a:off x="438912" y="2192273"/>
+            <a:off x="438912" y="2466593"/>
             <a:ext cx="4608576" cy="321564"/>
           </a:xfrm>
           <a:prstGeom prst="rect">
@@ -7733,7 +7733,7 @@
         </p:nvSpPr>
         <p:spPr>
           <a:xfrm>
-            <a:off x="438912" y="2458973"/>
+            <a:off x="438912" y="2788157"/>
             <a:ext cx="4608576" cy="321564"/>
           </a:xfrm>
           <a:prstGeom prst="rect">
@@ -7768,7 +7768,7 @@
         <p:spPr>
           <a:xfrm>
             <a:off x="5349240" y="749808"/>
-            <a:ext cx="3200400" cy="2691384"/>
+            <a:ext cx="3200400" cy="3185159"/>
           </a:xfrm>
           <a:prstGeom prst="rect">
             <a:avLst/>
@@ -7844,7 +7844,7 @@
         </p:nvSpPr>
         <p:spPr>
           <a:xfrm>
-            <a:off x="5513832" y="1125473"/>
+            <a:off x="5513832" y="1180337"/>
             <a:ext cx="2871216" cy="321564"/>
           </a:xfrm>
           <a:prstGeom prst="rect">
@@ -7878,7 +7878,7 @@
         </p:nvSpPr>
         <p:spPr>
           <a:xfrm>
-            <a:off x="5513832" y="1392173"/>
+            <a:off x="5513832" y="1501901"/>
             <a:ext cx="2871216" cy="321564"/>
           </a:xfrm>
           <a:prstGeom prst="rect">
@@ -7912,7 +7912,7 @@
         </p:nvSpPr>
         <p:spPr>
           <a:xfrm>
-            <a:off x="5513832" y="1658873"/>
+            <a:off x="5513832" y="1823465"/>
             <a:ext cx="2871216" cy="321564"/>
           </a:xfrm>
           <a:prstGeom prst="rect">
@@ -7946,7 +7946,7 @@
         </p:nvSpPr>
         <p:spPr>
           <a:xfrm>
-            <a:off x="5513832" y="1925573"/>
+            <a:off x="5513832" y="2145029"/>
             <a:ext cx="2871216" cy="321564"/>
           </a:xfrm>
           <a:prstGeom prst="rect">
@@ -7980,7 +7980,7 @@
         </p:nvSpPr>
         <p:spPr>
           <a:xfrm>
-            <a:off x="5513832" y="2192273"/>
+            <a:off x="5513832" y="2466593"/>
             <a:ext cx="2871216" cy="302513"/>
           </a:xfrm>
           <a:prstGeom prst="rect">
@@ -8014,7 +8014,7 @@
         </p:nvSpPr>
         <p:spPr>
           <a:xfrm>
-            <a:off x="5513832" y="2439922"/>
+            <a:off x="5513832" y="2769106"/>
             <a:ext cx="2871216" cy="321564"/>
           </a:xfrm>
           <a:prstGeom prst="rect">
@@ -8048,7 +8048,7 @@
         </p:nvSpPr>
         <p:spPr>
           <a:xfrm>
-            <a:off x="5513832" y="2706622"/>
+            <a:off x="5513832" y="3090670"/>
             <a:ext cx="2871216" cy="321564"/>
           </a:xfrm>
           <a:prstGeom prst="rect">
@@ -8082,7 +8082,7 @@
         </p:nvSpPr>
         <p:spPr>
           <a:xfrm>
-            <a:off x="5513832" y="2973322"/>
+            <a:off x="5513832" y="3412234"/>
             <a:ext cx="2871216" cy="321564"/>
           </a:xfrm>
           <a:prstGeom prst="rect">
@@ -8116,8 +8116,8 @@
         </p:nvSpPr>
         <p:spPr>
           <a:xfrm>
-            <a:off x="274320" y="3569208"/>
-            <a:ext cx="8229600" cy="2958084"/>
+            <a:off x="274320" y="4062983"/>
+            <a:ext cx="8229600" cy="3506723"/>
           </a:xfrm>
           <a:prstGeom prst="rect">
             <a:avLst/>
@@ -8159,7 +8159,7 @@
         </p:nvSpPr>
         <p:spPr>
           <a:xfrm>
-            <a:off x="438912" y="3697224"/>
+            <a:off x="438912" y="4190999"/>
             <a:ext cx="7900416" cy="302513"/>
           </a:xfrm>
           <a:prstGeom prst="rect">
@@ -8193,7 +8193,7 @@
         </p:nvSpPr>
         <p:spPr>
           <a:xfrm>
-            <a:off x="438912" y="3944873"/>
+            <a:off x="438912" y="4493512"/>
             <a:ext cx="7900416" cy="321564"/>
           </a:xfrm>
           <a:prstGeom prst="rect">
@@ -8227,7 +8227,7 @@
         </p:nvSpPr>
         <p:spPr>
           <a:xfrm>
-            <a:off x="438912" y="4211573"/>
+            <a:off x="438912" y="4815076"/>
             <a:ext cx="7900416" cy="321564"/>
           </a:xfrm>
           <a:prstGeom prst="rect">
@@ -8261,7 +8261,7 @@
         </p:nvSpPr>
         <p:spPr>
           <a:xfrm>
-            <a:off x="438912" y="4478273"/>
+            <a:off x="438912" y="5136640"/>
             <a:ext cx="7900416" cy="321564"/>
           </a:xfrm>
           <a:prstGeom prst="rect">
@@ -8295,7 +8295,7 @@
         </p:nvSpPr>
         <p:spPr>
           <a:xfrm>
-            <a:off x="438912" y="4744973"/>
+            <a:off x="438912" y="5458204"/>
             <a:ext cx="7900416" cy="321564"/>
           </a:xfrm>
           <a:prstGeom prst="rect">
@@ -8329,7 +8329,7 @@
         </p:nvSpPr>
         <p:spPr>
           <a:xfrm>
-            <a:off x="438912" y="5011673"/>
+            <a:off x="438912" y="5779768"/>
             <a:ext cx="7900416" cy="321564"/>
           </a:xfrm>
           <a:prstGeom prst="rect">
@@ -8363,7 +8363,7 @@
         </p:nvSpPr>
         <p:spPr>
           <a:xfrm>
-            <a:off x="438912" y="5278373"/>
+            <a:off x="438912" y="6101332"/>
             <a:ext cx="7900416" cy="321564"/>
           </a:xfrm>
           <a:prstGeom prst="rect">
@@ -8397,7 +8397,7 @@
         </p:nvSpPr>
         <p:spPr>
           <a:xfrm>
-            <a:off x="438912" y="5545073"/>
+            <a:off x="438912" y="6422896"/>
             <a:ext cx="7900416" cy="302513"/>
           </a:xfrm>
           <a:prstGeom prst="rect">
@@ -8431,7 +8431,7 @@
         </p:nvSpPr>
         <p:spPr>
           <a:xfrm>
-            <a:off x="438912" y="5792722"/>
+            <a:off x="438912" y="6725409"/>
             <a:ext cx="7900416" cy="321564"/>
           </a:xfrm>
           <a:prstGeom prst="rect">
@@ -8465,7 +8465,7 @@
         </p:nvSpPr>
         <p:spPr>
           <a:xfrm>
-            <a:off x="438912" y="6059422"/>
+            <a:off x="438912" y="7046973"/>
             <a:ext cx="7900416" cy="321564"/>
           </a:xfrm>
           <a:prstGeom prst="rect">
@@ -8662,7 +8662,7 @@
         <p:spPr>
           <a:xfrm>
             <a:off x="274320" y="749808"/>
-            <a:ext cx="4937760" cy="2443734"/>
+            <a:ext cx="4937760" cy="2882646"/>
           </a:xfrm>
           <a:prstGeom prst="rect">
             <a:avLst/>
@@ -8738,7 +8738,7 @@
         </p:nvSpPr>
         <p:spPr>
           <a:xfrm>
-            <a:off x="438912" y="1125473"/>
+            <a:off x="438912" y="1180337"/>
             <a:ext cx="4608576" cy="321564"/>
           </a:xfrm>
           <a:prstGeom prst="rect">
@@ -8772,7 +8772,7 @@
         </p:nvSpPr>
         <p:spPr>
           <a:xfrm>
-            <a:off x="438912" y="1392173"/>
+            <a:off x="438912" y="1501901"/>
             <a:ext cx="4608576" cy="321564"/>
           </a:xfrm>
           <a:prstGeom prst="rect">
@@ -8806,7 +8806,7 @@
         </p:nvSpPr>
         <p:spPr>
           <a:xfrm>
-            <a:off x="438912" y="1658873"/>
+            <a:off x="438912" y="1823465"/>
             <a:ext cx="4608576" cy="321564"/>
           </a:xfrm>
           <a:prstGeom prst="rect">
@@ -8840,7 +8840,7 @@
         </p:nvSpPr>
         <p:spPr>
           <a:xfrm>
-            <a:off x="438912" y="1925573"/>
+            <a:off x="438912" y="2145029"/>
             <a:ext cx="4608576" cy="321564"/>
           </a:xfrm>
           <a:prstGeom prst="rect">
@@ -8874,7 +8874,7 @@
         </p:nvSpPr>
         <p:spPr>
           <a:xfrm>
-            <a:off x="438912" y="2192273"/>
+            <a:off x="438912" y="2466593"/>
             <a:ext cx="4608576" cy="321564"/>
           </a:xfrm>
           <a:prstGeom prst="rect">
@@ -8908,7 +8908,7 @@
         </p:nvSpPr>
         <p:spPr>
           <a:xfrm>
-            <a:off x="438912" y="2458973"/>
+            <a:off x="438912" y="2788157"/>
             <a:ext cx="4608576" cy="321564"/>
           </a:xfrm>
           <a:prstGeom prst="rect">
@@ -8942,7 +8942,7 @@
         </p:nvSpPr>
         <p:spPr>
           <a:xfrm>
-            <a:off x="438912" y="2725673"/>
+            <a:off x="438912" y="3109721"/>
             <a:ext cx="4608576" cy="321564"/>
           </a:xfrm>
           <a:prstGeom prst="rect">
@@ -8977,7 +8977,7 @@
         <p:spPr>
           <a:xfrm>
             <a:off x="5349240" y="749808"/>
-            <a:ext cx="3200400" cy="2958084"/>
+            <a:ext cx="3200400" cy="3506723"/>
           </a:xfrm>
           <a:prstGeom prst="rect">
             <a:avLst/>
@@ -9053,7 +9053,7 @@
         </p:nvSpPr>
         <p:spPr>
           <a:xfrm>
-            <a:off x="5513832" y="1125473"/>
+            <a:off x="5513832" y="1180337"/>
             <a:ext cx="2871216" cy="321564"/>
           </a:xfrm>
           <a:prstGeom prst="rect">
@@ -9087,7 +9087,7 @@
         </p:nvSpPr>
         <p:spPr>
           <a:xfrm>
-            <a:off x="5513832" y="1392173"/>
+            <a:off x="5513832" y="1501901"/>
             <a:ext cx="2871216" cy="321564"/>
           </a:xfrm>
           <a:prstGeom prst="rect">
@@ -9121,7 +9121,7 @@
         </p:nvSpPr>
         <p:spPr>
           <a:xfrm>
-            <a:off x="5513832" y="1658873"/>
+            <a:off x="5513832" y="1823465"/>
             <a:ext cx="2871216" cy="321564"/>
           </a:xfrm>
           <a:prstGeom prst="rect">
@@ -9155,7 +9155,7 @@
         </p:nvSpPr>
         <p:spPr>
           <a:xfrm>
-            <a:off x="5513832" y="1925573"/>
+            <a:off x="5513832" y="2145029"/>
             <a:ext cx="2871216" cy="321564"/>
           </a:xfrm>
           <a:prstGeom prst="rect">
@@ -9189,7 +9189,7 @@
         </p:nvSpPr>
         <p:spPr>
           <a:xfrm>
-            <a:off x="5513832" y="2192273"/>
+            <a:off x="5513832" y="2466593"/>
             <a:ext cx="2871216" cy="302513"/>
           </a:xfrm>
           <a:prstGeom prst="rect">
@@ -9223,7 +9223,7 @@
         </p:nvSpPr>
         <p:spPr>
           <a:xfrm>
-            <a:off x="5513832" y="2439922"/>
+            <a:off x="5513832" y="2769106"/>
             <a:ext cx="2871216" cy="321564"/>
           </a:xfrm>
           <a:prstGeom prst="rect">
@@ -9257,7 +9257,7 @@
         </p:nvSpPr>
         <p:spPr>
           <a:xfrm>
-            <a:off x="5513832" y="2706622"/>
+            <a:off x="5513832" y="3090670"/>
             <a:ext cx="2871216" cy="321564"/>
           </a:xfrm>
           <a:prstGeom prst="rect">
@@ -9291,7 +9291,7 @@
         </p:nvSpPr>
         <p:spPr>
           <a:xfrm>
-            <a:off x="5513832" y="2973322"/>
+            <a:off x="5513832" y="3412234"/>
             <a:ext cx="2871216" cy="321564"/>
           </a:xfrm>
           <a:prstGeom prst="rect">
@@ -9325,7 +9325,7 @@
         </p:nvSpPr>
         <p:spPr>
           <a:xfrm>
-            <a:off x="5513832" y="3240022"/>
+            <a:off x="5513832" y="3733798"/>
             <a:ext cx="2871216" cy="321564"/>
           </a:xfrm>
           <a:prstGeom prst="rect">
@@ -9359,8 +9359,8 @@
         </p:nvSpPr>
         <p:spPr>
           <a:xfrm>
-            <a:off x="274320" y="3835908"/>
-            <a:ext cx="8229600" cy="2767584"/>
+            <a:off x="274320" y="4384547"/>
+            <a:ext cx="8229600" cy="3316224"/>
           </a:xfrm>
           <a:prstGeom prst="rect">
             <a:avLst/>
@@ -9402,7 +9402,7 @@
         </p:nvSpPr>
         <p:spPr>
           <a:xfrm>
-            <a:off x="438912" y="3963924"/>
+            <a:off x="438912" y="4512563"/>
             <a:ext cx="7900416" cy="283464"/>
           </a:xfrm>
           <a:prstGeom prst="rect">
@@ -9436,7 +9436,7 @@
         </p:nvSpPr>
         <p:spPr>
           <a:xfrm>
-            <a:off x="438912" y="4192524"/>
+            <a:off x="438912" y="4796027"/>
             <a:ext cx="7900416" cy="302513"/>
           </a:xfrm>
           <a:prstGeom prst="rect">
@@ -9470,7 +9470,7 @@
         </p:nvSpPr>
         <p:spPr>
           <a:xfrm>
-            <a:off x="438912" y="4440173"/>
+            <a:off x="438912" y="5098540"/>
             <a:ext cx="7900416" cy="302513"/>
           </a:xfrm>
           <a:prstGeom prst="rect">
@@ -9504,7 +9504,7 @@
         </p:nvSpPr>
         <p:spPr>
           <a:xfrm>
-            <a:off x="438912" y="4687822"/>
+            <a:off x="438912" y="5401053"/>
             <a:ext cx="7900416" cy="302513"/>
           </a:xfrm>
           <a:prstGeom prst="rect">
@@ -9538,7 +9538,7 @@
         </p:nvSpPr>
         <p:spPr>
           <a:xfrm>
-            <a:off x="438912" y="4935471"/>
+            <a:off x="438912" y="5703566"/>
             <a:ext cx="7900416" cy="302513"/>
           </a:xfrm>
           <a:prstGeom prst="rect">
@@ -9572,7 +9572,7 @@
         </p:nvSpPr>
         <p:spPr>
           <a:xfrm>
-            <a:off x="438912" y="5183120"/>
+            <a:off x="438912" y="6006079"/>
             <a:ext cx="7900416" cy="302513"/>
           </a:xfrm>
           <a:prstGeom prst="rect">
@@ -9606,7 +9606,7 @@
         </p:nvSpPr>
         <p:spPr>
           <a:xfrm>
-            <a:off x="438912" y="5430769"/>
+            <a:off x="438912" y="6308592"/>
             <a:ext cx="7900416" cy="283464"/>
           </a:xfrm>
           <a:prstGeom prst="rect">
@@ -9640,7 +9640,7 @@
         </p:nvSpPr>
         <p:spPr>
           <a:xfrm>
-            <a:off x="438912" y="5659369"/>
+            <a:off x="438912" y="6592056"/>
             <a:ext cx="7900416" cy="302513"/>
           </a:xfrm>
           <a:prstGeom prst="rect">
@@ -9674,7 +9674,7 @@
         </p:nvSpPr>
         <p:spPr>
           <a:xfrm>
-            <a:off x="438912" y="5907018"/>
+            <a:off x="438912" y="6894569"/>
             <a:ext cx="7900416" cy="302513"/>
           </a:xfrm>
           <a:prstGeom prst="rect">
@@ -9708,7 +9708,7 @@
         </p:nvSpPr>
         <p:spPr>
           <a:xfrm>
-            <a:off x="438912" y="6154667"/>
+            <a:off x="438912" y="7197082"/>
             <a:ext cx="7900416" cy="302513"/>
           </a:xfrm>
           <a:prstGeom prst="rect">
@@ -9960,7 +9960,7 @@
         <p:spPr>
           <a:xfrm>
             <a:off x="274320" y="749808"/>
-            <a:ext cx="4937760" cy="2710434"/>
+            <a:ext cx="4937760" cy="3204210"/>
           </a:xfrm>
           <a:prstGeom prst="rect">
             <a:avLst/>
@@ -10036,7 +10036,7 @@
         </p:nvSpPr>
         <p:spPr>
           <a:xfrm>
-            <a:off x="438912" y="1125473"/>
+            <a:off x="438912" y="1180337"/>
             <a:ext cx="4608576" cy="321564"/>
           </a:xfrm>
           <a:prstGeom prst="rect">
@@ -10070,7 +10070,7 @@
         </p:nvSpPr>
         <p:spPr>
           <a:xfrm>
-            <a:off x="438912" y="1392173"/>
+            <a:off x="438912" y="1501901"/>
             <a:ext cx="4608576" cy="321564"/>
           </a:xfrm>
           <a:prstGeom prst="rect">
@@ -10104,7 +10104,7 @@
         </p:nvSpPr>
         <p:spPr>
           <a:xfrm>
-            <a:off x="438912" y="1658873"/>
+            <a:off x="438912" y="1823465"/>
             <a:ext cx="4608576" cy="321564"/>
           </a:xfrm>
           <a:prstGeom prst="rect">
@@ -10138,7 +10138,7 @@
         </p:nvSpPr>
         <p:spPr>
           <a:xfrm>
-            <a:off x="438912" y="1925573"/>
+            <a:off x="438912" y="2145029"/>
             <a:ext cx="4608576" cy="321564"/>
           </a:xfrm>
           <a:prstGeom prst="rect">
@@ -10172,7 +10172,7 @@
         </p:nvSpPr>
         <p:spPr>
           <a:xfrm>
-            <a:off x="438912" y="2192273"/>
+            <a:off x="438912" y="2466593"/>
             <a:ext cx="4608576" cy="321564"/>
           </a:xfrm>
           <a:prstGeom prst="rect">
@@ -10206,7 +10206,7 @@
         </p:nvSpPr>
         <p:spPr>
           <a:xfrm>
-            <a:off x="438912" y="2458973"/>
+            <a:off x="438912" y="2788157"/>
             <a:ext cx="4608576" cy="321564"/>
           </a:xfrm>
           <a:prstGeom prst="rect">
@@ -10240,7 +10240,7 @@
         </p:nvSpPr>
         <p:spPr>
           <a:xfrm>
-            <a:off x="438912" y="2725673"/>
+            <a:off x="438912" y="3109721"/>
             <a:ext cx="4608576" cy="321564"/>
           </a:xfrm>
           <a:prstGeom prst="rect">
@@ -10274,7 +10274,7 @@
         </p:nvSpPr>
         <p:spPr>
           <a:xfrm>
-            <a:off x="438912" y="2992373"/>
+            <a:off x="438912" y="3431285"/>
             <a:ext cx="4608576" cy="321564"/>
           </a:xfrm>
           <a:prstGeom prst="rect">
@@ -10309,7 +10309,7 @@
         <p:spPr>
           <a:xfrm>
             <a:off x="5349240" y="749808"/>
-            <a:ext cx="3200400" cy="2958084"/>
+            <a:ext cx="3200400" cy="3506723"/>
           </a:xfrm>
           <a:prstGeom prst="rect">
             <a:avLst/>
@@ -10385,7 +10385,7 @@
         </p:nvSpPr>
         <p:spPr>
           <a:xfrm>
-            <a:off x="5513832" y="1125473"/>
+            <a:off x="5513832" y="1180337"/>
             <a:ext cx="2871216" cy="321564"/>
           </a:xfrm>
           <a:prstGeom prst="rect">
@@ -10419,7 +10419,7 @@
         </p:nvSpPr>
         <p:spPr>
           <a:xfrm>
-            <a:off x="5513832" y="1392173"/>
+            <a:off x="5513832" y="1501901"/>
             <a:ext cx="2871216" cy="321564"/>
           </a:xfrm>
           <a:prstGeom prst="rect">
@@ -10453,7 +10453,7 @@
         </p:nvSpPr>
         <p:spPr>
           <a:xfrm>
-            <a:off x="5513832" y="1658873"/>
+            <a:off x="5513832" y="1823465"/>
             <a:ext cx="2871216" cy="321564"/>
           </a:xfrm>
           <a:prstGeom prst="rect">
@@ -10487,7 +10487,7 @@
         </p:nvSpPr>
         <p:spPr>
           <a:xfrm>
-            <a:off x="5513832" y="1925573"/>
+            <a:off x="5513832" y="2145029"/>
             <a:ext cx="2871216" cy="321564"/>
           </a:xfrm>
           <a:prstGeom prst="rect">
@@ -10521,7 +10521,7 @@
         </p:nvSpPr>
         <p:spPr>
           <a:xfrm>
-            <a:off x="5513832" y="2192273"/>
+            <a:off x="5513832" y="2466593"/>
             <a:ext cx="2871216" cy="321564"/>
           </a:xfrm>
           <a:prstGeom prst="rect">
@@ -10555,7 +10555,7 @@
         </p:nvSpPr>
         <p:spPr>
           <a:xfrm>
-            <a:off x="5513832" y="2458973"/>
+            <a:off x="5513832" y="2788157"/>
             <a:ext cx="2871216" cy="302513"/>
           </a:xfrm>
           <a:prstGeom prst="rect">
@@ -10589,7 +10589,7 @@
         </p:nvSpPr>
         <p:spPr>
           <a:xfrm>
-            <a:off x="5513832" y="2706622"/>
+            <a:off x="5513832" y="3090670"/>
             <a:ext cx="2871216" cy="321564"/>
           </a:xfrm>
           <a:prstGeom prst="rect">
@@ -10623,7 +10623,7 @@
         </p:nvSpPr>
         <p:spPr>
           <a:xfrm>
-            <a:off x="5513832" y="2973322"/>
+            <a:off x="5513832" y="3412234"/>
             <a:ext cx="2871216" cy="321564"/>
           </a:xfrm>
           <a:prstGeom prst="rect">
@@ -10657,7 +10657,7 @@
         </p:nvSpPr>
         <p:spPr>
           <a:xfrm>
-            <a:off x="5513832" y="3240022"/>
+            <a:off x="5513832" y="3733798"/>
             <a:ext cx="2871216" cy="321564"/>
           </a:xfrm>
           <a:prstGeom prst="rect">
@@ -10691,8 +10691,8 @@
         </p:nvSpPr>
         <p:spPr>
           <a:xfrm>
-            <a:off x="274320" y="3835908"/>
-            <a:ext cx="8229600" cy="2767584"/>
+            <a:off x="274320" y="4384547"/>
+            <a:ext cx="8229600" cy="3316224"/>
           </a:xfrm>
           <a:prstGeom prst="rect">
             <a:avLst/>
@@ -10734,7 +10734,7 @@
         </p:nvSpPr>
         <p:spPr>
           <a:xfrm>
-            <a:off x="438912" y="3963924"/>
+            <a:off x="438912" y="4512563"/>
             <a:ext cx="7900416" cy="283464"/>
           </a:xfrm>
           <a:prstGeom prst="rect">
@@ -10768,7 +10768,7 @@
         </p:nvSpPr>
         <p:spPr>
           <a:xfrm>
-            <a:off x="438912" y="4192524"/>
+            <a:off x="438912" y="4796027"/>
             <a:ext cx="7900416" cy="302513"/>
           </a:xfrm>
           <a:prstGeom prst="rect">
@@ -10802,7 +10802,7 @@
         </p:nvSpPr>
         <p:spPr>
           <a:xfrm>
-            <a:off x="438912" y="4440173"/>
+            <a:off x="438912" y="5098540"/>
             <a:ext cx="7900416" cy="302513"/>
           </a:xfrm>
           <a:prstGeom prst="rect">
@@ -10836,7 +10836,7 @@
         </p:nvSpPr>
         <p:spPr>
           <a:xfrm>
-            <a:off x="438912" y="4687822"/>
+            <a:off x="438912" y="5401053"/>
             <a:ext cx="7900416" cy="302513"/>
           </a:xfrm>
           <a:prstGeom prst="rect">
@@ -10870,7 +10870,7 @@
         </p:nvSpPr>
         <p:spPr>
           <a:xfrm>
-            <a:off x="438912" y="4935471"/>
+            <a:off x="438912" y="5703566"/>
             <a:ext cx="7900416" cy="302513"/>
           </a:xfrm>
           <a:prstGeom prst="rect">
@@ -10904,7 +10904,7 @@
         </p:nvSpPr>
         <p:spPr>
           <a:xfrm>
-            <a:off x="438912" y="5183120"/>
+            <a:off x="438912" y="6006079"/>
             <a:ext cx="7900416" cy="283464"/>
           </a:xfrm>
           <a:prstGeom prst="rect">
@@ -10938,7 +10938,7 @@
         </p:nvSpPr>
         <p:spPr>
           <a:xfrm>
-            <a:off x="438912" y="5411720"/>
+            <a:off x="438912" y="6289543"/>
             <a:ext cx="7900416" cy="302513"/>
           </a:xfrm>
           <a:prstGeom prst="rect">
@@ -10972,7 +10972,7 @@
         </p:nvSpPr>
         <p:spPr>
           <a:xfrm>
-            <a:off x="438912" y="5659369"/>
+            <a:off x="438912" y="6592056"/>
             <a:ext cx="7900416" cy="302513"/>
           </a:xfrm>
           <a:prstGeom prst="rect">
@@ -11006,7 +11006,7 @@
         </p:nvSpPr>
         <p:spPr>
           <a:xfrm>
-            <a:off x="438912" y="5907018"/>
+            <a:off x="438912" y="6894569"/>
             <a:ext cx="7900416" cy="302513"/>
           </a:xfrm>
           <a:prstGeom prst="rect">
@@ -11040,7 +11040,7 @@
         </p:nvSpPr>
         <p:spPr>
           <a:xfrm>
-            <a:off x="438912" y="6154667"/>
+            <a:off x="438912" y="7197082"/>
             <a:ext cx="7900416" cy="302513"/>
           </a:xfrm>
           <a:prstGeom prst="rect">
@@ -11237,7 +11237,7 @@
         <p:spPr>
           <a:xfrm>
             <a:off x="274320" y="749808"/>
-            <a:ext cx="4937760" cy="2177034"/>
+            <a:ext cx="4937760" cy="2561082"/>
           </a:xfrm>
           <a:prstGeom prst="rect">
             <a:avLst/>
@@ -11313,7 +11313,7 @@
         </p:nvSpPr>
         <p:spPr>
           <a:xfrm>
-            <a:off x="438912" y="1125473"/>
+            <a:off x="438912" y="1180337"/>
             <a:ext cx="4608576" cy="321564"/>
           </a:xfrm>
           <a:prstGeom prst="rect">
@@ -11347,7 +11347,7 @@
         </p:nvSpPr>
         <p:spPr>
           <a:xfrm>
-            <a:off x="438912" y="1392173"/>
+            <a:off x="438912" y="1501901"/>
             <a:ext cx="4608576" cy="321564"/>
           </a:xfrm>
           <a:prstGeom prst="rect">
@@ -11381,7 +11381,7 @@
         </p:nvSpPr>
         <p:spPr>
           <a:xfrm>
-            <a:off x="438912" y="1658873"/>
+            <a:off x="438912" y="1823465"/>
             <a:ext cx="4608576" cy="321564"/>
           </a:xfrm>
           <a:prstGeom prst="rect">
@@ -11415,7 +11415,7 @@
         </p:nvSpPr>
         <p:spPr>
           <a:xfrm>
-            <a:off x="438912" y="1925573"/>
+            <a:off x="438912" y="2145029"/>
             <a:ext cx="4608576" cy="321564"/>
           </a:xfrm>
           <a:prstGeom prst="rect">
@@ -11449,7 +11449,7 @@
         </p:nvSpPr>
         <p:spPr>
           <a:xfrm>
-            <a:off x="438912" y="2192273"/>
+            <a:off x="438912" y="2466593"/>
             <a:ext cx="4608576" cy="321564"/>
           </a:xfrm>
           <a:prstGeom prst="rect">
@@ -11483,7 +11483,7 @@
         </p:nvSpPr>
         <p:spPr>
           <a:xfrm>
-            <a:off x="438912" y="2458973"/>
+            <a:off x="438912" y="2788157"/>
             <a:ext cx="4608576" cy="321564"/>
           </a:xfrm>
           <a:prstGeom prst="rect">
@@ -11517,8 +11517,8 @@
         </p:nvSpPr>
         <p:spPr>
           <a:xfrm>
-            <a:off x="274320" y="3054858"/>
-            <a:ext cx="2743200" cy="2043684"/>
+            <a:off x="274320" y="3438906"/>
+            <a:ext cx="2743200" cy="2427732"/>
           </a:xfrm>
           <a:prstGeom prst="rect">
             <a:avLst/>
@@ -11560,7 +11560,7 @@
         </p:nvSpPr>
         <p:spPr>
           <a:xfrm>
-            <a:off x="438912" y="3182874"/>
+            <a:off x="438912" y="3566922"/>
             <a:ext cx="2414016" cy="283464"/>
           </a:xfrm>
           <a:prstGeom prst="rect">
@@ -11594,7 +11594,7 @@
         </p:nvSpPr>
         <p:spPr>
           <a:xfrm>
-            <a:off x="438912" y="3411474"/>
+            <a:off x="438912" y="3850386"/>
             <a:ext cx="2414016" cy="302513"/>
           </a:xfrm>
           <a:prstGeom prst="rect">
@@ -11628,7 +11628,7 @@
         </p:nvSpPr>
         <p:spPr>
           <a:xfrm>
-            <a:off x="438912" y="3659123"/>
+            <a:off x="438912" y="4152899"/>
             <a:ext cx="2414016" cy="302513"/>
           </a:xfrm>
           <a:prstGeom prst="rect">
@@ -11662,7 +11662,7 @@
         </p:nvSpPr>
         <p:spPr>
           <a:xfrm>
-            <a:off x="438912" y="3906772"/>
+            <a:off x="438912" y="4455412"/>
             <a:ext cx="2414016" cy="302513"/>
           </a:xfrm>
           <a:prstGeom prst="rect">
@@ -11696,7 +11696,7 @@
         </p:nvSpPr>
         <p:spPr>
           <a:xfrm>
-            <a:off x="438912" y="4154421"/>
+            <a:off x="438912" y="4757925"/>
             <a:ext cx="2414016" cy="302513"/>
           </a:xfrm>
           <a:prstGeom prst="rect">
@@ -11730,7 +11730,7 @@
         </p:nvSpPr>
         <p:spPr>
           <a:xfrm>
-            <a:off x="438912" y="4402070"/>
+            <a:off x="438912" y="5060438"/>
             <a:ext cx="2414016" cy="302513"/>
           </a:xfrm>
           <a:prstGeom prst="rect">
@@ -11764,7 +11764,7 @@
         </p:nvSpPr>
         <p:spPr>
           <a:xfrm>
-            <a:off x="438912" y="4649719"/>
+            <a:off x="438912" y="5362951"/>
             <a:ext cx="2414016" cy="302513"/>
           </a:xfrm>
           <a:prstGeom prst="rect">
@@ -11798,8 +11798,8 @@
         </p:nvSpPr>
         <p:spPr>
           <a:xfrm>
-            <a:off x="3108960" y="3054858"/>
-            <a:ext cx="2743200" cy="2043684"/>
+            <a:off x="3108960" y="3438906"/>
+            <a:ext cx="2743200" cy="2427732"/>
           </a:xfrm>
           <a:prstGeom prst="rect">
             <a:avLst/>
@@ -11841,7 +11841,7 @@
         </p:nvSpPr>
         <p:spPr>
           <a:xfrm>
-            <a:off x="3273552" y="3182874"/>
+            <a:off x="3273552" y="3566922"/>
             <a:ext cx="2414016" cy="283464"/>
           </a:xfrm>
           <a:prstGeom prst="rect">
@@ -11875,7 +11875,7 @@
         </p:nvSpPr>
         <p:spPr>
           <a:xfrm>
-            <a:off x="3273552" y="3411474"/>
+            <a:off x="3273552" y="3850386"/>
             <a:ext cx="2414016" cy="302513"/>
           </a:xfrm>
           <a:prstGeom prst="rect">
@@ -11909,7 +11909,7 @@
         </p:nvSpPr>
         <p:spPr>
           <a:xfrm>
-            <a:off x="3273552" y="3659123"/>
+            <a:off x="3273552" y="4152899"/>
             <a:ext cx="2414016" cy="302513"/>
           </a:xfrm>
           <a:prstGeom prst="rect">
@@ -11943,7 +11943,7 @@
         </p:nvSpPr>
         <p:spPr>
           <a:xfrm>
-            <a:off x="3273552" y="3906772"/>
+            <a:off x="3273552" y="4455412"/>
             <a:ext cx="2414016" cy="302513"/>
           </a:xfrm>
           <a:prstGeom prst="rect">
@@ -11977,7 +11977,7 @@
         </p:nvSpPr>
         <p:spPr>
           <a:xfrm>
-            <a:off x="3273552" y="4154421"/>
+            <a:off x="3273552" y="4757925"/>
             <a:ext cx="2414016" cy="302513"/>
           </a:xfrm>
           <a:prstGeom prst="rect">
@@ -12011,7 +12011,7 @@
         </p:nvSpPr>
         <p:spPr>
           <a:xfrm>
-            <a:off x="3273552" y="4402070"/>
+            <a:off x="3273552" y="5060438"/>
             <a:ext cx="2414016" cy="302513"/>
           </a:xfrm>
           <a:prstGeom prst="rect">
@@ -12045,7 +12045,7 @@
         </p:nvSpPr>
         <p:spPr>
           <a:xfrm>
-            <a:off x="3273552" y="4649719"/>
+            <a:off x="3273552" y="5362951"/>
             <a:ext cx="2414016" cy="302513"/>
           </a:xfrm>
           <a:prstGeom prst="rect">
@@ -12079,8 +12079,8 @@
         </p:nvSpPr>
         <p:spPr>
           <a:xfrm>
-            <a:off x="5943600" y="3054858"/>
-            <a:ext cx="2743200" cy="2043684"/>
+            <a:off x="5943600" y="3438906"/>
+            <a:ext cx="2743200" cy="2427732"/>
           </a:xfrm>
           <a:prstGeom prst="rect">
             <a:avLst/>
@@ -12122,7 +12122,7 @@
         </p:nvSpPr>
         <p:spPr>
           <a:xfrm>
-            <a:off x="6108192" y="3182874"/>
+            <a:off x="6108192" y="3566922"/>
             <a:ext cx="2414016" cy="283464"/>
           </a:xfrm>
           <a:prstGeom prst="rect">
@@ -12156,7 +12156,7 @@
         </p:nvSpPr>
         <p:spPr>
           <a:xfrm>
-            <a:off x="6108192" y="3411474"/>
+            <a:off x="6108192" y="3850386"/>
             <a:ext cx="2414016" cy="302513"/>
           </a:xfrm>
           <a:prstGeom prst="rect">
@@ -12190,7 +12190,7 @@
         </p:nvSpPr>
         <p:spPr>
           <a:xfrm>
-            <a:off x="6108192" y="3659123"/>
+            <a:off x="6108192" y="4152899"/>
             <a:ext cx="2414016" cy="302513"/>
           </a:xfrm>
           <a:prstGeom prst="rect">
@@ -12224,7 +12224,7 @@
         </p:nvSpPr>
         <p:spPr>
           <a:xfrm>
-            <a:off x="6108192" y="3906772"/>
+            <a:off x="6108192" y="4455412"/>
             <a:ext cx="2414016" cy="302513"/>
           </a:xfrm>
           <a:prstGeom prst="rect">
@@ -12258,7 +12258,7 @@
         </p:nvSpPr>
         <p:spPr>
           <a:xfrm>
-            <a:off x="6108192" y="4154421"/>
+            <a:off x="6108192" y="4757925"/>
             <a:ext cx="2414016" cy="302513"/>
           </a:xfrm>
           <a:prstGeom prst="rect">
@@ -12292,7 +12292,7 @@
         </p:nvSpPr>
         <p:spPr>
           <a:xfrm>
-            <a:off x="6108192" y="4402070"/>
+            <a:off x="6108192" y="5060438"/>
             <a:ext cx="2414016" cy="302513"/>
           </a:xfrm>
           <a:prstGeom prst="rect">
@@ -12326,7 +12326,7 @@
         </p:nvSpPr>
         <p:spPr>
           <a:xfrm>
-            <a:off x="6108192" y="4649719"/>
+            <a:off x="6108192" y="5362951"/>
             <a:ext cx="2414016" cy="302513"/>
           </a:xfrm>
           <a:prstGeom prst="rect">
@@ -12360,8 +12360,8 @@
         </p:nvSpPr>
         <p:spPr>
           <a:xfrm>
-            <a:off x="8732520" y="3054858"/>
-            <a:ext cx="3108960" cy="2024633"/>
+            <a:off x="8732520" y="3438906"/>
+            <a:ext cx="3108960" cy="2408682"/>
           </a:xfrm>
           <a:prstGeom prst="rect">
             <a:avLst/>
@@ -12403,7 +12403,7 @@
         </p:nvSpPr>
         <p:spPr>
           <a:xfrm>
-            <a:off x="8897112" y="3182874"/>
+            <a:off x="8897112" y="3566922"/>
             <a:ext cx="2779776" cy="283464"/>
           </a:xfrm>
           <a:prstGeom prst="rect">
@@ -12437,7 +12437,7 @@
         </p:nvSpPr>
         <p:spPr>
           <a:xfrm>
-            <a:off x="8897112" y="3411474"/>
+            <a:off x="8897112" y="3850386"/>
             <a:ext cx="2779776" cy="302513"/>
           </a:xfrm>
           <a:prstGeom prst="rect">
@@ -12471,7 +12471,7 @@
         </p:nvSpPr>
         <p:spPr>
           <a:xfrm>
-            <a:off x="8897112" y="3659123"/>
+            <a:off x="8897112" y="4152899"/>
             <a:ext cx="2779776" cy="302513"/>
           </a:xfrm>
           <a:prstGeom prst="rect">
@@ -12505,7 +12505,7 @@
         </p:nvSpPr>
         <p:spPr>
           <a:xfrm>
-            <a:off x="8897112" y="3906772"/>
+            <a:off x="8897112" y="4455412"/>
             <a:ext cx="2779776" cy="302513"/>
           </a:xfrm>
           <a:prstGeom prst="rect">
@@ -12539,7 +12539,7 @@
         </p:nvSpPr>
         <p:spPr>
           <a:xfrm>
-            <a:off x="8897112" y="4154421"/>
+            <a:off x="8897112" y="4757925"/>
             <a:ext cx="2779776" cy="283464"/>
           </a:xfrm>
           <a:prstGeom prst="rect">
@@ -12573,7 +12573,7 @@
         </p:nvSpPr>
         <p:spPr>
           <a:xfrm>
-            <a:off x="8897112" y="4383021"/>
+            <a:off x="8897112" y="5041389"/>
             <a:ext cx="2779776" cy="302513"/>
           </a:xfrm>
           <a:prstGeom prst="rect">
@@ -12607,7 +12607,7 @@
         </p:nvSpPr>
         <p:spPr>
           <a:xfrm>
-            <a:off x="8897112" y="4630670"/>
+            <a:off x="8897112" y="5343902"/>
             <a:ext cx="2779776" cy="302513"/>
           </a:xfrm>
           <a:prstGeom prst="rect">
@@ -12859,7 +12859,7 @@
         <p:spPr>
           <a:xfrm>
             <a:off x="274320" y="749808"/>
-            <a:ext cx="4937760" cy="4005834"/>
+            <a:ext cx="4937760" cy="4828794"/>
           </a:xfrm>
           <a:prstGeom prst="rect">
             <a:avLst/>
@@ -12935,7 +12935,7 @@
         </p:nvSpPr>
         <p:spPr>
           <a:xfrm>
-            <a:off x="438912" y="1106424"/>
+            <a:off x="438912" y="1161288"/>
             <a:ext cx="4608576" cy="302513"/>
           </a:xfrm>
           <a:prstGeom prst="rect">
@@ -12969,7 +12969,7 @@
         </p:nvSpPr>
         <p:spPr>
           <a:xfrm>
-            <a:off x="438912" y="1354073"/>
+            <a:off x="438912" y="1463801"/>
             <a:ext cx="4608576" cy="302513"/>
           </a:xfrm>
           <a:prstGeom prst="rect">
@@ -13003,7 +13003,7 @@
         </p:nvSpPr>
         <p:spPr>
           <a:xfrm>
-            <a:off x="438912" y="1601722"/>
+            <a:off x="438912" y="1766314"/>
             <a:ext cx="4608576" cy="302513"/>
           </a:xfrm>
           <a:prstGeom prst="rect">
@@ -13037,7 +13037,7 @@
         </p:nvSpPr>
         <p:spPr>
           <a:xfrm>
-            <a:off x="438912" y="1849371"/>
+            <a:off x="438912" y="2068827"/>
             <a:ext cx="4608576" cy="302513"/>
           </a:xfrm>
           <a:prstGeom prst="rect">
@@ -13071,7 +13071,7 @@
         </p:nvSpPr>
         <p:spPr>
           <a:xfrm>
-            <a:off x="438912" y="2097020"/>
+            <a:off x="438912" y="2371340"/>
             <a:ext cx="4608576" cy="302513"/>
           </a:xfrm>
           <a:prstGeom prst="rect">
@@ -13105,7 +13105,7 @@
         </p:nvSpPr>
         <p:spPr>
           <a:xfrm>
-            <a:off x="438912" y="2344669"/>
+            <a:off x="438912" y="2673853"/>
             <a:ext cx="4608576" cy="302513"/>
           </a:xfrm>
           <a:prstGeom prst="rect">
@@ -13139,7 +13139,7 @@
         </p:nvSpPr>
         <p:spPr>
           <a:xfrm>
-            <a:off x="438912" y="2592318"/>
+            <a:off x="438912" y="2976366"/>
             <a:ext cx="4608576" cy="302513"/>
           </a:xfrm>
           <a:prstGeom prst="rect">
@@ -13173,7 +13173,7 @@
         </p:nvSpPr>
         <p:spPr>
           <a:xfrm>
-            <a:off x="438912" y="2839967"/>
+            <a:off x="438912" y="3278879"/>
             <a:ext cx="4608576" cy="302513"/>
           </a:xfrm>
           <a:prstGeom prst="rect">
@@ -13207,7 +13207,7 @@
         </p:nvSpPr>
         <p:spPr>
           <a:xfrm>
-            <a:off x="438912" y="3087616"/>
+            <a:off x="438912" y="3581392"/>
             <a:ext cx="4608576" cy="283464"/>
           </a:xfrm>
           <a:prstGeom prst="rect">
@@ -13241,7 +13241,7 @@
         </p:nvSpPr>
         <p:spPr>
           <a:xfrm>
-            <a:off x="438912" y="3316216"/>
+            <a:off x="438912" y="3864856"/>
             <a:ext cx="4608576" cy="302513"/>
           </a:xfrm>
           <a:prstGeom prst="rect">
@@ -13275,7 +13275,7 @@
         </p:nvSpPr>
         <p:spPr>
           <a:xfrm>
-            <a:off x="438912" y="3563865"/>
+            <a:off x="438912" y="4167369"/>
             <a:ext cx="4608576" cy="302513"/>
           </a:xfrm>
           <a:prstGeom prst="rect">
@@ -13309,7 +13309,7 @@
         </p:nvSpPr>
         <p:spPr>
           <a:xfrm>
-            <a:off x="438912" y="3811514"/>
+            <a:off x="438912" y="4469882"/>
             <a:ext cx="4608576" cy="302513"/>
           </a:xfrm>
           <a:prstGeom prst="rect">
@@ -13343,7 +13343,7 @@
         </p:nvSpPr>
         <p:spPr>
           <a:xfrm>
-            <a:off x="438912" y="4059163"/>
+            <a:off x="438912" y="4772395"/>
             <a:ext cx="4608576" cy="302513"/>
           </a:xfrm>
           <a:prstGeom prst="rect">
@@ -13377,7 +13377,7 @@
         </p:nvSpPr>
         <p:spPr>
           <a:xfrm>
-            <a:off x="438912" y="4306812"/>
+            <a:off x="438912" y="5074908"/>
             <a:ext cx="4608576" cy="302513"/>
           </a:xfrm>
           <a:prstGeom prst="rect">
@@ -13412,7 +13412,7 @@
         <p:spPr>
           <a:xfrm>
             <a:off x="5349240" y="749808"/>
-            <a:ext cx="3200400" cy="3739134"/>
+            <a:ext cx="3200400" cy="4507230"/>
           </a:xfrm>
           <a:prstGeom prst="rect">
             <a:avLst/>
@@ -13488,7 +13488,7 @@
         </p:nvSpPr>
         <p:spPr>
           <a:xfrm>
-            <a:off x="5513832" y="1106424"/>
+            <a:off x="5513832" y="1161288"/>
             <a:ext cx="2871216" cy="302513"/>
           </a:xfrm>
           <a:prstGeom prst="rect">
@@ -13522,7 +13522,7 @@
         </p:nvSpPr>
         <p:spPr>
           <a:xfrm>
-            <a:off x="5513832" y="1354073"/>
+            <a:off x="5513832" y="1463801"/>
             <a:ext cx="2871216" cy="302513"/>
           </a:xfrm>
           <a:prstGeom prst="rect">
@@ -13556,7 +13556,7 @@
         </p:nvSpPr>
         <p:spPr>
           <a:xfrm>
-            <a:off x="5513832" y="1601722"/>
+            <a:off x="5513832" y="1766314"/>
             <a:ext cx="2871216" cy="302513"/>
           </a:xfrm>
           <a:prstGeom prst="rect">
@@ -13590,7 +13590,7 @@
         </p:nvSpPr>
         <p:spPr>
           <a:xfrm>
-            <a:off x="5513832" y="1849371"/>
+            <a:off x="5513832" y="2068827"/>
             <a:ext cx="2871216" cy="302513"/>
           </a:xfrm>
           <a:prstGeom prst="rect">
@@ -13624,7 +13624,7 @@
         </p:nvSpPr>
         <p:spPr>
           <a:xfrm>
-            <a:off x="5513832" y="2097020"/>
+            <a:off x="5513832" y="2371340"/>
             <a:ext cx="2871216" cy="302513"/>
           </a:xfrm>
           <a:prstGeom prst="rect">
@@ -13658,7 +13658,7 @@
         </p:nvSpPr>
         <p:spPr>
           <a:xfrm>
-            <a:off x="5513832" y="2344669"/>
+            <a:off x="5513832" y="2673853"/>
             <a:ext cx="2871216" cy="283464"/>
           </a:xfrm>
           <a:prstGeom prst="rect">
@@ -13692,7 +13692,7 @@
         </p:nvSpPr>
         <p:spPr>
           <a:xfrm>
-            <a:off x="5513832" y="2573269"/>
+            <a:off x="5513832" y="2957317"/>
             <a:ext cx="2871216" cy="302513"/>
           </a:xfrm>
           <a:prstGeom prst="rect">
@@ -13726,7 +13726,7 @@
         </p:nvSpPr>
         <p:spPr>
           <a:xfrm>
-            <a:off x="5513832" y="2820918"/>
+            <a:off x="5513832" y="3259830"/>
             <a:ext cx="2871216" cy="302513"/>
           </a:xfrm>
           <a:prstGeom prst="rect">
@@ -13760,7 +13760,7 @@
         </p:nvSpPr>
         <p:spPr>
           <a:xfrm>
-            <a:off x="5513832" y="3068567"/>
+            <a:off x="5513832" y="3562343"/>
             <a:ext cx="2871216" cy="283464"/>
           </a:xfrm>
           <a:prstGeom prst="rect">
@@ -13794,7 +13794,7 @@
         </p:nvSpPr>
         <p:spPr>
           <a:xfrm>
-            <a:off x="5513832" y="3297167"/>
+            <a:off x="5513832" y="3845807"/>
             <a:ext cx="2871216" cy="302513"/>
           </a:xfrm>
           <a:prstGeom prst="rect">
@@ -13828,7 +13828,7 @@
         </p:nvSpPr>
         <p:spPr>
           <a:xfrm>
-            <a:off x="5513832" y="3544816"/>
+            <a:off x="5513832" y="4148320"/>
             <a:ext cx="2871216" cy="302513"/>
           </a:xfrm>
           <a:prstGeom prst="rect">
@@ -13862,7 +13862,7 @@
         </p:nvSpPr>
         <p:spPr>
           <a:xfrm>
-            <a:off x="5513832" y="3792465"/>
+            <a:off x="5513832" y="4450833"/>
             <a:ext cx="2871216" cy="302513"/>
           </a:xfrm>
           <a:prstGeom prst="rect">
@@ -13896,7 +13896,7 @@
         </p:nvSpPr>
         <p:spPr>
           <a:xfrm>
-            <a:off x="5513832" y="4040114"/>
+            <a:off x="5513832" y="4753346"/>
             <a:ext cx="2871216" cy="302513"/>
           </a:xfrm>
           <a:prstGeom prst="rect">
@@ -14093,7 +14093,7 @@
         <p:spPr>
           <a:xfrm>
             <a:off x="274320" y="749808"/>
-            <a:ext cx="4937760" cy="3491483"/>
+            <a:ext cx="4937760" cy="4149851"/>
           </a:xfrm>
           <a:prstGeom prst="rect">
             <a:avLst/>
@@ -14169,7 +14169,7 @@
         </p:nvSpPr>
         <p:spPr>
           <a:xfrm>
-            <a:off x="438912" y="1125473"/>
+            <a:off x="438912" y="1180337"/>
             <a:ext cx="4608576" cy="321564"/>
           </a:xfrm>
           <a:prstGeom prst="rect">
@@ -14203,7 +14203,7 @@
         </p:nvSpPr>
         <p:spPr>
           <a:xfrm>
-            <a:off x="438912" y="1392173"/>
+            <a:off x="438912" y="1501901"/>
             <a:ext cx="4608576" cy="321564"/>
           </a:xfrm>
           <a:prstGeom prst="rect">
@@ -14237,7 +14237,7 @@
         </p:nvSpPr>
         <p:spPr>
           <a:xfrm>
-            <a:off x="438912" y="1658873"/>
+            <a:off x="438912" y="1823465"/>
             <a:ext cx="4608576" cy="321564"/>
           </a:xfrm>
           <a:prstGeom prst="rect">
@@ -14271,7 +14271,7 @@
         </p:nvSpPr>
         <p:spPr>
           <a:xfrm>
-            <a:off x="438912" y="1925573"/>
+            <a:off x="438912" y="2145029"/>
             <a:ext cx="4608576" cy="321564"/>
           </a:xfrm>
           <a:prstGeom prst="rect">
@@ -14305,7 +14305,7 @@
         </p:nvSpPr>
         <p:spPr>
           <a:xfrm>
-            <a:off x="438912" y="2192273"/>
+            <a:off x="438912" y="2466593"/>
             <a:ext cx="4608576" cy="302513"/>
           </a:xfrm>
           <a:prstGeom prst="rect">
@@ -14339,7 +14339,7 @@
         </p:nvSpPr>
         <p:spPr>
           <a:xfrm>
-            <a:off x="438912" y="2439922"/>
+            <a:off x="438912" y="2769106"/>
             <a:ext cx="4608576" cy="321564"/>
           </a:xfrm>
           <a:prstGeom prst="rect">
@@ -14373,7 +14373,7 @@
         </p:nvSpPr>
         <p:spPr>
           <a:xfrm>
-            <a:off x="438912" y="2706622"/>
+            <a:off x="438912" y="3090670"/>
             <a:ext cx="4608576" cy="321564"/>
           </a:xfrm>
           <a:prstGeom prst="rect">
@@ -14407,7 +14407,7 @@
         </p:nvSpPr>
         <p:spPr>
           <a:xfrm>
-            <a:off x="438912" y="2973322"/>
+            <a:off x="438912" y="3412234"/>
             <a:ext cx="4608576" cy="321564"/>
           </a:xfrm>
           <a:prstGeom prst="rect">
@@ -14441,7 +14441,7 @@
         </p:nvSpPr>
         <p:spPr>
           <a:xfrm>
-            <a:off x="438912" y="3240022"/>
+            <a:off x="438912" y="3733798"/>
             <a:ext cx="4608576" cy="321564"/>
           </a:xfrm>
           <a:prstGeom prst="rect">
@@ -14475,7 +14475,7 @@
         </p:nvSpPr>
         <p:spPr>
           <a:xfrm>
-            <a:off x="438912" y="3506722"/>
+            <a:off x="438912" y="4055362"/>
             <a:ext cx="4608576" cy="321564"/>
           </a:xfrm>
           <a:prstGeom prst="rect">
@@ -14509,7 +14509,7 @@
         </p:nvSpPr>
         <p:spPr>
           <a:xfrm>
-            <a:off x="438912" y="3773422"/>
+            <a:off x="438912" y="4376926"/>
             <a:ext cx="4608576" cy="321564"/>
           </a:xfrm>
           <a:prstGeom prst="rect">
@@ -14544,7 +14544,7 @@
         <p:spPr>
           <a:xfrm>
             <a:off x="5349240" y="749808"/>
-            <a:ext cx="3200400" cy="2824733"/>
+            <a:ext cx="3200400" cy="3318510"/>
           </a:xfrm>
           <a:prstGeom prst="rect">
             <a:avLst/>
@@ -14620,7 +14620,7 @@
         </p:nvSpPr>
         <p:spPr>
           <a:xfrm>
-            <a:off x="5513832" y="1125473"/>
+            <a:off x="5513832" y="1180337"/>
             <a:ext cx="2871216" cy="321564"/>
           </a:xfrm>
           <a:prstGeom prst="rect">
@@ -14654,7 +14654,7 @@
         </p:nvSpPr>
         <p:spPr>
           <a:xfrm>
-            <a:off x="5513832" y="1392173"/>
+            <a:off x="5513832" y="1501901"/>
             <a:ext cx="2871216" cy="321564"/>
           </a:xfrm>
           <a:prstGeom prst="rect">
@@ -14688,7 +14688,7 @@
         </p:nvSpPr>
         <p:spPr>
           <a:xfrm>
-            <a:off x="5513832" y="1658873"/>
+            <a:off x="5513832" y="1823465"/>
             <a:ext cx="2871216" cy="321564"/>
           </a:xfrm>
           <a:prstGeom prst="rect">
@@ -14722,7 +14722,7 @@
         </p:nvSpPr>
         <p:spPr>
           <a:xfrm>
-            <a:off x="5513832" y="2058923"/>
+            <a:off x="5513832" y="2278379"/>
             <a:ext cx="2871216" cy="302513"/>
           </a:xfrm>
           <a:prstGeom prst="rect">
@@ -14756,7 +14756,7 @@
         </p:nvSpPr>
         <p:spPr>
           <a:xfrm>
-            <a:off x="5513832" y="2306572"/>
+            <a:off x="5513832" y="2580892"/>
             <a:ext cx="2871216" cy="321564"/>
           </a:xfrm>
           <a:prstGeom prst="rect">
@@ -14790,7 +14790,7 @@
         </p:nvSpPr>
         <p:spPr>
           <a:xfrm>
-            <a:off x="5513832" y="2573272"/>
+            <a:off x="5513832" y="2902456"/>
             <a:ext cx="2871216" cy="321564"/>
           </a:xfrm>
           <a:prstGeom prst="rect">
@@ -14824,7 +14824,7 @@
         </p:nvSpPr>
         <p:spPr>
           <a:xfrm>
-            <a:off x="5513832" y="2839972"/>
+            <a:off x="5513832" y="3224020"/>
             <a:ext cx="2871216" cy="321564"/>
           </a:xfrm>
           <a:prstGeom prst="rect">
@@ -14858,7 +14858,7 @@
         </p:nvSpPr>
         <p:spPr>
           <a:xfrm>
-            <a:off x="5513832" y="3106672"/>
+            <a:off x="5513832" y="3545584"/>
             <a:ext cx="2871216" cy="321564"/>
           </a:xfrm>
           <a:prstGeom prst="rect">
@@ -14892,8 +14892,8 @@
         </p:nvSpPr>
         <p:spPr>
           <a:xfrm>
-            <a:off x="274320" y="4369307"/>
-            <a:ext cx="8229600" cy="1300734"/>
+            <a:off x="274320" y="5027675"/>
+            <a:ext cx="8229600" cy="1520190"/>
           </a:xfrm>
           <a:prstGeom prst="rect">
             <a:avLst/>
@@ -14935,7 +14935,7 @@
         </p:nvSpPr>
         <p:spPr>
           <a:xfrm>
-            <a:off x="438912" y="4497323"/>
+            <a:off x="438912" y="5155691"/>
             <a:ext cx="7900416" cy="283464"/>
           </a:xfrm>
           <a:prstGeom prst="rect">
@@ -14969,7 +14969,7 @@
         </p:nvSpPr>
         <p:spPr>
           <a:xfrm>
-            <a:off x="438912" y="4725923"/>
+            <a:off x="438912" y="5439155"/>
             <a:ext cx="7900416" cy="302513"/>
           </a:xfrm>
           <a:prstGeom prst="rect">
@@ -15003,7 +15003,7 @@
         </p:nvSpPr>
         <p:spPr>
           <a:xfrm>
-            <a:off x="438912" y="4973572"/>
+            <a:off x="438912" y="5741668"/>
             <a:ext cx="7900416" cy="302513"/>
           </a:xfrm>
           <a:prstGeom prst="rect">
@@ -15037,7 +15037,7 @@
         </p:nvSpPr>
         <p:spPr>
           <a:xfrm>
-            <a:off x="438912" y="5221221"/>
+            <a:off x="438912" y="6044181"/>
             <a:ext cx="7900416" cy="302513"/>
           </a:xfrm>
           <a:prstGeom prst="rect">
@@ -15210,7 +15210,7 @@
         <p:spPr>
           <a:xfrm>
             <a:off x="274320" y="749808"/>
-            <a:ext cx="3749039" cy="2424684"/>
+            <a:ext cx="3749039" cy="2863596"/>
           </a:xfrm>
           <a:prstGeom prst="rect">
             <a:avLst/>
@@ -15286,7 +15286,7 @@
         </p:nvSpPr>
         <p:spPr>
           <a:xfrm>
-            <a:off x="438912" y="1125473"/>
+            <a:off x="438912" y="1180337"/>
             <a:ext cx="3419855" cy="321564"/>
           </a:xfrm>
           <a:prstGeom prst="rect">
@@ -15320,7 +15320,7 @@
         </p:nvSpPr>
         <p:spPr>
           <a:xfrm>
-            <a:off x="438912" y="1392173"/>
+            <a:off x="438912" y="1501901"/>
             <a:ext cx="3419855" cy="321564"/>
           </a:xfrm>
           <a:prstGeom prst="rect">
@@ -15354,7 +15354,7 @@
         </p:nvSpPr>
         <p:spPr>
           <a:xfrm>
-            <a:off x="438912" y="1658873"/>
+            <a:off x="438912" y="1823465"/>
             <a:ext cx="3419855" cy="321564"/>
           </a:xfrm>
           <a:prstGeom prst="rect">
@@ -15388,7 +15388,7 @@
         </p:nvSpPr>
         <p:spPr>
           <a:xfrm>
-            <a:off x="438912" y="1925573"/>
+            <a:off x="438912" y="2145029"/>
             <a:ext cx="3419855" cy="302513"/>
           </a:xfrm>
           <a:prstGeom prst="rect">
@@ -15422,7 +15422,7 @@
         </p:nvSpPr>
         <p:spPr>
           <a:xfrm>
-            <a:off x="438912" y="2173222"/>
+            <a:off x="438912" y="2447542"/>
             <a:ext cx="3419855" cy="321564"/>
           </a:xfrm>
           <a:prstGeom prst="rect">
@@ -15456,7 +15456,7 @@
         </p:nvSpPr>
         <p:spPr>
           <a:xfrm>
-            <a:off x="438912" y="2439922"/>
+            <a:off x="438912" y="2769106"/>
             <a:ext cx="3419855" cy="321564"/>
           </a:xfrm>
           <a:prstGeom prst="rect">
@@ -15490,7 +15490,7 @@
         </p:nvSpPr>
         <p:spPr>
           <a:xfrm>
-            <a:off x="438912" y="2706622"/>
+            <a:off x="438912" y="3090670"/>
             <a:ext cx="3419855" cy="321564"/>
           </a:xfrm>
           <a:prstGeom prst="rect">
@@ -15525,7 +15525,7 @@
         <p:spPr>
           <a:xfrm>
             <a:off x="4160520" y="749808"/>
-            <a:ext cx="3749039" cy="2691384"/>
+            <a:ext cx="3749039" cy="3185159"/>
           </a:xfrm>
           <a:prstGeom prst="rect">
             <a:avLst/>
@@ -15601,7 +15601,7 @@
         </p:nvSpPr>
         <p:spPr>
           <a:xfrm>
-            <a:off x="4325112" y="1125473"/>
+            <a:off x="4325112" y="1180337"/>
             <a:ext cx="3419855" cy="321564"/>
           </a:xfrm>
           <a:prstGeom prst="rect">
@@ -15635,7 +15635,7 @@
         </p:nvSpPr>
         <p:spPr>
           <a:xfrm>
-            <a:off x="4325112" y="1392173"/>
+            <a:off x="4325112" y="1501901"/>
             <a:ext cx="3419855" cy="321564"/>
           </a:xfrm>
           <a:prstGeom prst="rect">
@@ -15669,7 +15669,7 @@
         </p:nvSpPr>
         <p:spPr>
           <a:xfrm>
-            <a:off x="4325112" y="1658873"/>
+            <a:off x="4325112" y="1823465"/>
             <a:ext cx="3419855" cy="321564"/>
           </a:xfrm>
           <a:prstGeom prst="rect">
@@ -15703,7 +15703,7 @@
         </p:nvSpPr>
         <p:spPr>
           <a:xfrm>
-            <a:off x="4325112" y="1925573"/>
+            <a:off x="4325112" y="2145029"/>
             <a:ext cx="3419855" cy="321564"/>
           </a:xfrm>
           <a:prstGeom prst="rect">
@@ -15737,7 +15737,7 @@
         </p:nvSpPr>
         <p:spPr>
           <a:xfrm>
-            <a:off x="4325112" y="2192273"/>
+            <a:off x="4325112" y="2466593"/>
             <a:ext cx="3419855" cy="321564"/>
           </a:xfrm>
           <a:prstGeom prst="rect">
@@ -15771,7 +15771,7 @@
         </p:nvSpPr>
         <p:spPr>
           <a:xfrm>
-            <a:off x="4325112" y="2458973"/>
+            <a:off x="4325112" y="2788157"/>
             <a:ext cx="3419855" cy="302513"/>
           </a:xfrm>
           <a:prstGeom prst="rect">
@@ -15805,7 +15805,7 @@
         </p:nvSpPr>
         <p:spPr>
           <a:xfrm>
-            <a:off x="4325112" y="2706622"/>
+            <a:off x="4325112" y="3090670"/>
             <a:ext cx="3419855" cy="321564"/>
           </a:xfrm>
           <a:prstGeom prst="rect">
@@ -15839,7 +15839,7 @@
         </p:nvSpPr>
         <p:spPr>
           <a:xfrm>
-            <a:off x="4325112" y="2973322"/>
+            <a:off x="4325112" y="3412234"/>
             <a:ext cx="3419855" cy="321564"/>
           </a:xfrm>
           <a:prstGeom prst="rect">
@@ -15874,7 +15874,7 @@
         <p:spPr>
           <a:xfrm>
             <a:off x="8046720" y="749808"/>
-            <a:ext cx="3840480" cy="2157984"/>
+            <a:ext cx="3840480" cy="2542032"/>
           </a:xfrm>
           <a:prstGeom prst="rect">
             <a:avLst/>
@@ -15950,7 +15950,7 @@
         </p:nvSpPr>
         <p:spPr>
           <a:xfrm>
-            <a:off x="8211312" y="1125473"/>
+            <a:off x="8211312" y="1180337"/>
             <a:ext cx="3511296" cy="321564"/>
           </a:xfrm>
           <a:prstGeom prst="rect">
@@ -15984,7 +15984,7 @@
         </p:nvSpPr>
         <p:spPr>
           <a:xfrm>
-            <a:off x="8211312" y="1392173"/>
+            <a:off x="8211312" y="1501901"/>
             <a:ext cx="3511296" cy="321564"/>
           </a:xfrm>
           <a:prstGeom prst="rect">
@@ -16018,7 +16018,7 @@
         </p:nvSpPr>
         <p:spPr>
           <a:xfrm>
-            <a:off x="8211312" y="1658873"/>
+            <a:off x="8211312" y="1823465"/>
             <a:ext cx="3511296" cy="321564"/>
           </a:xfrm>
           <a:prstGeom prst="rect">
@@ -16052,7 +16052,7 @@
         </p:nvSpPr>
         <p:spPr>
           <a:xfrm>
-            <a:off x="8211312" y="1925573"/>
+            <a:off x="8211312" y="2145029"/>
             <a:ext cx="3511296" cy="321564"/>
           </a:xfrm>
           <a:prstGeom prst="rect">
@@ -16086,7 +16086,7 @@
         </p:nvSpPr>
         <p:spPr>
           <a:xfrm>
-            <a:off x="8211312" y="2192273"/>
+            <a:off x="8211312" y="2466593"/>
             <a:ext cx="3511296" cy="302513"/>
           </a:xfrm>
           <a:prstGeom prst="rect">
@@ -16120,7 +16120,7 @@
         </p:nvSpPr>
         <p:spPr>
           <a:xfrm>
-            <a:off x="8211312" y="2439922"/>
+            <a:off x="8211312" y="2769106"/>
             <a:ext cx="3511296" cy="321564"/>
           </a:xfrm>
           <a:prstGeom prst="rect">
@@ -16154,8 +16154,8 @@
         </p:nvSpPr>
         <p:spPr>
           <a:xfrm>
-            <a:off x="274320" y="3569208"/>
-            <a:ext cx="3749039" cy="1110234"/>
+            <a:off x="274320" y="4062983"/>
+            <a:ext cx="3749039" cy="1274826"/>
           </a:xfrm>
           <a:prstGeom prst="rect">
             <a:avLst/>
@@ -16197,7 +16197,7 @@
         </p:nvSpPr>
         <p:spPr>
           <a:xfrm>
-            <a:off x="438912" y="3697224"/>
+            <a:off x="438912" y="4190999"/>
             <a:ext cx="3419855" cy="302513"/>
           </a:xfrm>
           <a:prstGeom prst="rect">
@@ -16231,7 +16231,7 @@
         </p:nvSpPr>
         <p:spPr>
           <a:xfrm>
-            <a:off x="438912" y="3944873"/>
+            <a:off x="438912" y="4493512"/>
             <a:ext cx="3419855" cy="321564"/>
           </a:xfrm>
           <a:prstGeom prst="rect">
@@ -16265,7 +16265,7 @@
         </p:nvSpPr>
         <p:spPr>
           <a:xfrm>
-            <a:off x="438912" y="4211573"/>
+            <a:off x="438912" y="4815076"/>
             <a:ext cx="3419855" cy="321564"/>
           </a:xfrm>
           <a:prstGeom prst="rect">
@@ -16299,8 +16299,8 @@
         </p:nvSpPr>
         <p:spPr>
           <a:xfrm>
-            <a:off x="4160520" y="3569208"/>
-            <a:ext cx="3749039" cy="1376934"/>
+            <a:off x="4160520" y="4062983"/>
+            <a:ext cx="3749039" cy="1596390"/>
           </a:xfrm>
           <a:prstGeom prst="rect">
             <a:avLst/>
@@ -16342,7 +16342,7 @@
         </p:nvSpPr>
         <p:spPr>
           <a:xfrm>
-            <a:off x="4325112" y="3697224"/>
+            <a:off x="4325112" y="4190999"/>
             <a:ext cx="3419855" cy="302513"/>
           </a:xfrm>
           <a:prstGeom prst="rect">
@@ -16376,7 +16376,7 @@
         </p:nvSpPr>
         <p:spPr>
           <a:xfrm>
-            <a:off x="4325112" y="3944873"/>
+            <a:off x="4325112" y="4493512"/>
             <a:ext cx="3419855" cy="321564"/>
           </a:xfrm>
           <a:prstGeom prst="rect">
@@ -16410,7 +16410,7 @@
         </p:nvSpPr>
         <p:spPr>
           <a:xfrm>
-            <a:off x="4325112" y="4211573"/>
+            <a:off x="4325112" y="4815076"/>
             <a:ext cx="3419855" cy="321564"/>
           </a:xfrm>
           <a:prstGeom prst="rect">
@@ -16444,7 +16444,7 @@
         </p:nvSpPr>
         <p:spPr>
           <a:xfrm>
-            <a:off x="4325112" y="4478273"/>
+            <a:off x="4325112" y="5136640"/>
             <a:ext cx="3419855" cy="321564"/>
           </a:xfrm>
           <a:prstGeom prst="rect">
@@ -16478,8 +16478,8 @@
         </p:nvSpPr>
         <p:spPr>
           <a:xfrm>
-            <a:off x="8046720" y="3569208"/>
-            <a:ext cx="3840480" cy="1376934"/>
+            <a:off x="8046720" y="4062983"/>
+            <a:ext cx="3840480" cy="1596390"/>
           </a:xfrm>
           <a:prstGeom prst="rect">
             <a:avLst/>
@@ -16521,7 +16521,7 @@
         </p:nvSpPr>
         <p:spPr>
           <a:xfrm>
-            <a:off x="8211312" y="3697224"/>
+            <a:off x="8211312" y="4190999"/>
             <a:ext cx="3511296" cy="302513"/>
           </a:xfrm>
           <a:prstGeom prst="rect">
@@ -16555,7 +16555,7 @@
         </p:nvSpPr>
         <p:spPr>
           <a:xfrm>
-            <a:off x="8211312" y="3944873"/>
+            <a:off x="8211312" y="4493512"/>
             <a:ext cx="3511296" cy="321564"/>
           </a:xfrm>
           <a:prstGeom prst="rect">
@@ -16589,7 +16589,7 @@
         </p:nvSpPr>
         <p:spPr>
           <a:xfrm>
-            <a:off x="8211312" y="4211573"/>
+            <a:off x="8211312" y="4815076"/>
             <a:ext cx="3511296" cy="321564"/>
           </a:xfrm>
           <a:prstGeom prst="rect">
@@ -16623,7 +16623,7 @@
         </p:nvSpPr>
         <p:spPr>
           <a:xfrm>
-            <a:off x="8211312" y="4478273"/>
+            <a:off x="8211312" y="5136640"/>
             <a:ext cx="3511296" cy="321564"/>
           </a:xfrm>
           <a:prstGeom prst="rect">

--- a/docs/Pellet_Burner_Components.pptx
+++ b/docs/Pellet_Burner_Components.pptx
@@ -3323,7 +3323,7 @@
                   <a:srgbClr val="AAAAAA"/>
                 </a:solidFill>
               </a:rPr>
-              <a:t>ESP32  ·  SH1106 OLED  ·  DS18B20  ·  MAX6675  ·  Relays  ·  TRIAC  ·  Buttons</a:t>
+              <a:t>ESP32  ·  SH1106 OLED  ·  DS18B20  ·  MAX6675  ·  Relays  ·  AC Dimmer  ·  Buttons</a:t>
             </a:r>
           </a:p>
         </p:txBody>
@@ -4880,7 +4880,7 @@
                             <a:srgbClr val="FFFFFF"/>
                           </a:solidFill>
                         </a:rPr>
-                        <a:t>Relay — Igniter IN</a:t>
+                        <a:t>Dimmer CH2 — Igniter</a:t>
                       </a:r>
                     </a:p>
                   </a:txBody>
@@ -4948,7 +4948,7 @@
                             <a:srgbClr val="FFFFFF"/>
                           </a:solidFill>
                         </a:rPr>
-                        <a:t>GPIO</a:t>
+                        <a:t>PWM</a:t>
                       </a:r>
                     </a:p>
                   </a:txBody>
@@ -5016,7 +5016,7 @@
                             <a:srgbClr val="AAAAAA"/>
                           </a:solidFill>
                         </a:rPr>
-                        <a:t>active LOW, relay VCC = 5 V</a:t>
+                        <a:t>DIM2 on 2-ch AC dimmer module</a:t>
                       </a:r>
                     </a:p>
                   </a:txBody>
@@ -5224,7 +5224,7 @@
                             <a:srgbClr val="FFFFFF"/>
                           </a:solidFill>
                         </a:rPr>
-                        <a:t>TRIAC gate</a:t>
+                        <a:t>Dimmer CH1 — Blower</a:t>
                       </a:r>
                     </a:p>
                   </a:txBody>
@@ -5292,7 +5292,7 @@
                             <a:srgbClr val="FFFFFF"/>
                           </a:solidFill>
                         </a:rPr>
-                        <a:t>GPIO</a:t>
+                        <a:t>PWM</a:t>
                       </a:r>
                     </a:p>
                   </a:txBody>
@@ -5360,7 +5360,7 @@
                             <a:srgbClr val="AAAAAA"/>
                           </a:solidFill>
                         </a:rPr>
-                        <a:t>330 Ω → MOC3021 → TRIAC gate</a:t>
+                        <a:t>DIM1 on 2-ch AC dimmer module</a:t>
                       </a:r>
                     </a:p>
                   </a:txBody>
@@ -6477,7 +6477,7 @@
                   <a:srgbClr val="FFFFFF"/>
                 </a:solidFill>
               </a:rPr>
-              <a:t>• Controls relays and TRIAC output</a:t>
+              <a:t>• Controls relays and AC dimmer module</a:t>
             </a:r>
           </a:p>
         </p:txBody>
@@ -7141,7 +7141,7 @@
                   <a:srgbClr val="FFFFFF"/>
                 </a:solidFill>
               </a:rPr>
-              <a:t>• GPIO26  Relay — Igniter</a:t>
+              <a:t>• GPIO26  Dimmer CH2 — Igniter</a:t>
             </a:r>
           </a:p>
         </p:txBody>
@@ -7209,7 +7209,7 @@
                   <a:srgbClr val="FFFFFF"/>
                 </a:solidFill>
               </a:rPr>
-              <a:t>• GPIO33  TRIAC gate trigger</a:t>
+              <a:t>• GPIO33  Dimmer CH1 — Blower</a:t>
             </a:r>
           </a:p>
         </p:txBody>
@@ -11156,7 +11156,7 @@
                   <a:srgbClr val="E94560"/>
                 </a:solidFill>
               </a:rPr>
-              <a:t>5V Relay Modules  —  Feeder / Igniter / Pump</a:t>
+              <a:t>5V Relay Modules  —  Feeder / Pump</a:t>
             </a:r>
           </a:p>
         </p:txBody>
@@ -11237,7 +11237,7 @@
         <p:spPr>
           <a:xfrm>
             <a:off x="274320" y="749808"/>
-            <a:ext cx="4937760" cy="2561082"/>
+            <a:ext cx="4937760" cy="3506723"/>
           </a:xfrm>
           <a:prstGeom prst="rect">
             <a:avLst/>
@@ -11511,13 +11511,115 @@
       </p:sp>
       <p:sp>
         <p:nvSpPr>
-          <p:cNvPr id="14" name="Rectangle 13"/>
+          <p:cNvPr id="14" name="TextBox 13"/>
+          <p:cNvSpPr txBox="1"/>
+          <p:nvPr/>
+        </p:nvSpPr>
+        <p:spPr>
+          <a:xfrm>
+            <a:off x="438912" y="3109721"/>
+            <a:ext cx="4608576" cy="302513"/>
+          </a:xfrm>
+          <a:prstGeom prst="rect">
+            <a:avLst/>
+          </a:prstGeom>
+          <a:noFill/>
+        </p:spPr>
+        <p:txBody>
+          <a:bodyPr wrap="square">
+            <a:spAutoFit/>
+          </a:bodyPr>
+          <a:lstStyle/>
+          <a:p>
+            <a:pPr algn="l"/>
+            <a:r>
+              <a:rPr sz="1300" b="1">
+                <a:solidFill>
+                  <a:srgbClr val="A8DADC"/>
+                </a:solidFill>
+              </a:rPr>
+              <a:t>Note</a:t>
+            </a:r>
+          </a:p>
+        </p:txBody>
+      </p:sp>
+      <p:sp>
+        <p:nvSpPr>
+          <p:cNvPr id="15" name="TextBox 14"/>
+          <p:cNvSpPr txBox="1"/>
+          <p:nvPr/>
+        </p:nvSpPr>
+        <p:spPr>
+          <a:xfrm>
+            <a:off x="438912" y="3412234"/>
+            <a:ext cx="4608576" cy="321564"/>
+          </a:xfrm>
+          <a:prstGeom prst="rect">
+            <a:avLst/>
+          </a:prstGeom>
+          <a:noFill/>
+        </p:spPr>
+        <p:txBody>
+          <a:bodyPr wrap="square">
+            <a:spAutoFit/>
+          </a:bodyPr>
+          <a:lstStyle/>
+          <a:p>
+            <a:pPr algn="l"/>
+            <a:r>
+              <a:rPr sz="1400" b="0">
+                <a:solidFill>
+                  <a:srgbClr val="FFFFFF"/>
+                </a:solidFill>
+              </a:rPr>
+              <a:t>• Igniter is now on AC dimmer CH2 — not a relay.</a:t>
+            </a:r>
+          </a:p>
+        </p:txBody>
+      </p:sp>
+      <p:sp>
+        <p:nvSpPr>
+          <p:cNvPr id="16" name="TextBox 15"/>
+          <p:cNvSpPr txBox="1"/>
+          <p:nvPr/>
+        </p:nvSpPr>
+        <p:spPr>
+          <a:xfrm>
+            <a:off x="438912" y="3733798"/>
+            <a:ext cx="4608576" cy="321564"/>
+          </a:xfrm>
+          <a:prstGeom prst="rect">
+            <a:avLst/>
+          </a:prstGeom>
+          <a:noFill/>
+        </p:spPr>
+        <p:txBody>
+          <a:bodyPr wrap="square">
+            <a:spAutoFit/>
+          </a:bodyPr>
+          <a:lstStyle/>
+          <a:p>
+            <a:pPr algn="l"/>
+            <a:r>
+              <a:rPr sz="1400" b="0">
+                <a:solidFill>
+                  <a:srgbClr val="FFFFFF"/>
+                </a:solidFill>
+              </a:rPr>
+              <a:t>• Only 2 relay modules needed for this build.</a:t>
+            </a:r>
+          </a:p>
+        </p:txBody>
+      </p:sp>
+      <p:sp>
+        <p:nvSpPr>
+          <p:cNvPr id="17" name="Rectangle 16"/>
           <p:cNvSpPr/>
           <p:nvPr/>
         </p:nvSpPr>
         <p:spPr>
           <a:xfrm>
-            <a:off x="274320" y="3438906"/>
+            <a:off x="274320" y="4384547"/>
             <a:ext cx="2743200" cy="2427732"/>
           </a:xfrm>
           <a:prstGeom prst="rect">
@@ -11554,13 +11656,13 @@
       </p:sp>
       <p:sp>
         <p:nvSpPr>
-          <p:cNvPr id="15" name="TextBox 14"/>
-          <p:cNvSpPr txBox="1"/>
-          <p:nvPr/>
-        </p:nvSpPr>
-        <p:spPr>
-          <a:xfrm>
-            <a:off x="438912" y="3566922"/>
+          <p:cNvPr id="18" name="TextBox 17"/>
+          <p:cNvSpPr txBox="1"/>
+          <p:nvPr/>
+        </p:nvSpPr>
+        <p:spPr>
+          <a:xfrm>
+            <a:off x="438912" y="4512563"/>
             <a:ext cx="2414016" cy="283464"/>
           </a:xfrm>
           <a:prstGeom prst="rect">
@@ -11588,13 +11690,13 @@
       </p:sp>
       <p:sp>
         <p:nvSpPr>
-          <p:cNvPr id="16" name="TextBox 15"/>
-          <p:cNvSpPr txBox="1"/>
-          <p:nvPr/>
-        </p:nvSpPr>
-        <p:spPr>
-          <a:xfrm>
-            <a:off x="438912" y="3850386"/>
+          <p:cNvPr id="19" name="TextBox 18"/>
+          <p:cNvSpPr txBox="1"/>
+          <p:nvPr/>
+        </p:nvSpPr>
+        <p:spPr>
+          <a:xfrm>
+            <a:off x="438912" y="4796027"/>
             <a:ext cx="2414016" cy="302513"/>
           </a:xfrm>
           <a:prstGeom prst="rect">
@@ -11622,13 +11724,13 @@
       </p:sp>
       <p:sp>
         <p:nvSpPr>
-          <p:cNvPr id="17" name="TextBox 16"/>
-          <p:cNvSpPr txBox="1"/>
-          <p:nvPr/>
-        </p:nvSpPr>
-        <p:spPr>
-          <a:xfrm>
-            <a:off x="438912" y="4152899"/>
+          <p:cNvPr id="20" name="TextBox 19"/>
+          <p:cNvSpPr txBox="1"/>
+          <p:nvPr/>
+        </p:nvSpPr>
+        <p:spPr>
+          <a:xfrm>
+            <a:off x="438912" y="5098540"/>
             <a:ext cx="2414016" cy="302513"/>
           </a:xfrm>
           <a:prstGeom prst="rect">
@@ -11656,13 +11758,13 @@
       </p:sp>
       <p:sp>
         <p:nvSpPr>
-          <p:cNvPr id="18" name="TextBox 17"/>
-          <p:cNvSpPr txBox="1"/>
-          <p:nvPr/>
-        </p:nvSpPr>
-        <p:spPr>
-          <a:xfrm>
-            <a:off x="438912" y="4455412"/>
+          <p:cNvPr id="21" name="TextBox 20"/>
+          <p:cNvSpPr txBox="1"/>
+          <p:nvPr/>
+        </p:nvSpPr>
+        <p:spPr>
+          <a:xfrm>
+            <a:off x="438912" y="5401053"/>
             <a:ext cx="2414016" cy="302513"/>
           </a:xfrm>
           <a:prstGeom prst="rect">
@@ -11690,13 +11792,13 @@
       </p:sp>
       <p:sp>
         <p:nvSpPr>
-          <p:cNvPr id="19" name="TextBox 18"/>
-          <p:cNvSpPr txBox="1"/>
-          <p:nvPr/>
-        </p:nvSpPr>
-        <p:spPr>
-          <a:xfrm>
-            <a:off x="438912" y="4757925"/>
+          <p:cNvPr id="22" name="TextBox 21"/>
+          <p:cNvSpPr txBox="1"/>
+          <p:nvPr/>
+        </p:nvSpPr>
+        <p:spPr>
+          <a:xfrm>
+            <a:off x="438912" y="5703566"/>
             <a:ext cx="2414016" cy="302513"/>
           </a:xfrm>
           <a:prstGeom prst="rect">
@@ -11724,13 +11826,13 @@
       </p:sp>
       <p:sp>
         <p:nvSpPr>
-          <p:cNvPr id="20" name="TextBox 19"/>
-          <p:cNvSpPr txBox="1"/>
-          <p:nvPr/>
-        </p:nvSpPr>
-        <p:spPr>
-          <a:xfrm>
-            <a:off x="438912" y="5060438"/>
+          <p:cNvPr id="23" name="TextBox 22"/>
+          <p:cNvSpPr txBox="1"/>
+          <p:nvPr/>
+        </p:nvSpPr>
+        <p:spPr>
+          <a:xfrm>
+            <a:off x="438912" y="6006079"/>
             <a:ext cx="2414016" cy="302513"/>
           </a:xfrm>
           <a:prstGeom prst="rect">
@@ -11758,13 +11860,13 @@
       </p:sp>
       <p:sp>
         <p:nvSpPr>
-          <p:cNvPr id="21" name="TextBox 20"/>
-          <p:cNvSpPr txBox="1"/>
-          <p:nvPr/>
-        </p:nvSpPr>
-        <p:spPr>
-          <a:xfrm>
-            <a:off x="438912" y="5362951"/>
+          <p:cNvPr id="24" name="TextBox 23"/>
+          <p:cNvSpPr txBox="1"/>
+          <p:nvPr/>
+        </p:nvSpPr>
+        <p:spPr>
+          <a:xfrm>
+            <a:off x="438912" y="6308592"/>
             <a:ext cx="2414016" cy="302513"/>
           </a:xfrm>
           <a:prstGeom prst="rect">
@@ -11792,13 +11894,13 @@
       </p:sp>
       <p:sp>
         <p:nvSpPr>
-          <p:cNvPr id="22" name="Rectangle 21"/>
+          <p:cNvPr id="25" name="Rectangle 24"/>
           <p:cNvSpPr/>
           <p:nvPr/>
         </p:nvSpPr>
         <p:spPr>
           <a:xfrm>
-            <a:off x="3108960" y="3438906"/>
+            <a:off x="3108960" y="4384547"/>
             <a:ext cx="2743200" cy="2427732"/>
           </a:xfrm>
           <a:prstGeom prst="rect">
@@ -11835,13 +11937,13 @@
       </p:sp>
       <p:sp>
         <p:nvSpPr>
-          <p:cNvPr id="23" name="TextBox 22"/>
-          <p:cNvSpPr txBox="1"/>
-          <p:nvPr/>
-        </p:nvSpPr>
-        <p:spPr>
-          <a:xfrm>
-            <a:off x="3273552" y="3566922"/>
+          <p:cNvPr id="26" name="TextBox 25"/>
+          <p:cNvSpPr txBox="1"/>
+          <p:nvPr/>
+        </p:nvSpPr>
+        <p:spPr>
+          <a:xfrm>
+            <a:off x="3273552" y="4512563"/>
             <a:ext cx="2414016" cy="283464"/>
           </a:xfrm>
           <a:prstGeom prst="rect">
@@ -11862,20 +11964,20 @@
                   <a:srgbClr val="A8DADC"/>
                 </a:solidFill>
               </a:rPr>
-              <a:t>Igniter</a:t>
-            </a:r>
-          </a:p>
-        </p:txBody>
-      </p:sp>
-      <p:sp>
-        <p:nvSpPr>
-          <p:cNvPr id="24" name="TextBox 23"/>
-          <p:cNvSpPr txBox="1"/>
-          <p:nvPr/>
-        </p:nvSpPr>
-        <p:spPr>
-          <a:xfrm>
-            <a:off x="3273552" y="3850386"/>
+              <a:t>Water Pump</a:t>
+            </a:r>
+          </a:p>
+        </p:txBody>
+      </p:sp>
+      <p:sp>
+        <p:nvSpPr>
+          <p:cNvPr id="27" name="TextBox 26"/>
+          <p:cNvSpPr txBox="1"/>
+          <p:nvPr/>
+        </p:nvSpPr>
+        <p:spPr>
+          <a:xfrm>
+            <a:off x="3273552" y="4796027"/>
             <a:ext cx="2414016" cy="302513"/>
           </a:xfrm>
           <a:prstGeom prst="rect">
@@ -11896,20 +11998,20 @@
                   <a:srgbClr val="FFFFFF"/>
                 </a:solidFill>
               </a:rPr>
-              <a:t>• IN  →  GPIO26</a:t>
-            </a:r>
-          </a:p>
-        </p:txBody>
-      </p:sp>
-      <p:sp>
-        <p:nvSpPr>
-          <p:cNvPr id="25" name="TextBox 24"/>
-          <p:cNvSpPr txBox="1"/>
-          <p:nvPr/>
-        </p:nvSpPr>
-        <p:spPr>
-          <a:xfrm>
-            <a:off x="3273552" y="4152899"/>
+              <a:t>• IN  →  GPIO27</a:t>
+            </a:r>
+          </a:p>
+        </p:txBody>
+      </p:sp>
+      <p:sp>
+        <p:nvSpPr>
+          <p:cNvPr id="28" name="TextBox 27"/>
+          <p:cNvSpPr txBox="1"/>
+          <p:nvPr/>
+        </p:nvSpPr>
+        <p:spPr>
+          <a:xfrm>
+            <a:off x="3273552" y="5098540"/>
             <a:ext cx="2414016" cy="302513"/>
           </a:xfrm>
           <a:prstGeom prst="rect">
@@ -11937,13 +12039,13 @@
       </p:sp>
       <p:sp>
         <p:nvSpPr>
-          <p:cNvPr id="26" name="TextBox 25"/>
-          <p:cNvSpPr txBox="1"/>
-          <p:nvPr/>
-        </p:nvSpPr>
-        <p:spPr>
-          <a:xfrm>
-            <a:off x="3273552" y="4455412"/>
+          <p:cNvPr id="29" name="TextBox 28"/>
+          <p:cNvSpPr txBox="1"/>
+          <p:nvPr/>
+        </p:nvSpPr>
+        <p:spPr>
+          <a:xfrm>
+            <a:off x="3273552" y="5401053"/>
             <a:ext cx="2414016" cy="302513"/>
           </a:xfrm>
           <a:prstGeom prst="rect">
@@ -11971,13 +12073,13 @@
       </p:sp>
       <p:sp>
         <p:nvSpPr>
-          <p:cNvPr id="27" name="TextBox 26"/>
-          <p:cNvSpPr txBox="1"/>
-          <p:nvPr/>
-        </p:nvSpPr>
-        <p:spPr>
-          <a:xfrm>
-            <a:off x="3273552" y="4757925"/>
+          <p:cNvPr id="30" name="TextBox 29"/>
+          <p:cNvSpPr txBox="1"/>
+          <p:nvPr/>
+        </p:nvSpPr>
+        <p:spPr>
+          <a:xfrm>
+            <a:off x="3273552" y="5703566"/>
             <a:ext cx="2414016" cy="302513"/>
           </a:xfrm>
           <a:prstGeom prst="rect">
@@ -12005,13 +12107,13 @@
       </p:sp>
       <p:sp>
         <p:nvSpPr>
-          <p:cNvPr id="28" name="TextBox 27"/>
-          <p:cNvSpPr txBox="1"/>
-          <p:nvPr/>
-        </p:nvSpPr>
-        <p:spPr>
-          <a:xfrm>
-            <a:off x="3273552" y="5060438"/>
+          <p:cNvPr id="31" name="TextBox 30"/>
+          <p:cNvSpPr txBox="1"/>
+          <p:nvPr/>
+        </p:nvSpPr>
+        <p:spPr>
+          <a:xfrm>
+            <a:off x="3273552" y="6006079"/>
             <a:ext cx="2414016" cy="302513"/>
           </a:xfrm>
           <a:prstGeom prst="rect">
@@ -12039,13 +12141,13 @@
       </p:sp>
       <p:sp>
         <p:nvSpPr>
-          <p:cNvPr id="29" name="TextBox 28"/>
-          <p:cNvSpPr txBox="1"/>
-          <p:nvPr/>
-        </p:nvSpPr>
-        <p:spPr>
-          <a:xfrm>
-            <a:off x="3273552" y="5362951"/>
+          <p:cNvPr id="32" name="TextBox 31"/>
+          <p:cNvSpPr txBox="1"/>
+          <p:nvPr/>
+        </p:nvSpPr>
+        <p:spPr>
+          <a:xfrm>
+            <a:off x="3273552" y="6308592"/>
             <a:ext cx="2414016" cy="302513"/>
           </a:xfrm>
           <a:prstGeom prst="rect">
@@ -12066,21 +12168,21 @@
                   <a:srgbClr val="FFFFFF"/>
                 </a:solidFill>
               </a:rPr>
-              <a:t>• Electric heating element</a:t>
-            </a:r>
-          </a:p>
-        </p:txBody>
-      </p:sp>
-      <p:sp>
-        <p:nvSpPr>
-          <p:cNvPr id="30" name="Rectangle 29"/>
+              <a:t>• Circulation pump</a:t>
+            </a:r>
+          </a:p>
+        </p:txBody>
+      </p:sp>
+      <p:sp>
+        <p:nvSpPr>
+          <p:cNvPr id="33" name="Rectangle 32"/>
           <p:cNvSpPr/>
           <p:nvPr/>
         </p:nvSpPr>
         <p:spPr>
           <a:xfrm>
-            <a:off x="5943600" y="3438906"/>
-            <a:ext cx="2743200" cy="2427732"/>
+            <a:off x="8732520" y="4384547"/>
+            <a:ext cx="3108960" cy="3297174"/>
           </a:xfrm>
           <a:prstGeom prst="rect">
             <a:avLst/>
@@ -12116,14 +12218,14 @@
       </p:sp>
       <p:sp>
         <p:nvSpPr>
-          <p:cNvPr id="31" name="TextBox 30"/>
-          <p:cNvSpPr txBox="1"/>
-          <p:nvPr/>
-        </p:nvSpPr>
-        <p:spPr>
-          <a:xfrm>
-            <a:off x="6108192" y="3566922"/>
-            <a:ext cx="2414016" cy="283464"/>
+          <p:cNvPr id="34" name="TextBox 33"/>
+          <p:cNvSpPr txBox="1"/>
+          <p:nvPr/>
+        </p:nvSpPr>
+        <p:spPr>
+          <a:xfrm>
+            <a:off x="8897112" y="4512563"/>
+            <a:ext cx="2779776" cy="283464"/>
           </a:xfrm>
           <a:prstGeom prst="rect">
             <a:avLst/>
@@ -12143,21 +12245,21 @@
                   <a:srgbClr val="A8DADC"/>
                 </a:solidFill>
               </a:rPr>
-              <a:t>Water Pump</a:t>
-            </a:r>
-          </a:p>
-        </p:txBody>
-      </p:sp>
-      <p:sp>
-        <p:nvSpPr>
-          <p:cNvPr id="32" name="TextBox 31"/>
-          <p:cNvSpPr txBox="1"/>
-          <p:nvPr/>
-        </p:nvSpPr>
-        <p:spPr>
-          <a:xfrm>
-            <a:off x="6108192" y="3850386"/>
-            <a:ext cx="2414016" cy="302513"/>
+              <a:t>Active LOW wiring note</a:t>
+            </a:r>
+          </a:p>
+        </p:txBody>
+      </p:sp>
+      <p:sp>
+        <p:nvSpPr>
+          <p:cNvPr id="35" name="TextBox 34"/>
+          <p:cNvSpPr txBox="1"/>
+          <p:nvPr/>
+        </p:nvSpPr>
+        <p:spPr>
+          <a:xfrm>
+            <a:off x="8897112" y="4796027"/>
+            <a:ext cx="2779776" cy="302513"/>
           </a:xfrm>
           <a:prstGeom prst="rect">
             <a:avLst/>
@@ -12177,21 +12279,21 @@
                   <a:srgbClr val="FFFFFF"/>
                 </a:solidFill>
               </a:rPr>
-              <a:t>• IN  →  GPIO27</a:t>
-            </a:r>
-          </a:p>
-        </p:txBody>
-      </p:sp>
-      <p:sp>
-        <p:nvSpPr>
-          <p:cNvPr id="33" name="TextBox 32"/>
-          <p:cNvSpPr txBox="1"/>
-          <p:nvPr/>
-        </p:nvSpPr>
-        <p:spPr>
-          <a:xfrm>
-            <a:off x="6108192" y="4152899"/>
-            <a:ext cx="2414016" cy="302513"/>
+              <a:t>• ESP32 GPIO init HIGH at boot →</a:t>
+            </a:r>
+          </a:p>
+        </p:txBody>
+      </p:sp>
+      <p:sp>
+        <p:nvSpPr>
+          <p:cNvPr id="36" name="TextBox 35"/>
+          <p:cNvSpPr txBox="1"/>
+          <p:nvPr/>
+        </p:nvSpPr>
+        <p:spPr>
+          <a:xfrm>
+            <a:off x="8897112" y="5098540"/>
+            <a:ext cx="2779776" cy="302513"/>
           </a:xfrm>
           <a:prstGeom prst="rect">
             <a:avLst/>
@@ -12211,21 +12313,21 @@
                   <a:srgbClr val="FFFFFF"/>
                 </a:solidFill>
               </a:rPr>
-              <a:t>• VCC →  5V</a:t>
-            </a:r>
-          </a:p>
-        </p:txBody>
-      </p:sp>
-      <p:sp>
-        <p:nvSpPr>
-          <p:cNvPr id="34" name="TextBox 33"/>
-          <p:cNvSpPr txBox="1"/>
-          <p:nvPr/>
-        </p:nvSpPr>
-        <p:spPr>
-          <a:xfrm>
-            <a:off x="6108192" y="4455412"/>
-            <a:ext cx="2414016" cy="302513"/>
+              <a:t>• relay stays OFF during reset/startup</a:t>
+            </a:r>
+          </a:p>
+        </p:txBody>
+      </p:sp>
+      <p:sp>
+        <p:nvSpPr>
+          <p:cNvPr id="37" name="TextBox 36"/>
+          <p:cNvSpPr txBox="1"/>
+          <p:nvPr/>
+        </p:nvSpPr>
+        <p:spPr>
+          <a:xfrm>
+            <a:off x="8897112" y="5401053"/>
+            <a:ext cx="2779776" cy="302513"/>
           </a:xfrm>
           <a:prstGeom prst="rect">
             <a:avLst/>
@@ -12245,21 +12347,55 @@
                   <a:srgbClr val="FFFFFF"/>
                 </a:solidFill>
               </a:rPr>
-              <a:t>• GND →  GND</a:t>
-            </a:r>
-          </a:p>
-        </p:txBody>
-      </p:sp>
-      <p:sp>
-        <p:nvSpPr>
-          <p:cNvPr id="35" name="TextBox 34"/>
-          <p:cNvSpPr txBox="1"/>
-          <p:nvPr/>
-        </p:nvSpPr>
-        <p:spPr>
-          <a:xfrm>
-            <a:off x="6108192" y="4757925"/>
-            <a:ext cx="2414016" cy="302513"/>
+              <a:t>• LOW = relay ON,  HIGH = relay OFF</a:t>
+            </a:r>
+          </a:p>
+        </p:txBody>
+      </p:sp>
+      <p:sp>
+        <p:nvSpPr>
+          <p:cNvPr id="38" name="TextBox 37"/>
+          <p:cNvSpPr txBox="1"/>
+          <p:nvPr/>
+        </p:nvSpPr>
+        <p:spPr>
+          <a:xfrm>
+            <a:off x="8897112" y="5703566"/>
+            <a:ext cx="2779776" cy="283464"/>
+          </a:xfrm>
+          <a:prstGeom prst="rect">
+            <a:avLst/>
+          </a:prstGeom>
+          <a:noFill/>
+        </p:spPr>
+        <p:txBody>
+          <a:bodyPr wrap="square">
+            <a:spAutoFit/>
+          </a:bodyPr>
+          <a:lstStyle/>
+          <a:p>
+            <a:pPr algn="l"/>
+            <a:r>
+              <a:rPr sz="1200" b="1">
+                <a:solidFill>
+                  <a:srgbClr val="A8DADC"/>
+                </a:solidFill>
+              </a:rPr>
+              <a:t>Safety</a:t>
+            </a:r>
+          </a:p>
+        </p:txBody>
+      </p:sp>
+      <p:sp>
+        <p:nvSpPr>
+          <p:cNvPr id="39" name="TextBox 38"/>
+          <p:cNvSpPr txBox="1"/>
+          <p:nvPr/>
+        </p:nvSpPr>
+        <p:spPr>
+          <a:xfrm>
+            <a:off x="8897112" y="5987030"/>
+            <a:ext cx="2779776" cy="302513"/>
           </a:xfrm>
           <a:prstGeom prst="rect">
             <a:avLst/>
@@ -12279,21 +12415,21 @@
                   <a:srgbClr val="FFFFFF"/>
                 </a:solidFill>
               </a:rPr>
-              <a:t>• COM →  AC Live</a:t>
-            </a:r>
-          </a:p>
-        </p:txBody>
-      </p:sp>
-      <p:sp>
-        <p:nvSpPr>
-          <p:cNvPr id="36" name="TextBox 35"/>
-          <p:cNvSpPr txBox="1"/>
-          <p:nvPr/>
-        </p:nvSpPr>
-        <p:spPr>
-          <a:xfrm>
-            <a:off x="6108192" y="5060438"/>
-            <a:ext cx="2414016" cy="302513"/>
+              <a:t>• All relays default OFF on power-up</a:t>
+            </a:r>
+          </a:p>
+        </p:txBody>
+      </p:sp>
+      <p:sp>
+        <p:nvSpPr>
+          <p:cNvPr id="40" name="TextBox 39"/>
+          <p:cNvSpPr txBox="1"/>
+          <p:nvPr/>
+        </p:nvSpPr>
+        <p:spPr>
+          <a:xfrm>
+            <a:off x="8897112" y="6289543"/>
+            <a:ext cx="2779776" cy="302513"/>
           </a:xfrm>
           <a:prstGeom prst="rect">
             <a:avLst/>
@@ -12313,21 +12449,55 @@
                   <a:srgbClr val="FFFFFF"/>
                 </a:solidFill>
               </a:rPr>
-              <a:t>• NO  →  Load</a:t>
-            </a:r>
-          </a:p>
-        </p:txBody>
-      </p:sp>
-      <p:sp>
-        <p:nvSpPr>
-          <p:cNvPr id="37" name="TextBox 36"/>
-          <p:cNvSpPr txBox="1"/>
-          <p:nvPr/>
-        </p:nvSpPr>
-        <p:spPr>
-          <a:xfrm>
-            <a:off x="6108192" y="5362951"/>
-            <a:ext cx="2414016" cy="302513"/>
+              <a:t>• Emergency stop: all GPIOs → HIGH</a:t>
+            </a:r>
+          </a:p>
+        </p:txBody>
+      </p:sp>
+      <p:sp>
+        <p:nvSpPr>
+          <p:cNvPr id="41" name="TextBox 40"/>
+          <p:cNvSpPr txBox="1"/>
+          <p:nvPr/>
+        </p:nvSpPr>
+        <p:spPr>
+          <a:xfrm>
+            <a:off x="8897112" y="6592056"/>
+            <a:ext cx="2779776" cy="283464"/>
+          </a:xfrm>
+          <a:prstGeom prst="rect">
+            <a:avLst/>
+          </a:prstGeom>
+          <a:noFill/>
+        </p:spPr>
+        <p:txBody>
+          <a:bodyPr wrap="square">
+            <a:spAutoFit/>
+          </a:bodyPr>
+          <a:lstStyle/>
+          <a:p>
+            <a:pPr algn="l"/>
+            <a:r>
+              <a:rPr sz="1200" b="1">
+                <a:solidFill>
+                  <a:srgbClr val="A8DADC"/>
+                </a:solidFill>
+              </a:rPr>
+              <a:t>Decoupling</a:t>
+            </a:r>
+          </a:p>
+        </p:txBody>
+      </p:sp>
+      <p:sp>
+        <p:nvSpPr>
+          <p:cNvPr id="42" name="TextBox 41"/>
+          <p:cNvSpPr txBox="1"/>
+          <p:nvPr/>
+        </p:nvSpPr>
+        <p:spPr>
+          <a:xfrm>
+            <a:off x="8897112" y="6875520"/>
+            <a:ext cx="2779776" cy="302513"/>
           </a:xfrm>
           <a:prstGeom prst="rect">
             <a:avLst/>
@@ -12347,97 +12517,20 @@
                   <a:srgbClr val="FFFFFF"/>
                 </a:solidFill>
               </a:rPr>
-              <a:t>• Circulation pump</a:t>
-            </a:r>
-          </a:p>
-        </p:txBody>
-      </p:sp>
-      <p:sp>
-        <p:nvSpPr>
-          <p:cNvPr id="38" name="Rectangle 37"/>
-          <p:cNvSpPr/>
-          <p:nvPr/>
-        </p:nvSpPr>
-        <p:spPr>
-          <a:xfrm>
-            <a:off x="8732520" y="3438906"/>
-            <a:ext cx="3108960" cy="2408682"/>
-          </a:xfrm>
-          <a:prstGeom prst="rect">
-            <a:avLst/>
-          </a:prstGeom>
-          <a:solidFill>
-            <a:srgbClr val="16213E"/>
-          </a:solidFill>
-          <a:ln>
-            <a:noFill/>
-          </a:ln>
-        </p:spPr>
-        <p:style>
-          <a:lnRef idx="1">
-            <a:schemeClr val="accent1"/>
-          </a:lnRef>
-          <a:fillRef idx="3">
-            <a:schemeClr val="accent1"/>
-          </a:fillRef>
-          <a:effectRef idx="2">
-            <a:schemeClr val="accent1"/>
-          </a:effectRef>
-          <a:fontRef idx="minor">
-            <a:schemeClr val="lt1"/>
-          </a:fontRef>
-        </p:style>
-        <p:txBody>
-          <a:bodyPr rtlCol="0" anchor="ctr"/>
-          <a:lstStyle/>
-          <a:p>
-            <a:pPr algn="ctr"/>
-          </a:p>
-        </p:txBody>
-      </p:sp>
-      <p:sp>
-        <p:nvSpPr>
-          <p:cNvPr id="39" name="TextBox 38"/>
-          <p:cNvSpPr txBox="1"/>
-          <p:nvPr/>
-        </p:nvSpPr>
-        <p:spPr>
-          <a:xfrm>
-            <a:off x="8897112" y="3566922"/>
-            <a:ext cx="2779776" cy="283464"/>
-          </a:xfrm>
-          <a:prstGeom prst="rect">
-            <a:avLst/>
-          </a:prstGeom>
-          <a:noFill/>
-        </p:spPr>
-        <p:txBody>
-          <a:bodyPr wrap="square">
-            <a:spAutoFit/>
-          </a:bodyPr>
-          <a:lstStyle/>
-          <a:p>
-            <a:pPr algn="l"/>
-            <a:r>
-              <a:rPr sz="1200" b="1">
-                <a:solidFill>
-                  <a:srgbClr val="A8DADC"/>
-                </a:solidFill>
-              </a:rPr>
-              <a:t>Active LOW wiring note</a:t>
-            </a:r>
-          </a:p>
-        </p:txBody>
-      </p:sp>
-      <p:sp>
-        <p:nvSpPr>
-          <p:cNvPr id="40" name="TextBox 39"/>
-          <p:cNvSpPr txBox="1"/>
-          <p:nvPr/>
-        </p:nvSpPr>
-        <p:spPr>
-          <a:xfrm>
-            <a:off x="8897112" y="3850386"/>
+              <a:t>• 100 nF ceramic cap across VCC/GND</a:t>
+            </a:r>
+          </a:p>
+        </p:txBody>
+      </p:sp>
+      <p:sp>
+        <p:nvSpPr>
+          <p:cNvPr id="43" name="TextBox 42"/>
+          <p:cNvSpPr txBox="1"/>
+          <p:nvPr/>
+        </p:nvSpPr>
+        <p:spPr>
+          <a:xfrm>
+            <a:off x="8897112" y="7178033"/>
             <a:ext cx="2779776" cy="302513"/>
           </a:xfrm>
           <a:prstGeom prst="rect">
@@ -12458,177 +12551,7 @@
                   <a:srgbClr val="FFFFFF"/>
                 </a:solidFill>
               </a:rPr>
-              <a:t>• ESP32 GPIO init HIGH at boot →</a:t>
-            </a:r>
-          </a:p>
-        </p:txBody>
-      </p:sp>
-      <p:sp>
-        <p:nvSpPr>
-          <p:cNvPr id="41" name="TextBox 40"/>
-          <p:cNvSpPr txBox="1"/>
-          <p:nvPr/>
-        </p:nvSpPr>
-        <p:spPr>
-          <a:xfrm>
-            <a:off x="8897112" y="4152899"/>
-            <a:ext cx="2779776" cy="302513"/>
-          </a:xfrm>
-          <a:prstGeom prst="rect">
-            <a:avLst/>
-          </a:prstGeom>
-          <a:noFill/>
-        </p:spPr>
-        <p:txBody>
-          <a:bodyPr wrap="square">
-            <a:spAutoFit/>
-          </a:bodyPr>
-          <a:lstStyle/>
-          <a:p>
-            <a:pPr algn="l"/>
-            <a:r>
-              <a:rPr sz="1300" b="0">
-                <a:solidFill>
-                  <a:srgbClr val="FFFFFF"/>
-                </a:solidFill>
-              </a:rPr>
-              <a:t>• relay stays OFF during reset/startup</a:t>
-            </a:r>
-          </a:p>
-        </p:txBody>
-      </p:sp>
-      <p:sp>
-        <p:nvSpPr>
-          <p:cNvPr id="42" name="TextBox 41"/>
-          <p:cNvSpPr txBox="1"/>
-          <p:nvPr/>
-        </p:nvSpPr>
-        <p:spPr>
-          <a:xfrm>
-            <a:off x="8897112" y="4455412"/>
-            <a:ext cx="2779776" cy="302513"/>
-          </a:xfrm>
-          <a:prstGeom prst="rect">
-            <a:avLst/>
-          </a:prstGeom>
-          <a:noFill/>
-        </p:spPr>
-        <p:txBody>
-          <a:bodyPr wrap="square">
-            <a:spAutoFit/>
-          </a:bodyPr>
-          <a:lstStyle/>
-          <a:p>
-            <a:pPr algn="l"/>
-            <a:r>
-              <a:rPr sz="1300" b="0">
-                <a:solidFill>
-                  <a:srgbClr val="FFFFFF"/>
-                </a:solidFill>
-              </a:rPr>
-              <a:t>• LOW = relay ON,  HIGH = relay OFF</a:t>
-            </a:r>
-          </a:p>
-        </p:txBody>
-      </p:sp>
-      <p:sp>
-        <p:nvSpPr>
-          <p:cNvPr id="43" name="TextBox 42"/>
-          <p:cNvSpPr txBox="1"/>
-          <p:nvPr/>
-        </p:nvSpPr>
-        <p:spPr>
-          <a:xfrm>
-            <a:off x="8897112" y="4757925"/>
-            <a:ext cx="2779776" cy="283464"/>
-          </a:xfrm>
-          <a:prstGeom prst="rect">
-            <a:avLst/>
-          </a:prstGeom>
-          <a:noFill/>
-        </p:spPr>
-        <p:txBody>
-          <a:bodyPr wrap="square">
-            <a:spAutoFit/>
-          </a:bodyPr>
-          <a:lstStyle/>
-          <a:p>
-            <a:pPr algn="l"/>
-            <a:r>
-              <a:rPr sz="1200" b="1">
-                <a:solidFill>
-                  <a:srgbClr val="A8DADC"/>
-                </a:solidFill>
-              </a:rPr>
-              <a:t>Safety</a:t>
-            </a:r>
-          </a:p>
-        </p:txBody>
-      </p:sp>
-      <p:sp>
-        <p:nvSpPr>
-          <p:cNvPr id="44" name="TextBox 43"/>
-          <p:cNvSpPr txBox="1"/>
-          <p:nvPr/>
-        </p:nvSpPr>
-        <p:spPr>
-          <a:xfrm>
-            <a:off x="8897112" y="5041389"/>
-            <a:ext cx="2779776" cy="302513"/>
-          </a:xfrm>
-          <a:prstGeom prst="rect">
-            <a:avLst/>
-          </a:prstGeom>
-          <a:noFill/>
-        </p:spPr>
-        <p:txBody>
-          <a:bodyPr wrap="square">
-            <a:spAutoFit/>
-          </a:bodyPr>
-          <a:lstStyle/>
-          <a:p>
-            <a:pPr algn="l"/>
-            <a:r>
-              <a:rPr sz="1300" b="0">
-                <a:solidFill>
-                  <a:srgbClr val="FFFFFF"/>
-                </a:solidFill>
-              </a:rPr>
-              <a:t>• All relays default OFF on power-up</a:t>
-            </a:r>
-          </a:p>
-        </p:txBody>
-      </p:sp>
-      <p:sp>
-        <p:nvSpPr>
-          <p:cNvPr id="45" name="TextBox 44"/>
-          <p:cNvSpPr txBox="1"/>
-          <p:nvPr/>
-        </p:nvSpPr>
-        <p:spPr>
-          <a:xfrm>
-            <a:off x="8897112" y="5343902"/>
-            <a:ext cx="2779776" cy="302513"/>
-          </a:xfrm>
-          <a:prstGeom prst="rect">
-            <a:avLst/>
-          </a:prstGeom>
-          <a:noFill/>
-        </p:spPr>
-        <p:txBody>
-          <a:bodyPr wrap="square">
-            <a:spAutoFit/>
-          </a:bodyPr>
-          <a:lstStyle/>
-          <a:p>
-            <a:pPr algn="l"/>
-            <a:r>
-              <a:rPr sz="1300" b="0">
-                <a:solidFill>
-                  <a:srgbClr val="FFFFFF"/>
-                </a:solidFill>
-              </a:rPr>
-              <a:t>• Emergency stop: all GPIOs → HIGH</a:t>
+              <a:t>• at each relay module — prevents spikes</a:t>
             </a:r>
           </a:p>
         </p:txBody>
@@ -12723,7 +12646,7 @@
                   <a:srgbClr val="E94560"/>
                 </a:solidFill>
               </a:rPr>
-              <a:t>TRIAC Dimmer  —  Blower Motor Speed Control</a:t>
+              <a:t>2-Channel AC Dimmer  —  Blower &amp; Igniter</a:t>
             </a:r>
           </a:p>
         </p:txBody>
@@ -12845,7 +12768,7 @@
                   <a:srgbClr val="A8DADC"/>
                 </a:solidFill>
               </a:rPr>
-              <a:t>TRIAC / AC Dimmer</a:t>
+              <a:t>Hipzeepo 2-ch Dimmer</a:t>
             </a:r>
           </a:p>
         </p:txBody>
@@ -12859,7 +12782,7 @@
         <p:spPr>
           <a:xfrm>
             <a:off x="274320" y="749808"/>
-            <a:ext cx="4937760" cy="4828794"/>
+            <a:ext cx="4937760" cy="3902202"/>
           </a:xfrm>
           <a:prstGeom prst="rect">
             <a:avLst/>
@@ -12922,7 +12845,7 @@
                   <a:srgbClr val="A8DADC"/>
                 </a:solidFill>
               </a:rPr>
-              <a:t>Method: Phase-angle control</a:t>
+              <a:t>Module: Hipzeepo 2-Channel AC Dimmer</a:t>
             </a:r>
           </a:p>
         </p:txBody>
@@ -12956,7 +12879,7 @@
                   <a:srgbClr val="FFFFFF"/>
                 </a:solidFill>
               </a:rPr>
-              <a:t>• The AC waveform is chopped each half-cycle.</a:t>
+              <a:t>• 3.3V / 5V logic  ·  110V / 220V AC load</a:t>
             </a:r>
           </a:p>
         </p:txBody>
@@ -12990,7 +12913,7 @@
                   <a:srgbClr val="FFFFFF"/>
                 </a:solidFill>
               </a:rPr>
-              <a:t>• TRIAC fires later in the cycle → less power.</a:t>
+              <a:t>• Phase-angle control — variable AC power</a:t>
             </a:r>
           </a:p>
         </p:txBody>
@@ -13004,6 +12927,40 @@
         <p:spPr>
           <a:xfrm>
             <a:off x="438912" y="1766314"/>
+            <a:ext cx="4608576" cy="283464"/>
+          </a:xfrm>
+          <a:prstGeom prst="rect">
+            <a:avLst/>
+          </a:prstGeom>
+          <a:noFill/>
+        </p:spPr>
+        <p:txBody>
+          <a:bodyPr wrap="square">
+            <a:spAutoFit/>
+          </a:bodyPr>
+          <a:lstStyle/>
+          <a:p>
+            <a:pPr algn="l"/>
+            <a:r>
+              <a:rPr sz="1200" b="1">
+                <a:solidFill>
+                  <a:srgbClr val="A8DADC"/>
+                </a:solidFill>
+              </a:rPr>
+              <a:t>Built into the module (no discrete parts needed)</a:t>
+            </a:r>
+          </a:p>
+        </p:txBody>
+      </p:sp>
+      <p:sp>
+        <p:nvSpPr>
+          <p:cNvPr id="12" name="TextBox 11"/>
+          <p:cNvSpPr txBox="1"/>
+          <p:nvPr/>
+        </p:nvSpPr>
+        <p:spPr>
+          <a:xfrm>
+            <a:off x="438912" y="2049778"/>
             <a:ext cx="4608576" cy="302513"/>
           </a:xfrm>
           <a:prstGeom prst="rect">
@@ -13024,20 +12981,20 @@
                   <a:srgbClr val="FFFFFF"/>
                 </a:solidFill>
               </a:rPr>
-              <a:t>• Zero-cross detector tells ESP32 exactly when</a:t>
-            </a:r>
-          </a:p>
-        </p:txBody>
-      </p:sp>
-      <p:sp>
-        <p:nvSpPr>
-          <p:cNvPr id="12" name="TextBox 11"/>
-          <p:cNvSpPr txBox="1"/>
-          <p:nvPr/>
-        </p:nvSpPr>
-        <p:spPr>
-          <a:xfrm>
-            <a:off x="438912" y="2068827"/>
+              <a:t>• TRIAC × 2 (one per channel)</a:t>
+            </a:r>
+          </a:p>
+        </p:txBody>
+      </p:sp>
+      <p:sp>
+        <p:nvSpPr>
+          <p:cNvPr id="13" name="TextBox 12"/>
+          <p:cNvSpPr txBox="1"/>
+          <p:nvPr/>
+        </p:nvSpPr>
+        <p:spPr>
+          <a:xfrm>
+            <a:off x="438912" y="2352291"/>
             <a:ext cx="4608576" cy="302513"/>
           </a:xfrm>
           <a:prstGeom prst="rect">
@@ -13058,20 +13015,20 @@
                   <a:srgbClr val="FFFFFF"/>
                 </a:solidFill>
               </a:rPr>
-              <a:t>• the AC wave crosses 0V.</a:t>
-            </a:r>
-          </a:p>
-        </p:txBody>
-      </p:sp>
-      <p:sp>
-        <p:nvSpPr>
-          <p:cNvPr id="13" name="TextBox 12"/>
-          <p:cNvSpPr txBox="1"/>
-          <p:nvPr/>
-        </p:nvSpPr>
-        <p:spPr>
-          <a:xfrm>
-            <a:off x="438912" y="2371340"/>
+              <a:t>• Optocouplers for gate isolation</a:t>
+            </a:r>
+          </a:p>
+        </p:txBody>
+      </p:sp>
+      <p:sp>
+        <p:nvSpPr>
+          <p:cNvPr id="14" name="TextBox 13"/>
+          <p:cNvSpPr txBox="1"/>
+          <p:nvPr/>
+        </p:nvSpPr>
+        <p:spPr>
+          <a:xfrm>
+            <a:off x="438912" y="2654804"/>
             <a:ext cx="4608576" cy="302513"/>
           </a:xfrm>
           <a:prstGeom prst="rect">
@@ -13092,20 +13049,20 @@
                   <a:srgbClr val="FFFFFF"/>
                 </a:solidFill>
               </a:rPr>
-              <a:t>• ESP32 waits N µs, then pulses the TRIAC gate</a:t>
-            </a:r>
-          </a:p>
-        </p:txBody>
-      </p:sp>
-      <p:sp>
-        <p:nvSpPr>
-          <p:cNvPr id="14" name="TextBox 13"/>
-          <p:cNvSpPr txBox="1"/>
-          <p:nvPr/>
-        </p:nvSpPr>
-        <p:spPr>
-          <a:xfrm>
-            <a:off x="438912" y="2673853"/>
+              <a:t>• Snubber circuits per channel</a:t>
+            </a:r>
+          </a:p>
+        </p:txBody>
+      </p:sp>
+      <p:sp>
+        <p:nvSpPr>
+          <p:cNvPr id="15" name="TextBox 14"/>
+          <p:cNvSpPr txBox="1"/>
+          <p:nvPr/>
+        </p:nvSpPr>
+        <p:spPr>
+          <a:xfrm>
+            <a:off x="438912" y="2957317"/>
             <a:ext cx="4608576" cy="302513"/>
           </a:xfrm>
           <a:prstGeom prst="rect">
@@ -13126,20 +13083,54 @@
                   <a:srgbClr val="FFFFFF"/>
                 </a:solidFill>
               </a:rPr>
-              <a:t>• → conducts for the rest of the half-cycle.</a:t>
-            </a:r>
-          </a:p>
-        </p:txBody>
-      </p:sp>
-      <p:sp>
-        <p:nvSpPr>
-          <p:cNvPr id="15" name="TextBox 14"/>
-          <p:cNvSpPr txBox="1"/>
-          <p:nvPr/>
-        </p:nvSpPr>
-        <p:spPr>
-          <a:xfrm>
-            <a:off x="438912" y="2976366"/>
+              <a:t>• Zero-cross detector (shared ZC output)</a:t>
+            </a:r>
+          </a:p>
+        </p:txBody>
+      </p:sp>
+      <p:sp>
+        <p:nvSpPr>
+          <p:cNvPr id="16" name="TextBox 15"/>
+          <p:cNvSpPr txBox="1"/>
+          <p:nvPr/>
+        </p:nvSpPr>
+        <p:spPr>
+          <a:xfrm>
+            <a:off x="438912" y="3259830"/>
+            <a:ext cx="4608576" cy="283464"/>
+          </a:xfrm>
+          <a:prstGeom prst="rect">
+            <a:avLst/>
+          </a:prstGeom>
+          <a:noFill/>
+        </p:spPr>
+        <p:txBody>
+          <a:bodyPr wrap="square">
+            <a:spAutoFit/>
+          </a:bodyPr>
+          <a:lstStyle/>
+          <a:p>
+            <a:pPr algn="l"/>
+            <a:r>
+              <a:rPr sz="1200" b="1">
+                <a:solidFill>
+                  <a:srgbClr val="A8DADC"/>
+                </a:solidFill>
+              </a:rPr>
+              <a:t>Control method</a:t>
+            </a:r>
+          </a:p>
+        </p:txBody>
+      </p:sp>
+      <p:sp>
+        <p:nvSpPr>
+          <p:cNvPr id="17" name="TextBox 16"/>
+          <p:cNvSpPr txBox="1"/>
+          <p:nvPr/>
+        </p:nvSpPr>
+        <p:spPr>
+          <a:xfrm>
+            <a:off x="438912" y="3543294"/>
             <a:ext cx="4608576" cy="302513"/>
           </a:xfrm>
           <a:prstGeom prst="rect">
@@ -13160,20 +13151,20 @@
                   <a:srgbClr val="FFFFFF"/>
                 </a:solidFill>
               </a:rPr>
-              <a:t>• Larger delay = lower fan speed.</a:t>
-            </a:r>
-          </a:p>
-        </p:txBody>
-      </p:sp>
-      <p:sp>
-        <p:nvSpPr>
-          <p:cNvPr id="16" name="TextBox 15"/>
-          <p:cNvSpPr txBox="1"/>
-          <p:nvPr/>
-        </p:nvSpPr>
-        <p:spPr>
-          <a:xfrm>
-            <a:off x="438912" y="3278879"/>
+              <a:t>• PWM duty → phase angle → AC power %</a:t>
+            </a:r>
+          </a:p>
+        </p:txBody>
+      </p:sp>
+      <p:sp>
+        <p:nvSpPr>
+          <p:cNvPr id="18" name="TextBox 17"/>
+          <p:cNvSpPr txBox="1"/>
+          <p:nvPr/>
+        </p:nvSpPr>
+        <p:spPr>
+          <a:xfrm>
+            <a:off x="438912" y="3845807"/>
             <a:ext cx="4608576" cy="302513"/>
           </a:xfrm>
           <a:prstGeom prst="rect">
@@ -13194,54 +13185,20 @@
                   <a:srgbClr val="FFFFFF"/>
                 </a:solidFill>
               </a:rPr>
-              <a:t>• Delay = 0 = full power.</a:t>
-            </a:r>
-          </a:p>
-        </p:txBody>
-      </p:sp>
-      <p:sp>
-        <p:nvSpPr>
-          <p:cNvPr id="17" name="TextBox 16"/>
-          <p:cNvSpPr txBox="1"/>
-          <p:nvPr/>
-        </p:nvSpPr>
-        <p:spPr>
-          <a:xfrm>
-            <a:off x="438912" y="3581392"/>
-            <a:ext cx="4608576" cy="283464"/>
-          </a:xfrm>
-          <a:prstGeom prst="rect">
-            <a:avLst/>
-          </a:prstGeom>
-          <a:noFill/>
-        </p:spPr>
-        <p:txBody>
-          <a:bodyPr wrap="square">
-            <a:spAutoFit/>
-          </a:bodyPr>
-          <a:lstStyle/>
-          <a:p>
-            <a:pPr algn="l"/>
-            <a:r>
-              <a:rPr sz="1200" b="1">
-                <a:solidFill>
-                  <a:srgbClr val="A8DADC"/>
-                </a:solidFill>
-              </a:rPr>
-              <a:t>Typical components</a:t>
-            </a:r>
-          </a:p>
-        </p:txBody>
-      </p:sp>
-      <p:sp>
-        <p:nvSpPr>
-          <p:cNvPr id="18" name="TextBox 17"/>
-          <p:cNvSpPr txBox="1"/>
-          <p:nvPr/>
-        </p:nvSpPr>
-        <p:spPr>
-          <a:xfrm>
-            <a:off x="438912" y="3864856"/>
+              <a:t>• CH1 (blower): 0–100% fan speed</a:t>
+            </a:r>
+          </a:p>
+        </p:txBody>
+      </p:sp>
+      <p:sp>
+        <p:nvSpPr>
+          <p:cNvPr id="19" name="TextBox 18"/>
+          <p:cNvSpPr txBox="1"/>
+          <p:nvPr/>
+        </p:nvSpPr>
+        <p:spPr>
+          <a:xfrm>
+            <a:off x="438912" y="4148320"/>
             <a:ext cx="4608576" cy="302513"/>
           </a:xfrm>
           <a:prstGeom prst="rect">
@@ -13262,150 +13219,14 @@
                   <a:srgbClr val="FFFFFF"/>
                 </a:solidFill>
               </a:rPr>
-              <a:t>• BT136 or BTA16 TRIAC (TO-220)</a:t>
-            </a:r>
-          </a:p>
-        </p:txBody>
-      </p:sp>
-      <p:sp>
-        <p:nvSpPr>
-          <p:cNvPr id="19" name="TextBox 18"/>
-          <p:cNvSpPr txBox="1"/>
-          <p:nvPr/>
-        </p:nvSpPr>
-        <p:spPr>
-          <a:xfrm>
-            <a:off x="438912" y="4167369"/>
-            <a:ext cx="4608576" cy="302513"/>
-          </a:xfrm>
-          <a:prstGeom prst="rect">
-            <a:avLst/>
-          </a:prstGeom>
-          <a:noFill/>
-        </p:spPr>
-        <p:txBody>
-          <a:bodyPr wrap="square">
-            <a:spAutoFit/>
-          </a:bodyPr>
-          <a:lstStyle/>
-          <a:p>
-            <a:pPr algn="l"/>
-            <a:r>
-              <a:rPr sz="1300" b="0">
-                <a:solidFill>
-                  <a:srgbClr val="FFFFFF"/>
-                </a:solidFill>
-              </a:rPr>
-              <a:t>• MOC3021 optocoupler (gate isolation)</a:t>
-            </a:r>
-          </a:p>
-        </p:txBody>
-      </p:sp>
-      <p:sp>
-        <p:nvSpPr>
-          <p:cNvPr id="20" name="TextBox 19"/>
-          <p:cNvSpPr txBox="1"/>
-          <p:nvPr/>
-        </p:nvSpPr>
-        <p:spPr>
-          <a:xfrm>
-            <a:off x="438912" y="4469882"/>
-            <a:ext cx="4608576" cy="302513"/>
-          </a:xfrm>
-          <a:prstGeom prst="rect">
-            <a:avLst/>
-          </a:prstGeom>
-          <a:noFill/>
-        </p:spPr>
-        <p:txBody>
-          <a:bodyPr wrap="square">
-            <a:spAutoFit/>
-          </a:bodyPr>
-          <a:lstStyle/>
-          <a:p>
-            <a:pPr algn="l"/>
-            <a:r>
-              <a:rPr sz="1300" b="0">
-                <a:solidFill>
-                  <a:srgbClr val="FFFFFF"/>
-                </a:solidFill>
-              </a:rPr>
-              <a:t>• 4N35 optocoupler (zero-cross isolation)</a:t>
-            </a:r>
-          </a:p>
-        </p:txBody>
-      </p:sp>
-      <p:sp>
-        <p:nvSpPr>
-          <p:cNvPr id="21" name="TextBox 20"/>
-          <p:cNvSpPr txBox="1"/>
-          <p:nvPr/>
-        </p:nvSpPr>
-        <p:spPr>
-          <a:xfrm>
-            <a:off x="438912" y="4772395"/>
-            <a:ext cx="4608576" cy="302513"/>
-          </a:xfrm>
-          <a:prstGeom prst="rect">
-            <a:avLst/>
-          </a:prstGeom>
-          <a:noFill/>
-        </p:spPr>
-        <p:txBody>
-          <a:bodyPr wrap="square">
-            <a:spAutoFit/>
-          </a:bodyPr>
-          <a:lstStyle/>
-          <a:p>
-            <a:pPr algn="l"/>
-            <a:r>
-              <a:rPr sz="1300" b="0">
-                <a:solidFill>
-                  <a:srgbClr val="FFFFFF"/>
-                </a:solidFill>
-              </a:rPr>
-              <a:t>• Snubber: 100Ω + 100nF/400V across TRIAC</a:t>
-            </a:r>
-          </a:p>
-        </p:txBody>
-      </p:sp>
-      <p:sp>
-        <p:nvSpPr>
-          <p:cNvPr id="22" name="TextBox 21"/>
-          <p:cNvSpPr txBox="1"/>
-          <p:nvPr/>
-        </p:nvSpPr>
-        <p:spPr>
-          <a:xfrm>
-            <a:off x="438912" y="5074908"/>
-            <a:ext cx="4608576" cy="302513"/>
-          </a:xfrm>
-          <a:prstGeom prst="rect">
-            <a:avLst/>
-          </a:prstGeom>
-          <a:noFill/>
-        </p:spPr>
-        <p:txBody>
-          <a:bodyPr wrap="square">
-            <a:spAutoFit/>
-          </a:bodyPr>
-          <a:lstStyle/>
-          <a:p>
-            <a:pPr algn="l"/>
-            <a:r>
-              <a:rPr sz="1300" b="0">
-                <a:solidFill>
-                  <a:srgbClr val="FFFFFF"/>
-                </a:solidFill>
-              </a:rPr>
-              <a:t>• Gate resistor: 330Ω before MOC3021</a:t>
-            </a:r>
-          </a:p>
-        </p:txBody>
-      </p:sp>
-      <p:sp>
-        <p:nvSpPr>
-          <p:cNvPr id="23" name="Rectangle 22"/>
+              <a:t>• CH2 (igniter): 0% = off, 100% = full heat</a:t>
+            </a:r>
+          </a:p>
+        </p:txBody>
+      </p:sp>
+      <p:sp>
+        <p:nvSpPr>
+          <p:cNvPr id="20" name="Rectangle 19"/>
           <p:cNvSpPr/>
           <p:nvPr/>
         </p:nvSpPr>
@@ -13448,7 +13269,7 @@
       </p:sp>
       <p:sp>
         <p:nvSpPr>
-          <p:cNvPr id="24" name="TextBox 23"/>
+          <p:cNvPr id="21" name="TextBox 20"/>
           <p:cNvSpPr txBox="1"/>
           <p:nvPr/>
         </p:nvSpPr>
@@ -13475,14 +13296,14 @@
                   <a:srgbClr val="A8DADC"/>
                 </a:solidFill>
               </a:rPr>
-              <a:t>Zero-cross input</a:t>
-            </a:r>
-          </a:p>
-        </p:txBody>
-      </p:sp>
-      <p:sp>
-        <p:nvSpPr>
-          <p:cNvPr id="25" name="TextBox 24"/>
+              <a:t>DC logic side — wiring to ESP32</a:t>
+            </a:r>
+          </a:p>
+        </p:txBody>
+      </p:sp>
+      <p:sp>
+        <p:nvSpPr>
+          <p:cNvPr id="22" name="TextBox 21"/>
           <p:cNvSpPr txBox="1"/>
           <p:nvPr/>
         </p:nvSpPr>
@@ -13509,14 +13330,14 @@
                   <a:srgbClr val="FFFFFF"/>
                 </a:solidFill>
               </a:rPr>
-              <a:t>• GPIO35  ←  Zero-cross signal</a:t>
-            </a:r>
-          </a:p>
-        </p:txBody>
-      </p:sp>
-      <p:sp>
-        <p:nvSpPr>
-          <p:cNvPr id="26" name="TextBox 25"/>
+              <a:t>• VCC  →  3.3V (or 5V)</a:t>
+            </a:r>
+          </a:p>
+        </p:txBody>
+      </p:sp>
+      <p:sp>
+        <p:nvSpPr>
+          <p:cNvPr id="23" name="TextBox 22"/>
           <p:cNvSpPr txBox="1"/>
           <p:nvPr/>
         </p:nvSpPr>
@@ -13543,14 +13364,14 @@
                   <a:srgbClr val="FFFFFF"/>
                 </a:solidFill>
               </a:rPr>
-              <a:t>• (GPIO35 is input-only on ESP32)</a:t>
-            </a:r>
-          </a:p>
-        </p:txBody>
-      </p:sp>
-      <p:sp>
-        <p:nvSpPr>
-          <p:cNvPr id="27" name="TextBox 26"/>
+              <a:t>• GND  →  GND bus</a:t>
+            </a:r>
+          </a:p>
+        </p:txBody>
+      </p:sp>
+      <p:sp>
+        <p:nvSpPr>
+          <p:cNvPr id="24" name="TextBox 23"/>
           <p:cNvSpPr txBox="1"/>
           <p:nvPr/>
         </p:nvSpPr>
@@ -13577,14 +13398,14 @@
                   <a:srgbClr val="FFFFFF"/>
                 </a:solidFill>
               </a:rPr>
-              <a:t>• Signal: HIGH normally, drops LOW at</a:t>
-            </a:r>
-          </a:p>
-        </p:txBody>
-      </p:sp>
-      <p:sp>
-        <p:nvSpPr>
-          <p:cNvPr id="28" name="TextBox 27"/>
+              <a:t>• ZC   →  GPIO35  (zero-cross, shared output)</a:t>
+            </a:r>
+          </a:p>
+        </p:txBody>
+      </p:sp>
+      <p:sp>
+        <p:nvSpPr>
+          <p:cNvPr id="25" name="TextBox 24"/>
           <p:cNvSpPr txBox="1"/>
           <p:nvPr/>
         </p:nvSpPr>
@@ -13611,14 +13432,14 @@
                   <a:srgbClr val="FFFFFF"/>
                 </a:solidFill>
               </a:rPr>
-              <a:t>• each zero crossing of the AC wave</a:t>
-            </a:r>
-          </a:p>
-        </p:txBody>
-      </p:sp>
-      <p:sp>
-        <p:nvSpPr>
-          <p:cNvPr id="29" name="TextBox 28"/>
+              <a:t>• DIM1 →  GPIO33  (CH1 — blower motor)</a:t>
+            </a:r>
+          </a:p>
+        </p:txBody>
+      </p:sp>
+      <p:sp>
+        <p:nvSpPr>
+          <p:cNvPr id="26" name="TextBox 25"/>
           <p:cNvSpPr txBox="1"/>
           <p:nvPr/>
         </p:nvSpPr>
@@ -13645,14 +13466,14 @@
                   <a:srgbClr val="FFFFFF"/>
                 </a:solidFill>
               </a:rPr>
-              <a:t>• Trigger ISR on falling edge</a:t>
-            </a:r>
-          </a:p>
-        </p:txBody>
-      </p:sp>
-      <p:sp>
-        <p:nvSpPr>
-          <p:cNvPr id="30" name="TextBox 29"/>
+              <a:t>• DIM2 →  GPIO26  (CH2 — igniter heater)</a:t>
+            </a:r>
+          </a:p>
+        </p:txBody>
+      </p:sp>
+      <p:sp>
+        <p:nvSpPr>
+          <p:cNvPr id="27" name="TextBox 26"/>
           <p:cNvSpPr txBox="1"/>
           <p:nvPr/>
         </p:nvSpPr>
@@ -13679,14 +13500,14 @@
                   <a:srgbClr val="A8DADC"/>
                 </a:solidFill>
               </a:rPr>
-              <a:t>TRIAC gate output</a:t>
-            </a:r>
-          </a:p>
-        </p:txBody>
-      </p:sp>
-      <p:sp>
-        <p:nvSpPr>
-          <p:cNvPr id="31" name="TextBox 30"/>
+              <a:t>AC load side</a:t>
+            </a:r>
+          </a:p>
+        </p:txBody>
+      </p:sp>
+      <p:sp>
+        <p:nvSpPr>
+          <p:cNvPr id="28" name="TextBox 27"/>
           <p:cNvSpPr txBox="1"/>
           <p:nvPr/>
         </p:nvSpPr>
@@ -13713,14 +13534,14 @@
                   <a:srgbClr val="FFFFFF"/>
                 </a:solidFill>
               </a:rPr>
-              <a:t>• GPIO33  →  330Ω  →  MOC3021 LED(+)</a:t>
-            </a:r>
-          </a:p>
-        </p:txBody>
-      </p:sp>
-      <p:sp>
-        <p:nvSpPr>
-          <p:cNvPr id="32" name="TextBox 31"/>
+              <a:t>• CH1 OUT  →  Blower motor (220V AC)</a:t>
+            </a:r>
+          </a:p>
+        </p:txBody>
+      </p:sp>
+      <p:sp>
+        <p:nvSpPr>
+          <p:cNvPr id="29" name="TextBox 28"/>
           <p:cNvSpPr txBox="1"/>
           <p:nvPr/>
         </p:nvSpPr>
@@ -13747,20 +13568,54 @@
                   <a:srgbClr val="FFFFFF"/>
                 </a:solidFill>
               </a:rPr>
-              <a:t>• MOC3021 output  →  TRIAC gate</a:t>
-            </a:r>
-          </a:p>
-        </p:txBody>
-      </p:sp>
-      <p:sp>
-        <p:nvSpPr>
-          <p:cNvPr id="33" name="TextBox 32"/>
+              <a:t>• CH2 OUT  →  Igniter heater (220V AC)</a:t>
+            </a:r>
+          </a:p>
+        </p:txBody>
+      </p:sp>
+      <p:sp>
+        <p:nvSpPr>
+          <p:cNvPr id="30" name="TextBox 29"/>
           <p:cNvSpPr txBox="1"/>
           <p:nvPr/>
         </p:nvSpPr>
         <p:spPr>
           <a:xfrm>
             <a:off x="5513832" y="3562343"/>
+            <a:ext cx="2871216" cy="302513"/>
+          </a:xfrm>
+          <a:prstGeom prst="rect">
+            <a:avLst/>
+          </a:prstGeom>
+          <a:noFill/>
+        </p:spPr>
+        <p:txBody>
+          <a:bodyPr wrap="square">
+            <a:spAutoFit/>
+          </a:bodyPr>
+          <a:lstStyle/>
+          <a:p>
+            <a:pPr algn="l"/>
+            <a:r>
+              <a:rPr sz="1300" b="0">
+                <a:solidFill>
+                  <a:srgbClr val="FFFFFF"/>
+                </a:solidFill>
+              </a:rPr>
+              <a:t>• AC IN    →  Mains L + N (via 5–10A fuse)</a:t>
+            </a:r>
+          </a:p>
+        </p:txBody>
+      </p:sp>
+      <p:sp>
+        <p:nvSpPr>
+          <p:cNvPr id="31" name="TextBox 30"/>
+          <p:cNvSpPr txBox="1"/>
+          <p:nvPr/>
+        </p:nvSpPr>
+        <p:spPr>
+          <a:xfrm>
+            <a:off x="5513832" y="3864856"/>
             <a:ext cx="2871216" cy="283464"/>
           </a:xfrm>
           <a:prstGeom prst="rect">
@@ -13781,48 +13636,14 @@
                   <a:srgbClr val="A8DADC"/>
                 </a:solidFill>
               </a:rPr>
-              <a:t>Voltage levels</a:t>
-            </a:r>
-          </a:p>
-        </p:txBody>
-      </p:sp>
-      <p:sp>
-        <p:nvSpPr>
-          <p:cNvPr id="34" name="TextBox 33"/>
-          <p:cNvSpPr txBox="1"/>
-          <p:nvPr/>
-        </p:nvSpPr>
-        <p:spPr>
-          <a:xfrm>
-            <a:off x="5513832" y="3845807"/>
-            <a:ext cx="2871216" cy="302513"/>
-          </a:xfrm>
-          <a:prstGeom prst="rect">
-            <a:avLst/>
-          </a:prstGeom>
-          <a:noFill/>
-        </p:spPr>
-        <p:txBody>
-          <a:bodyPr wrap="square">
-            <a:spAutoFit/>
-          </a:bodyPr>
-          <a:lstStyle/>
-          <a:p>
-            <a:pPr algn="l"/>
-            <a:r>
-              <a:rPr sz="1300" b="0">
-                <a:solidFill>
-                  <a:srgbClr val="FFFFFF"/>
-                </a:solidFill>
-              </a:rPr>
-              <a:t>• ESP32 side: 3.3V logic (optocoupled)</a:t>
-            </a:r>
-          </a:p>
-        </p:txBody>
-      </p:sp>
-      <p:sp>
-        <p:nvSpPr>
-          <p:cNvPr id="35" name="TextBox 34"/>
+              <a:t>Safety</a:t>
+            </a:r>
+          </a:p>
+        </p:txBody>
+      </p:sp>
+      <p:sp>
+        <p:nvSpPr>
+          <p:cNvPr id="32" name="TextBox 31"/>
           <p:cNvSpPr txBox="1"/>
           <p:nvPr/>
         </p:nvSpPr>
@@ -13849,14 +13670,14 @@
                   <a:srgbClr val="FFFFFF"/>
                 </a:solidFill>
               </a:rPr>
-              <a:t>• AC side: 230V AC — HIGH VOLTAGE</a:t>
-            </a:r>
-          </a:p>
-        </p:txBody>
-      </p:sp>
-      <p:sp>
-        <p:nvSpPr>
-          <p:cNvPr id="36" name="TextBox 35"/>
+              <a:t>• AC side: 230V — HIGH VOLTAGE</a:t>
+            </a:r>
+          </a:p>
+        </p:txBody>
+      </p:sp>
+      <p:sp>
+        <p:nvSpPr>
+          <p:cNvPr id="33" name="TextBox 32"/>
           <p:cNvSpPr txBox="1"/>
           <p:nvPr/>
         </p:nvSpPr>
@@ -13883,14 +13704,14 @@
                   <a:srgbClr val="FFFFFF"/>
                 </a:solidFill>
               </a:rPr>
-              <a:t>• Keep AC and DC wiring separated</a:t>
-            </a:r>
-          </a:p>
-        </p:txBody>
-      </p:sp>
-      <p:sp>
-        <p:nvSpPr>
-          <p:cNvPr id="37" name="TextBox 36"/>
+              <a:t>• Keep AC and DC wiring physically separated</a:t>
+            </a:r>
+          </a:p>
+        </p:txBody>
+      </p:sp>
+      <p:sp>
+        <p:nvSpPr>
+          <p:cNvPr id="34" name="TextBox 33"/>
           <p:cNvSpPr txBox="1"/>
           <p:nvPr/>
         </p:nvSpPr>
@@ -13917,7 +13738,7 @@
                   <a:srgbClr val="FFFFFF"/>
                 </a:solidFill>
               </a:rPr>
-              <a:t>• Fuse the AC circuit (5–10A slow blow)</a:t>
+              <a:t>• Fuse live wire before module AC IN</a:t>
             </a:r>
           </a:p>
         </p:txBody>
@@ -15874,7 +15695,7 @@
         <p:spPr>
           <a:xfrm>
             <a:off x="8046720" y="749808"/>
-            <a:ext cx="3840480" cy="2542032"/>
+            <a:ext cx="3840480" cy="2863596"/>
           </a:xfrm>
           <a:prstGeom prst="rect">
             <a:avLst/>
@@ -16005,7 +15826,7 @@
                   <a:srgbClr val="FFFFFF"/>
                 </a:solidFill>
               </a:rPr>
-              <a:t>• GPIO26 → Relay IN — Igniter</a:t>
+              <a:t>• GPIO27 → Relay IN — Water pump</a:t>
             </a:r>
           </a:p>
         </p:txBody>
@@ -16039,7 +15860,7 @@
                   <a:srgbClr val="FFFFFF"/>
                 </a:solidFill>
               </a:rPr>
-              <a:t>• GPIO27 → Relay IN — Pump</a:t>
+              <a:t>• Relay VCC → 5V   GND → GND</a:t>
             </a:r>
           </a:p>
         </p:txBody>
@@ -16053,6 +15874,40 @@
         <p:spPr>
           <a:xfrm>
             <a:off x="8211312" y="2145029"/>
+            <a:ext cx="3511296" cy="302513"/>
+          </a:xfrm>
+          <a:prstGeom prst="rect">
+            <a:avLst/>
+          </a:prstGeom>
+          <a:noFill/>
+        </p:spPr>
+        <p:txBody>
+          <a:bodyPr wrap="square">
+            <a:spAutoFit/>
+          </a:bodyPr>
+          <a:lstStyle/>
+          <a:p>
+            <a:pPr algn="l"/>
+            <a:r>
+              <a:rPr sz="1300" b="1">
+                <a:solidFill>
+                  <a:srgbClr val="A8DADC"/>
+                </a:solidFill>
+              </a:rPr>
+              <a:t>AC Dimmer  (2-ch Hipzeepo module)</a:t>
+            </a:r>
+          </a:p>
+        </p:txBody>
+      </p:sp>
+      <p:sp>
+        <p:nvSpPr>
+          <p:cNvPr id="30" name="TextBox 29"/>
+          <p:cNvSpPr txBox="1"/>
+          <p:nvPr/>
+        </p:nvSpPr>
+        <p:spPr>
+          <a:xfrm>
+            <a:off x="8211312" y="2447542"/>
             <a:ext cx="3511296" cy="321564"/>
           </a:xfrm>
           <a:prstGeom prst="rect">
@@ -16073,41 +15928,7 @@
                   <a:srgbClr val="FFFFFF"/>
                 </a:solidFill>
               </a:rPr>
-              <a:t>• Relay VCC → 5V   GND → GND</a:t>
-            </a:r>
-          </a:p>
-        </p:txBody>
-      </p:sp>
-      <p:sp>
-        <p:nvSpPr>
-          <p:cNvPr id="30" name="TextBox 29"/>
-          <p:cNvSpPr txBox="1"/>
-          <p:nvPr/>
-        </p:nvSpPr>
-        <p:spPr>
-          <a:xfrm>
-            <a:off x="8211312" y="2466593"/>
-            <a:ext cx="3511296" cy="302513"/>
-          </a:xfrm>
-          <a:prstGeom prst="rect">
-            <a:avLst/>
-          </a:prstGeom>
-          <a:noFill/>
-        </p:spPr>
-        <p:txBody>
-          <a:bodyPr wrap="square">
-            <a:spAutoFit/>
-          </a:bodyPr>
-          <a:lstStyle/>
-          <a:p>
-            <a:pPr algn="l"/>
-            <a:r>
-              <a:rPr sz="1300" b="1">
-                <a:solidFill>
-                  <a:srgbClr val="A8DADC"/>
-                </a:solidFill>
-              </a:rPr>
-              <a:t>TRIAC gate</a:t>
+              <a:t>• GPIO35 ← ZC   zero-cross in</a:t>
             </a:r>
           </a:p>
         </p:txBody>
@@ -16141,14 +15962,48 @@
                   <a:srgbClr val="FFFFFF"/>
                 </a:solidFill>
               </a:rPr>
-              <a:t>• GPIO33 → 330Ω → MOC3021 → TRIAC</a:t>
-            </a:r>
-          </a:p>
-        </p:txBody>
-      </p:sp>
-      <p:sp>
-        <p:nvSpPr>
-          <p:cNvPr id="32" name="Rectangle 31"/>
+              <a:t>• GPIO33 → DIM1  blower speed</a:t>
+            </a:r>
+          </a:p>
+        </p:txBody>
+      </p:sp>
+      <p:sp>
+        <p:nvSpPr>
+          <p:cNvPr id="32" name="TextBox 31"/>
+          <p:cNvSpPr txBox="1"/>
+          <p:nvPr/>
+        </p:nvSpPr>
+        <p:spPr>
+          <a:xfrm>
+            <a:off x="8211312" y="3090670"/>
+            <a:ext cx="3511296" cy="321564"/>
+          </a:xfrm>
+          <a:prstGeom prst="rect">
+            <a:avLst/>
+          </a:prstGeom>
+          <a:noFill/>
+        </p:spPr>
+        <p:txBody>
+          <a:bodyPr wrap="square">
+            <a:spAutoFit/>
+          </a:bodyPr>
+          <a:lstStyle/>
+          <a:p>
+            <a:pPr algn="l"/>
+            <a:r>
+              <a:rPr sz="1400" b="0">
+                <a:solidFill>
+                  <a:srgbClr val="FFFFFF"/>
+                </a:solidFill>
+              </a:rPr>
+              <a:t>• GPIO26 → DIM2  igniter on/off</a:t>
+            </a:r>
+          </a:p>
+        </p:txBody>
+      </p:sp>
+      <p:sp>
+        <p:nvSpPr>
+          <p:cNvPr id="33" name="Rectangle 32"/>
           <p:cNvSpPr/>
           <p:nvPr/>
         </p:nvSpPr>
@@ -16191,7 +16046,7 @@
       </p:sp>
       <p:sp>
         <p:nvSpPr>
-          <p:cNvPr id="33" name="TextBox 32"/>
+          <p:cNvPr id="34" name="TextBox 33"/>
           <p:cNvSpPr txBox="1"/>
           <p:nvPr/>
         </p:nvSpPr>
@@ -16225,7 +16080,7 @@
       </p:sp>
       <p:sp>
         <p:nvSpPr>
-          <p:cNvPr id="34" name="TextBox 33"/>
+          <p:cNvPr id="35" name="TextBox 34"/>
           <p:cNvSpPr txBox="1"/>
           <p:nvPr/>
         </p:nvSpPr>
@@ -16259,7 +16114,7 @@
       </p:sp>
       <p:sp>
         <p:nvSpPr>
-          <p:cNvPr id="35" name="TextBox 34"/>
+          <p:cNvPr id="36" name="TextBox 35"/>
           <p:cNvSpPr txBox="1"/>
           <p:nvPr/>
         </p:nvSpPr>
@@ -16293,7 +16148,7 @@
       </p:sp>
       <p:sp>
         <p:nvSpPr>
-          <p:cNvPr id="36" name="Rectangle 35"/>
+          <p:cNvPr id="37" name="Rectangle 36"/>
           <p:cNvSpPr/>
           <p:nvPr/>
         </p:nvSpPr>
@@ -16336,7 +16191,7 @@
       </p:sp>
       <p:sp>
         <p:nvSpPr>
-          <p:cNvPr id="37" name="TextBox 36"/>
+          <p:cNvPr id="38" name="TextBox 37"/>
           <p:cNvSpPr txBox="1"/>
           <p:nvPr/>
         </p:nvSpPr>
@@ -16370,7 +16225,7 @@
       </p:sp>
       <p:sp>
         <p:nvSpPr>
-          <p:cNvPr id="38" name="TextBox 37"/>
+          <p:cNvPr id="39" name="TextBox 38"/>
           <p:cNvSpPr txBox="1"/>
           <p:nvPr/>
         </p:nvSpPr>
@@ -16397,14 +16252,14 @@
                   <a:srgbClr val="FFFFFF"/>
                 </a:solidFill>
               </a:rPr>
-              <a:t>• 3.3V: ESP32 reg, OLED, DS18B20, MAX6675</a:t>
-            </a:r>
-          </a:p>
-        </p:txBody>
-      </p:sp>
-      <p:sp>
-        <p:nvSpPr>
-          <p:cNvPr id="39" name="TextBox 38"/>
+              <a:t>• 3.3V: ESP32 reg → OLED, sensors, dimmer</a:t>
+            </a:r>
+          </a:p>
+        </p:txBody>
+      </p:sp>
+      <p:sp>
+        <p:nvSpPr>
+          <p:cNvPr id="40" name="TextBox 39"/>
           <p:cNvSpPr txBox="1"/>
           <p:nvPr/>
         </p:nvSpPr>
@@ -16431,14 +16286,14 @@
                   <a:srgbClr val="FFFFFF"/>
                 </a:solidFill>
               </a:rPr>
-              <a:t>• 5V: Relay module VCC</a:t>
-            </a:r>
-          </a:p>
-        </p:txBody>
-      </p:sp>
-      <p:sp>
-        <p:nvSpPr>
-          <p:cNvPr id="40" name="TextBox 39"/>
+              <a:t>• 5V (HLK-PM01): relay VCC, ESP32 VIN</a:t>
+            </a:r>
+          </a:p>
+        </p:txBody>
+      </p:sp>
+      <p:sp>
+        <p:nvSpPr>
+          <p:cNvPr id="41" name="TextBox 40"/>
           <p:cNvSpPr txBox="1"/>
           <p:nvPr/>
         </p:nvSpPr>
@@ -16465,21 +16320,21 @@
                   <a:srgbClr val="FFFFFF"/>
                 </a:solidFill>
               </a:rPr>
-              <a:t>• AC 230V: TRIAC load side — isolated</a:t>
-            </a:r>
-          </a:p>
-        </p:txBody>
-      </p:sp>
-      <p:sp>
-        <p:nvSpPr>
-          <p:cNvPr id="41" name="Rectangle 40"/>
+              <a:t>• AC 230V: dimmer load side — isolated</a:t>
+            </a:r>
+          </a:p>
+        </p:txBody>
+      </p:sp>
+      <p:sp>
+        <p:nvSpPr>
+          <p:cNvPr id="42" name="Rectangle 41"/>
           <p:cNvSpPr/>
           <p:nvPr/>
         </p:nvSpPr>
         <p:spPr>
           <a:xfrm>
             <a:off x="8046720" y="4062983"/>
-            <a:ext cx="3840480" cy="1596390"/>
+            <a:ext cx="3840480" cy="1917954"/>
           </a:xfrm>
           <a:prstGeom prst="rect">
             <a:avLst/>
@@ -16515,7 +16370,7 @@
       </p:sp>
       <p:sp>
         <p:nvSpPr>
-          <p:cNvPr id="42" name="TextBox 41"/>
+          <p:cNvPr id="43" name="TextBox 42"/>
           <p:cNvSpPr txBox="1"/>
           <p:nvPr/>
         </p:nvSpPr>
@@ -16549,7 +16404,7 @@
       </p:sp>
       <p:sp>
         <p:nvSpPr>
-          <p:cNvPr id="43" name="TextBox 42"/>
+          <p:cNvPr id="44" name="TextBox 43"/>
           <p:cNvSpPr txBox="1"/>
           <p:nvPr/>
         </p:nvSpPr>
@@ -16583,7 +16438,7 @@
       </p:sp>
       <p:sp>
         <p:nvSpPr>
-          <p:cNvPr id="44" name="TextBox 43"/>
+          <p:cNvPr id="45" name="TextBox 44"/>
           <p:cNvSpPr txBox="1"/>
           <p:nvPr/>
         </p:nvSpPr>
@@ -16610,14 +16465,14 @@
                   <a:srgbClr val="FFFFFF"/>
                 </a:solidFill>
               </a:rPr>
-              <a:t>• Optocouplers required on TRIAC side</a:t>
-            </a:r>
-          </a:p>
-        </p:txBody>
-      </p:sp>
-      <p:sp>
-        <p:nvSpPr>
-          <p:cNvPr id="45" name="TextBox 44"/>
+              <a:t>• Dimmer module has built-in optocouplers</a:t>
+            </a:r>
+          </a:p>
+        </p:txBody>
+      </p:sp>
+      <p:sp>
+        <p:nvSpPr>
+          <p:cNvPr id="46" name="TextBox 45"/>
           <p:cNvSpPr txBox="1"/>
           <p:nvPr/>
         </p:nvSpPr>
@@ -16644,7 +16499,41 @@
                   <a:srgbClr val="FFFFFF"/>
                 </a:solidFill>
               </a:rPr>
-              <a:t>• Fuse the AC circuit (5–10A slow blow)</a:t>
+              <a:t>• Fuse AC input (5–10A slow blow)</a:t>
+            </a:r>
+          </a:p>
+        </p:txBody>
+      </p:sp>
+      <p:sp>
+        <p:nvSpPr>
+          <p:cNvPr id="47" name="TextBox 46"/>
+          <p:cNvSpPr txBox="1"/>
+          <p:nvPr/>
+        </p:nvSpPr>
+        <p:spPr>
+          <a:xfrm>
+            <a:off x="8211312" y="5458204"/>
+            <a:ext cx="3511296" cy="321564"/>
+          </a:xfrm>
+          <a:prstGeom prst="rect">
+            <a:avLst/>
+          </a:prstGeom>
+          <a:noFill/>
+        </p:spPr>
+        <p:txBody>
+          <a:bodyPr wrap="square">
+            <a:spAutoFit/>
+          </a:bodyPr>
+          <a:lstStyle/>
+          <a:p>
+            <a:pPr algn="l"/>
+            <a:r>
+              <a:rPr sz="1400" b="0">
+                <a:solidFill>
+                  <a:srgbClr val="FFFFFF"/>
+                </a:solidFill>
+              </a:rPr>
+              <a:t>• Do AC wiring last — verify logic first</a:t>
             </a:r>
           </a:p>
         </p:txBody>

--- a/docs/Pellet_Burner_Components.pptx
+++ b/docs/Pellet_Burner_Components.pptx
@@ -12782,7 +12782,7 @@
         <p:spPr>
           <a:xfrm>
             <a:off x="274320" y="749808"/>
-            <a:ext cx="4937760" cy="3902202"/>
+            <a:ext cx="4937760" cy="4204716"/>
           </a:xfrm>
           <a:prstGeom prst="rect">
             <a:avLst/>
@@ -13185,7 +13185,7 @@
                   <a:srgbClr val="FFFFFF"/>
                 </a:solidFill>
               </a:rPr>
-              <a:t>• CH1 (blower): 0–100% fan speed</a:t>
+              <a:t>• CH1 (blower): 0–100% continuously variable fan speed</a:t>
             </a:r>
           </a:p>
         </p:txBody>
@@ -13219,14 +13219,48 @@
                   <a:srgbClr val="FFFFFF"/>
                 </a:solidFill>
               </a:rPr>
-              <a:t>• CH2 (igniter): 0% = off, 100% = full heat</a:t>
-            </a:r>
-          </a:p>
-        </p:txBody>
-      </p:sp>
-      <p:sp>
-        <p:nvSpPr>
-          <p:cNvPr id="20" name="Rectangle 19"/>
+              <a:t>• CH2 (igniter): soft-start ramp 0→100% over ~1–2 s,</a:t>
+            </a:r>
+          </a:p>
+        </p:txBody>
+      </p:sp>
+      <p:sp>
+        <p:nvSpPr>
+          <p:cNvPr id="20" name="TextBox 19"/>
+          <p:cNvSpPr txBox="1"/>
+          <p:nvPr/>
+        </p:nvSpPr>
+        <p:spPr>
+          <a:xfrm>
+            <a:off x="438912" y="4450833"/>
+            <a:ext cx="4608576" cy="302513"/>
+          </a:xfrm>
+          <a:prstGeom prst="rect">
+            <a:avLst/>
+          </a:prstGeom>
+          <a:noFill/>
+        </p:spPr>
+        <p:txBody>
+          <a:bodyPr wrap="square">
+            <a:spAutoFit/>
+          </a:bodyPr>
+          <a:lstStyle/>
+          <a:p>
+            <a:pPr algn="l"/>
+            <a:r>
+              <a:rPr sz="1300" b="0">
+                <a:solidFill>
+                  <a:srgbClr val="FFFFFF"/>
+                </a:solidFill>
+              </a:rPr>
+              <a:t>• then holds at 100% — limits inrush on cold coil</a:t>
+            </a:r>
+          </a:p>
+        </p:txBody>
+      </p:sp>
+      <p:sp>
+        <p:nvSpPr>
+          <p:cNvPr id="21" name="Rectangle 20"/>
           <p:cNvSpPr/>
           <p:nvPr/>
         </p:nvSpPr>
@@ -13269,7 +13303,7 @@
       </p:sp>
       <p:sp>
         <p:nvSpPr>
-          <p:cNvPr id="21" name="TextBox 20"/>
+          <p:cNvPr id="22" name="TextBox 21"/>
           <p:cNvSpPr txBox="1"/>
           <p:nvPr/>
         </p:nvSpPr>
@@ -13303,7 +13337,7 @@
       </p:sp>
       <p:sp>
         <p:nvSpPr>
-          <p:cNvPr id="22" name="TextBox 21"/>
+          <p:cNvPr id="23" name="TextBox 22"/>
           <p:cNvSpPr txBox="1"/>
           <p:nvPr/>
         </p:nvSpPr>
@@ -13337,7 +13371,7 @@
       </p:sp>
       <p:sp>
         <p:nvSpPr>
-          <p:cNvPr id="23" name="TextBox 22"/>
+          <p:cNvPr id="24" name="TextBox 23"/>
           <p:cNvSpPr txBox="1"/>
           <p:nvPr/>
         </p:nvSpPr>
@@ -13371,7 +13405,7 @@
       </p:sp>
       <p:sp>
         <p:nvSpPr>
-          <p:cNvPr id="24" name="TextBox 23"/>
+          <p:cNvPr id="25" name="TextBox 24"/>
           <p:cNvSpPr txBox="1"/>
           <p:nvPr/>
         </p:nvSpPr>
@@ -13405,7 +13439,7 @@
       </p:sp>
       <p:sp>
         <p:nvSpPr>
-          <p:cNvPr id="25" name="TextBox 24"/>
+          <p:cNvPr id="26" name="TextBox 25"/>
           <p:cNvSpPr txBox="1"/>
           <p:nvPr/>
         </p:nvSpPr>
@@ -13439,7 +13473,7 @@
       </p:sp>
       <p:sp>
         <p:nvSpPr>
-          <p:cNvPr id="26" name="TextBox 25"/>
+          <p:cNvPr id="27" name="TextBox 26"/>
           <p:cNvSpPr txBox="1"/>
           <p:nvPr/>
         </p:nvSpPr>
@@ -13466,14 +13500,14 @@
                   <a:srgbClr val="FFFFFF"/>
                 </a:solidFill>
               </a:rPr>
-              <a:t>• DIM2 →  GPIO26  (CH2 — igniter heater)</a:t>
-            </a:r>
-          </a:p>
-        </p:txBody>
-      </p:sp>
-      <p:sp>
-        <p:nvSpPr>
-          <p:cNvPr id="27" name="TextBox 26"/>
+              <a:t>• DIM2 →  GPIO26  (CH2 — igniter soft-start)</a:t>
+            </a:r>
+          </a:p>
+        </p:txBody>
+      </p:sp>
+      <p:sp>
+        <p:nvSpPr>
+          <p:cNvPr id="28" name="TextBox 27"/>
           <p:cNvSpPr txBox="1"/>
           <p:nvPr/>
         </p:nvSpPr>
@@ -13507,7 +13541,7 @@
       </p:sp>
       <p:sp>
         <p:nvSpPr>
-          <p:cNvPr id="28" name="TextBox 27"/>
+          <p:cNvPr id="29" name="TextBox 28"/>
           <p:cNvSpPr txBox="1"/>
           <p:nvPr/>
         </p:nvSpPr>
@@ -13541,7 +13575,7 @@
       </p:sp>
       <p:sp>
         <p:nvSpPr>
-          <p:cNvPr id="29" name="TextBox 28"/>
+          <p:cNvPr id="30" name="TextBox 29"/>
           <p:cNvSpPr txBox="1"/>
           <p:nvPr/>
         </p:nvSpPr>
@@ -13575,7 +13609,7 @@
       </p:sp>
       <p:sp>
         <p:nvSpPr>
-          <p:cNvPr id="30" name="TextBox 29"/>
+          <p:cNvPr id="31" name="TextBox 30"/>
           <p:cNvSpPr txBox="1"/>
           <p:nvPr/>
         </p:nvSpPr>
@@ -13609,7 +13643,7 @@
       </p:sp>
       <p:sp>
         <p:nvSpPr>
-          <p:cNvPr id="31" name="TextBox 30"/>
+          <p:cNvPr id="32" name="TextBox 31"/>
           <p:cNvSpPr txBox="1"/>
           <p:nvPr/>
         </p:nvSpPr>
@@ -13643,7 +13677,7 @@
       </p:sp>
       <p:sp>
         <p:nvSpPr>
-          <p:cNvPr id="32" name="TextBox 31"/>
+          <p:cNvPr id="33" name="TextBox 32"/>
           <p:cNvSpPr txBox="1"/>
           <p:nvPr/>
         </p:nvSpPr>
@@ -13677,7 +13711,7 @@
       </p:sp>
       <p:sp>
         <p:nvSpPr>
-          <p:cNvPr id="33" name="TextBox 32"/>
+          <p:cNvPr id="34" name="TextBox 33"/>
           <p:cNvSpPr txBox="1"/>
           <p:nvPr/>
         </p:nvSpPr>
@@ -13711,7 +13745,7 @@
       </p:sp>
       <p:sp>
         <p:nvSpPr>
-          <p:cNvPr id="34" name="TextBox 33"/>
+          <p:cNvPr id="35" name="TextBox 34"/>
           <p:cNvSpPr txBox="1"/>
           <p:nvPr/>
         </p:nvSpPr>

--- a/docs/Pellet_Burner_Components.pptx
+++ b/docs/Pellet_Burner_Components.pptx
@@ -13219,7 +13219,7 @@
                   <a:srgbClr val="FFFFFF"/>
                 </a:solidFill>
               </a:rPr>
-              <a:t>• CH2 (igniter): soft-start ramp 0→100% over ~1–2 s,</a:t>
+              <a:t>• CH2 (igniter): soft-start ramp 0→100% over 4 s,</a:t>
             </a:r>
           </a:p>
         </p:txBody>
